--- a/Cohoot.pptx
+++ b/Cohoot.pptx
@@ -1,32 +1,35 @@
 
 <file path=ppt/presentation.xml><?xml version="1.0" encoding="utf-8"?>
-<p:presentation xmlns:a="http://schemas.openxmlformats.org/drawingml/2006/main" xmlns:r="http://schemas.openxmlformats.org/officeDocument/2006/relationships" xmlns:mc="http://schemas.openxmlformats.org/markup-compatibility/2006" xmlns:mv="urn:schemas-microsoft-com:mac:vml" xmlns:p="http://schemas.openxmlformats.org/presentationml/2006/main" xmlns:c="http://schemas.openxmlformats.org/drawingml/2006/chart" xmlns:dgm="http://schemas.openxmlformats.org/drawingml/2006/diagram" xmlns:o="urn:schemas-microsoft-com:office:office" xmlns:v="urn:schemas-microsoft-com:vml" xmlns:pvml="urn:schemas-microsoft-com:office:powerpoint" xmlns:com="http://schemas.openxmlformats.org/drawingml/2006/compatibility" xmlns:p14="http://schemas.microsoft.com/office/powerpoint/2010/main" xmlns:p15="http://schemas.microsoft.com/office/powerpoint/2012/main" xmlns:ahyp="http://schemas.microsoft.com/office/drawing/2018/hyperlinkcolor" autoCompressPictures="0" embedTrueTypeFonts="1" strictFirstAndLastChars="0" saveSubsetFonts="1">
+<p:presentation xmlns:a="http://schemas.openxmlformats.org/drawingml/2006/main" xmlns:r="http://schemas.openxmlformats.org/officeDocument/2006/relationships" xmlns:p="http://schemas.openxmlformats.org/presentationml/2006/main" strictFirstAndLastChars="0" embedTrueTypeFonts="1" saveSubsetFonts="1" autoCompressPictures="0">
   <p:sldMasterIdLst>
-    <p:sldMasterId id="2147483659" r:id="rId4"/>
+    <p:sldMasterId id="2147483659" r:id="rId1"/>
   </p:sldMasterIdLst>
   <p:notesMasterIdLst>
-    <p:notesMasterId r:id="rId5"/>
+    <p:notesMasterId r:id="rId18"/>
   </p:notesMasterIdLst>
   <p:sldIdLst>
-    <p:sldId id="256" r:id="rId6"/>
-    <p:sldId id="257" r:id="rId7"/>
-    <p:sldId id="258" r:id="rId8"/>
-    <p:sldId id="259" r:id="rId9"/>
-    <p:sldId id="260" r:id="rId10"/>
-    <p:sldId id="261" r:id="rId11"/>
-    <p:sldId id="262" r:id="rId12"/>
-    <p:sldId id="263" r:id="rId13"/>
-    <p:sldId id="264" r:id="rId14"/>
-    <p:sldId id="265" r:id="rId15"/>
-    <p:sldId id="266" r:id="rId16"/>
-    <p:sldId id="267" r:id="rId17"/>
-    <p:sldId id="268" r:id="rId18"/>
+    <p:sldId id="256" r:id="rId2"/>
+    <p:sldId id="257" r:id="rId3"/>
+    <p:sldId id="258" r:id="rId4"/>
+    <p:sldId id="259" r:id="rId5"/>
+    <p:sldId id="269" r:id="rId6"/>
+    <p:sldId id="260" r:id="rId7"/>
+    <p:sldId id="261" r:id="rId8"/>
+    <p:sldId id="262" r:id="rId9"/>
+    <p:sldId id="263" r:id="rId10"/>
+    <p:sldId id="264" r:id="rId11"/>
+    <p:sldId id="265" r:id="rId12"/>
+    <p:sldId id="266" r:id="rId13"/>
+    <p:sldId id="267" r:id="rId14"/>
+    <p:sldId id="270" r:id="rId15"/>
+    <p:sldId id="268" r:id="rId16"/>
+    <p:sldId id="271" r:id="rId17"/>
   </p:sldIdLst>
-  <p:sldSz cy="5143500" cx="9144000"/>
+  <p:sldSz cx="9144000" cy="5143500" type="screen16x9"/>
   <p:notesSz cx="6858000" cy="9144000"/>
   <p:embeddedFontLst>
     <p:embeddedFont>
-      <p:font typeface="Roboto"/>
+      <p:font typeface="Roboto" panose="02000000000000000000" pitchFamily="2" charset="0"/>
       <p:regular r:id="rId19"/>
       <p:bold r:id="rId20"/>
       <p:italic r:id="rId21"/>
@@ -34,7 +37,7 @@
     </p:embeddedFont>
   </p:embeddedFontLst>
   <p:defaultTextStyle>
-    <a:defPPr lvl="0" marR="0" rtl="0" algn="l">
+    <a:defPPr marR="0" lvl="0" algn="l" rtl="0">
       <a:lnSpc>
         <a:spcPct val="100000"/>
       </a:lnSpc>
@@ -45,7 +48,7 @@
         <a:spcPts val="0"/>
       </a:spcAft>
     </a:defPPr>
-    <a:lvl1pPr lvl="0" marR="0" rtl="0" algn="l">
+    <a:lvl1pPr marR="0" lvl="0" algn="l" rtl="0">
       <a:lnSpc>
         <a:spcPct val="100000"/>
       </a:lnSpc>
@@ -59,7 +62,7 @@
         <a:srgbClr val="000000"/>
       </a:buClr>
       <a:buFont typeface="Arial"/>
-      <a:defRPr b="0" i="0" sz="1400" u="none" cap="none" strike="noStrike">
+      <a:defRPr sz="1400" b="0" i="0" u="none" strike="noStrike" cap="none">
         <a:solidFill>
           <a:srgbClr val="000000"/>
         </a:solidFill>
@@ -69,7 +72,7 @@
         <a:sym typeface="Arial"/>
       </a:defRPr>
     </a:lvl1pPr>
-    <a:lvl2pPr lvl="1" marR="0" rtl="0" algn="l">
+    <a:lvl2pPr marR="0" lvl="1" algn="l" rtl="0">
       <a:lnSpc>
         <a:spcPct val="100000"/>
       </a:lnSpc>
@@ -83,7 +86,7 @@
         <a:srgbClr val="000000"/>
       </a:buClr>
       <a:buFont typeface="Arial"/>
-      <a:defRPr b="0" i="0" sz="1400" u="none" cap="none" strike="noStrike">
+      <a:defRPr sz="1400" b="0" i="0" u="none" strike="noStrike" cap="none">
         <a:solidFill>
           <a:srgbClr val="000000"/>
         </a:solidFill>
@@ -93,7 +96,7 @@
         <a:sym typeface="Arial"/>
       </a:defRPr>
     </a:lvl2pPr>
-    <a:lvl3pPr lvl="2" marR="0" rtl="0" algn="l">
+    <a:lvl3pPr marR="0" lvl="2" algn="l" rtl="0">
       <a:lnSpc>
         <a:spcPct val="100000"/>
       </a:lnSpc>
@@ -107,7 +110,7 @@
         <a:srgbClr val="000000"/>
       </a:buClr>
       <a:buFont typeface="Arial"/>
-      <a:defRPr b="0" i="0" sz="1400" u="none" cap="none" strike="noStrike">
+      <a:defRPr sz="1400" b="0" i="0" u="none" strike="noStrike" cap="none">
         <a:solidFill>
           <a:srgbClr val="000000"/>
         </a:solidFill>
@@ -117,7 +120,7 @@
         <a:sym typeface="Arial"/>
       </a:defRPr>
     </a:lvl3pPr>
-    <a:lvl4pPr lvl="3" marR="0" rtl="0" algn="l">
+    <a:lvl4pPr marR="0" lvl="3" algn="l" rtl="0">
       <a:lnSpc>
         <a:spcPct val="100000"/>
       </a:lnSpc>
@@ -131,7 +134,7 @@
         <a:srgbClr val="000000"/>
       </a:buClr>
       <a:buFont typeface="Arial"/>
-      <a:defRPr b="0" i="0" sz="1400" u="none" cap="none" strike="noStrike">
+      <a:defRPr sz="1400" b="0" i="0" u="none" strike="noStrike" cap="none">
         <a:solidFill>
           <a:srgbClr val="000000"/>
         </a:solidFill>
@@ -141,7 +144,7 @@
         <a:sym typeface="Arial"/>
       </a:defRPr>
     </a:lvl4pPr>
-    <a:lvl5pPr lvl="4" marR="0" rtl="0" algn="l">
+    <a:lvl5pPr marR="0" lvl="4" algn="l" rtl="0">
       <a:lnSpc>
         <a:spcPct val="100000"/>
       </a:lnSpc>
@@ -155,7 +158,7 @@
         <a:srgbClr val="000000"/>
       </a:buClr>
       <a:buFont typeface="Arial"/>
-      <a:defRPr b="0" i="0" sz="1400" u="none" cap="none" strike="noStrike">
+      <a:defRPr sz="1400" b="0" i="0" u="none" strike="noStrike" cap="none">
         <a:solidFill>
           <a:srgbClr val="000000"/>
         </a:solidFill>
@@ -165,7 +168,7 @@
         <a:sym typeface="Arial"/>
       </a:defRPr>
     </a:lvl5pPr>
-    <a:lvl6pPr lvl="5" marR="0" rtl="0" algn="l">
+    <a:lvl6pPr marR="0" lvl="5" algn="l" rtl="0">
       <a:lnSpc>
         <a:spcPct val="100000"/>
       </a:lnSpc>
@@ -179,7 +182,7 @@
         <a:srgbClr val="000000"/>
       </a:buClr>
       <a:buFont typeface="Arial"/>
-      <a:defRPr b="0" i="0" sz="1400" u="none" cap="none" strike="noStrike">
+      <a:defRPr sz="1400" b="0" i="0" u="none" strike="noStrike" cap="none">
         <a:solidFill>
           <a:srgbClr val="000000"/>
         </a:solidFill>
@@ -189,7 +192,7 @@
         <a:sym typeface="Arial"/>
       </a:defRPr>
     </a:lvl6pPr>
-    <a:lvl7pPr lvl="6" marR="0" rtl="0" algn="l">
+    <a:lvl7pPr marR="0" lvl="6" algn="l" rtl="0">
       <a:lnSpc>
         <a:spcPct val="100000"/>
       </a:lnSpc>
@@ -203,7 +206,7 @@
         <a:srgbClr val="000000"/>
       </a:buClr>
       <a:buFont typeface="Arial"/>
-      <a:defRPr b="0" i="0" sz="1400" u="none" cap="none" strike="noStrike">
+      <a:defRPr sz="1400" b="0" i="0" u="none" strike="noStrike" cap="none">
         <a:solidFill>
           <a:srgbClr val="000000"/>
         </a:solidFill>
@@ -213,7 +216,7 @@
         <a:sym typeface="Arial"/>
       </a:defRPr>
     </a:lvl7pPr>
-    <a:lvl8pPr lvl="7" marR="0" rtl="0" algn="l">
+    <a:lvl8pPr marR="0" lvl="7" algn="l" rtl="0">
       <a:lnSpc>
         <a:spcPct val="100000"/>
       </a:lnSpc>
@@ -227,7 +230,7 @@
         <a:srgbClr val="000000"/>
       </a:buClr>
       <a:buFont typeface="Arial"/>
-      <a:defRPr b="0" i="0" sz="1400" u="none" cap="none" strike="noStrike">
+      <a:defRPr sz="1400" b="0" i="0" u="none" strike="noStrike" cap="none">
         <a:solidFill>
           <a:srgbClr val="000000"/>
         </a:solidFill>
@@ -237,7 +240,7 @@
         <a:sym typeface="Arial"/>
       </a:defRPr>
     </a:lvl8pPr>
-    <a:lvl9pPr lvl="8" marR="0" rtl="0" algn="l">
+    <a:lvl9pPr marR="0" lvl="8" algn="l" rtl="0">
       <a:lnSpc>
         <a:spcPct val="100000"/>
       </a:lnSpc>
@@ -251,7 +254,7 @@
         <a:srgbClr val="000000"/>
       </a:buClr>
       <a:buFont typeface="Arial"/>
-      <a:defRPr b="0" i="0" sz="1400" u="none" cap="none" strike="noStrike">
+      <a:defRPr sz="1400" b="0" i="0" u="none" strike="noStrike" cap="none">
         <a:solidFill>
           <a:srgbClr val="000000"/>
         </a:solidFill>
@@ -264,7 +267,7 @@
   </p:defaultTextStyle>
   <p:extLst>
     <p:ext uri="{EFAFB233-063F-42B5-8137-9DF3F51BA10A}">
-      <p15:sldGuideLst>
+      <p15:sldGuideLst xmlns:p15="http://schemas.microsoft.com/office/powerpoint/2012/main">
         <p15:guide id="1" orient="horz" pos="1620">
           <p15:clr>
             <a:srgbClr val="747775"/>
@@ -282,11 +285,16 @@
 </file>
 
 <file path=ppt/notesMasters/notesMaster1.xml><?xml version="1.0" encoding="utf-8"?>
-<p:notesMaster xmlns:a="http://schemas.openxmlformats.org/drawingml/2006/main" xmlns:r="http://schemas.openxmlformats.org/officeDocument/2006/relationships" xmlns:mc="http://schemas.openxmlformats.org/markup-compatibility/2006" xmlns:mv="urn:schemas-microsoft-com:mac:vml" xmlns:p="http://schemas.openxmlformats.org/presentationml/2006/main" xmlns:c="http://schemas.openxmlformats.org/drawingml/2006/chart" xmlns:dgm="http://schemas.openxmlformats.org/drawingml/2006/diagram" xmlns:o="urn:schemas-microsoft-com:office:office" xmlns:v="urn:schemas-microsoft-com:vml" xmlns:pvml="urn:schemas-microsoft-com:office:powerpoint" xmlns:com="http://schemas.openxmlformats.org/drawingml/2006/compatibility" xmlns:p14="http://schemas.microsoft.com/office/powerpoint/2010/main" xmlns:p15="http://schemas.microsoft.com/office/powerpoint/2012/main" xmlns:ahyp="http://schemas.microsoft.com/office/drawing/2018/hyperlinkcolor">
+<p:notesMaster xmlns:a="http://schemas.openxmlformats.org/drawingml/2006/main" xmlns:r="http://schemas.openxmlformats.org/officeDocument/2006/relationships" xmlns:p="http://schemas.openxmlformats.org/presentationml/2006/main">
   <p:cSld>
+    <p:bg>
+      <p:bgRef idx="1001">
+        <a:schemeClr val="bg1"/>
+      </p:bgRef>
+    </p:bg>
     <p:spTree>
       <p:nvGrpSpPr>
-        <p:cNvPr id="2" name="Shape 2"/>
+        <p:cNvPr id="1" name="Shape 2"/>
         <p:cNvGrpSpPr/>
         <p:nvPr/>
       </p:nvGrpSpPr>
@@ -301,9 +309,11 @@
       <p:sp>
         <p:nvSpPr>
           <p:cNvPr id="3" name="Google Shape;3;n"/>
-          <p:cNvSpPr/>
+          <p:cNvSpPr>
+            <a:spLocks noGrp="1" noRot="1" noChangeAspect="1"/>
+          </p:cNvSpPr>
           <p:nvPr>
-            <p:ph idx="2" type="sldImg"/>
+            <p:ph type="sldImg" idx="2"/>
           </p:nvPr>
         </p:nvSpPr>
         <p:spPr>
@@ -312,9 +322,13 @@
             <a:ext cx="6096075" cy="3429000"/>
           </a:xfrm>
           <a:custGeom>
-            <a:rect b="b" l="l" r="r" t="t"/>
+            <a:avLst/>
+            <a:gdLst/>
+            <a:ahLst/>
+            <a:cxnLst/>
+            <a:rect l="l" t="t" r="r" b="b"/>
             <a:pathLst>
-              <a:path extrusionOk="0" h="120000" w="120000">
+              <a:path w="120000" h="120000" extrusionOk="0">
                 <a:moveTo>
                   <a:pt x="0" y="0"/>
                 </a:moveTo>
@@ -332,23 +346,25 @@
             </a:pathLst>
           </a:custGeom>
           <a:noFill/>
-          <a:ln cap="flat" cmpd="sng" w="9525">
+          <a:ln w="9525" cap="flat" cmpd="sng">
             <a:solidFill>
               <a:srgbClr val="000000"/>
             </a:solidFill>
             <a:prstDash val="solid"/>
             <a:round/>
-            <a:headEnd len="sm" w="sm" type="none"/>
-            <a:tailEnd len="sm" w="sm" type="none"/>
+            <a:headEnd type="none" w="sm" len="sm"/>
+            <a:tailEnd type="none" w="sm" len="sm"/>
           </a:ln>
         </p:spPr>
       </p:sp>
       <p:sp>
         <p:nvSpPr>
           <p:cNvPr id="4" name="Google Shape;4;n"/>
-          <p:cNvSpPr txBox="1"/>
+          <p:cNvSpPr txBox="1">
+            <a:spLocks noGrp="1"/>
+          </p:cNvSpPr>
           <p:nvPr>
-            <p:ph idx="1" type="body"/>
+            <p:ph type="body" idx="1"/>
           </p:nvPr>
         </p:nvSpPr>
         <p:spPr>
@@ -365,11 +381,11 @@
           </a:ln>
         </p:spPr>
         <p:txBody>
-          <a:bodyPr anchorCtr="0" anchor="t" bIns="91425" lIns="91425" spcFirstLastPara="1" rIns="91425" wrap="square" tIns="91425">
+          <a:bodyPr spcFirstLastPara="1" wrap="square" lIns="91425" tIns="91425" rIns="91425" bIns="91425" anchor="t" anchorCtr="0">
             <a:noAutofit/>
           </a:bodyPr>
           <a:lstStyle>
-            <a:lvl1pPr indent="-298450" lvl="0" marL="457200">
+            <a:lvl1pPr marL="457200" lvl="0" indent="-298450">
               <a:spcBef>
                 <a:spcPts val="0"/>
               </a:spcBef>
@@ -380,7 +396,7 @@
               <a:buChar char="●"/>
               <a:defRPr sz="1100"/>
             </a:lvl1pPr>
-            <a:lvl2pPr indent="-298450" lvl="1" marL="914400">
+            <a:lvl2pPr marL="914400" lvl="1" indent="-298450">
               <a:spcBef>
                 <a:spcPts val="0"/>
               </a:spcBef>
@@ -391,7 +407,7 @@
               <a:buChar char="○"/>
               <a:defRPr sz="1100"/>
             </a:lvl2pPr>
-            <a:lvl3pPr indent="-298450" lvl="2" marL="1371600">
+            <a:lvl3pPr marL="1371600" lvl="2" indent="-298450">
               <a:spcBef>
                 <a:spcPts val="0"/>
               </a:spcBef>
@@ -402,7 +418,7 @@
               <a:buChar char="■"/>
               <a:defRPr sz="1100"/>
             </a:lvl3pPr>
-            <a:lvl4pPr indent="-298450" lvl="3" marL="1828800">
+            <a:lvl4pPr marL="1828800" lvl="3" indent="-298450">
               <a:spcBef>
                 <a:spcPts val="0"/>
               </a:spcBef>
@@ -413,7 +429,7 @@
               <a:buChar char="●"/>
               <a:defRPr sz="1100"/>
             </a:lvl4pPr>
-            <a:lvl5pPr indent="-298450" lvl="4" marL="2286000">
+            <a:lvl5pPr marL="2286000" lvl="4" indent="-298450">
               <a:spcBef>
                 <a:spcPts val="0"/>
               </a:spcBef>
@@ -424,7 +440,7 @@
               <a:buChar char="○"/>
               <a:defRPr sz="1100"/>
             </a:lvl5pPr>
-            <a:lvl6pPr indent="-298450" lvl="5" marL="2743200">
+            <a:lvl6pPr marL="2743200" lvl="5" indent="-298450">
               <a:spcBef>
                 <a:spcPts val="0"/>
               </a:spcBef>
@@ -435,7 +451,7 @@
               <a:buChar char="■"/>
               <a:defRPr sz="1100"/>
             </a:lvl6pPr>
-            <a:lvl7pPr indent="-298450" lvl="6" marL="3200400">
+            <a:lvl7pPr marL="3200400" lvl="6" indent="-298450">
               <a:spcBef>
                 <a:spcPts val="0"/>
               </a:spcBef>
@@ -446,7 +462,7 @@
               <a:buChar char="●"/>
               <a:defRPr sz="1100"/>
             </a:lvl7pPr>
-            <a:lvl8pPr indent="-298450" lvl="7" marL="3657600">
+            <a:lvl8pPr marL="3657600" lvl="7" indent="-298450">
               <a:spcBef>
                 <a:spcPts val="0"/>
               </a:spcBef>
@@ -457,7 +473,7 @@
               <a:buChar char="○"/>
               <a:defRPr sz="1100"/>
             </a:lvl8pPr>
-            <a:lvl9pPr indent="-298450" lvl="8" marL="4114800">
+            <a:lvl9pPr marL="4114800" lvl="8" indent="-298450">
               <a:spcBef>
                 <a:spcPts val="0"/>
               </a:spcBef>
@@ -469,14 +485,16 @@
               <a:defRPr sz="1100"/>
             </a:lvl9pPr>
           </a:lstStyle>
-          <a:p/>
+          <a:p>
+            <a:endParaRPr/>
+          </a:p>
         </p:txBody>
       </p:sp>
     </p:spTree>
   </p:cSld>
-  <p:clrMap accent1="accent1" accent2="accent2" accent3="accent3" accent4="accent4" accent5="accent5" accent6="accent6" bg1="lt1" bg2="dk2" tx1="dk1" tx2="lt2" folHlink="folHlink" hlink="hlink"/>
+  <p:clrMap bg1="lt1" tx1="dk1" bg2="dk2" tx2="lt2" accent1="accent1" accent2="accent2" accent3="accent3" accent4="accent4" accent5="accent5" accent6="accent6" hlink="hlink" folHlink="folHlink"/>
   <p:notesStyle>
-    <a:defPPr lvl="0" marR="0" rtl="0" algn="l">
+    <a:defPPr marR="0" lvl="0" algn="l" rtl="0">
       <a:lnSpc>
         <a:spcPct val="100000"/>
       </a:lnSpc>
@@ -487,7 +505,7 @@
         <a:spcPts val="0"/>
       </a:spcAft>
     </a:defPPr>
-    <a:lvl1pPr lvl="0" marR="0" rtl="0" algn="l">
+    <a:lvl1pPr marR="0" lvl="0" algn="l" rtl="0">
       <a:lnSpc>
         <a:spcPct val="100000"/>
       </a:lnSpc>
@@ -501,7 +519,7 @@
         <a:srgbClr val="000000"/>
       </a:buClr>
       <a:buFont typeface="Arial"/>
-      <a:defRPr b="0" i="0" sz="1400" u="none" cap="none" strike="noStrike">
+      <a:defRPr sz="1400" b="0" i="0" u="none" strike="noStrike" cap="none">
         <a:solidFill>
           <a:srgbClr val="000000"/>
         </a:solidFill>
@@ -511,7 +529,7 @@
         <a:sym typeface="Arial"/>
       </a:defRPr>
     </a:lvl1pPr>
-    <a:lvl2pPr lvl="1" marR="0" rtl="0" algn="l">
+    <a:lvl2pPr marR="0" lvl="1" algn="l" rtl="0">
       <a:lnSpc>
         <a:spcPct val="100000"/>
       </a:lnSpc>
@@ -525,7 +543,7 @@
         <a:srgbClr val="000000"/>
       </a:buClr>
       <a:buFont typeface="Arial"/>
-      <a:defRPr b="0" i="0" sz="1400" u="none" cap="none" strike="noStrike">
+      <a:defRPr sz="1400" b="0" i="0" u="none" strike="noStrike" cap="none">
         <a:solidFill>
           <a:srgbClr val="000000"/>
         </a:solidFill>
@@ -535,7 +553,7 @@
         <a:sym typeface="Arial"/>
       </a:defRPr>
     </a:lvl2pPr>
-    <a:lvl3pPr lvl="2" marR="0" rtl="0" algn="l">
+    <a:lvl3pPr marR="0" lvl="2" algn="l" rtl="0">
       <a:lnSpc>
         <a:spcPct val="100000"/>
       </a:lnSpc>
@@ -549,7 +567,7 @@
         <a:srgbClr val="000000"/>
       </a:buClr>
       <a:buFont typeface="Arial"/>
-      <a:defRPr b="0" i="0" sz="1400" u="none" cap="none" strike="noStrike">
+      <a:defRPr sz="1400" b="0" i="0" u="none" strike="noStrike" cap="none">
         <a:solidFill>
           <a:srgbClr val="000000"/>
         </a:solidFill>
@@ -559,7 +577,7 @@
         <a:sym typeface="Arial"/>
       </a:defRPr>
     </a:lvl3pPr>
-    <a:lvl4pPr lvl="3" marR="0" rtl="0" algn="l">
+    <a:lvl4pPr marR="0" lvl="3" algn="l" rtl="0">
       <a:lnSpc>
         <a:spcPct val="100000"/>
       </a:lnSpc>
@@ -573,7 +591,7 @@
         <a:srgbClr val="000000"/>
       </a:buClr>
       <a:buFont typeface="Arial"/>
-      <a:defRPr b="0" i="0" sz="1400" u="none" cap="none" strike="noStrike">
+      <a:defRPr sz="1400" b="0" i="0" u="none" strike="noStrike" cap="none">
         <a:solidFill>
           <a:srgbClr val="000000"/>
         </a:solidFill>
@@ -583,7 +601,7 @@
         <a:sym typeface="Arial"/>
       </a:defRPr>
     </a:lvl4pPr>
-    <a:lvl5pPr lvl="4" marR="0" rtl="0" algn="l">
+    <a:lvl5pPr marR="0" lvl="4" algn="l" rtl="0">
       <a:lnSpc>
         <a:spcPct val="100000"/>
       </a:lnSpc>
@@ -597,7 +615,7 @@
         <a:srgbClr val="000000"/>
       </a:buClr>
       <a:buFont typeface="Arial"/>
-      <a:defRPr b="0" i="0" sz="1400" u="none" cap="none" strike="noStrike">
+      <a:defRPr sz="1400" b="0" i="0" u="none" strike="noStrike" cap="none">
         <a:solidFill>
           <a:srgbClr val="000000"/>
         </a:solidFill>
@@ -607,7 +625,7 @@
         <a:sym typeface="Arial"/>
       </a:defRPr>
     </a:lvl5pPr>
-    <a:lvl6pPr lvl="5" marR="0" rtl="0" algn="l">
+    <a:lvl6pPr marR="0" lvl="5" algn="l" rtl="0">
       <a:lnSpc>
         <a:spcPct val="100000"/>
       </a:lnSpc>
@@ -621,7 +639,7 @@
         <a:srgbClr val="000000"/>
       </a:buClr>
       <a:buFont typeface="Arial"/>
-      <a:defRPr b="0" i="0" sz="1400" u="none" cap="none" strike="noStrike">
+      <a:defRPr sz="1400" b="0" i="0" u="none" strike="noStrike" cap="none">
         <a:solidFill>
           <a:srgbClr val="000000"/>
         </a:solidFill>
@@ -631,7 +649,7 @@
         <a:sym typeface="Arial"/>
       </a:defRPr>
     </a:lvl6pPr>
-    <a:lvl7pPr lvl="6" marR="0" rtl="0" algn="l">
+    <a:lvl7pPr marR="0" lvl="6" algn="l" rtl="0">
       <a:lnSpc>
         <a:spcPct val="100000"/>
       </a:lnSpc>
@@ -645,7 +663,7 @@
         <a:srgbClr val="000000"/>
       </a:buClr>
       <a:buFont typeface="Arial"/>
-      <a:defRPr b="0" i="0" sz="1400" u="none" cap="none" strike="noStrike">
+      <a:defRPr sz="1400" b="0" i="0" u="none" strike="noStrike" cap="none">
         <a:solidFill>
           <a:srgbClr val="000000"/>
         </a:solidFill>
@@ -655,7 +673,7 @@
         <a:sym typeface="Arial"/>
       </a:defRPr>
     </a:lvl7pPr>
-    <a:lvl8pPr lvl="7" marR="0" rtl="0" algn="l">
+    <a:lvl8pPr marR="0" lvl="7" algn="l" rtl="0">
       <a:lnSpc>
         <a:spcPct val="100000"/>
       </a:lnSpc>
@@ -669,7 +687,7 @@
         <a:srgbClr val="000000"/>
       </a:buClr>
       <a:buFont typeface="Arial"/>
-      <a:defRPr b="0" i="0" sz="1400" u="none" cap="none" strike="noStrike">
+      <a:defRPr sz="1400" b="0" i="0" u="none" strike="noStrike" cap="none">
         <a:solidFill>
           <a:srgbClr val="000000"/>
         </a:solidFill>
@@ -679,7 +697,7 @@
         <a:sym typeface="Arial"/>
       </a:defRPr>
     </a:lvl8pPr>
-    <a:lvl9pPr lvl="8" marR="0" rtl="0" algn="l">
+    <a:lvl9pPr marR="0" lvl="8" algn="l" rtl="0">
       <a:lnSpc>
         <a:spcPct val="100000"/>
       </a:lnSpc>
@@ -693,7 +711,7 @@
         <a:srgbClr val="000000"/>
       </a:buClr>
       <a:buFont typeface="Arial"/>
-      <a:defRPr b="0" i="0" sz="1400" u="none" cap="none" strike="noStrike">
+      <a:defRPr sz="1400" b="0" i="0" u="none" strike="noStrike" cap="none">
         <a:solidFill>
           <a:srgbClr val="000000"/>
         </a:solidFill>
@@ -708,11 +726,11 @@
 </file>
 
 <file path=ppt/notesSlides/notesSlide1.xml><?xml version="1.0" encoding="utf-8"?>
-<p:notes xmlns:a="http://schemas.openxmlformats.org/drawingml/2006/main" xmlns:r="http://schemas.openxmlformats.org/officeDocument/2006/relationships" xmlns:mc="http://schemas.openxmlformats.org/markup-compatibility/2006" xmlns:mv="urn:schemas-microsoft-com:mac:vml" xmlns:p="http://schemas.openxmlformats.org/presentationml/2006/main" xmlns:c="http://schemas.openxmlformats.org/drawingml/2006/chart" xmlns:dgm="http://schemas.openxmlformats.org/drawingml/2006/diagram" xmlns:o="urn:schemas-microsoft-com:office:office" xmlns:v="urn:schemas-microsoft-com:vml" xmlns:pvml="urn:schemas-microsoft-com:office:powerpoint" xmlns:com="http://schemas.openxmlformats.org/drawingml/2006/compatibility" xmlns:p14="http://schemas.microsoft.com/office/powerpoint/2010/main" xmlns:p15="http://schemas.microsoft.com/office/powerpoint/2012/main" xmlns:ahyp="http://schemas.microsoft.com/office/drawing/2018/hyperlinkcolor" showMasterPhAnim="0" showMasterSp="0">
+<p:notes xmlns:a="http://schemas.openxmlformats.org/drawingml/2006/main" xmlns:r="http://schemas.openxmlformats.org/officeDocument/2006/relationships" xmlns:p="http://schemas.openxmlformats.org/presentationml/2006/main" showMasterSp="0" showMasterPhAnim="0">
   <p:cSld>
     <p:spTree>
       <p:nvGrpSpPr>
-        <p:cNvPr id="81" name="Shape 81"/>
+        <p:cNvPr id="1" name="Shape 81"/>
         <p:cNvGrpSpPr/>
         <p:nvPr/>
       </p:nvGrpSpPr>
@@ -727,9 +745,11 @@
       <p:sp>
         <p:nvSpPr>
           <p:cNvPr id="82" name="Google Shape;82;p:notes"/>
-          <p:cNvSpPr/>
+          <p:cNvSpPr>
+            <a:spLocks noGrp="1" noRot="1" noChangeAspect="1"/>
+          </p:cNvSpPr>
           <p:nvPr>
-            <p:ph idx="2" type="sldImg"/>
+            <p:ph type="sldImg" idx="2"/>
           </p:nvPr>
         </p:nvSpPr>
         <p:spPr>
@@ -738,9 +758,13 @@
             <a:ext cx="6096075" cy="3429000"/>
           </a:xfrm>
           <a:custGeom>
-            <a:rect b="b" l="l" r="r" t="t"/>
+            <a:avLst/>
+            <a:gdLst/>
+            <a:ahLst/>
+            <a:cxnLst/>
+            <a:rect l="l" t="t" r="r" b="b"/>
             <a:pathLst>
-              <a:path extrusionOk="0" h="120000" w="120000">
+              <a:path w="120000" h="120000" extrusionOk="0">
                 <a:moveTo>
                   <a:pt x="0" y="0"/>
                 </a:moveTo>
@@ -762,9 +786,11 @@
       <p:sp>
         <p:nvSpPr>
           <p:cNvPr id="83" name="Google Shape;83;p:notes"/>
-          <p:cNvSpPr txBox="1"/>
+          <p:cNvSpPr txBox="1">
+            <a:spLocks noGrp="1"/>
+          </p:cNvSpPr>
           <p:nvPr>
-            <p:ph idx="1" type="body"/>
+            <p:ph type="body" idx="1"/>
           </p:nvPr>
         </p:nvSpPr>
         <p:spPr>
@@ -777,12 +803,12 @@
           </a:prstGeom>
         </p:spPr>
         <p:txBody>
-          <a:bodyPr anchorCtr="0" anchor="t" bIns="91425" lIns="91425" spcFirstLastPara="1" rIns="91425" wrap="square" tIns="91425">
+          <a:bodyPr spcFirstLastPara="1" wrap="square" lIns="91425" tIns="91425" rIns="91425" bIns="91425" anchor="t" anchorCtr="0">
             <a:noAutofit/>
           </a:bodyPr>
           <a:lstStyle/>
           <a:p>
-            <a:pPr indent="0" lvl="0" marL="0" rtl="0" algn="l">
+            <a:pPr marL="0" lvl="0" indent="0" algn="l" rtl="0">
               <a:spcBef>
                 <a:spcPts val="0"/>
               </a:spcBef>
@@ -791,9 +817,6 @@
               </a:spcAft>
               <a:buNone/>
             </a:pPr>
-            <a:r>
-              <a:t/>
-            </a:r>
             <a:endParaRPr/>
           </a:p>
         </p:txBody>
@@ -807,11 +830,115 @@
 </file>
 
 <file path=ppt/notesSlides/notesSlide10.xml><?xml version="1.0" encoding="utf-8"?>
-<p:notes xmlns:a="http://schemas.openxmlformats.org/drawingml/2006/main" xmlns:r="http://schemas.openxmlformats.org/officeDocument/2006/relationships" xmlns:mc="http://schemas.openxmlformats.org/markup-compatibility/2006" xmlns:mv="urn:schemas-microsoft-com:mac:vml" xmlns:p="http://schemas.openxmlformats.org/presentationml/2006/main" xmlns:c="http://schemas.openxmlformats.org/drawingml/2006/chart" xmlns:dgm="http://schemas.openxmlformats.org/drawingml/2006/diagram" xmlns:o="urn:schemas-microsoft-com:office:office" xmlns:v="urn:schemas-microsoft-com:vml" xmlns:pvml="urn:schemas-microsoft-com:office:powerpoint" xmlns:com="http://schemas.openxmlformats.org/drawingml/2006/compatibility" xmlns:p14="http://schemas.microsoft.com/office/powerpoint/2010/main" xmlns:p15="http://schemas.microsoft.com/office/powerpoint/2012/main" xmlns:ahyp="http://schemas.microsoft.com/office/drawing/2018/hyperlinkcolor" showMasterPhAnim="0" showMasterSp="0">
+<p:notes xmlns:a="http://schemas.openxmlformats.org/drawingml/2006/main" xmlns:r="http://schemas.openxmlformats.org/officeDocument/2006/relationships" xmlns:p="http://schemas.openxmlformats.org/presentationml/2006/main" showMasterSp="0" showMasterPhAnim="0">
   <p:cSld>
     <p:spTree>
       <p:nvGrpSpPr>
-        <p:cNvPr id="135" name="Shape 135"/>
+        <p:cNvPr id="1" name="Shape 129"/>
+        <p:cNvGrpSpPr/>
+        <p:nvPr/>
+      </p:nvGrpSpPr>
+      <p:grpSpPr>
+        <a:xfrm>
+          <a:off x="0" y="0"/>
+          <a:ext cx="0" cy="0"/>
+          <a:chOff x="0" y="0"/>
+          <a:chExt cx="0" cy="0"/>
+        </a:xfrm>
+      </p:grpSpPr>
+      <p:sp>
+        <p:nvSpPr>
+          <p:cNvPr id="130" name="Google Shape;130;g33c0cf3f8a6_0_111:notes"/>
+          <p:cNvSpPr>
+            <a:spLocks noGrp="1" noRot="1" noChangeAspect="1"/>
+          </p:cNvSpPr>
+          <p:nvPr>
+            <p:ph type="sldImg" idx="2"/>
+          </p:nvPr>
+        </p:nvSpPr>
+        <p:spPr>
+          <a:xfrm>
+            <a:off x="381300" y="685800"/>
+            <a:ext cx="6096000" cy="3429000"/>
+          </a:xfrm>
+          <a:custGeom>
+            <a:avLst/>
+            <a:gdLst/>
+            <a:ahLst/>
+            <a:cxnLst/>
+            <a:rect l="l" t="t" r="r" b="b"/>
+            <a:pathLst>
+              <a:path w="120000" h="120000" extrusionOk="0">
+                <a:moveTo>
+                  <a:pt x="0" y="0"/>
+                </a:moveTo>
+                <a:lnTo>
+                  <a:pt x="120000" y="0"/>
+                </a:lnTo>
+                <a:lnTo>
+                  <a:pt x="120000" y="120000"/>
+                </a:lnTo>
+                <a:lnTo>
+                  <a:pt x="0" y="120000"/>
+                </a:lnTo>
+                <a:close/>
+              </a:path>
+            </a:pathLst>
+          </a:custGeom>
+        </p:spPr>
+      </p:sp>
+      <p:sp>
+        <p:nvSpPr>
+          <p:cNvPr id="131" name="Google Shape;131;g33c0cf3f8a6_0_111:notes"/>
+          <p:cNvSpPr txBox="1">
+            <a:spLocks noGrp="1"/>
+          </p:cNvSpPr>
+          <p:nvPr>
+            <p:ph type="body" idx="1"/>
+          </p:nvPr>
+        </p:nvSpPr>
+        <p:spPr>
+          <a:xfrm>
+            <a:off x="685800" y="4343400"/>
+            <a:ext cx="5486400" cy="4114800"/>
+          </a:xfrm>
+          <a:prstGeom prst="rect">
+            <a:avLst/>
+          </a:prstGeom>
+        </p:spPr>
+        <p:txBody>
+          <a:bodyPr spcFirstLastPara="1" wrap="square" lIns="91425" tIns="91425" rIns="91425" bIns="91425" anchor="t" anchorCtr="0">
+            <a:noAutofit/>
+          </a:bodyPr>
+          <a:lstStyle/>
+          <a:p>
+            <a:pPr marL="0" lvl="0" indent="0" algn="l" rtl="0">
+              <a:spcBef>
+                <a:spcPts val="0"/>
+              </a:spcBef>
+              <a:spcAft>
+                <a:spcPts val="0"/>
+              </a:spcAft>
+              <a:buNone/>
+            </a:pPr>
+            <a:endParaRPr/>
+          </a:p>
+        </p:txBody>
+      </p:sp>
+    </p:spTree>
+  </p:cSld>
+  <p:clrMapOvr>
+    <a:masterClrMapping/>
+  </p:clrMapOvr>
+</p:notes>
+</file>
+
+<file path=ppt/notesSlides/notesSlide11.xml><?xml version="1.0" encoding="utf-8"?>
+<p:notes xmlns:a="http://schemas.openxmlformats.org/drawingml/2006/main" xmlns:r="http://schemas.openxmlformats.org/officeDocument/2006/relationships" xmlns:p="http://schemas.openxmlformats.org/presentationml/2006/main" showMasterSp="0" showMasterPhAnim="0">
+  <p:cSld>
+    <p:spTree>
+      <p:nvGrpSpPr>
+        <p:cNvPr id="1" name="Shape 135"/>
         <p:cNvGrpSpPr/>
         <p:nvPr/>
       </p:nvGrpSpPr>
@@ -826,9 +953,11 @@
       <p:sp>
         <p:nvSpPr>
           <p:cNvPr id="136" name="Google Shape;136;g33c0cf3f8a6_0_116:notes"/>
-          <p:cNvSpPr/>
+          <p:cNvSpPr>
+            <a:spLocks noGrp="1" noRot="1" noChangeAspect="1"/>
+          </p:cNvSpPr>
           <p:nvPr>
-            <p:ph idx="2" type="sldImg"/>
+            <p:ph type="sldImg" idx="2"/>
           </p:nvPr>
         </p:nvSpPr>
         <p:spPr>
@@ -837,9 +966,13 @@
             <a:ext cx="6096000" cy="3429000"/>
           </a:xfrm>
           <a:custGeom>
-            <a:rect b="b" l="l" r="r" t="t"/>
+            <a:avLst/>
+            <a:gdLst/>
+            <a:ahLst/>
+            <a:cxnLst/>
+            <a:rect l="l" t="t" r="r" b="b"/>
             <a:pathLst>
-              <a:path extrusionOk="0" h="120000" w="120000">
+              <a:path w="120000" h="120000" extrusionOk="0">
                 <a:moveTo>
                   <a:pt x="0" y="0"/>
                 </a:moveTo>
@@ -861,9 +994,11 @@
       <p:sp>
         <p:nvSpPr>
           <p:cNvPr id="137" name="Google Shape;137;g33c0cf3f8a6_0_116:notes"/>
-          <p:cNvSpPr txBox="1"/>
+          <p:cNvSpPr txBox="1">
+            <a:spLocks noGrp="1"/>
+          </p:cNvSpPr>
           <p:nvPr>
-            <p:ph idx="1" type="body"/>
+            <p:ph type="body" idx="1"/>
           </p:nvPr>
         </p:nvSpPr>
         <p:spPr>
@@ -876,12 +1011,12 @@
           </a:prstGeom>
         </p:spPr>
         <p:txBody>
-          <a:bodyPr anchorCtr="0" anchor="t" bIns="91425" lIns="91425" spcFirstLastPara="1" rIns="91425" wrap="square" tIns="91425">
+          <a:bodyPr spcFirstLastPara="1" wrap="square" lIns="91425" tIns="91425" rIns="91425" bIns="91425" anchor="t" anchorCtr="0">
             <a:noAutofit/>
           </a:bodyPr>
           <a:lstStyle/>
           <a:p>
-            <a:pPr indent="0" lvl="0" marL="0" rtl="0" algn="l">
+            <a:pPr marL="0" lvl="0" indent="0" algn="l" rtl="0">
               <a:spcBef>
                 <a:spcPts val="0"/>
               </a:spcBef>
@@ -890,9 +1025,6 @@
               </a:spcAft>
               <a:buNone/>
             </a:pPr>
-            <a:r>
-              <a:t/>
-            </a:r>
             <a:endParaRPr/>
           </a:p>
         </p:txBody>
@@ -905,12 +1037,12 @@
 </p:notes>
 </file>
 
-<file path=ppt/notesSlides/notesSlide11.xml><?xml version="1.0" encoding="utf-8"?>
-<p:notes xmlns:a="http://schemas.openxmlformats.org/drawingml/2006/main" xmlns:r="http://schemas.openxmlformats.org/officeDocument/2006/relationships" xmlns:mc="http://schemas.openxmlformats.org/markup-compatibility/2006" xmlns:mv="urn:schemas-microsoft-com:mac:vml" xmlns:p="http://schemas.openxmlformats.org/presentationml/2006/main" xmlns:c="http://schemas.openxmlformats.org/drawingml/2006/chart" xmlns:dgm="http://schemas.openxmlformats.org/drawingml/2006/diagram" xmlns:o="urn:schemas-microsoft-com:office:office" xmlns:v="urn:schemas-microsoft-com:vml" xmlns:pvml="urn:schemas-microsoft-com:office:powerpoint" xmlns:com="http://schemas.openxmlformats.org/drawingml/2006/compatibility" xmlns:p14="http://schemas.microsoft.com/office/powerpoint/2010/main" xmlns:p15="http://schemas.microsoft.com/office/powerpoint/2012/main" xmlns:ahyp="http://schemas.microsoft.com/office/drawing/2018/hyperlinkcolor" showMasterPhAnim="0" showMasterSp="0">
+<file path=ppt/notesSlides/notesSlide12.xml><?xml version="1.0" encoding="utf-8"?>
+<p:notes xmlns:a="http://schemas.openxmlformats.org/drawingml/2006/main" xmlns:r="http://schemas.openxmlformats.org/officeDocument/2006/relationships" xmlns:p="http://schemas.openxmlformats.org/presentationml/2006/main" showMasterSp="0" showMasterPhAnim="0">
   <p:cSld>
     <p:spTree>
       <p:nvGrpSpPr>
-        <p:cNvPr id="143" name="Shape 143"/>
+        <p:cNvPr id="1" name="Shape 143"/>
         <p:cNvGrpSpPr/>
         <p:nvPr/>
       </p:nvGrpSpPr>
@@ -925,20 +1057,26 @@
       <p:sp>
         <p:nvSpPr>
           <p:cNvPr id="144" name="Google Shape;144;g33c0cf3f8a6_0_121:notes"/>
-          <p:cNvSpPr/>
+          <p:cNvSpPr>
+            <a:spLocks noGrp="1" noRot="1" noChangeAspect="1"/>
+          </p:cNvSpPr>
           <p:nvPr>
-            <p:ph idx="2" type="sldImg"/>
+            <p:ph type="sldImg" idx="2"/>
           </p:nvPr>
         </p:nvSpPr>
         <p:spPr>
           <a:xfrm>
-            <a:off x="381300" y="685800"/>
+            <a:off x="381000" y="685800"/>
             <a:ext cx="6096000" cy="3429000"/>
           </a:xfrm>
           <a:custGeom>
-            <a:rect b="b" l="l" r="r" t="t"/>
+            <a:avLst/>
+            <a:gdLst/>
+            <a:ahLst/>
+            <a:cxnLst/>
+            <a:rect l="l" t="t" r="r" b="b"/>
             <a:pathLst>
-              <a:path extrusionOk="0" h="120000" w="120000">
+              <a:path w="120000" h="120000" extrusionOk="0">
                 <a:moveTo>
                   <a:pt x="0" y="0"/>
                 </a:moveTo>
@@ -960,9 +1098,11 @@
       <p:sp>
         <p:nvSpPr>
           <p:cNvPr id="145" name="Google Shape;145;g33c0cf3f8a6_0_121:notes"/>
-          <p:cNvSpPr txBox="1"/>
+          <p:cNvSpPr txBox="1">
+            <a:spLocks noGrp="1"/>
+          </p:cNvSpPr>
           <p:nvPr>
-            <p:ph idx="1" type="body"/>
+            <p:ph type="body" idx="1"/>
           </p:nvPr>
         </p:nvSpPr>
         <p:spPr>
@@ -975,12 +1115,12 @@
           </a:prstGeom>
         </p:spPr>
         <p:txBody>
-          <a:bodyPr anchorCtr="0" anchor="t" bIns="91425" lIns="91425" spcFirstLastPara="1" rIns="91425" wrap="square" tIns="91425">
+          <a:bodyPr spcFirstLastPara="1" wrap="square" lIns="91425" tIns="91425" rIns="91425" bIns="91425" anchor="t" anchorCtr="0">
             <a:noAutofit/>
           </a:bodyPr>
           <a:lstStyle/>
           <a:p>
-            <a:pPr indent="0" lvl="0" marL="0" rtl="0" algn="l">
+            <a:pPr marL="0" lvl="0" indent="0" algn="l" rtl="0">
               <a:spcBef>
                 <a:spcPts val="0"/>
               </a:spcBef>
@@ -989,9 +1129,6 @@
               </a:spcAft>
               <a:buNone/>
             </a:pPr>
-            <a:r>
-              <a:t/>
-            </a:r>
             <a:endParaRPr/>
           </a:p>
         </p:txBody>
@@ -1004,12 +1141,12 @@
 </p:notes>
 </file>
 
-<file path=ppt/notesSlides/notesSlide12.xml><?xml version="1.0" encoding="utf-8"?>
-<p:notes xmlns:a="http://schemas.openxmlformats.org/drawingml/2006/main" xmlns:r="http://schemas.openxmlformats.org/officeDocument/2006/relationships" xmlns:mc="http://schemas.openxmlformats.org/markup-compatibility/2006" xmlns:mv="urn:schemas-microsoft-com:mac:vml" xmlns:p="http://schemas.openxmlformats.org/presentationml/2006/main" xmlns:c="http://schemas.openxmlformats.org/drawingml/2006/chart" xmlns:dgm="http://schemas.openxmlformats.org/drawingml/2006/diagram" xmlns:o="urn:schemas-microsoft-com:office:office" xmlns:v="urn:schemas-microsoft-com:vml" xmlns:pvml="urn:schemas-microsoft-com:office:powerpoint" xmlns:com="http://schemas.openxmlformats.org/drawingml/2006/compatibility" xmlns:p14="http://schemas.microsoft.com/office/powerpoint/2010/main" xmlns:p15="http://schemas.microsoft.com/office/powerpoint/2012/main" xmlns:ahyp="http://schemas.microsoft.com/office/drawing/2018/hyperlinkcolor" showMasterPhAnim="0" showMasterSp="0">
+<file path=ppt/notesSlides/notesSlide13.xml><?xml version="1.0" encoding="utf-8"?>
+<p:notes xmlns:a="http://schemas.openxmlformats.org/drawingml/2006/main" xmlns:r="http://schemas.openxmlformats.org/officeDocument/2006/relationships" xmlns:p="http://schemas.openxmlformats.org/presentationml/2006/main" showMasterSp="0" showMasterPhAnim="0">
   <p:cSld>
     <p:spTree>
       <p:nvGrpSpPr>
-        <p:cNvPr id="149" name="Shape 149"/>
+        <p:cNvPr id="1" name="Shape 149"/>
         <p:cNvGrpSpPr/>
         <p:nvPr/>
       </p:nvGrpSpPr>
@@ -1024,20 +1161,26 @@
       <p:sp>
         <p:nvSpPr>
           <p:cNvPr id="150" name="Google Shape;150;g33c0cf3f8a6_0_126:notes"/>
-          <p:cNvSpPr/>
+          <p:cNvSpPr>
+            <a:spLocks noGrp="1" noRot="1" noChangeAspect="1"/>
+          </p:cNvSpPr>
           <p:nvPr>
-            <p:ph idx="2" type="sldImg"/>
+            <p:ph type="sldImg" idx="2"/>
           </p:nvPr>
         </p:nvSpPr>
         <p:spPr>
           <a:xfrm>
-            <a:off x="381300" y="685800"/>
+            <a:off x="381000" y="685800"/>
             <a:ext cx="6096000" cy="3429000"/>
           </a:xfrm>
           <a:custGeom>
-            <a:rect b="b" l="l" r="r" t="t"/>
+            <a:avLst/>
+            <a:gdLst/>
+            <a:ahLst/>
+            <a:cxnLst/>
+            <a:rect l="l" t="t" r="r" b="b"/>
             <a:pathLst>
-              <a:path extrusionOk="0" h="120000" w="120000">
+              <a:path w="120000" h="120000" extrusionOk="0">
                 <a:moveTo>
                   <a:pt x="0" y="0"/>
                 </a:moveTo>
@@ -1059,9 +1202,11 @@
       <p:sp>
         <p:nvSpPr>
           <p:cNvPr id="151" name="Google Shape;151;g33c0cf3f8a6_0_126:notes"/>
-          <p:cNvSpPr txBox="1"/>
+          <p:cNvSpPr txBox="1">
+            <a:spLocks noGrp="1"/>
+          </p:cNvSpPr>
           <p:nvPr>
-            <p:ph idx="1" type="body"/>
+            <p:ph type="body" idx="1"/>
           </p:nvPr>
         </p:nvSpPr>
         <p:spPr>
@@ -1074,12 +1219,12 @@
           </a:prstGeom>
         </p:spPr>
         <p:txBody>
-          <a:bodyPr anchorCtr="0" anchor="t" bIns="91425" lIns="91425" spcFirstLastPara="1" rIns="91425" wrap="square" tIns="91425">
+          <a:bodyPr spcFirstLastPara="1" wrap="square" lIns="91425" tIns="91425" rIns="91425" bIns="91425" anchor="t" anchorCtr="0">
             <a:noAutofit/>
           </a:bodyPr>
           <a:lstStyle/>
           <a:p>
-            <a:pPr indent="0" lvl="0" marL="0" rtl="0" algn="l">
+            <a:pPr marL="0" lvl="0" indent="0" algn="l" rtl="0">
               <a:spcBef>
                 <a:spcPts val="0"/>
               </a:spcBef>
@@ -1088,9 +1233,6 @@
               </a:spcAft>
               <a:buNone/>
             </a:pPr>
-            <a:r>
-              <a:t/>
-            </a:r>
             <a:endParaRPr/>
           </a:p>
         </p:txBody>
@@ -1103,12 +1245,139 @@
 </p:notes>
 </file>
 
-<file path=ppt/notesSlides/notesSlide13.xml><?xml version="1.0" encoding="utf-8"?>
-<p:notes xmlns:a="http://schemas.openxmlformats.org/drawingml/2006/main" xmlns:r="http://schemas.openxmlformats.org/officeDocument/2006/relationships" xmlns:mc="http://schemas.openxmlformats.org/markup-compatibility/2006" xmlns:mv="urn:schemas-microsoft-com:mac:vml" xmlns:p="http://schemas.openxmlformats.org/presentationml/2006/main" xmlns:c="http://schemas.openxmlformats.org/drawingml/2006/chart" xmlns:dgm="http://schemas.openxmlformats.org/drawingml/2006/diagram" xmlns:o="urn:schemas-microsoft-com:office:office" xmlns:v="urn:schemas-microsoft-com:vml" xmlns:pvml="urn:schemas-microsoft-com:office:powerpoint" xmlns:com="http://schemas.openxmlformats.org/drawingml/2006/compatibility" xmlns:p14="http://schemas.microsoft.com/office/powerpoint/2010/main" xmlns:p15="http://schemas.microsoft.com/office/powerpoint/2012/main" xmlns:ahyp="http://schemas.microsoft.com/office/drawing/2018/hyperlinkcolor" showMasterPhAnim="0" showMasterSp="0">
+<file path=ppt/notesSlides/notesSlide14.xml><?xml version="1.0" encoding="utf-8"?>
+<p:notes xmlns:a="http://schemas.openxmlformats.org/drawingml/2006/main" xmlns:r="http://schemas.openxmlformats.org/officeDocument/2006/relationships" xmlns:p="http://schemas.openxmlformats.org/presentationml/2006/main" showMasterSp="0" showMasterPhAnim="0">
   <p:cSld>
     <p:spTree>
       <p:nvGrpSpPr>
-        <p:cNvPr id="155" name="Shape 155"/>
+        <p:cNvPr id="1" name="Shape 149">
+          <a:extLst>
+            <a:ext uri="{FF2B5EF4-FFF2-40B4-BE49-F238E27FC236}">
+              <a16:creationId xmlns:a16="http://schemas.microsoft.com/office/drawing/2014/main" id="{106F0F88-52FE-331D-745D-70BF7AB8F953}"/>
+            </a:ext>
+          </a:extLst>
+        </p:cNvPr>
+        <p:cNvGrpSpPr/>
+        <p:nvPr/>
+      </p:nvGrpSpPr>
+      <p:grpSpPr>
+        <a:xfrm>
+          <a:off x="0" y="0"/>
+          <a:ext cx="0" cy="0"/>
+          <a:chOff x="0" y="0"/>
+          <a:chExt cx="0" cy="0"/>
+        </a:xfrm>
+      </p:grpSpPr>
+      <p:sp>
+        <p:nvSpPr>
+          <p:cNvPr id="150" name="Google Shape;150;g33c0cf3f8a6_0_126:notes">
+            <a:extLst>
+              <a:ext uri="{FF2B5EF4-FFF2-40B4-BE49-F238E27FC236}">
+                <a16:creationId xmlns:a16="http://schemas.microsoft.com/office/drawing/2014/main" id="{E97C6088-0301-134F-FAC2-90AAE686F52F}"/>
+              </a:ext>
+            </a:extLst>
+          </p:cNvPr>
+          <p:cNvSpPr>
+            <a:spLocks noGrp="1" noRot="1" noChangeAspect="1"/>
+          </p:cNvSpPr>
+          <p:nvPr>
+            <p:ph type="sldImg" idx="2"/>
+          </p:nvPr>
+        </p:nvSpPr>
+        <p:spPr>
+          <a:xfrm>
+            <a:off x="381000" y="685800"/>
+            <a:ext cx="6096000" cy="3429000"/>
+          </a:xfrm>
+          <a:custGeom>
+            <a:avLst/>
+            <a:gdLst/>
+            <a:ahLst/>
+            <a:cxnLst/>
+            <a:rect l="l" t="t" r="r" b="b"/>
+            <a:pathLst>
+              <a:path w="120000" h="120000" extrusionOk="0">
+                <a:moveTo>
+                  <a:pt x="0" y="0"/>
+                </a:moveTo>
+                <a:lnTo>
+                  <a:pt x="120000" y="0"/>
+                </a:lnTo>
+                <a:lnTo>
+                  <a:pt x="120000" y="120000"/>
+                </a:lnTo>
+                <a:lnTo>
+                  <a:pt x="0" y="120000"/>
+                </a:lnTo>
+                <a:close/>
+              </a:path>
+            </a:pathLst>
+          </a:custGeom>
+        </p:spPr>
+      </p:sp>
+      <p:sp>
+        <p:nvSpPr>
+          <p:cNvPr id="151" name="Google Shape;151;g33c0cf3f8a6_0_126:notes">
+            <a:extLst>
+              <a:ext uri="{FF2B5EF4-FFF2-40B4-BE49-F238E27FC236}">
+                <a16:creationId xmlns:a16="http://schemas.microsoft.com/office/drawing/2014/main" id="{DBECFF72-AE62-2C24-5093-FF85C74F5253}"/>
+              </a:ext>
+            </a:extLst>
+          </p:cNvPr>
+          <p:cNvSpPr txBox="1">
+            <a:spLocks noGrp="1"/>
+          </p:cNvSpPr>
+          <p:nvPr>
+            <p:ph type="body" idx="1"/>
+          </p:nvPr>
+        </p:nvSpPr>
+        <p:spPr>
+          <a:xfrm>
+            <a:off x="685800" y="4343400"/>
+            <a:ext cx="5486400" cy="4114800"/>
+          </a:xfrm>
+          <a:prstGeom prst="rect">
+            <a:avLst/>
+          </a:prstGeom>
+        </p:spPr>
+        <p:txBody>
+          <a:bodyPr spcFirstLastPara="1" wrap="square" lIns="91425" tIns="91425" rIns="91425" bIns="91425" anchor="t" anchorCtr="0">
+            <a:noAutofit/>
+          </a:bodyPr>
+          <a:lstStyle/>
+          <a:p>
+            <a:pPr marL="0" lvl="0" indent="0" algn="l" rtl="0">
+              <a:spcBef>
+                <a:spcPts val="0"/>
+              </a:spcBef>
+              <a:spcAft>
+                <a:spcPts val="0"/>
+              </a:spcAft>
+              <a:buNone/>
+            </a:pPr>
+            <a:endParaRPr/>
+          </a:p>
+        </p:txBody>
+      </p:sp>
+    </p:spTree>
+    <p:extLst>
+      <p:ext uri="{BB962C8B-B14F-4D97-AF65-F5344CB8AC3E}">
+        <p14:creationId xmlns:p14="http://schemas.microsoft.com/office/powerpoint/2010/main" val="3653966276"/>
+      </p:ext>
+    </p:extLst>
+  </p:cSld>
+  <p:clrMapOvr>
+    <a:masterClrMapping/>
+  </p:clrMapOvr>
+</p:notes>
+</file>
+
+<file path=ppt/notesSlides/notesSlide15.xml><?xml version="1.0" encoding="utf-8"?>
+<p:notes xmlns:a="http://schemas.openxmlformats.org/drawingml/2006/main" xmlns:r="http://schemas.openxmlformats.org/officeDocument/2006/relationships" xmlns:p="http://schemas.openxmlformats.org/presentationml/2006/main" showMasterSp="0" showMasterPhAnim="0">
+  <p:cSld>
+    <p:spTree>
+      <p:nvGrpSpPr>
+        <p:cNvPr id="1" name="Shape 155"/>
         <p:cNvGrpSpPr/>
         <p:nvPr/>
       </p:nvGrpSpPr>
@@ -1123,20 +1392,26 @@
       <p:sp>
         <p:nvSpPr>
           <p:cNvPr id="156" name="Google Shape;156;g33c0cf3f8a6_0_131:notes"/>
-          <p:cNvSpPr/>
+          <p:cNvSpPr>
+            <a:spLocks noGrp="1" noRot="1" noChangeAspect="1"/>
+          </p:cNvSpPr>
           <p:nvPr>
-            <p:ph idx="2" type="sldImg"/>
+            <p:ph type="sldImg" idx="2"/>
           </p:nvPr>
         </p:nvSpPr>
         <p:spPr>
           <a:xfrm>
-            <a:off x="381300" y="685800"/>
+            <a:off x="381000" y="685800"/>
             <a:ext cx="6096000" cy="3429000"/>
           </a:xfrm>
           <a:custGeom>
-            <a:rect b="b" l="l" r="r" t="t"/>
+            <a:avLst/>
+            <a:gdLst/>
+            <a:ahLst/>
+            <a:cxnLst/>
+            <a:rect l="l" t="t" r="r" b="b"/>
             <a:pathLst>
-              <a:path extrusionOk="0" h="120000" w="120000">
+              <a:path w="120000" h="120000" extrusionOk="0">
                 <a:moveTo>
                   <a:pt x="0" y="0"/>
                 </a:moveTo>
@@ -1158,9 +1433,11 @@
       <p:sp>
         <p:nvSpPr>
           <p:cNvPr id="157" name="Google Shape;157;g33c0cf3f8a6_0_131:notes"/>
-          <p:cNvSpPr txBox="1"/>
+          <p:cNvSpPr txBox="1">
+            <a:spLocks noGrp="1"/>
+          </p:cNvSpPr>
           <p:nvPr>
-            <p:ph idx="1" type="body"/>
+            <p:ph type="body" idx="1"/>
           </p:nvPr>
         </p:nvSpPr>
         <p:spPr>
@@ -1173,12 +1450,12 @@
           </a:prstGeom>
         </p:spPr>
         <p:txBody>
-          <a:bodyPr anchorCtr="0" anchor="t" bIns="91425" lIns="91425" spcFirstLastPara="1" rIns="91425" wrap="square" tIns="91425">
+          <a:bodyPr spcFirstLastPara="1" wrap="square" lIns="91425" tIns="91425" rIns="91425" bIns="91425" anchor="t" anchorCtr="0">
             <a:noAutofit/>
           </a:bodyPr>
           <a:lstStyle/>
           <a:p>
-            <a:pPr indent="0" lvl="0" marL="0" rtl="0" algn="l">
+            <a:pPr marL="0" lvl="0" indent="0" algn="l" rtl="0">
               <a:spcBef>
                 <a:spcPts val="0"/>
               </a:spcBef>
@@ -1187,9 +1464,6 @@
               </a:spcAft>
               <a:buNone/>
             </a:pPr>
-            <a:r>
-              <a:t/>
-            </a:r>
             <a:endParaRPr/>
           </a:p>
         </p:txBody>
@@ -1203,11 +1477,11 @@
 </file>
 
 <file path=ppt/notesSlides/notesSlide2.xml><?xml version="1.0" encoding="utf-8"?>
-<p:notes xmlns:a="http://schemas.openxmlformats.org/drawingml/2006/main" xmlns:r="http://schemas.openxmlformats.org/officeDocument/2006/relationships" xmlns:mc="http://schemas.openxmlformats.org/markup-compatibility/2006" xmlns:mv="urn:schemas-microsoft-com:mac:vml" xmlns:p="http://schemas.openxmlformats.org/presentationml/2006/main" xmlns:c="http://schemas.openxmlformats.org/drawingml/2006/chart" xmlns:dgm="http://schemas.openxmlformats.org/drawingml/2006/diagram" xmlns:o="urn:schemas-microsoft-com:office:office" xmlns:v="urn:schemas-microsoft-com:vml" xmlns:pvml="urn:schemas-microsoft-com:office:powerpoint" xmlns:com="http://schemas.openxmlformats.org/drawingml/2006/compatibility" xmlns:p14="http://schemas.microsoft.com/office/powerpoint/2010/main" xmlns:p15="http://schemas.microsoft.com/office/powerpoint/2012/main" xmlns:ahyp="http://schemas.microsoft.com/office/drawing/2018/hyperlinkcolor" showMasterPhAnim="0" showMasterSp="0">
+<p:notes xmlns:a="http://schemas.openxmlformats.org/drawingml/2006/main" xmlns:r="http://schemas.openxmlformats.org/officeDocument/2006/relationships" xmlns:p="http://schemas.openxmlformats.org/presentationml/2006/main" showMasterSp="0" showMasterPhAnim="0">
   <p:cSld>
     <p:spTree>
       <p:nvGrpSpPr>
-        <p:cNvPr id="87" name="Shape 87"/>
+        <p:cNvPr id="1" name="Shape 87"/>
         <p:cNvGrpSpPr/>
         <p:nvPr/>
       </p:nvGrpSpPr>
@@ -1222,20 +1496,26 @@
       <p:sp>
         <p:nvSpPr>
           <p:cNvPr id="88" name="Google Shape;88;g33c0cf3f8a6_0_76:notes"/>
-          <p:cNvSpPr/>
+          <p:cNvSpPr>
+            <a:spLocks noGrp="1" noRot="1" noChangeAspect="1"/>
+          </p:cNvSpPr>
           <p:nvPr>
-            <p:ph idx="2" type="sldImg"/>
+            <p:ph type="sldImg" idx="2"/>
           </p:nvPr>
         </p:nvSpPr>
         <p:spPr>
           <a:xfrm>
-            <a:off x="381300" y="685800"/>
+            <a:off x="381000" y="685800"/>
             <a:ext cx="6096000" cy="3429000"/>
           </a:xfrm>
           <a:custGeom>
-            <a:rect b="b" l="l" r="r" t="t"/>
+            <a:avLst/>
+            <a:gdLst/>
+            <a:ahLst/>
+            <a:cxnLst/>
+            <a:rect l="l" t="t" r="r" b="b"/>
             <a:pathLst>
-              <a:path extrusionOk="0" h="120000" w="120000">
+              <a:path w="120000" h="120000" extrusionOk="0">
                 <a:moveTo>
                   <a:pt x="0" y="0"/>
                 </a:moveTo>
@@ -1257,9 +1537,11 @@
       <p:sp>
         <p:nvSpPr>
           <p:cNvPr id="89" name="Google Shape;89;g33c0cf3f8a6_0_76:notes"/>
-          <p:cNvSpPr txBox="1"/>
+          <p:cNvSpPr txBox="1">
+            <a:spLocks noGrp="1"/>
+          </p:cNvSpPr>
           <p:nvPr>
-            <p:ph idx="1" type="body"/>
+            <p:ph type="body" idx="1"/>
           </p:nvPr>
         </p:nvSpPr>
         <p:spPr>
@@ -1272,12 +1554,12 @@
           </a:prstGeom>
         </p:spPr>
         <p:txBody>
-          <a:bodyPr anchorCtr="0" anchor="t" bIns="91425" lIns="91425" spcFirstLastPara="1" rIns="91425" wrap="square" tIns="91425">
+          <a:bodyPr spcFirstLastPara="1" wrap="square" lIns="91425" tIns="91425" rIns="91425" bIns="91425" anchor="t" anchorCtr="0">
             <a:noAutofit/>
           </a:bodyPr>
           <a:lstStyle/>
           <a:p>
-            <a:pPr indent="0" lvl="0" marL="0" rtl="0" algn="l">
+            <a:pPr marL="0" lvl="0" indent="0" algn="l" rtl="0">
               <a:spcBef>
                 <a:spcPts val="0"/>
               </a:spcBef>
@@ -1286,9 +1568,6 @@
               </a:spcAft>
               <a:buNone/>
             </a:pPr>
-            <a:r>
-              <a:t/>
-            </a:r>
             <a:endParaRPr/>
           </a:p>
         </p:txBody>
@@ -1302,11 +1581,11 @@
 </file>
 
 <file path=ppt/notesSlides/notesSlide3.xml><?xml version="1.0" encoding="utf-8"?>
-<p:notes xmlns:a="http://schemas.openxmlformats.org/drawingml/2006/main" xmlns:r="http://schemas.openxmlformats.org/officeDocument/2006/relationships" xmlns:mc="http://schemas.openxmlformats.org/markup-compatibility/2006" xmlns:mv="urn:schemas-microsoft-com:mac:vml" xmlns:p="http://schemas.openxmlformats.org/presentationml/2006/main" xmlns:c="http://schemas.openxmlformats.org/drawingml/2006/chart" xmlns:dgm="http://schemas.openxmlformats.org/drawingml/2006/diagram" xmlns:o="urn:schemas-microsoft-com:office:office" xmlns:v="urn:schemas-microsoft-com:vml" xmlns:pvml="urn:schemas-microsoft-com:office:powerpoint" xmlns:com="http://schemas.openxmlformats.org/drawingml/2006/compatibility" xmlns:p14="http://schemas.microsoft.com/office/powerpoint/2010/main" xmlns:p15="http://schemas.microsoft.com/office/powerpoint/2012/main" xmlns:ahyp="http://schemas.microsoft.com/office/drawing/2018/hyperlinkcolor" showMasterPhAnim="0" showMasterSp="0">
+<p:notes xmlns:a="http://schemas.openxmlformats.org/drawingml/2006/main" xmlns:r="http://schemas.openxmlformats.org/officeDocument/2006/relationships" xmlns:p="http://schemas.openxmlformats.org/presentationml/2006/main" showMasterSp="0" showMasterPhAnim="0">
   <p:cSld>
     <p:spTree>
       <p:nvGrpSpPr>
-        <p:cNvPr id="93" name="Shape 93"/>
+        <p:cNvPr id="1" name="Shape 93"/>
         <p:cNvGrpSpPr/>
         <p:nvPr/>
       </p:nvGrpSpPr>
@@ -1321,20 +1600,26 @@
       <p:sp>
         <p:nvSpPr>
           <p:cNvPr id="94" name="Google Shape;94;g33c0cf3f8a6_0_81:notes"/>
-          <p:cNvSpPr/>
+          <p:cNvSpPr>
+            <a:spLocks noGrp="1" noRot="1" noChangeAspect="1"/>
+          </p:cNvSpPr>
           <p:nvPr>
-            <p:ph idx="2" type="sldImg"/>
+            <p:ph type="sldImg" idx="2"/>
           </p:nvPr>
         </p:nvSpPr>
         <p:spPr>
           <a:xfrm>
-            <a:off x="381300" y="685800"/>
+            <a:off x="381000" y="685800"/>
             <a:ext cx="6096000" cy="3429000"/>
           </a:xfrm>
           <a:custGeom>
-            <a:rect b="b" l="l" r="r" t="t"/>
+            <a:avLst/>
+            <a:gdLst/>
+            <a:ahLst/>
+            <a:cxnLst/>
+            <a:rect l="l" t="t" r="r" b="b"/>
             <a:pathLst>
-              <a:path extrusionOk="0" h="120000" w="120000">
+              <a:path w="120000" h="120000" extrusionOk="0">
                 <a:moveTo>
                   <a:pt x="0" y="0"/>
                 </a:moveTo>
@@ -1356,9 +1641,11 @@
       <p:sp>
         <p:nvSpPr>
           <p:cNvPr id="95" name="Google Shape;95;g33c0cf3f8a6_0_81:notes"/>
-          <p:cNvSpPr txBox="1"/>
+          <p:cNvSpPr txBox="1">
+            <a:spLocks noGrp="1"/>
+          </p:cNvSpPr>
           <p:nvPr>
-            <p:ph idx="1" type="body"/>
+            <p:ph type="body" idx="1"/>
           </p:nvPr>
         </p:nvSpPr>
         <p:spPr>
@@ -1371,12 +1658,12 @@
           </a:prstGeom>
         </p:spPr>
         <p:txBody>
-          <a:bodyPr anchorCtr="0" anchor="t" bIns="91425" lIns="91425" spcFirstLastPara="1" rIns="91425" wrap="square" tIns="91425">
+          <a:bodyPr spcFirstLastPara="1" wrap="square" lIns="91425" tIns="91425" rIns="91425" bIns="91425" anchor="t" anchorCtr="0">
             <a:noAutofit/>
           </a:bodyPr>
           <a:lstStyle/>
           <a:p>
-            <a:pPr indent="0" lvl="0" marL="0" rtl="0" algn="l">
+            <a:pPr marL="0" lvl="0" indent="0" algn="l" rtl="0">
               <a:spcBef>
                 <a:spcPts val="0"/>
               </a:spcBef>
@@ -1385,9 +1672,6 @@
               </a:spcAft>
               <a:buNone/>
             </a:pPr>
-            <a:r>
-              <a:t/>
-            </a:r>
             <a:endParaRPr/>
           </a:p>
         </p:txBody>
@@ -1401,11 +1685,11 @@
 </file>
 
 <file path=ppt/notesSlides/notesSlide4.xml><?xml version="1.0" encoding="utf-8"?>
-<p:notes xmlns:a="http://schemas.openxmlformats.org/drawingml/2006/main" xmlns:r="http://schemas.openxmlformats.org/officeDocument/2006/relationships" xmlns:mc="http://schemas.openxmlformats.org/markup-compatibility/2006" xmlns:mv="urn:schemas-microsoft-com:mac:vml" xmlns:p="http://schemas.openxmlformats.org/presentationml/2006/main" xmlns:c="http://schemas.openxmlformats.org/drawingml/2006/chart" xmlns:dgm="http://schemas.openxmlformats.org/drawingml/2006/diagram" xmlns:o="urn:schemas-microsoft-com:office:office" xmlns:v="urn:schemas-microsoft-com:vml" xmlns:pvml="urn:schemas-microsoft-com:office:powerpoint" xmlns:com="http://schemas.openxmlformats.org/drawingml/2006/compatibility" xmlns:p14="http://schemas.microsoft.com/office/powerpoint/2010/main" xmlns:p15="http://schemas.microsoft.com/office/powerpoint/2012/main" xmlns:ahyp="http://schemas.microsoft.com/office/drawing/2018/hyperlinkcolor" showMasterPhAnim="0" showMasterSp="0">
+<p:notes xmlns:a="http://schemas.openxmlformats.org/drawingml/2006/main" xmlns:r="http://schemas.openxmlformats.org/officeDocument/2006/relationships" xmlns:p="http://schemas.openxmlformats.org/presentationml/2006/main" showMasterSp="0" showMasterPhAnim="0">
   <p:cSld>
     <p:spTree>
       <p:nvGrpSpPr>
-        <p:cNvPr id="99" name="Shape 99"/>
+        <p:cNvPr id="1" name="Shape 99"/>
         <p:cNvGrpSpPr/>
         <p:nvPr/>
       </p:nvGrpSpPr>
@@ -1420,20 +1704,26 @@
       <p:sp>
         <p:nvSpPr>
           <p:cNvPr id="100" name="Google Shape;100;g33c0cf3f8a6_0_86:notes"/>
-          <p:cNvSpPr/>
+          <p:cNvSpPr>
+            <a:spLocks noGrp="1" noRot="1" noChangeAspect="1"/>
+          </p:cNvSpPr>
           <p:nvPr>
-            <p:ph idx="2" type="sldImg"/>
+            <p:ph type="sldImg" idx="2"/>
           </p:nvPr>
         </p:nvSpPr>
         <p:spPr>
           <a:xfrm>
-            <a:off x="381300" y="685800"/>
+            <a:off x="381000" y="685800"/>
             <a:ext cx="6096000" cy="3429000"/>
           </a:xfrm>
           <a:custGeom>
-            <a:rect b="b" l="l" r="r" t="t"/>
+            <a:avLst/>
+            <a:gdLst/>
+            <a:ahLst/>
+            <a:cxnLst/>
+            <a:rect l="l" t="t" r="r" b="b"/>
             <a:pathLst>
-              <a:path extrusionOk="0" h="120000" w="120000">
+              <a:path w="120000" h="120000" extrusionOk="0">
                 <a:moveTo>
                   <a:pt x="0" y="0"/>
                 </a:moveTo>
@@ -1455,9 +1745,11 @@
       <p:sp>
         <p:nvSpPr>
           <p:cNvPr id="101" name="Google Shape;101;g33c0cf3f8a6_0_86:notes"/>
-          <p:cNvSpPr txBox="1"/>
+          <p:cNvSpPr txBox="1">
+            <a:spLocks noGrp="1"/>
+          </p:cNvSpPr>
           <p:nvPr>
-            <p:ph idx="1" type="body"/>
+            <p:ph type="body" idx="1"/>
           </p:nvPr>
         </p:nvSpPr>
         <p:spPr>
@@ -1470,12 +1762,12 @@
           </a:prstGeom>
         </p:spPr>
         <p:txBody>
-          <a:bodyPr anchorCtr="0" anchor="t" bIns="91425" lIns="91425" spcFirstLastPara="1" rIns="91425" wrap="square" tIns="91425">
+          <a:bodyPr spcFirstLastPara="1" wrap="square" lIns="91425" tIns="91425" rIns="91425" bIns="91425" anchor="t" anchorCtr="0">
             <a:noAutofit/>
           </a:bodyPr>
           <a:lstStyle/>
           <a:p>
-            <a:pPr indent="0" lvl="0" marL="0" rtl="0" algn="l">
+            <a:pPr marL="0" lvl="0" indent="0" algn="l" rtl="0">
               <a:spcBef>
                 <a:spcPts val="0"/>
               </a:spcBef>
@@ -1484,9 +1776,6 @@
               </a:spcAft>
               <a:buNone/>
             </a:pPr>
-            <a:r>
-              <a:t/>
-            </a:r>
             <a:endParaRPr/>
           </a:p>
         </p:txBody>
@@ -1500,11 +1789,138 @@
 </file>
 
 <file path=ppt/notesSlides/notesSlide5.xml><?xml version="1.0" encoding="utf-8"?>
-<p:notes xmlns:a="http://schemas.openxmlformats.org/drawingml/2006/main" xmlns:r="http://schemas.openxmlformats.org/officeDocument/2006/relationships" xmlns:mc="http://schemas.openxmlformats.org/markup-compatibility/2006" xmlns:mv="urn:schemas-microsoft-com:mac:vml" xmlns:p="http://schemas.openxmlformats.org/presentationml/2006/main" xmlns:c="http://schemas.openxmlformats.org/drawingml/2006/chart" xmlns:dgm="http://schemas.openxmlformats.org/drawingml/2006/diagram" xmlns:o="urn:schemas-microsoft-com:office:office" xmlns:v="urn:schemas-microsoft-com:vml" xmlns:pvml="urn:schemas-microsoft-com:office:powerpoint" xmlns:com="http://schemas.openxmlformats.org/drawingml/2006/compatibility" xmlns:p14="http://schemas.microsoft.com/office/powerpoint/2010/main" xmlns:p15="http://schemas.microsoft.com/office/powerpoint/2012/main" xmlns:ahyp="http://schemas.microsoft.com/office/drawing/2018/hyperlinkcolor" showMasterPhAnim="0" showMasterSp="0">
+<p:notes xmlns:a="http://schemas.openxmlformats.org/drawingml/2006/main" xmlns:r="http://schemas.openxmlformats.org/officeDocument/2006/relationships" xmlns:p="http://schemas.openxmlformats.org/presentationml/2006/main" showMasterSp="0" showMasterPhAnim="0">
   <p:cSld>
     <p:spTree>
       <p:nvGrpSpPr>
-        <p:cNvPr id="105" name="Shape 105"/>
+        <p:cNvPr id="1" name="Shape 99">
+          <a:extLst>
+            <a:ext uri="{FF2B5EF4-FFF2-40B4-BE49-F238E27FC236}">
+              <a16:creationId xmlns:a16="http://schemas.microsoft.com/office/drawing/2014/main" id="{73CD831E-1711-4983-6733-AE6F44BA5C3A}"/>
+            </a:ext>
+          </a:extLst>
+        </p:cNvPr>
+        <p:cNvGrpSpPr/>
+        <p:nvPr/>
+      </p:nvGrpSpPr>
+      <p:grpSpPr>
+        <a:xfrm>
+          <a:off x="0" y="0"/>
+          <a:ext cx="0" cy="0"/>
+          <a:chOff x="0" y="0"/>
+          <a:chExt cx="0" cy="0"/>
+        </a:xfrm>
+      </p:grpSpPr>
+      <p:sp>
+        <p:nvSpPr>
+          <p:cNvPr id="100" name="Google Shape;100;g33c0cf3f8a6_0_86:notes">
+            <a:extLst>
+              <a:ext uri="{FF2B5EF4-FFF2-40B4-BE49-F238E27FC236}">
+                <a16:creationId xmlns:a16="http://schemas.microsoft.com/office/drawing/2014/main" id="{07317511-F2BC-56DB-981D-2429B7B832B0}"/>
+              </a:ext>
+            </a:extLst>
+          </p:cNvPr>
+          <p:cNvSpPr>
+            <a:spLocks noGrp="1" noRot="1" noChangeAspect="1"/>
+          </p:cNvSpPr>
+          <p:nvPr>
+            <p:ph type="sldImg" idx="2"/>
+          </p:nvPr>
+        </p:nvSpPr>
+        <p:spPr>
+          <a:xfrm>
+            <a:off x="381000" y="685800"/>
+            <a:ext cx="6096000" cy="3429000"/>
+          </a:xfrm>
+          <a:custGeom>
+            <a:avLst/>
+            <a:gdLst/>
+            <a:ahLst/>
+            <a:cxnLst/>
+            <a:rect l="l" t="t" r="r" b="b"/>
+            <a:pathLst>
+              <a:path w="120000" h="120000" extrusionOk="0">
+                <a:moveTo>
+                  <a:pt x="0" y="0"/>
+                </a:moveTo>
+                <a:lnTo>
+                  <a:pt x="120000" y="0"/>
+                </a:lnTo>
+                <a:lnTo>
+                  <a:pt x="120000" y="120000"/>
+                </a:lnTo>
+                <a:lnTo>
+                  <a:pt x="0" y="120000"/>
+                </a:lnTo>
+                <a:close/>
+              </a:path>
+            </a:pathLst>
+          </a:custGeom>
+        </p:spPr>
+      </p:sp>
+      <p:sp>
+        <p:nvSpPr>
+          <p:cNvPr id="101" name="Google Shape;101;g33c0cf3f8a6_0_86:notes">
+            <a:extLst>
+              <a:ext uri="{FF2B5EF4-FFF2-40B4-BE49-F238E27FC236}">
+                <a16:creationId xmlns:a16="http://schemas.microsoft.com/office/drawing/2014/main" id="{B20C5531-E387-CB1A-70AA-CE24715BB7FB}"/>
+              </a:ext>
+            </a:extLst>
+          </p:cNvPr>
+          <p:cNvSpPr txBox="1">
+            <a:spLocks noGrp="1"/>
+          </p:cNvSpPr>
+          <p:nvPr>
+            <p:ph type="body" idx="1"/>
+          </p:nvPr>
+        </p:nvSpPr>
+        <p:spPr>
+          <a:xfrm>
+            <a:off x="685800" y="4343400"/>
+            <a:ext cx="5486400" cy="4114800"/>
+          </a:xfrm>
+          <a:prstGeom prst="rect">
+            <a:avLst/>
+          </a:prstGeom>
+        </p:spPr>
+        <p:txBody>
+          <a:bodyPr spcFirstLastPara="1" wrap="square" lIns="91425" tIns="91425" rIns="91425" bIns="91425" anchor="t" anchorCtr="0">
+            <a:noAutofit/>
+          </a:bodyPr>
+          <a:lstStyle/>
+          <a:p>
+            <a:pPr marL="0" lvl="0" indent="0" algn="l" rtl="0">
+              <a:spcBef>
+                <a:spcPts val="0"/>
+              </a:spcBef>
+              <a:spcAft>
+                <a:spcPts val="0"/>
+              </a:spcAft>
+              <a:buNone/>
+            </a:pPr>
+            <a:endParaRPr/>
+          </a:p>
+        </p:txBody>
+      </p:sp>
+    </p:spTree>
+    <p:extLst>
+      <p:ext uri="{BB962C8B-B14F-4D97-AF65-F5344CB8AC3E}">
+        <p14:creationId xmlns:p14="http://schemas.microsoft.com/office/powerpoint/2010/main" val="2635984066"/>
+      </p:ext>
+    </p:extLst>
+  </p:cSld>
+  <p:clrMapOvr>
+    <a:masterClrMapping/>
+  </p:clrMapOvr>
+</p:notes>
+</file>
+
+<file path=ppt/notesSlides/notesSlide6.xml><?xml version="1.0" encoding="utf-8"?>
+<p:notes xmlns:a="http://schemas.openxmlformats.org/drawingml/2006/main" xmlns:r="http://schemas.openxmlformats.org/officeDocument/2006/relationships" xmlns:p="http://schemas.openxmlformats.org/presentationml/2006/main" showMasterSp="0" showMasterPhAnim="0">
+  <p:cSld>
+    <p:spTree>
+      <p:nvGrpSpPr>
+        <p:cNvPr id="1" name="Shape 105"/>
         <p:cNvGrpSpPr/>
         <p:nvPr/>
       </p:nvGrpSpPr>
@@ -1519,20 +1935,26 @@
       <p:sp>
         <p:nvSpPr>
           <p:cNvPr id="106" name="Google Shape;106;g33c0cf3f8a6_0_91:notes"/>
-          <p:cNvSpPr/>
+          <p:cNvSpPr>
+            <a:spLocks noGrp="1" noRot="1" noChangeAspect="1"/>
+          </p:cNvSpPr>
           <p:nvPr>
-            <p:ph idx="2" type="sldImg"/>
+            <p:ph type="sldImg" idx="2"/>
           </p:nvPr>
         </p:nvSpPr>
         <p:spPr>
           <a:xfrm>
-            <a:off x="381300" y="685800"/>
+            <a:off x="381000" y="685800"/>
             <a:ext cx="6096000" cy="3429000"/>
           </a:xfrm>
           <a:custGeom>
-            <a:rect b="b" l="l" r="r" t="t"/>
+            <a:avLst/>
+            <a:gdLst/>
+            <a:ahLst/>
+            <a:cxnLst/>
+            <a:rect l="l" t="t" r="r" b="b"/>
             <a:pathLst>
-              <a:path extrusionOk="0" h="120000" w="120000">
+              <a:path w="120000" h="120000" extrusionOk="0">
                 <a:moveTo>
                   <a:pt x="0" y="0"/>
                 </a:moveTo>
@@ -1554,9 +1976,11 @@
       <p:sp>
         <p:nvSpPr>
           <p:cNvPr id="107" name="Google Shape;107;g33c0cf3f8a6_0_91:notes"/>
-          <p:cNvSpPr txBox="1"/>
+          <p:cNvSpPr txBox="1">
+            <a:spLocks noGrp="1"/>
+          </p:cNvSpPr>
           <p:nvPr>
-            <p:ph idx="1" type="body"/>
+            <p:ph type="body" idx="1"/>
           </p:nvPr>
         </p:nvSpPr>
         <p:spPr>
@@ -1569,12 +1993,12 @@
           </a:prstGeom>
         </p:spPr>
         <p:txBody>
-          <a:bodyPr anchorCtr="0" anchor="t" bIns="91425" lIns="91425" spcFirstLastPara="1" rIns="91425" wrap="square" tIns="91425">
+          <a:bodyPr spcFirstLastPara="1" wrap="square" lIns="91425" tIns="91425" rIns="91425" bIns="91425" anchor="t" anchorCtr="0">
             <a:noAutofit/>
           </a:bodyPr>
           <a:lstStyle/>
           <a:p>
-            <a:pPr indent="0" lvl="0" marL="0" rtl="0" algn="l">
+            <a:pPr marL="0" lvl="0" indent="0" algn="l" rtl="0">
               <a:spcBef>
                 <a:spcPts val="0"/>
               </a:spcBef>
@@ -1583,9 +2007,6 @@
               </a:spcAft>
               <a:buNone/>
             </a:pPr>
-            <a:r>
-              <a:t/>
-            </a:r>
             <a:endParaRPr/>
           </a:p>
         </p:txBody>
@@ -1598,12 +2019,12 @@
 </p:notes>
 </file>
 
-<file path=ppt/notesSlides/notesSlide6.xml><?xml version="1.0" encoding="utf-8"?>
-<p:notes xmlns:a="http://schemas.openxmlformats.org/drawingml/2006/main" xmlns:r="http://schemas.openxmlformats.org/officeDocument/2006/relationships" xmlns:mc="http://schemas.openxmlformats.org/markup-compatibility/2006" xmlns:mv="urn:schemas-microsoft-com:mac:vml" xmlns:p="http://schemas.openxmlformats.org/presentationml/2006/main" xmlns:c="http://schemas.openxmlformats.org/drawingml/2006/chart" xmlns:dgm="http://schemas.openxmlformats.org/drawingml/2006/diagram" xmlns:o="urn:schemas-microsoft-com:office:office" xmlns:v="urn:schemas-microsoft-com:vml" xmlns:pvml="urn:schemas-microsoft-com:office:powerpoint" xmlns:com="http://schemas.openxmlformats.org/drawingml/2006/compatibility" xmlns:p14="http://schemas.microsoft.com/office/powerpoint/2010/main" xmlns:p15="http://schemas.microsoft.com/office/powerpoint/2012/main" xmlns:ahyp="http://schemas.microsoft.com/office/drawing/2018/hyperlinkcolor" showMasterPhAnim="0" showMasterSp="0">
+<file path=ppt/notesSlides/notesSlide7.xml><?xml version="1.0" encoding="utf-8"?>
+<p:notes xmlns:a="http://schemas.openxmlformats.org/drawingml/2006/main" xmlns:r="http://schemas.openxmlformats.org/officeDocument/2006/relationships" xmlns:p="http://schemas.openxmlformats.org/presentationml/2006/main" showMasterSp="0" showMasterPhAnim="0">
   <p:cSld>
     <p:spTree>
       <p:nvGrpSpPr>
-        <p:cNvPr id="111" name="Shape 111"/>
+        <p:cNvPr id="1" name="Shape 111"/>
         <p:cNvGrpSpPr/>
         <p:nvPr/>
       </p:nvGrpSpPr>
@@ -1618,20 +2039,26 @@
       <p:sp>
         <p:nvSpPr>
           <p:cNvPr id="112" name="Google Shape;112;g33c0cf3f8a6_0_96:notes"/>
-          <p:cNvSpPr/>
+          <p:cNvSpPr>
+            <a:spLocks noGrp="1" noRot="1" noChangeAspect="1"/>
+          </p:cNvSpPr>
           <p:nvPr>
-            <p:ph idx="2" type="sldImg"/>
+            <p:ph type="sldImg" idx="2"/>
           </p:nvPr>
         </p:nvSpPr>
         <p:spPr>
           <a:xfrm>
-            <a:off x="381300" y="685800"/>
+            <a:off x="381000" y="685800"/>
             <a:ext cx="6096000" cy="3429000"/>
           </a:xfrm>
           <a:custGeom>
-            <a:rect b="b" l="l" r="r" t="t"/>
+            <a:avLst/>
+            <a:gdLst/>
+            <a:ahLst/>
+            <a:cxnLst/>
+            <a:rect l="l" t="t" r="r" b="b"/>
             <a:pathLst>
-              <a:path extrusionOk="0" h="120000" w="120000">
+              <a:path w="120000" h="120000" extrusionOk="0">
                 <a:moveTo>
                   <a:pt x="0" y="0"/>
                 </a:moveTo>
@@ -1653,9 +2080,11 @@
       <p:sp>
         <p:nvSpPr>
           <p:cNvPr id="113" name="Google Shape;113;g33c0cf3f8a6_0_96:notes"/>
-          <p:cNvSpPr txBox="1"/>
+          <p:cNvSpPr txBox="1">
+            <a:spLocks noGrp="1"/>
+          </p:cNvSpPr>
           <p:nvPr>
-            <p:ph idx="1" type="body"/>
+            <p:ph type="body" idx="1"/>
           </p:nvPr>
         </p:nvSpPr>
         <p:spPr>
@@ -1668,12 +2097,12 @@
           </a:prstGeom>
         </p:spPr>
         <p:txBody>
-          <a:bodyPr anchorCtr="0" anchor="t" bIns="91425" lIns="91425" spcFirstLastPara="1" rIns="91425" wrap="square" tIns="91425">
+          <a:bodyPr spcFirstLastPara="1" wrap="square" lIns="91425" tIns="91425" rIns="91425" bIns="91425" anchor="t" anchorCtr="0">
             <a:noAutofit/>
           </a:bodyPr>
           <a:lstStyle/>
           <a:p>
-            <a:pPr indent="0" lvl="0" marL="0" rtl="0" algn="l">
+            <a:pPr marL="0" lvl="0" indent="0" algn="l" rtl="0">
               <a:spcBef>
                 <a:spcPts val="0"/>
               </a:spcBef>
@@ -1682,9 +2111,6 @@
               </a:spcAft>
               <a:buNone/>
             </a:pPr>
-            <a:r>
-              <a:t/>
-            </a:r>
             <a:endParaRPr/>
           </a:p>
         </p:txBody>
@@ -1697,12 +2123,12 @@
 </p:notes>
 </file>
 
-<file path=ppt/notesSlides/notesSlide7.xml><?xml version="1.0" encoding="utf-8"?>
-<p:notes xmlns:a="http://schemas.openxmlformats.org/drawingml/2006/main" xmlns:r="http://schemas.openxmlformats.org/officeDocument/2006/relationships" xmlns:mc="http://schemas.openxmlformats.org/markup-compatibility/2006" xmlns:mv="urn:schemas-microsoft-com:mac:vml" xmlns:p="http://schemas.openxmlformats.org/presentationml/2006/main" xmlns:c="http://schemas.openxmlformats.org/drawingml/2006/chart" xmlns:dgm="http://schemas.openxmlformats.org/drawingml/2006/diagram" xmlns:o="urn:schemas-microsoft-com:office:office" xmlns:v="urn:schemas-microsoft-com:vml" xmlns:pvml="urn:schemas-microsoft-com:office:powerpoint" xmlns:com="http://schemas.openxmlformats.org/drawingml/2006/compatibility" xmlns:p14="http://schemas.microsoft.com/office/powerpoint/2010/main" xmlns:p15="http://schemas.microsoft.com/office/powerpoint/2012/main" xmlns:ahyp="http://schemas.microsoft.com/office/drawing/2018/hyperlinkcolor" showMasterPhAnim="0" showMasterSp="0">
+<file path=ppt/notesSlides/notesSlide8.xml><?xml version="1.0" encoding="utf-8"?>
+<p:notes xmlns:a="http://schemas.openxmlformats.org/drawingml/2006/main" xmlns:r="http://schemas.openxmlformats.org/officeDocument/2006/relationships" xmlns:p="http://schemas.openxmlformats.org/presentationml/2006/main" showMasterSp="0" showMasterPhAnim="0">
   <p:cSld>
     <p:spTree>
       <p:nvGrpSpPr>
-        <p:cNvPr id="117" name="Shape 117"/>
+        <p:cNvPr id="1" name="Shape 117"/>
         <p:cNvGrpSpPr/>
         <p:nvPr/>
       </p:nvGrpSpPr>
@@ -1717,9 +2143,11 @@
       <p:sp>
         <p:nvSpPr>
           <p:cNvPr id="118" name="Google Shape;118;g33c0cf3f8a6_0_101:notes"/>
-          <p:cNvSpPr/>
+          <p:cNvSpPr>
+            <a:spLocks noGrp="1" noRot="1" noChangeAspect="1"/>
+          </p:cNvSpPr>
           <p:nvPr>
-            <p:ph idx="2" type="sldImg"/>
+            <p:ph type="sldImg" idx="2"/>
           </p:nvPr>
         </p:nvSpPr>
         <p:spPr>
@@ -1728,9 +2156,13 @@
             <a:ext cx="6096000" cy="3429000"/>
           </a:xfrm>
           <a:custGeom>
-            <a:rect b="b" l="l" r="r" t="t"/>
+            <a:avLst/>
+            <a:gdLst/>
+            <a:ahLst/>
+            <a:cxnLst/>
+            <a:rect l="l" t="t" r="r" b="b"/>
             <a:pathLst>
-              <a:path extrusionOk="0" h="120000" w="120000">
+              <a:path w="120000" h="120000" extrusionOk="0">
                 <a:moveTo>
                   <a:pt x="0" y="0"/>
                 </a:moveTo>
@@ -1752,9 +2184,11 @@
       <p:sp>
         <p:nvSpPr>
           <p:cNvPr id="119" name="Google Shape;119;g33c0cf3f8a6_0_101:notes"/>
-          <p:cNvSpPr txBox="1"/>
+          <p:cNvSpPr txBox="1">
+            <a:spLocks noGrp="1"/>
+          </p:cNvSpPr>
           <p:nvPr>
-            <p:ph idx="1" type="body"/>
+            <p:ph type="body" idx="1"/>
           </p:nvPr>
         </p:nvSpPr>
         <p:spPr>
@@ -1767,12 +2201,12 @@
           </a:prstGeom>
         </p:spPr>
         <p:txBody>
-          <a:bodyPr anchorCtr="0" anchor="t" bIns="91425" lIns="91425" spcFirstLastPara="1" rIns="91425" wrap="square" tIns="91425">
+          <a:bodyPr spcFirstLastPara="1" wrap="square" lIns="91425" tIns="91425" rIns="91425" bIns="91425" anchor="t" anchorCtr="0">
             <a:noAutofit/>
           </a:bodyPr>
           <a:lstStyle/>
           <a:p>
-            <a:pPr indent="0" lvl="0" marL="0" rtl="0" algn="l">
+            <a:pPr marL="0" lvl="0" indent="0" algn="l" rtl="0">
               <a:spcBef>
                 <a:spcPts val="0"/>
               </a:spcBef>
@@ -1781,9 +2215,6 @@
               </a:spcAft>
               <a:buNone/>
             </a:pPr>
-            <a:r>
-              <a:t/>
-            </a:r>
             <a:endParaRPr/>
           </a:p>
         </p:txBody>
@@ -1796,12 +2227,12 @@
 </p:notes>
 </file>
 
-<file path=ppt/notesSlides/notesSlide8.xml><?xml version="1.0" encoding="utf-8"?>
-<p:notes xmlns:a="http://schemas.openxmlformats.org/drawingml/2006/main" xmlns:r="http://schemas.openxmlformats.org/officeDocument/2006/relationships" xmlns:mc="http://schemas.openxmlformats.org/markup-compatibility/2006" xmlns:mv="urn:schemas-microsoft-com:mac:vml" xmlns:p="http://schemas.openxmlformats.org/presentationml/2006/main" xmlns:c="http://schemas.openxmlformats.org/drawingml/2006/chart" xmlns:dgm="http://schemas.openxmlformats.org/drawingml/2006/diagram" xmlns:o="urn:schemas-microsoft-com:office:office" xmlns:v="urn:schemas-microsoft-com:vml" xmlns:pvml="urn:schemas-microsoft-com:office:powerpoint" xmlns:com="http://schemas.openxmlformats.org/drawingml/2006/compatibility" xmlns:p14="http://schemas.microsoft.com/office/powerpoint/2010/main" xmlns:p15="http://schemas.microsoft.com/office/powerpoint/2012/main" xmlns:ahyp="http://schemas.microsoft.com/office/drawing/2018/hyperlinkcolor" showMasterPhAnim="0" showMasterSp="0">
+<file path=ppt/notesSlides/notesSlide9.xml><?xml version="1.0" encoding="utf-8"?>
+<p:notes xmlns:a="http://schemas.openxmlformats.org/drawingml/2006/main" xmlns:r="http://schemas.openxmlformats.org/officeDocument/2006/relationships" xmlns:p="http://schemas.openxmlformats.org/presentationml/2006/main" showMasterSp="0" showMasterPhAnim="0">
   <p:cSld>
     <p:spTree>
       <p:nvGrpSpPr>
-        <p:cNvPr id="123" name="Shape 123"/>
+        <p:cNvPr id="1" name="Shape 123"/>
         <p:cNvGrpSpPr/>
         <p:nvPr/>
       </p:nvGrpSpPr>
@@ -1816,20 +2247,26 @@
       <p:sp>
         <p:nvSpPr>
           <p:cNvPr id="124" name="Google Shape;124;g33c0cf3f8a6_0_106:notes"/>
-          <p:cNvSpPr/>
+          <p:cNvSpPr>
+            <a:spLocks noGrp="1" noRot="1" noChangeAspect="1"/>
+          </p:cNvSpPr>
           <p:nvPr>
-            <p:ph idx="2" type="sldImg"/>
+            <p:ph type="sldImg" idx="2"/>
           </p:nvPr>
         </p:nvSpPr>
         <p:spPr>
           <a:xfrm>
-            <a:off x="381300" y="685800"/>
+            <a:off x="381000" y="685800"/>
             <a:ext cx="6096000" cy="3429000"/>
           </a:xfrm>
           <a:custGeom>
-            <a:rect b="b" l="l" r="r" t="t"/>
+            <a:avLst/>
+            <a:gdLst/>
+            <a:ahLst/>
+            <a:cxnLst/>
+            <a:rect l="l" t="t" r="r" b="b"/>
             <a:pathLst>
-              <a:path extrusionOk="0" h="120000" w="120000">
+              <a:path w="120000" h="120000" extrusionOk="0">
                 <a:moveTo>
                   <a:pt x="0" y="0"/>
                 </a:moveTo>
@@ -1851,9 +2288,11 @@
       <p:sp>
         <p:nvSpPr>
           <p:cNvPr id="125" name="Google Shape;125;g33c0cf3f8a6_0_106:notes"/>
-          <p:cNvSpPr txBox="1"/>
+          <p:cNvSpPr txBox="1">
+            <a:spLocks noGrp="1"/>
+          </p:cNvSpPr>
           <p:nvPr>
-            <p:ph idx="1" type="body"/>
+            <p:ph type="body" idx="1"/>
           </p:nvPr>
         </p:nvSpPr>
         <p:spPr>
@@ -1866,12 +2305,12 @@
           </a:prstGeom>
         </p:spPr>
         <p:txBody>
-          <a:bodyPr anchorCtr="0" anchor="t" bIns="91425" lIns="91425" spcFirstLastPara="1" rIns="91425" wrap="square" tIns="91425">
+          <a:bodyPr spcFirstLastPara="1" wrap="square" lIns="91425" tIns="91425" rIns="91425" bIns="91425" anchor="t" anchorCtr="0">
             <a:noAutofit/>
           </a:bodyPr>
           <a:lstStyle/>
           <a:p>
-            <a:pPr indent="0" lvl="0" marL="0" rtl="0" algn="l">
+            <a:pPr marL="0" lvl="0" indent="0" algn="l" rtl="0">
               <a:spcBef>
                 <a:spcPts val="0"/>
               </a:spcBef>
@@ -1880,108 +2319,6 @@
               </a:spcAft>
               <a:buNone/>
             </a:pPr>
-            <a:r>
-              <a:t/>
-            </a:r>
-            <a:endParaRPr/>
-          </a:p>
-        </p:txBody>
-      </p:sp>
-    </p:spTree>
-  </p:cSld>
-  <p:clrMapOvr>
-    <a:masterClrMapping/>
-  </p:clrMapOvr>
-</p:notes>
-</file>
-
-<file path=ppt/notesSlides/notesSlide9.xml><?xml version="1.0" encoding="utf-8"?>
-<p:notes xmlns:a="http://schemas.openxmlformats.org/drawingml/2006/main" xmlns:r="http://schemas.openxmlformats.org/officeDocument/2006/relationships" xmlns:mc="http://schemas.openxmlformats.org/markup-compatibility/2006" xmlns:mv="urn:schemas-microsoft-com:mac:vml" xmlns:p="http://schemas.openxmlformats.org/presentationml/2006/main" xmlns:c="http://schemas.openxmlformats.org/drawingml/2006/chart" xmlns:dgm="http://schemas.openxmlformats.org/drawingml/2006/diagram" xmlns:o="urn:schemas-microsoft-com:office:office" xmlns:v="urn:schemas-microsoft-com:vml" xmlns:pvml="urn:schemas-microsoft-com:office:powerpoint" xmlns:com="http://schemas.openxmlformats.org/drawingml/2006/compatibility" xmlns:p14="http://schemas.microsoft.com/office/powerpoint/2010/main" xmlns:p15="http://schemas.microsoft.com/office/powerpoint/2012/main" xmlns:ahyp="http://schemas.microsoft.com/office/drawing/2018/hyperlinkcolor" showMasterPhAnim="0" showMasterSp="0">
-  <p:cSld>
-    <p:spTree>
-      <p:nvGrpSpPr>
-        <p:cNvPr id="129" name="Shape 129"/>
-        <p:cNvGrpSpPr/>
-        <p:nvPr/>
-      </p:nvGrpSpPr>
-      <p:grpSpPr>
-        <a:xfrm>
-          <a:off x="0" y="0"/>
-          <a:ext cx="0" cy="0"/>
-          <a:chOff x="0" y="0"/>
-          <a:chExt cx="0" cy="0"/>
-        </a:xfrm>
-      </p:grpSpPr>
-      <p:sp>
-        <p:nvSpPr>
-          <p:cNvPr id="130" name="Google Shape;130;g33c0cf3f8a6_0_111:notes"/>
-          <p:cNvSpPr/>
-          <p:nvPr>
-            <p:ph idx="2" type="sldImg"/>
-          </p:nvPr>
-        </p:nvSpPr>
-        <p:spPr>
-          <a:xfrm>
-            <a:off x="381300" y="685800"/>
-            <a:ext cx="6096000" cy="3429000"/>
-          </a:xfrm>
-          <a:custGeom>
-            <a:rect b="b" l="l" r="r" t="t"/>
-            <a:pathLst>
-              <a:path extrusionOk="0" h="120000" w="120000">
-                <a:moveTo>
-                  <a:pt x="0" y="0"/>
-                </a:moveTo>
-                <a:lnTo>
-                  <a:pt x="120000" y="0"/>
-                </a:lnTo>
-                <a:lnTo>
-                  <a:pt x="120000" y="120000"/>
-                </a:lnTo>
-                <a:lnTo>
-                  <a:pt x="0" y="120000"/>
-                </a:lnTo>
-                <a:close/>
-              </a:path>
-            </a:pathLst>
-          </a:custGeom>
-        </p:spPr>
-      </p:sp>
-      <p:sp>
-        <p:nvSpPr>
-          <p:cNvPr id="131" name="Google Shape;131;g33c0cf3f8a6_0_111:notes"/>
-          <p:cNvSpPr txBox="1"/>
-          <p:nvPr>
-            <p:ph idx="1" type="body"/>
-          </p:nvPr>
-        </p:nvSpPr>
-        <p:spPr>
-          <a:xfrm>
-            <a:off x="685800" y="4343400"/>
-            <a:ext cx="5486400" cy="4114800"/>
-          </a:xfrm>
-          <a:prstGeom prst="rect">
-            <a:avLst/>
-          </a:prstGeom>
-        </p:spPr>
-        <p:txBody>
-          <a:bodyPr anchorCtr="0" anchor="t" bIns="91425" lIns="91425" spcFirstLastPara="1" rIns="91425" wrap="square" tIns="91425">
-            <a:noAutofit/>
-          </a:bodyPr>
-          <a:lstStyle/>
-          <a:p>
-            <a:pPr indent="0" lvl="0" marL="0" rtl="0" algn="l">
-              <a:spcBef>
-                <a:spcPts val="0"/>
-              </a:spcBef>
-              <a:spcAft>
-                <a:spcPts val="0"/>
-              </a:spcAft>
-              <a:buNone/>
-            </a:pPr>
-            <a:r>
-              <a:t/>
-            </a:r>
             <a:endParaRPr/>
           </a:p>
         </p:txBody>
@@ -1995,18 +2332,19 @@
 </file>
 
 <file path=ppt/slideLayouts/slideLayout1.xml><?xml version="1.0" encoding="utf-8"?>
-<p:sldLayout xmlns:a="http://schemas.openxmlformats.org/drawingml/2006/main" xmlns:r="http://schemas.openxmlformats.org/officeDocument/2006/relationships" xmlns:mc="http://schemas.openxmlformats.org/markup-compatibility/2006" xmlns:mv="urn:schemas-microsoft-com:mac:vml" xmlns:p="http://schemas.openxmlformats.org/presentationml/2006/main" xmlns:c="http://schemas.openxmlformats.org/drawingml/2006/chart" xmlns:dgm="http://schemas.openxmlformats.org/drawingml/2006/diagram" xmlns:o="urn:schemas-microsoft-com:office:office" xmlns:v="urn:schemas-microsoft-com:vml" xmlns:pvml="urn:schemas-microsoft-com:office:powerpoint" xmlns:com="http://schemas.openxmlformats.org/drawingml/2006/compatibility" xmlns:p14="http://schemas.microsoft.com/office/powerpoint/2010/main" xmlns:p15="http://schemas.microsoft.com/office/powerpoint/2012/main" xmlns:ahyp="http://schemas.microsoft.com/office/drawing/2018/hyperlinkcolor" matchingName="Title slide" type="title">
+<p:sldLayout xmlns:a="http://schemas.openxmlformats.org/drawingml/2006/main" xmlns:r="http://schemas.openxmlformats.org/officeDocument/2006/relationships" xmlns:p="http://schemas.openxmlformats.org/presentationml/2006/main" matchingName="Title slide" type="title">
   <p:cSld name="TITLE">
     <p:bg>
       <p:bgPr>
         <a:solidFill>
           <a:schemeClr val="dk1"/>
         </a:solidFill>
+        <a:effectLst/>
       </p:bgPr>
     </p:bg>
     <p:spTree>
       <p:nvGrpSpPr>
-        <p:cNvPr id="9" name="Shape 9"/>
+        <p:cNvPr id="1" name="Shape 9"/>
         <p:cNvGrpSpPr/>
         <p:nvPr/>
       </p:nvGrpSpPr>
@@ -2054,12 +2392,12 @@
             </a:ln>
           </p:spPr>
           <p:txBody>
-            <a:bodyPr anchorCtr="0" anchor="ctr" bIns="91425" lIns="91425" spcFirstLastPara="1" rIns="91425" wrap="square" tIns="91425">
+            <a:bodyPr spcFirstLastPara="1" wrap="square" lIns="91425" tIns="91425" rIns="91425" bIns="91425" anchor="ctr" anchorCtr="0">
               <a:noAutofit/>
             </a:bodyPr>
             <a:lstStyle/>
             <a:p>
-              <a:pPr indent="0" lvl="0" marL="0" rtl="0" algn="l">
+              <a:pPr marL="0" lvl="0" indent="0" algn="l" rtl="0">
                 <a:spcBef>
                   <a:spcPts val="0"/>
                 </a:spcBef>
@@ -2068,9 +2406,6 @@
                 </a:spcAft>
                 <a:buNone/>
               </a:pPr>
-              <a:r>
-                <a:t/>
-              </a:r>
               <a:endParaRPr/>
             </a:p>
           </p:txBody>
@@ -2097,12 +2432,12 @@
             </a:ln>
           </p:spPr>
           <p:txBody>
-            <a:bodyPr anchorCtr="0" anchor="ctr" bIns="91425" lIns="91425" spcFirstLastPara="1" rIns="91425" wrap="square" tIns="91425">
+            <a:bodyPr spcFirstLastPara="1" wrap="square" lIns="91425" tIns="91425" rIns="91425" bIns="91425" anchor="ctr" anchorCtr="0">
               <a:noAutofit/>
             </a:bodyPr>
             <a:lstStyle/>
             <a:p>
-              <a:pPr indent="0" lvl="0" marL="0" rtl="0" algn="l">
+              <a:pPr marL="0" lvl="0" indent="0" algn="l" rtl="0">
                 <a:spcBef>
                   <a:spcPts val="0"/>
                 </a:spcBef>
@@ -2111,9 +2446,6 @@
                 </a:spcAft>
                 <a:buNone/>
               </a:pPr>
-              <a:r>
-                <a:t/>
-              </a:r>
               <a:endParaRPr/>
             </a:p>
           </p:txBody>
@@ -2125,7 +2457,7 @@
             <p:nvPr/>
           </p:nvSpPr>
           <p:spPr>
-            <a:xfrm flipH="1" rot="10800000">
+            <a:xfrm rot="10800000" flipH="1">
               <a:off x="7113588" y="107"/>
               <a:ext cx="1015200" cy="1015200"/>
             </a:xfrm>
@@ -2140,12 +2472,12 @@
             </a:ln>
           </p:spPr>
           <p:txBody>
-            <a:bodyPr anchorCtr="0" anchor="ctr" bIns="91425" lIns="91425" spcFirstLastPara="1" rIns="91425" wrap="square" tIns="91425">
+            <a:bodyPr spcFirstLastPara="1" wrap="square" lIns="91425" tIns="91425" rIns="91425" bIns="91425" anchor="ctr" anchorCtr="0">
               <a:noAutofit/>
             </a:bodyPr>
             <a:lstStyle/>
             <a:p>
-              <a:pPr indent="0" lvl="0" marL="0" rtl="0" algn="l">
+              <a:pPr marL="0" lvl="0" indent="0" algn="l" rtl="0">
                 <a:spcBef>
                   <a:spcPts val="0"/>
                 </a:spcBef>
@@ -2154,9 +2486,6 @@
                 </a:spcAft>
                 <a:buNone/>
               </a:pPr>
-              <a:r>
-                <a:t/>
-              </a:r>
               <a:endParaRPr/>
             </a:p>
           </p:txBody>
@@ -2183,12 +2512,12 @@
             </a:ln>
           </p:spPr>
           <p:txBody>
-            <a:bodyPr anchorCtr="0" anchor="ctr" bIns="91425" lIns="91425" spcFirstLastPara="1" rIns="91425" wrap="square" tIns="91425">
+            <a:bodyPr spcFirstLastPara="1" wrap="square" lIns="91425" tIns="91425" rIns="91425" bIns="91425" anchor="ctr" anchorCtr="0">
               <a:noAutofit/>
             </a:bodyPr>
             <a:lstStyle/>
             <a:p>
-              <a:pPr indent="0" lvl="0" marL="0" rtl="0" algn="l">
+              <a:pPr marL="0" lvl="0" indent="0" algn="l" rtl="0">
                 <a:spcBef>
                   <a:spcPts val="0"/>
                 </a:spcBef>
@@ -2197,9 +2526,6 @@
                 </a:spcAft>
                 <a:buNone/>
               </a:pPr>
-              <a:r>
-                <a:t/>
-              </a:r>
               <a:endParaRPr/>
             </a:p>
           </p:txBody>
@@ -2226,12 +2552,12 @@
             </a:ln>
           </p:spPr>
           <p:txBody>
-            <a:bodyPr anchorCtr="0" anchor="ctr" bIns="91425" lIns="91425" spcFirstLastPara="1" rIns="91425" wrap="square" tIns="91425">
+            <a:bodyPr spcFirstLastPara="1" wrap="square" lIns="91425" tIns="91425" rIns="91425" bIns="91425" anchor="ctr" anchorCtr="0">
               <a:noAutofit/>
             </a:bodyPr>
             <a:lstStyle/>
             <a:p>
-              <a:pPr indent="0" lvl="0" marL="0" rtl="0" algn="l">
+              <a:pPr marL="0" lvl="0" indent="0" algn="l" rtl="0">
                 <a:spcBef>
                   <a:spcPts val="0"/>
                 </a:spcBef>
@@ -2240,9 +2566,6 @@
                 </a:spcAft>
                 <a:buNone/>
               </a:pPr>
-              <a:r>
-                <a:t/>
-              </a:r>
               <a:endParaRPr/>
             </a:p>
           </p:txBody>
@@ -2251,7 +2574,9 @@
       <p:sp>
         <p:nvSpPr>
           <p:cNvPr id="16" name="Google Shape;16;p2"/>
-          <p:cNvSpPr txBox="1"/>
+          <p:cNvSpPr txBox="1">
+            <a:spLocks noGrp="1"/>
+          </p:cNvSpPr>
           <p:nvPr>
             <p:ph type="ctrTitle"/>
           </p:nvPr>
@@ -2266,7 +2591,7 @@
           </a:prstGeom>
         </p:spPr>
         <p:txBody>
-          <a:bodyPr anchorCtr="0" anchor="b" bIns="91425" lIns="91425" spcFirstLastPara="1" rIns="91425" wrap="square" tIns="91425">
+          <a:bodyPr spcFirstLastPara="1" wrap="square" lIns="91425" tIns="91425" rIns="91425" bIns="91425" anchor="b" anchorCtr="0">
             <a:normAutofit/>
           </a:bodyPr>
           <a:lstStyle>
@@ -2433,15 +2758,19 @@
               </a:defRPr>
             </a:lvl9pPr>
           </a:lstStyle>
-          <a:p/>
+          <a:p>
+            <a:endParaRPr/>
+          </a:p>
         </p:txBody>
       </p:sp>
       <p:sp>
         <p:nvSpPr>
           <p:cNvPr id="17" name="Google Shape;17;p2"/>
-          <p:cNvSpPr txBox="1"/>
+          <p:cNvSpPr txBox="1">
+            <a:spLocks noGrp="1"/>
+          </p:cNvSpPr>
           <p:nvPr>
-            <p:ph idx="1" type="subTitle"/>
+            <p:ph type="subTitle" idx="1"/>
           </p:nvPr>
         </p:nvSpPr>
         <p:spPr>
@@ -2454,7 +2783,7 @@
           </a:prstGeom>
         </p:spPr>
         <p:txBody>
-          <a:bodyPr anchorCtr="0" anchor="t" bIns="91425" lIns="91425" spcFirstLastPara="1" rIns="91425" wrap="square" tIns="91425">
+          <a:bodyPr spcFirstLastPara="1" wrap="square" lIns="91425" tIns="91425" rIns="91425" bIns="91425" anchor="t" anchorCtr="0">
             <a:normAutofit/>
           </a:bodyPr>
           <a:lstStyle>
@@ -2648,15 +2977,19 @@
               </a:defRPr>
             </a:lvl9pPr>
           </a:lstStyle>
-          <a:p/>
+          <a:p>
+            <a:endParaRPr/>
+          </a:p>
         </p:txBody>
       </p:sp>
       <p:sp>
         <p:nvSpPr>
           <p:cNvPr id="18" name="Google Shape;18;p2"/>
-          <p:cNvSpPr txBox="1"/>
+          <p:cNvSpPr txBox="1">
+            <a:spLocks noGrp="1"/>
+          </p:cNvSpPr>
           <p:nvPr>
-            <p:ph idx="12" type="sldNum"/>
+            <p:ph type="sldNum" idx="12"/>
           </p:nvPr>
         </p:nvSpPr>
         <p:spPr>
@@ -2669,7 +3002,7 @@
           </a:prstGeom>
         </p:spPr>
         <p:txBody>
-          <a:bodyPr anchorCtr="0" anchor="ctr" bIns="91425" lIns="91425" spcFirstLastPara="1" rIns="91425" wrap="square" tIns="91425">
+          <a:bodyPr spcFirstLastPara="1" wrap="square" lIns="91425" tIns="91425" rIns="91425" bIns="91425" anchor="ctr" anchorCtr="0">
             <a:normAutofit/>
           </a:bodyPr>
           <a:lstStyle>
@@ -2711,7 +3044,7 @@
             </a:lvl9pPr>
           </a:lstStyle>
           <a:p>
-            <a:pPr indent="0" lvl="0" marL="0" rtl="0" algn="r">
+            <a:pPr marL="0" lvl="0" indent="0" algn="r" rtl="0">
               <a:spcBef>
                 <a:spcPts val="0"/>
               </a:spcBef>
@@ -2737,18 +3070,19 @@
 </file>
 
 <file path=ppt/slideLayouts/slideLayout10.xml><?xml version="1.0" encoding="utf-8"?>
-<p:sldLayout xmlns:a="http://schemas.openxmlformats.org/drawingml/2006/main" xmlns:r="http://schemas.openxmlformats.org/officeDocument/2006/relationships" xmlns:mc="http://schemas.openxmlformats.org/markup-compatibility/2006" xmlns:mv="urn:schemas-microsoft-com:mac:vml" xmlns:p="http://schemas.openxmlformats.org/presentationml/2006/main" xmlns:c="http://schemas.openxmlformats.org/drawingml/2006/chart" xmlns:dgm="http://schemas.openxmlformats.org/drawingml/2006/diagram" xmlns:o="urn:schemas-microsoft-com:office:office" xmlns:v="urn:schemas-microsoft-com:vml" xmlns:pvml="urn:schemas-microsoft-com:office:powerpoint" xmlns:com="http://schemas.openxmlformats.org/drawingml/2006/compatibility" xmlns:p14="http://schemas.microsoft.com/office/powerpoint/2010/main" xmlns:p15="http://schemas.microsoft.com/office/powerpoint/2012/main" xmlns:ahyp="http://schemas.microsoft.com/office/drawing/2018/hyperlinkcolor" matchingName="Big number">
+<p:sldLayout xmlns:a="http://schemas.openxmlformats.org/drawingml/2006/main" xmlns:r="http://schemas.openxmlformats.org/officeDocument/2006/relationships" xmlns:p="http://schemas.openxmlformats.org/presentationml/2006/main" matchingName="Big number">
   <p:cSld name="BIG_NUMBER">
     <p:bg>
       <p:bgPr>
         <a:solidFill>
           <a:schemeClr val="dk1"/>
         </a:solidFill>
+        <a:effectLst/>
       </p:bgPr>
     </p:bg>
     <p:spTree>
       <p:nvGrpSpPr>
-        <p:cNvPr id="69" name="Shape 69"/>
+        <p:cNvPr id="1" name="Shape 69"/>
         <p:cNvGrpSpPr/>
         <p:nvPr/>
       </p:nvGrpSpPr>
@@ -2796,12 +3130,12 @@
             </a:ln>
           </p:spPr>
           <p:txBody>
-            <a:bodyPr anchorCtr="0" anchor="ctr" bIns="91425" lIns="91425" spcFirstLastPara="1" rIns="91425" wrap="square" tIns="91425">
+            <a:bodyPr spcFirstLastPara="1" wrap="square" lIns="91425" tIns="91425" rIns="91425" bIns="91425" anchor="ctr" anchorCtr="0">
               <a:noAutofit/>
             </a:bodyPr>
             <a:lstStyle/>
             <a:p>
-              <a:pPr indent="0" lvl="0" marL="0" rtl="0" algn="l">
+              <a:pPr marL="0" lvl="0" indent="0" algn="l" rtl="0">
                 <a:spcBef>
                   <a:spcPts val="0"/>
                 </a:spcBef>
@@ -2810,9 +3144,6 @@
                 </a:spcAft>
                 <a:buNone/>
               </a:pPr>
-              <a:r>
-                <a:t/>
-              </a:r>
               <a:endParaRPr/>
             </a:p>
           </p:txBody>
@@ -2839,12 +3170,12 @@
             </a:ln>
           </p:spPr>
           <p:txBody>
-            <a:bodyPr anchorCtr="0" anchor="ctr" bIns="91425" lIns="91425" spcFirstLastPara="1" rIns="91425" wrap="square" tIns="91425">
+            <a:bodyPr spcFirstLastPara="1" wrap="square" lIns="91425" tIns="91425" rIns="91425" bIns="91425" anchor="ctr" anchorCtr="0">
               <a:noAutofit/>
             </a:bodyPr>
             <a:lstStyle/>
             <a:p>
-              <a:pPr indent="0" lvl="0" marL="0" rtl="0" algn="l">
+              <a:pPr marL="0" lvl="0" indent="0" algn="l" rtl="0">
                 <a:spcBef>
                   <a:spcPts val="0"/>
                 </a:spcBef>
@@ -2853,9 +3184,6 @@
                 </a:spcAft>
                 <a:buNone/>
               </a:pPr>
-              <a:r>
-                <a:t/>
-              </a:r>
               <a:endParaRPr/>
             </a:p>
           </p:txBody>
@@ -2867,7 +3195,7 @@
             <p:nvPr/>
           </p:nvSpPr>
           <p:spPr>
-            <a:xfrm flipH="1" rot="10800000">
+            <a:xfrm rot="10800000" flipH="1">
               <a:off x="7113588" y="107"/>
               <a:ext cx="1015200" cy="1015200"/>
             </a:xfrm>
@@ -2882,12 +3210,12 @@
             </a:ln>
           </p:spPr>
           <p:txBody>
-            <a:bodyPr anchorCtr="0" anchor="ctr" bIns="91425" lIns="91425" spcFirstLastPara="1" rIns="91425" wrap="square" tIns="91425">
+            <a:bodyPr spcFirstLastPara="1" wrap="square" lIns="91425" tIns="91425" rIns="91425" bIns="91425" anchor="ctr" anchorCtr="0">
               <a:noAutofit/>
             </a:bodyPr>
             <a:lstStyle/>
             <a:p>
-              <a:pPr indent="0" lvl="0" marL="0" rtl="0" algn="l">
+              <a:pPr marL="0" lvl="0" indent="0" algn="l" rtl="0">
                 <a:spcBef>
                   <a:spcPts val="0"/>
                 </a:spcBef>
@@ -2896,9 +3224,6 @@
                 </a:spcAft>
                 <a:buNone/>
               </a:pPr>
-              <a:r>
-                <a:t/>
-              </a:r>
               <a:endParaRPr/>
             </a:p>
           </p:txBody>
@@ -2925,12 +3250,12 @@
             </a:ln>
           </p:spPr>
           <p:txBody>
-            <a:bodyPr anchorCtr="0" anchor="ctr" bIns="91425" lIns="91425" spcFirstLastPara="1" rIns="91425" wrap="square" tIns="91425">
+            <a:bodyPr spcFirstLastPara="1" wrap="square" lIns="91425" tIns="91425" rIns="91425" bIns="91425" anchor="ctr" anchorCtr="0">
               <a:noAutofit/>
             </a:bodyPr>
             <a:lstStyle/>
             <a:p>
-              <a:pPr indent="0" lvl="0" marL="0" rtl="0" algn="l">
+              <a:pPr marL="0" lvl="0" indent="0" algn="l" rtl="0">
                 <a:spcBef>
                   <a:spcPts val="0"/>
                 </a:spcBef>
@@ -2939,9 +3264,6 @@
                 </a:spcAft>
                 <a:buNone/>
               </a:pPr>
-              <a:r>
-                <a:t/>
-              </a:r>
               <a:endParaRPr/>
             </a:p>
           </p:txBody>
@@ -2968,12 +3290,12 @@
             </a:ln>
           </p:spPr>
           <p:txBody>
-            <a:bodyPr anchorCtr="0" anchor="ctr" bIns="91425" lIns="91425" spcFirstLastPara="1" rIns="91425" wrap="square" tIns="91425">
+            <a:bodyPr spcFirstLastPara="1" wrap="square" lIns="91425" tIns="91425" rIns="91425" bIns="91425" anchor="ctr" anchorCtr="0">
               <a:noAutofit/>
             </a:bodyPr>
             <a:lstStyle/>
             <a:p>
-              <a:pPr indent="0" lvl="0" marL="0" rtl="0" algn="l">
+              <a:pPr marL="0" lvl="0" indent="0" algn="l" rtl="0">
                 <a:spcBef>
                   <a:spcPts val="0"/>
                 </a:spcBef>
@@ -2982,9 +3304,6 @@
                 </a:spcAft>
                 <a:buNone/>
               </a:pPr>
-              <a:r>
-                <a:t/>
-              </a:r>
               <a:endParaRPr/>
             </a:p>
           </p:txBody>
@@ -2993,9 +3312,11 @@
       <p:sp>
         <p:nvSpPr>
           <p:cNvPr id="76" name="Google Shape;76;p11"/>
-          <p:cNvSpPr txBox="1"/>
+          <p:cNvSpPr txBox="1">
+            <a:spLocks noGrp="1"/>
+          </p:cNvSpPr>
           <p:nvPr>
-            <p:ph hasCustomPrompt="1" type="title"/>
+            <p:ph type="title" hasCustomPrompt="1"/>
           </p:nvPr>
         </p:nvSpPr>
         <p:spPr>
@@ -3008,7 +3329,7 @@
           </a:prstGeom>
         </p:spPr>
         <p:txBody>
-          <a:bodyPr anchorCtr="0" anchor="b" bIns="91425" lIns="91425" spcFirstLastPara="1" rIns="91425" wrap="square" tIns="91425">
+          <a:bodyPr spcFirstLastPara="1" wrap="square" lIns="91425" tIns="91425" rIns="91425" bIns="91425" anchor="b" anchorCtr="0">
             <a:normAutofit/>
           </a:bodyPr>
           <a:lstStyle>
@@ -3185,9 +3506,11 @@
       <p:sp>
         <p:nvSpPr>
           <p:cNvPr id="77" name="Google Shape;77;p11"/>
-          <p:cNvSpPr txBox="1"/>
+          <p:cNvSpPr txBox="1">
+            <a:spLocks noGrp="1"/>
+          </p:cNvSpPr>
           <p:nvPr>
-            <p:ph idx="1" type="body"/>
+            <p:ph type="body" idx="1"/>
           </p:nvPr>
         </p:nvSpPr>
         <p:spPr>
@@ -3200,11 +3523,11 @@
           </a:prstGeom>
         </p:spPr>
         <p:txBody>
-          <a:bodyPr anchorCtr="0" anchor="t" bIns="91425" lIns="91425" spcFirstLastPara="1" rIns="91425" wrap="square" tIns="91425">
+          <a:bodyPr spcFirstLastPara="1" wrap="square" lIns="91425" tIns="91425" rIns="91425" bIns="91425" anchor="t" anchorCtr="0">
             <a:normAutofit/>
           </a:bodyPr>
           <a:lstStyle>
-            <a:lvl1pPr indent="-342900" lvl="0" marL="457200" algn="ctr">
+            <a:lvl1pPr marL="457200" lvl="0" indent="-342900" algn="ctr">
               <a:spcBef>
                 <a:spcPts val="0"/>
               </a:spcBef>
@@ -3222,7 +3545,7 @@
                 </a:solidFill>
               </a:defRPr>
             </a:lvl1pPr>
-            <a:lvl2pPr indent="-317500" lvl="1" marL="914400" algn="ctr">
+            <a:lvl2pPr marL="914400" lvl="1" indent="-317500" algn="ctr">
               <a:spcBef>
                 <a:spcPts val="0"/>
               </a:spcBef>
@@ -3240,7 +3563,7 @@
                 </a:solidFill>
               </a:defRPr>
             </a:lvl2pPr>
-            <a:lvl3pPr indent="-317500" lvl="2" marL="1371600" algn="ctr">
+            <a:lvl3pPr marL="1371600" lvl="2" indent="-317500" algn="ctr">
               <a:spcBef>
                 <a:spcPts val="0"/>
               </a:spcBef>
@@ -3258,7 +3581,7 @@
                 </a:solidFill>
               </a:defRPr>
             </a:lvl3pPr>
-            <a:lvl4pPr indent="-317500" lvl="3" marL="1828800" algn="ctr">
+            <a:lvl4pPr marL="1828800" lvl="3" indent="-317500" algn="ctr">
               <a:spcBef>
                 <a:spcPts val="0"/>
               </a:spcBef>
@@ -3276,7 +3599,7 @@
                 </a:solidFill>
               </a:defRPr>
             </a:lvl4pPr>
-            <a:lvl5pPr indent="-317500" lvl="4" marL="2286000" algn="ctr">
+            <a:lvl5pPr marL="2286000" lvl="4" indent="-317500" algn="ctr">
               <a:spcBef>
                 <a:spcPts val="0"/>
               </a:spcBef>
@@ -3294,7 +3617,7 @@
                 </a:solidFill>
               </a:defRPr>
             </a:lvl5pPr>
-            <a:lvl6pPr indent="-317500" lvl="5" marL="2743200" algn="ctr">
+            <a:lvl6pPr marL="2743200" lvl="5" indent="-317500" algn="ctr">
               <a:spcBef>
                 <a:spcPts val="0"/>
               </a:spcBef>
@@ -3312,7 +3635,7 @@
                 </a:solidFill>
               </a:defRPr>
             </a:lvl6pPr>
-            <a:lvl7pPr indent="-317500" lvl="6" marL="3200400" algn="ctr">
+            <a:lvl7pPr marL="3200400" lvl="6" indent="-317500" algn="ctr">
               <a:spcBef>
                 <a:spcPts val="0"/>
               </a:spcBef>
@@ -3330,7 +3653,7 @@
                 </a:solidFill>
               </a:defRPr>
             </a:lvl7pPr>
-            <a:lvl8pPr indent="-317500" lvl="7" marL="3657600" algn="ctr">
+            <a:lvl8pPr marL="3657600" lvl="7" indent="-317500" algn="ctr">
               <a:spcBef>
                 <a:spcPts val="0"/>
               </a:spcBef>
@@ -3348,7 +3671,7 @@
                 </a:solidFill>
               </a:defRPr>
             </a:lvl8pPr>
-            <a:lvl9pPr indent="-317500" lvl="8" marL="4114800" algn="ctr">
+            <a:lvl9pPr marL="4114800" lvl="8" indent="-317500" algn="ctr">
               <a:spcBef>
                 <a:spcPts val="0"/>
               </a:spcBef>
@@ -3367,15 +3690,19 @@
               </a:defRPr>
             </a:lvl9pPr>
           </a:lstStyle>
-          <a:p/>
+          <a:p>
+            <a:endParaRPr/>
+          </a:p>
         </p:txBody>
       </p:sp>
       <p:sp>
         <p:nvSpPr>
           <p:cNvPr id="78" name="Google Shape;78;p11"/>
-          <p:cNvSpPr txBox="1"/>
+          <p:cNvSpPr txBox="1">
+            <a:spLocks noGrp="1"/>
+          </p:cNvSpPr>
           <p:nvPr>
-            <p:ph idx="12" type="sldNum"/>
+            <p:ph type="sldNum" idx="12"/>
           </p:nvPr>
         </p:nvSpPr>
         <p:spPr>
@@ -3388,7 +3715,7 @@
           </a:prstGeom>
         </p:spPr>
         <p:txBody>
-          <a:bodyPr anchorCtr="0" anchor="ctr" bIns="91425" lIns="91425" spcFirstLastPara="1" rIns="91425" wrap="square" tIns="91425">
+          <a:bodyPr spcFirstLastPara="1" wrap="square" lIns="91425" tIns="91425" rIns="91425" bIns="91425" anchor="ctr" anchorCtr="0">
             <a:normAutofit/>
           </a:bodyPr>
           <a:lstStyle>
@@ -3430,7 +3757,7 @@
             </a:lvl9pPr>
           </a:lstStyle>
           <a:p>
-            <a:pPr indent="0" lvl="0" marL="0" rtl="0" algn="r">
+            <a:pPr marL="0" lvl="0" indent="0" algn="r" rtl="0">
               <a:spcBef>
                 <a:spcPts val="0"/>
               </a:spcBef>
@@ -3456,11 +3783,11 @@
 </file>
 
 <file path=ppt/slideLayouts/slideLayout11.xml><?xml version="1.0" encoding="utf-8"?>
-<p:sldLayout xmlns:a="http://schemas.openxmlformats.org/drawingml/2006/main" xmlns:r="http://schemas.openxmlformats.org/officeDocument/2006/relationships" xmlns:mc="http://schemas.openxmlformats.org/markup-compatibility/2006" xmlns:mv="urn:schemas-microsoft-com:mac:vml" xmlns:p="http://schemas.openxmlformats.org/presentationml/2006/main" xmlns:c="http://schemas.openxmlformats.org/drawingml/2006/chart" xmlns:dgm="http://schemas.openxmlformats.org/drawingml/2006/diagram" xmlns:o="urn:schemas-microsoft-com:office:office" xmlns:v="urn:schemas-microsoft-com:vml" xmlns:pvml="urn:schemas-microsoft-com:office:powerpoint" xmlns:com="http://schemas.openxmlformats.org/drawingml/2006/compatibility" xmlns:p14="http://schemas.microsoft.com/office/powerpoint/2010/main" xmlns:p15="http://schemas.microsoft.com/office/powerpoint/2012/main" xmlns:ahyp="http://schemas.microsoft.com/office/drawing/2018/hyperlinkcolor" matchingName="Blank" type="blank">
+<p:sldLayout xmlns:a="http://schemas.openxmlformats.org/drawingml/2006/main" xmlns:r="http://schemas.openxmlformats.org/officeDocument/2006/relationships" xmlns:p="http://schemas.openxmlformats.org/presentationml/2006/main" matchingName="Blank" type="blank">
   <p:cSld name="BLANK">
     <p:spTree>
       <p:nvGrpSpPr>
-        <p:cNvPr id="79" name="Shape 79"/>
+        <p:cNvPr id="1" name="Shape 79"/>
         <p:cNvGrpSpPr/>
         <p:nvPr/>
       </p:nvGrpSpPr>
@@ -3475,9 +3802,11 @@
       <p:sp>
         <p:nvSpPr>
           <p:cNvPr id="80" name="Google Shape;80;p12"/>
-          <p:cNvSpPr txBox="1"/>
+          <p:cNvSpPr txBox="1">
+            <a:spLocks noGrp="1"/>
+          </p:cNvSpPr>
           <p:nvPr>
-            <p:ph idx="12" type="sldNum"/>
+            <p:ph type="sldNum" idx="12"/>
           </p:nvPr>
         </p:nvSpPr>
         <p:spPr>
@@ -3490,7 +3819,7 @@
           </a:prstGeom>
         </p:spPr>
         <p:txBody>
-          <a:bodyPr anchorCtr="0" anchor="ctr" bIns="91425" lIns="91425" spcFirstLastPara="1" rIns="91425" wrap="square" tIns="91425">
+          <a:bodyPr spcFirstLastPara="1" wrap="square" lIns="91425" tIns="91425" rIns="91425" bIns="91425" anchor="ctr" anchorCtr="0">
             <a:normAutofit/>
           </a:bodyPr>
           <a:lstStyle>
@@ -3568,7 +3897,7 @@
             </a:lvl9pPr>
           </a:lstStyle>
           <a:p>
-            <a:pPr indent="0" lvl="0" marL="0" rtl="0" algn="r">
+            <a:pPr marL="0" lvl="0" indent="0" algn="r" rtl="0">
               <a:spcBef>
                 <a:spcPts val="0"/>
               </a:spcBef>
@@ -3594,18 +3923,19 @@
 </file>
 
 <file path=ppt/slideLayouts/slideLayout2.xml><?xml version="1.0" encoding="utf-8"?>
-<p:sldLayout xmlns:a="http://schemas.openxmlformats.org/drawingml/2006/main" xmlns:r="http://schemas.openxmlformats.org/officeDocument/2006/relationships" xmlns:mc="http://schemas.openxmlformats.org/markup-compatibility/2006" xmlns:mv="urn:schemas-microsoft-com:mac:vml" xmlns:p="http://schemas.openxmlformats.org/presentationml/2006/main" xmlns:c="http://schemas.openxmlformats.org/drawingml/2006/chart" xmlns:dgm="http://schemas.openxmlformats.org/drawingml/2006/diagram" xmlns:o="urn:schemas-microsoft-com:office:office" xmlns:v="urn:schemas-microsoft-com:vml" xmlns:pvml="urn:schemas-microsoft-com:office:powerpoint" xmlns:com="http://schemas.openxmlformats.org/drawingml/2006/compatibility" xmlns:p14="http://schemas.microsoft.com/office/powerpoint/2010/main" xmlns:p15="http://schemas.microsoft.com/office/powerpoint/2012/main" xmlns:ahyp="http://schemas.microsoft.com/office/drawing/2018/hyperlinkcolor" matchingName="Section header" type="secHead">
+<p:sldLayout xmlns:a="http://schemas.openxmlformats.org/drawingml/2006/main" xmlns:r="http://schemas.openxmlformats.org/officeDocument/2006/relationships" xmlns:p="http://schemas.openxmlformats.org/presentationml/2006/main" matchingName="Section header" type="secHead">
   <p:cSld name="SECTION_HEADER">
     <p:bg>
       <p:bgPr>
         <a:solidFill>
           <a:schemeClr val="dk1"/>
         </a:solidFill>
+        <a:effectLst/>
       </p:bgPr>
     </p:bg>
     <p:spTree>
       <p:nvGrpSpPr>
-        <p:cNvPr id="19" name="Shape 19"/>
+        <p:cNvPr id="1" name="Shape 19"/>
         <p:cNvGrpSpPr/>
         <p:nvPr/>
       </p:nvGrpSpPr>
@@ -3653,12 +3983,12 @@
             </a:ln>
           </p:spPr>
           <p:txBody>
-            <a:bodyPr anchorCtr="0" anchor="ctr" bIns="91425" lIns="91425" spcFirstLastPara="1" rIns="91425" wrap="square" tIns="91425">
+            <a:bodyPr spcFirstLastPara="1" wrap="square" lIns="91425" tIns="91425" rIns="91425" bIns="91425" anchor="ctr" anchorCtr="0">
               <a:noAutofit/>
             </a:bodyPr>
             <a:lstStyle/>
             <a:p>
-              <a:pPr indent="0" lvl="0" marL="0" rtl="0" algn="l">
+              <a:pPr marL="0" lvl="0" indent="0" algn="l" rtl="0">
                 <a:spcBef>
                   <a:spcPts val="0"/>
                 </a:spcBef>
@@ -3667,9 +3997,6 @@
                 </a:spcAft>
                 <a:buNone/>
               </a:pPr>
-              <a:r>
-                <a:t/>
-              </a:r>
               <a:endParaRPr/>
             </a:p>
           </p:txBody>
@@ -3696,12 +4023,12 @@
             </a:ln>
           </p:spPr>
           <p:txBody>
-            <a:bodyPr anchorCtr="0" anchor="ctr" bIns="91425" lIns="91425" spcFirstLastPara="1" rIns="91425" wrap="square" tIns="91425">
+            <a:bodyPr spcFirstLastPara="1" wrap="square" lIns="91425" tIns="91425" rIns="91425" bIns="91425" anchor="ctr" anchorCtr="0">
               <a:noAutofit/>
             </a:bodyPr>
             <a:lstStyle/>
             <a:p>
-              <a:pPr indent="0" lvl="0" marL="0" rtl="0" algn="l">
+              <a:pPr marL="0" lvl="0" indent="0" algn="l" rtl="0">
                 <a:spcBef>
                   <a:spcPts val="0"/>
                 </a:spcBef>
@@ -3710,9 +4037,6 @@
                 </a:spcAft>
                 <a:buNone/>
               </a:pPr>
-              <a:r>
-                <a:t/>
-              </a:r>
               <a:endParaRPr/>
             </a:p>
           </p:txBody>
@@ -3724,7 +4048,7 @@
             <p:nvPr/>
           </p:nvSpPr>
           <p:spPr>
-            <a:xfrm flipH="1" rot="10800000">
+            <a:xfrm rot="10800000" flipH="1">
               <a:off x="7113588" y="107"/>
               <a:ext cx="1015200" cy="1015200"/>
             </a:xfrm>
@@ -3739,12 +4063,12 @@
             </a:ln>
           </p:spPr>
           <p:txBody>
-            <a:bodyPr anchorCtr="0" anchor="ctr" bIns="91425" lIns="91425" spcFirstLastPara="1" rIns="91425" wrap="square" tIns="91425">
+            <a:bodyPr spcFirstLastPara="1" wrap="square" lIns="91425" tIns="91425" rIns="91425" bIns="91425" anchor="ctr" anchorCtr="0">
               <a:noAutofit/>
             </a:bodyPr>
             <a:lstStyle/>
             <a:p>
-              <a:pPr indent="0" lvl="0" marL="0" rtl="0" algn="l">
+              <a:pPr marL="0" lvl="0" indent="0" algn="l" rtl="0">
                 <a:spcBef>
                   <a:spcPts val="0"/>
                 </a:spcBef>
@@ -3753,9 +4077,6 @@
                 </a:spcAft>
                 <a:buNone/>
               </a:pPr>
-              <a:r>
-                <a:t/>
-              </a:r>
               <a:endParaRPr/>
             </a:p>
           </p:txBody>
@@ -3782,12 +4103,12 @@
             </a:ln>
           </p:spPr>
           <p:txBody>
-            <a:bodyPr anchorCtr="0" anchor="ctr" bIns="91425" lIns="91425" spcFirstLastPara="1" rIns="91425" wrap="square" tIns="91425">
+            <a:bodyPr spcFirstLastPara="1" wrap="square" lIns="91425" tIns="91425" rIns="91425" bIns="91425" anchor="ctr" anchorCtr="0">
               <a:noAutofit/>
             </a:bodyPr>
             <a:lstStyle/>
             <a:p>
-              <a:pPr indent="0" lvl="0" marL="0" rtl="0" algn="l">
+              <a:pPr marL="0" lvl="0" indent="0" algn="l" rtl="0">
                 <a:spcBef>
                   <a:spcPts val="0"/>
                 </a:spcBef>
@@ -3796,9 +4117,6 @@
                 </a:spcAft>
                 <a:buNone/>
               </a:pPr>
-              <a:r>
-                <a:t/>
-              </a:r>
               <a:endParaRPr/>
             </a:p>
           </p:txBody>
@@ -3825,12 +4143,12 @@
             </a:ln>
           </p:spPr>
           <p:txBody>
-            <a:bodyPr anchorCtr="0" anchor="ctr" bIns="91425" lIns="91425" spcFirstLastPara="1" rIns="91425" wrap="square" tIns="91425">
+            <a:bodyPr spcFirstLastPara="1" wrap="square" lIns="91425" tIns="91425" rIns="91425" bIns="91425" anchor="ctr" anchorCtr="0">
               <a:noAutofit/>
             </a:bodyPr>
             <a:lstStyle/>
             <a:p>
-              <a:pPr indent="0" lvl="0" marL="0" rtl="0" algn="l">
+              <a:pPr marL="0" lvl="0" indent="0" algn="l" rtl="0">
                 <a:spcBef>
                   <a:spcPts val="0"/>
                 </a:spcBef>
@@ -3839,9 +4157,6 @@
                 </a:spcAft>
                 <a:buNone/>
               </a:pPr>
-              <a:r>
-                <a:t/>
-              </a:r>
               <a:endParaRPr/>
             </a:p>
           </p:txBody>
@@ -3850,7 +4165,9 @@
       <p:sp>
         <p:nvSpPr>
           <p:cNvPr id="26" name="Google Shape;26;p3"/>
-          <p:cNvSpPr txBox="1"/>
+          <p:cNvSpPr txBox="1">
+            <a:spLocks noGrp="1"/>
+          </p:cNvSpPr>
           <p:nvPr>
             <p:ph type="title"/>
           </p:nvPr>
@@ -3865,7 +4182,7 @@
           </a:prstGeom>
         </p:spPr>
         <p:txBody>
-          <a:bodyPr anchorCtr="0" anchor="ctr" bIns="91425" lIns="91425" spcFirstLastPara="1" rIns="91425" wrap="square" tIns="91425">
+          <a:bodyPr spcFirstLastPara="1" wrap="square" lIns="91425" tIns="91425" rIns="91425" bIns="91425" anchor="ctr" anchorCtr="0">
             <a:normAutofit/>
           </a:bodyPr>
           <a:lstStyle>
@@ -4032,15 +4349,19 @@
               </a:defRPr>
             </a:lvl9pPr>
           </a:lstStyle>
-          <a:p/>
+          <a:p>
+            <a:endParaRPr/>
+          </a:p>
         </p:txBody>
       </p:sp>
       <p:sp>
         <p:nvSpPr>
           <p:cNvPr id="27" name="Google Shape;27;p3"/>
-          <p:cNvSpPr txBox="1"/>
+          <p:cNvSpPr txBox="1">
+            <a:spLocks noGrp="1"/>
+          </p:cNvSpPr>
           <p:nvPr>
-            <p:ph idx="12" type="sldNum"/>
+            <p:ph type="sldNum" idx="12"/>
           </p:nvPr>
         </p:nvSpPr>
         <p:spPr>
@@ -4053,7 +4374,7 @@
           </a:prstGeom>
         </p:spPr>
         <p:txBody>
-          <a:bodyPr anchorCtr="0" anchor="ctr" bIns="91425" lIns="91425" spcFirstLastPara="1" rIns="91425" wrap="square" tIns="91425">
+          <a:bodyPr spcFirstLastPara="1" wrap="square" lIns="91425" tIns="91425" rIns="91425" bIns="91425" anchor="ctr" anchorCtr="0">
             <a:normAutofit/>
           </a:bodyPr>
           <a:lstStyle>
@@ -4095,7 +4416,7 @@
             </a:lvl9pPr>
           </a:lstStyle>
           <a:p>
-            <a:pPr indent="0" lvl="0" marL="0" rtl="0" algn="r">
+            <a:pPr marL="0" lvl="0" indent="0" algn="r" rtl="0">
               <a:spcBef>
                 <a:spcPts val="0"/>
               </a:spcBef>
@@ -4121,11 +4442,11 @@
 </file>
 
 <file path=ppt/slideLayouts/slideLayout3.xml><?xml version="1.0" encoding="utf-8"?>
-<p:sldLayout xmlns:a="http://schemas.openxmlformats.org/drawingml/2006/main" xmlns:r="http://schemas.openxmlformats.org/officeDocument/2006/relationships" xmlns:mc="http://schemas.openxmlformats.org/markup-compatibility/2006" xmlns:mv="urn:schemas-microsoft-com:mac:vml" xmlns:p="http://schemas.openxmlformats.org/presentationml/2006/main" xmlns:c="http://schemas.openxmlformats.org/drawingml/2006/chart" xmlns:dgm="http://schemas.openxmlformats.org/drawingml/2006/diagram" xmlns:o="urn:schemas-microsoft-com:office:office" xmlns:v="urn:schemas-microsoft-com:vml" xmlns:pvml="urn:schemas-microsoft-com:office:powerpoint" xmlns:com="http://schemas.openxmlformats.org/drawingml/2006/compatibility" xmlns:p14="http://schemas.microsoft.com/office/powerpoint/2010/main" xmlns:p15="http://schemas.microsoft.com/office/powerpoint/2012/main" xmlns:ahyp="http://schemas.microsoft.com/office/drawing/2018/hyperlinkcolor" matchingName="Title and body" type="tx">
+<p:sldLayout xmlns:a="http://schemas.openxmlformats.org/drawingml/2006/main" xmlns:r="http://schemas.openxmlformats.org/officeDocument/2006/relationships" xmlns:p="http://schemas.openxmlformats.org/presentationml/2006/main" matchingName="Title and body" type="tx">
   <p:cSld name="TITLE_AND_BODY">
     <p:spTree>
       <p:nvGrpSpPr>
-        <p:cNvPr id="28" name="Shape 28"/>
+        <p:cNvPr id="1" name="Shape 28"/>
         <p:cNvGrpSpPr/>
         <p:nvPr/>
       </p:nvGrpSpPr>
@@ -4173,12 +4494,12 @@
             </a:ln>
           </p:spPr>
           <p:txBody>
-            <a:bodyPr anchorCtr="0" anchor="ctr" bIns="91425" lIns="91425" spcFirstLastPara="1" rIns="91425" wrap="square" tIns="91425">
+            <a:bodyPr spcFirstLastPara="1" wrap="square" lIns="91425" tIns="91425" rIns="91425" bIns="91425" anchor="ctr" anchorCtr="0">
               <a:noAutofit/>
             </a:bodyPr>
             <a:lstStyle/>
             <a:p>
-              <a:pPr indent="0" lvl="0" marL="0" rtl="0" algn="l">
+              <a:pPr marL="0" lvl="0" indent="0" algn="l" rtl="0">
                 <a:spcBef>
                   <a:spcPts val="0"/>
                 </a:spcBef>
@@ -4187,9 +4508,6 @@
                 </a:spcAft>
                 <a:buNone/>
               </a:pPr>
-              <a:r>
-                <a:t/>
-              </a:r>
               <a:endParaRPr/>
             </a:p>
           </p:txBody>
@@ -4216,12 +4534,12 @@
             </a:ln>
           </p:spPr>
           <p:txBody>
-            <a:bodyPr anchorCtr="0" anchor="ctr" bIns="91425" lIns="91425" spcFirstLastPara="1" rIns="91425" wrap="square" tIns="91425">
+            <a:bodyPr spcFirstLastPara="1" wrap="square" lIns="91425" tIns="91425" rIns="91425" bIns="91425" anchor="ctr" anchorCtr="0">
               <a:noAutofit/>
             </a:bodyPr>
             <a:lstStyle/>
             <a:p>
-              <a:pPr indent="0" lvl="0" marL="0" rtl="0" algn="l">
+              <a:pPr marL="0" lvl="0" indent="0" algn="l" rtl="0">
                 <a:spcBef>
                   <a:spcPts val="0"/>
                 </a:spcBef>
@@ -4230,9 +4548,6 @@
                 </a:spcAft>
                 <a:buNone/>
               </a:pPr>
-              <a:r>
-                <a:t/>
-              </a:r>
               <a:endParaRPr/>
             </a:p>
           </p:txBody>
@@ -4259,12 +4574,12 @@
             </a:ln>
           </p:spPr>
           <p:txBody>
-            <a:bodyPr anchorCtr="0" anchor="ctr" bIns="91425" lIns="91425" spcFirstLastPara="1" rIns="91425" wrap="square" tIns="91425">
+            <a:bodyPr spcFirstLastPara="1" wrap="square" lIns="91425" tIns="91425" rIns="91425" bIns="91425" anchor="ctr" anchorCtr="0">
               <a:noAutofit/>
             </a:bodyPr>
             <a:lstStyle/>
             <a:p>
-              <a:pPr indent="0" lvl="0" marL="0" rtl="0" algn="l">
+              <a:pPr marL="0" lvl="0" indent="0" algn="l" rtl="0">
                 <a:spcBef>
                   <a:spcPts val="0"/>
                 </a:spcBef>
@@ -4273,9 +4588,6 @@
                 </a:spcAft>
                 <a:buNone/>
               </a:pPr>
-              <a:r>
-                <a:t/>
-              </a:r>
               <a:endParaRPr/>
             </a:p>
           </p:txBody>
@@ -4302,12 +4614,12 @@
             </a:ln>
           </p:spPr>
           <p:txBody>
-            <a:bodyPr anchorCtr="0" anchor="ctr" bIns="91425" lIns="91425" spcFirstLastPara="1" rIns="91425" wrap="square" tIns="91425">
+            <a:bodyPr spcFirstLastPara="1" wrap="square" lIns="91425" tIns="91425" rIns="91425" bIns="91425" anchor="ctr" anchorCtr="0">
               <a:noAutofit/>
             </a:bodyPr>
             <a:lstStyle/>
             <a:p>
-              <a:pPr indent="0" lvl="0" marL="0" rtl="0" algn="l">
+              <a:pPr marL="0" lvl="0" indent="0" algn="l" rtl="0">
                 <a:spcBef>
                   <a:spcPts val="0"/>
                 </a:spcBef>
@@ -4316,9 +4628,6 @@
                 </a:spcAft>
                 <a:buNone/>
               </a:pPr>
-              <a:r>
-                <a:t/>
-              </a:r>
               <a:endParaRPr/>
             </a:p>
           </p:txBody>
@@ -4345,12 +4654,12 @@
             </a:ln>
           </p:spPr>
           <p:txBody>
-            <a:bodyPr anchorCtr="0" anchor="ctr" bIns="91425" lIns="91425" spcFirstLastPara="1" rIns="91425" wrap="square" tIns="91425">
+            <a:bodyPr spcFirstLastPara="1" wrap="square" lIns="91425" tIns="91425" rIns="91425" bIns="91425" anchor="ctr" anchorCtr="0">
               <a:noAutofit/>
             </a:bodyPr>
             <a:lstStyle/>
             <a:p>
-              <a:pPr indent="0" lvl="0" marL="0" rtl="0" algn="l">
+              <a:pPr marL="0" lvl="0" indent="0" algn="l" rtl="0">
                 <a:spcBef>
                   <a:spcPts val="0"/>
                 </a:spcBef>
@@ -4359,9 +4668,6 @@
                 </a:spcAft>
                 <a:buNone/>
               </a:pPr>
-              <a:r>
-                <a:t/>
-              </a:r>
               <a:endParaRPr/>
             </a:p>
           </p:txBody>
@@ -4370,7 +4676,9 @@
       <p:sp>
         <p:nvSpPr>
           <p:cNvPr id="35" name="Google Shape;35;p4"/>
-          <p:cNvSpPr txBox="1"/>
+          <p:cNvSpPr txBox="1">
+            <a:spLocks noGrp="1"/>
+          </p:cNvSpPr>
           <p:nvPr>
             <p:ph type="title"/>
           </p:nvPr>
@@ -4385,7 +4693,7 @@
           </a:prstGeom>
         </p:spPr>
         <p:txBody>
-          <a:bodyPr anchorCtr="0" anchor="t" bIns="91425" lIns="91425" spcFirstLastPara="1" rIns="91425" wrap="square" tIns="91425">
+          <a:bodyPr spcFirstLastPara="1" wrap="square" lIns="91425" tIns="91425" rIns="91425" bIns="91425" anchor="t" anchorCtr="0">
             <a:normAutofit/>
           </a:bodyPr>
           <a:lstStyle>
@@ -4489,15 +4797,19 @@
               <a:defRPr/>
             </a:lvl9pPr>
           </a:lstStyle>
-          <a:p/>
+          <a:p>
+            <a:endParaRPr/>
+          </a:p>
         </p:txBody>
       </p:sp>
       <p:sp>
         <p:nvSpPr>
           <p:cNvPr id="36" name="Google Shape;36;p4"/>
-          <p:cNvSpPr txBox="1"/>
+          <p:cNvSpPr txBox="1">
+            <a:spLocks noGrp="1"/>
+          </p:cNvSpPr>
           <p:nvPr>
-            <p:ph idx="1" type="body"/>
+            <p:ph type="body" idx="1"/>
           </p:nvPr>
         </p:nvSpPr>
         <p:spPr>
@@ -4510,11 +4822,11 @@
           </a:prstGeom>
         </p:spPr>
         <p:txBody>
-          <a:bodyPr anchorCtr="0" anchor="t" bIns="91425" lIns="91425" spcFirstLastPara="1" rIns="91425" wrap="square" tIns="91425">
+          <a:bodyPr spcFirstLastPara="1" wrap="square" lIns="91425" tIns="91425" rIns="91425" bIns="91425" anchor="t" anchorCtr="0">
             <a:normAutofit/>
           </a:bodyPr>
           <a:lstStyle>
-            <a:lvl1pPr indent="-342900" lvl="0" marL="457200">
+            <a:lvl1pPr marL="457200" lvl="0" indent="-342900">
               <a:spcBef>
                 <a:spcPts val="0"/>
               </a:spcBef>
@@ -4525,7 +4837,7 @@
               <a:buChar char="●"/>
               <a:defRPr/>
             </a:lvl1pPr>
-            <a:lvl2pPr indent="-317500" lvl="1" marL="914400">
+            <a:lvl2pPr marL="914400" lvl="1" indent="-317500">
               <a:spcBef>
                 <a:spcPts val="0"/>
               </a:spcBef>
@@ -4536,7 +4848,7 @@
               <a:buChar char="○"/>
               <a:defRPr/>
             </a:lvl2pPr>
-            <a:lvl3pPr indent="-317500" lvl="2" marL="1371600">
+            <a:lvl3pPr marL="1371600" lvl="2" indent="-317500">
               <a:spcBef>
                 <a:spcPts val="0"/>
               </a:spcBef>
@@ -4547,7 +4859,7 @@
               <a:buChar char="■"/>
               <a:defRPr/>
             </a:lvl3pPr>
-            <a:lvl4pPr indent="-317500" lvl="3" marL="1828800">
+            <a:lvl4pPr marL="1828800" lvl="3" indent="-317500">
               <a:spcBef>
                 <a:spcPts val="0"/>
               </a:spcBef>
@@ -4558,7 +4870,7 @@
               <a:buChar char="●"/>
               <a:defRPr/>
             </a:lvl4pPr>
-            <a:lvl5pPr indent="-317500" lvl="4" marL="2286000">
+            <a:lvl5pPr marL="2286000" lvl="4" indent="-317500">
               <a:spcBef>
                 <a:spcPts val="0"/>
               </a:spcBef>
@@ -4569,7 +4881,7 @@
               <a:buChar char="○"/>
               <a:defRPr/>
             </a:lvl5pPr>
-            <a:lvl6pPr indent="-317500" lvl="5" marL="2743200">
+            <a:lvl6pPr marL="2743200" lvl="5" indent="-317500">
               <a:spcBef>
                 <a:spcPts val="0"/>
               </a:spcBef>
@@ -4580,7 +4892,7 @@
               <a:buChar char="■"/>
               <a:defRPr/>
             </a:lvl6pPr>
-            <a:lvl7pPr indent="-317500" lvl="6" marL="3200400">
+            <a:lvl7pPr marL="3200400" lvl="6" indent="-317500">
               <a:spcBef>
                 <a:spcPts val="0"/>
               </a:spcBef>
@@ -4591,7 +4903,7 @@
               <a:buChar char="●"/>
               <a:defRPr/>
             </a:lvl7pPr>
-            <a:lvl8pPr indent="-317500" lvl="7" marL="3657600">
+            <a:lvl8pPr marL="3657600" lvl="7" indent="-317500">
               <a:spcBef>
                 <a:spcPts val="0"/>
               </a:spcBef>
@@ -4602,7 +4914,7 @@
               <a:buChar char="○"/>
               <a:defRPr/>
             </a:lvl8pPr>
-            <a:lvl9pPr indent="-317500" lvl="8" marL="4114800">
+            <a:lvl9pPr marL="4114800" lvl="8" indent="-317500">
               <a:spcBef>
                 <a:spcPts val="0"/>
               </a:spcBef>
@@ -4614,15 +4926,19 @@
               <a:defRPr/>
             </a:lvl9pPr>
           </a:lstStyle>
-          <a:p/>
+          <a:p>
+            <a:endParaRPr/>
+          </a:p>
         </p:txBody>
       </p:sp>
       <p:sp>
         <p:nvSpPr>
           <p:cNvPr id="37" name="Google Shape;37;p4"/>
-          <p:cNvSpPr txBox="1"/>
+          <p:cNvSpPr txBox="1">
+            <a:spLocks noGrp="1"/>
+          </p:cNvSpPr>
           <p:nvPr>
-            <p:ph idx="12" type="sldNum"/>
+            <p:ph type="sldNum" idx="12"/>
           </p:nvPr>
         </p:nvSpPr>
         <p:spPr>
@@ -4635,7 +4951,7 @@
           </a:prstGeom>
         </p:spPr>
         <p:txBody>
-          <a:bodyPr anchorCtr="0" anchor="ctr" bIns="91425" lIns="91425" spcFirstLastPara="1" rIns="91425" wrap="square" tIns="91425">
+          <a:bodyPr spcFirstLastPara="1" wrap="square" lIns="91425" tIns="91425" rIns="91425" bIns="91425" anchor="ctr" anchorCtr="0">
             <a:normAutofit/>
           </a:bodyPr>
           <a:lstStyle>
@@ -4677,7 +4993,7 @@
             </a:lvl9pPr>
           </a:lstStyle>
           <a:p>
-            <a:pPr indent="0" lvl="0" marL="0" rtl="0" algn="r">
+            <a:pPr marL="0" lvl="0" indent="0" algn="r" rtl="0">
               <a:spcBef>
                 <a:spcPts val="0"/>
               </a:spcBef>
@@ -4703,11 +5019,11 @@
 </file>
 
 <file path=ppt/slideLayouts/slideLayout4.xml><?xml version="1.0" encoding="utf-8"?>
-<p:sldLayout xmlns:a="http://schemas.openxmlformats.org/drawingml/2006/main" xmlns:r="http://schemas.openxmlformats.org/officeDocument/2006/relationships" xmlns:mc="http://schemas.openxmlformats.org/markup-compatibility/2006" xmlns:mv="urn:schemas-microsoft-com:mac:vml" xmlns:p="http://schemas.openxmlformats.org/presentationml/2006/main" xmlns:c="http://schemas.openxmlformats.org/drawingml/2006/chart" xmlns:dgm="http://schemas.openxmlformats.org/drawingml/2006/diagram" xmlns:o="urn:schemas-microsoft-com:office:office" xmlns:v="urn:schemas-microsoft-com:vml" xmlns:pvml="urn:schemas-microsoft-com:office:powerpoint" xmlns:com="http://schemas.openxmlformats.org/drawingml/2006/compatibility" xmlns:p14="http://schemas.microsoft.com/office/powerpoint/2010/main" xmlns:p15="http://schemas.microsoft.com/office/powerpoint/2012/main" xmlns:ahyp="http://schemas.microsoft.com/office/drawing/2018/hyperlinkcolor" matchingName="Title and two columns" type="twoColTx">
+<p:sldLayout xmlns:a="http://schemas.openxmlformats.org/drawingml/2006/main" xmlns:r="http://schemas.openxmlformats.org/officeDocument/2006/relationships" xmlns:p="http://schemas.openxmlformats.org/presentationml/2006/main" matchingName="Title and two columns" type="twoColTx">
   <p:cSld name="TITLE_AND_TWO_COLUMNS">
     <p:spTree>
       <p:nvGrpSpPr>
-        <p:cNvPr id="38" name="Shape 38"/>
+        <p:cNvPr id="1" name="Shape 38"/>
         <p:cNvGrpSpPr/>
         <p:nvPr/>
       </p:nvGrpSpPr>
@@ -4722,7 +5038,9 @@
       <p:sp>
         <p:nvSpPr>
           <p:cNvPr id="39" name="Google Shape;39;p5"/>
-          <p:cNvSpPr txBox="1"/>
+          <p:cNvSpPr txBox="1">
+            <a:spLocks noGrp="1"/>
+          </p:cNvSpPr>
           <p:nvPr>
             <p:ph type="title"/>
           </p:nvPr>
@@ -4737,7 +5055,7 @@
           </a:prstGeom>
         </p:spPr>
         <p:txBody>
-          <a:bodyPr anchorCtr="0" anchor="t" bIns="91425" lIns="91425" spcFirstLastPara="1" rIns="91425" wrap="square" tIns="91425">
+          <a:bodyPr spcFirstLastPara="1" wrap="square" lIns="91425" tIns="91425" rIns="91425" bIns="91425" anchor="t" anchorCtr="0">
             <a:normAutofit/>
           </a:bodyPr>
           <a:lstStyle>
@@ -4841,15 +5159,19 @@
               <a:defRPr/>
             </a:lvl9pPr>
           </a:lstStyle>
-          <a:p/>
+          <a:p>
+            <a:endParaRPr/>
+          </a:p>
         </p:txBody>
       </p:sp>
       <p:sp>
         <p:nvSpPr>
           <p:cNvPr id="40" name="Google Shape;40;p5"/>
-          <p:cNvSpPr txBox="1"/>
+          <p:cNvSpPr txBox="1">
+            <a:spLocks noGrp="1"/>
+          </p:cNvSpPr>
           <p:nvPr>
-            <p:ph idx="1" type="body"/>
+            <p:ph type="body" idx="1"/>
           </p:nvPr>
         </p:nvSpPr>
         <p:spPr>
@@ -4862,11 +5184,11 @@
           </a:prstGeom>
         </p:spPr>
         <p:txBody>
-          <a:bodyPr anchorCtr="0" anchor="t" bIns="91425" lIns="91425" spcFirstLastPara="1" rIns="91425" wrap="square" tIns="91425">
+          <a:bodyPr spcFirstLastPara="1" wrap="square" lIns="91425" tIns="91425" rIns="91425" bIns="91425" anchor="t" anchorCtr="0">
             <a:normAutofit/>
           </a:bodyPr>
           <a:lstStyle>
-            <a:lvl1pPr indent="-317500" lvl="0" marL="457200">
+            <a:lvl1pPr marL="457200" lvl="0" indent="-317500">
               <a:spcBef>
                 <a:spcPts val="0"/>
               </a:spcBef>
@@ -4877,7 +5199,7 @@
               <a:buChar char="●"/>
               <a:defRPr sz="1400"/>
             </a:lvl1pPr>
-            <a:lvl2pPr indent="-304800" lvl="1" marL="914400">
+            <a:lvl2pPr marL="914400" lvl="1" indent="-304800">
               <a:spcBef>
                 <a:spcPts val="0"/>
               </a:spcBef>
@@ -4888,7 +5210,7 @@
               <a:buChar char="○"/>
               <a:defRPr sz="1200"/>
             </a:lvl2pPr>
-            <a:lvl3pPr indent="-304800" lvl="2" marL="1371600">
+            <a:lvl3pPr marL="1371600" lvl="2" indent="-304800">
               <a:spcBef>
                 <a:spcPts val="0"/>
               </a:spcBef>
@@ -4899,7 +5221,7 @@
               <a:buChar char="■"/>
               <a:defRPr sz="1200"/>
             </a:lvl3pPr>
-            <a:lvl4pPr indent="-304800" lvl="3" marL="1828800">
+            <a:lvl4pPr marL="1828800" lvl="3" indent="-304800">
               <a:spcBef>
                 <a:spcPts val="0"/>
               </a:spcBef>
@@ -4910,7 +5232,7 @@
               <a:buChar char="●"/>
               <a:defRPr sz="1200"/>
             </a:lvl4pPr>
-            <a:lvl5pPr indent="-304800" lvl="4" marL="2286000">
+            <a:lvl5pPr marL="2286000" lvl="4" indent="-304800">
               <a:spcBef>
                 <a:spcPts val="0"/>
               </a:spcBef>
@@ -4921,7 +5243,7 @@
               <a:buChar char="○"/>
               <a:defRPr sz="1200"/>
             </a:lvl5pPr>
-            <a:lvl6pPr indent="-304800" lvl="5" marL="2743200">
+            <a:lvl6pPr marL="2743200" lvl="5" indent="-304800">
               <a:spcBef>
                 <a:spcPts val="0"/>
               </a:spcBef>
@@ -4932,7 +5254,7 @@
               <a:buChar char="■"/>
               <a:defRPr sz="1200"/>
             </a:lvl6pPr>
-            <a:lvl7pPr indent="-304800" lvl="6" marL="3200400">
+            <a:lvl7pPr marL="3200400" lvl="6" indent="-304800">
               <a:spcBef>
                 <a:spcPts val="0"/>
               </a:spcBef>
@@ -4943,7 +5265,7 @@
               <a:buChar char="●"/>
               <a:defRPr sz="1200"/>
             </a:lvl7pPr>
-            <a:lvl8pPr indent="-304800" lvl="7" marL="3657600">
+            <a:lvl8pPr marL="3657600" lvl="7" indent="-304800">
               <a:spcBef>
                 <a:spcPts val="0"/>
               </a:spcBef>
@@ -4954,7 +5276,7 @@
               <a:buChar char="○"/>
               <a:defRPr sz="1200"/>
             </a:lvl8pPr>
-            <a:lvl9pPr indent="-304800" lvl="8" marL="4114800">
+            <a:lvl9pPr marL="4114800" lvl="8" indent="-304800">
               <a:spcBef>
                 <a:spcPts val="0"/>
               </a:spcBef>
@@ -4966,15 +5288,19 @@
               <a:defRPr sz="1200"/>
             </a:lvl9pPr>
           </a:lstStyle>
-          <a:p/>
+          <a:p>
+            <a:endParaRPr/>
+          </a:p>
         </p:txBody>
       </p:sp>
       <p:sp>
         <p:nvSpPr>
           <p:cNvPr id="41" name="Google Shape;41;p5"/>
-          <p:cNvSpPr txBox="1"/>
+          <p:cNvSpPr txBox="1">
+            <a:spLocks noGrp="1"/>
+          </p:cNvSpPr>
           <p:nvPr>
-            <p:ph idx="2" type="body"/>
+            <p:ph type="body" idx="2"/>
           </p:nvPr>
         </p:nvSpPr>
         <p:spPr>
@@ -4987,11 +5313,11 @@
           </a:prstGeom>
         </p:spPr>
         <p:txBody>
-          <a:bodyPr anchorCtr="0" anchor="t" bIns="91425" lIns="91425" spcFirstLastPara="1" rIns="91425" wrap="square" tIns="91425">
+          <a:bodyPr spcFirstLastPara="1" wrap="square" lIns="91425" tIns="91425" rIns="91425" bIns="91425" anchor="t" anchorCtr="0">
             <a:normAutofit/>
           </a:bodyPr>
           <a:lstStyle>
-            <a:lvl1pPr indent="-317500" lvl="0" marL="457200">
+            <a:lvl1pPr marL="457200" lvl="0" indent="-317500">
               <a:spcBef>
                 <a:spcPts val="0"/>
               </a:spcBef>
@@ -5002,7 +5328,7 @@
               <a:buChar char="●"/>
               <a:defRPr sz="1400"/>
             </a:lvl1pPr>
-            <a:lvl2pPr indent="-304800" lvl="1" marL="914400">
+            <a:lvl2pPr marL="914400" lvl="1" indent="-304800">
               <a:spcBef>
                 <a:spcPts val="0"/>
               </a:spcBef>
@@ -5013,7 +5339,7 @@
               <a:buChar char="○"/>
               <a:defRPr sz="1200"/>
             </a:lvl2pPr>
-            <a:lvl3pPr indent="-304800" lvl="2" marL="1371600">
+            <a:lvl3pPr marL="1371600" lvl="2" indent="-304800">
               <a:spcBef>
                 <a:spcPts val="0"/>
               </a:spcBef>
@@ -5024,7 +5350,7 @@
               <a:buChar char="■"/>
               <a:defRPr sz="1200"/>
             </a:lvl3pPr>
-            <a:lvl4pPr indent="-304800" lvl="3" marL="1828800">
+            <a:lvl4pPr marL="1828800" lvl="3" indent="-304800">
               <a:spcBef>
                 <a:spcPts val="0"/>
               </a:spcBef>
@@ -5035,7 +5361,7 @@
               <a:buChar char="●"/>
               <a:defRPr sz="1200"/>
             </a:lvl4pPr>
-            <a:lvl5pPr indent="-304800" lvl="4" marL="2286000">
+            <a:lvl5pPr marL="2286000" lvl="4" indent="-304800">
               <a:spcBef>
                 <a:spcPts val="0"/>
               </a:spcBef>
@@ -5046,7 +5372,7 @@
               <a:buChar char="○"/>
               <a:defRPr sz="1200"/>
             </a:lvl5pPr>
-            <a:lvl6pPr indent="-304800" lvl="5" marL="2743200">
+            <a:lvl6pPr marL="2743200" lvl="5" indent="-304800">
               <a:spcBef>
                 <a:spcPts val="0"/>
               </a:spcBef>
@@ -5057,7 +5383,7 @@
               <a:buChar char="■"/>
               <a:defRPr sz="1200"/>
             </a:lvl6pPr>
-            <a:lvl7pPr indent="-304800" lvl="6" marL="3200400">
+            <a:lvl7pPr marL="3200400" lvl="6" indent="-304800">
               <a:spcBef>
                 <a:spcPts val="0"/>
               </a:spcBef>
@@ -5068,7 +5394,7 @@
               <a:buChar char="●"/>
               <a:defRPr sz="1200"/>
             </a:lvl7pPr>
-            <a:lvl8pPr indent="-304800" lvl="7" marL="3657600">
+            <a:lvl8pPr marL="3657600" lvl="7" indent="-304800">
               <a:spcBef>
                 <a:spcPts val="0"/>
               </a:spcBef>
@@ -5079,7 +5405,7 @@
               <a:buChar char="○"/>
               <a:defRPr sz="1200"/>
             </a:lvl8pPr>
-            <a:lvl9pPr indent="-304800" lvl="8" marL="4114800">
+            <a:lvl9pPr marL="4114800" lvl="8" indent="-304800">
               <a:spcBef>
                 <a:spcPts val="0"/>
               </a:spcBef>
@@ -5091,15 +5417,19 @@
               <a:defRPr sz="1200"/>
             </a:lvl9pPr>
           </a:lstStyle>
-          <a:p/>
+          <a:p>
+            <a:endParaRPr/>
+          </a:p>
         </p:txBody>
       </p:sp>
       <p:sp>
         <p:nvSpPr>
           <p:cNvPr id="42" name="Google Shape;42;p5"/>
-          <p:cNvSpPr txBox="1"/>
+          <p:cNvSpPr txBox="1">
+            <a:spLocks noGrp="1"/>
+          </p:cNvSpPr>
           <p:nvPr>
-            <p:ph idx="12" type="sldNum"/>
+            <p:ph type="sldNum" idx="12"/>
           </p:nvPr>
         </p:nvSpPr>
         <p:spPr>
@@ -5112,7 +5442,7 @@
           </a:prstGeom>
         </p:spPr>
         <p:txBody>
-          <a:bodyPr anchorCtr="0" anchor="ctr" bIns="91425" lIns="91425" spcFirstLastPara="1" rIns="91425" wrap="square" tIns="91425">
+          <a:bodyPr spcFirstLastPara="1" wrap="square" lIns="91425" tIns="91425" rIns="91425" bIns="91425" anchor="ctr" anchorCtr="0">
             <a:normAutofit/>
           </a:bodyPr>
           <a:lstStyle>
@@ -5190,7 +5520,7 @@
             </a:lvl9pPr>
           </a:lstStyle>
           <a:p>
-            <a:pPr indent="0" lvl="0" marL="0" rtl="0" algn="r">
+            <a:pPr marL="0" lvl="0" indent="0" algn="r" rtl="0">
               <a:spcBef>
                 <a:spcPts val="0"/>
               </a:spcBef>
@@ -5216,11 +5546,11 @@
 </file>
 
 <file path=ppt/slideLayouts/slideLayout5.xml><?xml version="1.0" encoding="utf-8"?>
-<p:sldLayout xmlns:a="http://schemas.openxmlformats.org/drawingml/2006/main" xmlns:r="http://schemas.openxmlformats.org/officeDocument/2006/relationships" xmlns:mc="http://schemas.openxmlformats.org/markup-compatibility/2006" xmlns:mv="urn:schemas-microsoft-com:mac:vml" xmlns:p="http://schemas.openxmlformats.org/presentationml/2006/main" xmlns:c="http://schemas.openxmlformats.org/drawingml/2006/chart" xmlns:dgm="http://schemas.openxmlformats.org/drawingml/2006/diagram" xmlns:o="urn:schemas-microsoft-com:office:office" xmlns:v="urn:schemas-microsoft-com:vml" xmlns:pvml="urn:schemas-microsoft-com:office:powerpoint" xmlns:com="http://schemas.openxmlformats.org/drawingml/2006/compatibility" xmlns:p14="http://schemas.microsoft.com/office/powerpoint/2010/main" xmlns:p15="http://schemas.microsoft.com/office/powerpoint/2012/main" xmlns:ahyp="http://schemas.microsoft.com/office/drawing/2018/hyperlinkcolor" matchingName="Title only" type="titleOnly">
+<p:sldLayout xmlns:a="http://schemas.openxmlformats.org/drawingml/2006/main" xmlns:r="http://schemas.openxmlformats.org/officeDocument/2006/relationships" xmlns:p="http://schemas.openxmlformats.org/presentationml/2006/main" matchingName="Title only" type="titleOnly">
   <p:cSld name="TITLE_ONLY">
     <p:spTree>
       <p:nvGrpSpPr>
-        <p:cNvPr id="43" name="Shape 43"/>
+        <p:cNvPr id="1" name="Shape 43"/>
         <p:cNvGrpSpPr/>
         <p:nvPr/>
       </p:nvGrpSpPr>
@@ -5235,7 +5565,9 @@
       <p:sp>
         <p:nvSpPr>
           <p:cNvPr id="44" name="Google Shape;44;p6"/>
-          <p:cNvSpPr txBox="1"/>
+          <p:cNvSpPr txBox="1">
+            <a:spLocks noGrp="1"/>
+          </p:cNvSpPr>
           <p:nvPr>
             <p:ph type="title"/>
           </p:nvPr>
@@ -5250,7 +5582,7 @@
           </a:prstGeom>
         </p:spPr>
         <p:txBody>
-          <a:bodyPr anchorCtr="0" anchor="t" bIns="91425" lIns="91425" spcFirstLastPara="1" rIns="91425" wrap="square" tIns="91425">
+          <a:bodyPr spcFirstLastPara="1" wrap="square" lIns="91425" tIns="91425" rIns="91425" bIns="91425" anchor="t" anchorCtr="0">
             <a:normAutofit/>
           </a:bodyPr>
           <a:lstStyle>
@@ -5354,15 +5686,19 @@
               <a:defRPr/>
             </a:lvl9pPr>
           </a:lstStyle>
-          <a:p/>
+          <a:p>
+            <a:endParaRPr/>
+          </a:p>
         </p:txBody>
       </p:sp>
       <p:sp>
         <p:nvSpPr>
           <p:cNvPr id="45" name="Google Shape;45;p6"/>
-          <p:cNvSpPr txBox="1"/>
+          <p:cNvSpPr txBox="1">
+            <a:spLocks noGrp="1"/>
+          </p:cNvSpPr>
           <p:nvPr>
-            <p:ph idx="12" type="sldNum"/>
+            <p:ph type="sldNum" idx="12"/>
           </p:nvPr>
         </p:nvSpPr>
         <p:spPr>
@@ -5375,7 +5711,7 @@
           </a:prstGeom>
         </p:spPr>
         <p:txBody>
-          <a:bodyPr anchorCtr="0" anchor="ctr" bIns="91425" lIns="91425" spcFirstLastPara="1" rIns="91425" wrap="square" tIns="91425">
+          <a:bodyPr spcFirstLastPara="1" wrap="square" lIns="91425" tIns="91425" rIns="91425" bIns="91425" anchor="ctr" anchorCtr="0">
             <a:normAutofit/>
           </a:bodyPr>
           <a:lstStyle>
@@ -5453,7 +5789,7 @@
             </a:lvl9pPr>
           </a:lstStyle>
           <a:p>
-            <a:pPr indent="0" lvl="0" marL="0" rtl="0" algn="r">
+            <a:pPr marL="0" lvl="0" indent="0" algn="r" rtl="0">
               <a:spcBef>
                 <a:spcPts val="0"/>
               </a:spcBef>
@@ -5479,11 +5815,11 @@
 </file>
 
 <file path=ppt/slideLayouts/slideLayout6.xml><?xml version="1.0" encoding="utf-8"?>
-<p:sldLayout xmlns:a="http://schemas.openxmlformats.org/drawingml/2006/main" xmlns:r="http://schemas.openxmlformats.org/officeDocument/2006/relationships" xmlns:mc="http://schemas.openxmlformats.org/markup-compatibility/2006" xmlns:mv="urn:schemas-microsoft-com:mac:vml" xmlns:p="http://schemas.openxmlformats.org/presentationml/2006/main" xmlns:c="http://schemas.openxmlformats.org/drawingml/2006/chart" xmlns:dgm="http://schemas.openxmlformats.org/drawingml/2006/diagram" xmlns:o="urn:schemas-microsoft-com:office:office" xmlns:v="urn:schemas-microsoft-com:vml" xmlns:pvml="urn:schemas-microsoft-com:office:powerpoint" xmlns:com="http://schemas.openxmlformats.org/drawingml/2006/compatibility" xmlns:p14="http://schemas.microsoft.com/office/powerpoint/2010/main" xmlns:p15="http://schemas.microsoft.com/office/powerpoint/2012/main" xmlns:ahyp="http://schemas.microsoft.com/office/drawing/2018/hyperlinkcolor" matchingName="One column text">
+<p:sldLayout xmlns:a="http://schemas.openxmlformats.org/drawingml/2006/main" xmlns:r="http://schemas.openxmlformats.org/officeDocument/2006/relationships" xmlns:p="http://schemas.openxmlformats.org/presentationml/2006/main" matchingName="One column text">
   <p:cSld name="ONE_COLUMN_TEXT">
     <p:spTree>
       <p:nvGrpSpPr>
-        <p:cNvPr id="46" name="Shape 46"/>
+        <p:cNvPr id="1" name="Shape 46"/>
         <p:cNvGrpSpPr/>
         <p:nvPr/>
       </p:nvGrpSpPr>
@@ -5498,7 +5834,9 @@
       <p:sp>
         <p:nvSpPr>
           <p:cNvPr id="47" name="Google Shape;47;p7"/>
-          <p:cNvSpPr txBox="1"/>
+          <p:cNvSpPr txBox="1">
+            <a:spLocks noGrp="1"/>
+          </p:cNvSpPr>
           <p:nvPr>
             <p:ph type="title"/>
           </p:nvPr>
@@ -5513,7 +5851,7 @@
           </a:prstGeom>
         </p:spPr>
         <p:txBody>
-          <a:bodyPr anchorCtr="0" anchor="b" bIns="91425" lIns="91425" spcFirstLastPara="1" rIns="91425" wrap="square" tIns="91425">
+          <a:bodyPr spcFirstLastPara="1" wrap="square" lIns="91425" tIns="91425" rIns="91425" bIns="91425" anchor="b" anchorCtr="0">
             <a:normAutofit/>
           </a:bodyPr>
           <a:lstStyle>
@@ -5617,15 +5955,19 @@
               <a:defRPr sz="2400"/>
             </a:lvl9pPr>
           </a:lstStyle>
-          <a:p/>
+          <a:p>
+            <a:endParaRPr/>
+          </a:p>
         </p:txBody>
       </p:sp>
       <p:sp>
         <p:nvSpPr>
           <p:cNvPr id="48" name="Google Shape;48;p7"/>
-          <p:cNvSpPr txBox="1"/>
+          <p:cNvSpPr txBox="1">
+            <a:spLocks noGrp="1"/>
+          </p:cNvSpPr>
           <p:nvPr>
-            <p:ph idx="1" type="body"/>
+            <p:ph type="body" idx="1"/>
           </p:nvPr>
         </p:nvSpPr>
         <p:spPr>
@@ -5638,11 +5980,11 @@
           </a:prstGeom>
         </p:spPr>
         <p:txBody>
-          <a:bodyPr anchorCtr="0" anchor="t" bIns="91425" lIns="91425" spcFirstLastPara="1" rIns="91425" wrap="square" tIns="91425">
+          <a:bodyPr spcFirstLastPara="1" wrap="square" lIns="91425" tIns="91425" rIns="91425" bIns="91425" anchor="t" anchorCtr="0">
             <a:normAutofit/>
           </a:bodyPr>
           <a:lstStyle>
-            <a:lvl1pPr indent="-304800" lvl="0" marL="457200">
+            <a:lvl1pPr marL="457200" lvl="0" indent="-304800">
               <a:spcBef>
                 <a:spcPts val="0"/>
               </a:spcBef>
@@ -5653,7 +5995,7 @@
               <a:buChar char="●"/>
               <a:defRPr sz="1200"/>
             </a:lvl1pPr>
-            <a:lvl2pPr indent="-304800" lvl="1" marL="914400">
+            <a:lvl2pPr marL="914400" lvl="1" indent="-304800">
               <a:spcBef>
                 <a:spcPts val="0"/>
               </a:spcBef>
@@ -5664,7 +6006,7 @@
               <a:buChar char="○"/>
               <a:defRPr sz="1200"/>
             </a:lvl2pPr>
-            <a:lvl3pPr indent="-304800" lvl="2" marL="1371600">
+            <a:lvl3pPr marL="1371600" lvl="2" indent="-304800">
               <a:spcBef>
                 <a:spcPts val="0"/>
               </a:spcBef>
@@ -5675,7 +6017,7 @@
               <a:buChar char="■"/>
               <a:defRPr sz="1200"/>
             </a:lvl3pPr>
-            <a:lvl4pPr indent="-304800" lvl="3" marL="1828800">
+            <a:lvl4pPr marL="1828800" lvl="3" indent="-304800">
               <a:spcBef>
                 <a:spcPts val="0"/>
               </a:spcBef>
@@ -5686,7 +6028,7 @@
               <a:buChar char="●"/>
               <a:defRPr sz="1200"/>
             </a:lvl4pPr>
-            <a:lvl5pPr indent="-304800" lvl="4" marL="2286000">
+            <a:lvl5pPr marL="2286000" lvl="4" indent="-304800">
               <a:spcBef>
                 <a:spcPts val="0"/>
               </a:spcBef>
@@ -5697,7 +6039,7 @@
               <a:buChar char="○"/>
               <a:defRPr sz="1200"/>
             </a:lvl5pPr>
-            <a:lvl6pPr indent="-304800" lvl="5" marL="2743200">
+            <a:lvl6pPr marL="2743200" lvl="5" indent="-304800">
               <a:spcBef>
                 <a:spcPts val="0"/>
               </a:spcBef>
@@ -5708,7 +6050,7 @@
               <a:buChar char="■"/>
               <a:defRPr sz="1200"/>
             </a:lvl6pPr>
-            <a:lvl7pPr indent="-304800" lvl="6" marL="3200400">
+            <a:lvl7pPr marL="3200400" lvl="6" indent="-304800">
               <a:spcBef>
                 <a:spcPts val="0"/>
               </a:spcBef>
@@ -5719,7 +6061,7 @@
               <a:buChar char="●"/>
               <a:defRPr sz="1200"/>
             </a:lvl7pPr>
-            <a:lvl8pPr indent="-304800" lvl="7" marL="3657600">
+            <a:lvl8pPr marL="3657600" lvl="7" indent="-304800">
               <a:spcBef>
                 <a:spcPts val="0"/>
               </a:spcBef>
@@ -5730,7 +6072,7 @@
               <a:buChar char="○"/>
               <a:defRPr sz="1200"/>
             </a:lvl8pPr>
-            <a:lvl9pPr indent="-304800" lvl="8" marL="4114800">
+            <a:lvl9pPr marL="4114800" lvl="8" indent="-304800">
               <a:spcBef>
                 <a:spcPts val="0"/>
               </a:spcBef>
@@ -5742,15 +6084,19 @@
               <a:defRPr sz="1200"/>
             </a:lvl9pPr>
           </a:lstStyle>
-          <a:p/>
+          <a:p>
+            <a:endParaRPr/>
+          </a:p>
         </p:txBody>
       </p:sp>
       <p:sp>
         <p:nvSpPr>
           <p:cNvPr id="49" name="Google Shape;49;p7"/>
-          <p:cNvSpPr txBox="1"/>
+          <p:cNvSpPr txBox="1">
+            <a:spLocks noGrp="1"/>
+          </p:cNvSpPr>
           <p:nvPr>
-            <p:ph idx="12" type="sldNum"/>
+            <p:ph type="sldNum" idx="12"/>
           </p:nvPr>
         </p:nvSpPr>
         <p:spPr>
@@ -5763,7 +6109,7 @@
           </a:prstGeom>
         </p:spPr>
         <p:txBody>
-          <a:bodyPr anchorCtr="0" anchor="ctr" bIns="91425" lIns="91425" spcFirstLastPara="1" rIns="91425" wrap="square" tIns="91425">
+          <a:bodyPr spcFirstLastPara="1" wrap="square" lIns="91425" tIns="91425" rIns="91425" bIns="91425" anchor="ctr" anchorCtr="0">
             <a:normAutofit/>
           </a:bodyPr>
           <a:lstStyle>
@@ -5841,7 +6187,7 @@
             </a:lvl9pPr>
           </a:lstStyle>
           <a:p>
-            <a:pPr indent="0" lvl="0" marL="0" rtl="0" algn="r">
+            <a:pPr marL="0" lvl="0" indent="0" algn="r" rtl="0">
               <a:spcBef>
                 <a:spcPts val="0"/>
               </a:spcBef>
@@ -5867,18 +6213,19 @@
 </file>
 
 <file path=ppt/slideLayouts/slideLayout7.xml><?xml version="1.0" encoding="utf-8"?>
-<p:sldLayout xmlns:a="http://schemas.openxmlformats.org/drawingml/2006/main" xmlns:r="http://schemas.openxmlformats.org/officeDocument/2006/relationships" xmlns:mc="http://schemas.openxmlformats.org/markup-compatibility/2006" xmlns:mv="urn:schemas-microsoft-com:mac:vml" xmlns:p="http://schemas.openxmlformats.org/presentationml/2006/main" xmlns:c="http://schemas.openxmlformats.org/drawingml/2006/chart" xmlns:dgm="http://schemas.openxmlformats.org/drawingml/2006/diagram" xmlns:o="urn:schemas-microsoft-com:office:office" xmlns:v="urn:schemas-microsoft-com:vml" xmlns:pvml="urn:schemas-microsoft-com:office:powerpoint" xmlns:com="http://schemas.openxmlformats.org/drawingml/2006/compatibility" xmlns:p14="http://schemas.microsoft.com/office/powerpoint/2010/main" xmlns:p15="http://schemas.microsoft.com/office/powerpoint/2012/main" xmlns:ahyp="http://schemas.microsoft.com/office/drawing/2018/hyperlinkcolor" matchingName="Main point">
+<p:sldLayout xmlns:a="http://schemas.openxmlformats.org/drawingml/2006/main" xmlns:r="http://schemas.openxmlformats.org/officeDocument/2006/relationships" xmlns:p="http://schemas.openxmlformats.org/presentationml/2006/main" matchingName="Main point">
   <p:cSld name="MAIN_POINT">
     <p:bg>
       <p:bgPr>
         <a:solidFill>
           <a:schemeClr val="accent4"/>
         </a:solidFill>
+        <a:effectLst/>
       </p:bgPr>
     </p:bg>
     <p:spTree>
       <p:nvGrpSpPr>
-        <p:cNvPr id="50" name="Shape 50"/>
+        <p:cNvPr id="1" name="Shape 50"/>
         <p:cNvGrpSpPr/>
         <p:nvPr/>
       </p:nvGrpSpPr>
@@ -5926,12 +6273,12 @@
             </a:ln>
           </p:spPr>
           <p:txBody>
-            <a:bodyPr anchorCtr="0" anchor="ctr" bIns="91425" lIns="91425" spcFirstLastPara="1" rIns="91425" wrap="square" tIns="91425">
+            <a:bodyPr spcFirstLastPara="1" wrap="square" lIns="91425" tIns="91425" rIns="91425" bIns="91425" anchor="ctr" anchorCtr="0">
               <a:noAutofit/>
             </a:bodyPr>
             <a:lstStyle/>
             <a:p>
-              <a:pPr indent="0" lvl="0" marL="0" rtl="0" algn="l">
+              <a:pPr marL="0" lvl="0" indent="0" algn="l" rtl="0">
                 <a:spcBef>
                   <a:spcPts val="0"/>
                 </a:spcBef>
@@ -5940,9 +6287,6 @@
                 </a:spcAft>
                 <a:buNone/>
               </a:pPr>
-              <a:r>
-                <a:t/>
-              </a:r>
               <a:endParaRPr/>
             </a:p>
           </p:txBody>
@@ -5969,12 +6313,12 @@
             </a:ln>
           </p:spPr>
           <p:txBody>
-            <a:bodyPr anchorCtr="0" anchor="ctr" bIns="91425" lIns="91425" spcFirstLastPara="1" rIns="91425" wrap="square" tIns="91425">
+            <a:bodyPr spcFirstLastPara="1" wrap="square" lIns="91425" tIns="91425" rIns="91425" bIns="91425" anchor="ctr" anchorCtr="0">
               <a:noAutofit/>
             </a:bodyPr>
             <a:lstStyle/>
             <a:p>
-              <a:pPr indent="0" lvl="0" marL="0" rtl="0" algn="l">
+              <a:pPr marL="0" lvl="0" indent="0" algn="l" rtl="0">
                 <a:spcBef>
                   <a:spcPts val="0"/>
                 </a:spcBef>
@@ -5983,9 +6327,6 @@
                 </a:spcAft>
                 <a:buNone/>
               </a:pPr>
-              <a:r>
-                <a:t/>
-              </a:r>
               <a:endParaRPr/>
             </a:p>
           </p:txBody>
@@ -5997,7 +6338,7 @@
             <p:nvPr/>
           </p:nvSpPr>
           <p:spPr>
-            <a:xfrm flipH="1" rot="10800000">
+            <a:xfrm rot="10800000" flipH="1">
               <a:off x="7113588" y="107"/>
               <a:ext cx="1015200" cy="1015200"/>
             </a:xfrm>
@@ -6012,12 +6353,12 @@
             </a:ln>
           </p:spPr>
           <p:txBody>
-            <a:bodyPr anchorCtr="0" anchor="ctr" bIns="91425" lIns="91425" spcFirstLastPara="1" rIns="91425" wrap="square" tIns="91425">
+            <a:bodyPr spcFirstLastPara="1" wrap="square" lIns="91425" tIns="91425" rIns="91425" bIns="91425" anchor="ctr" anchorCtr="0">
               <a:noAutofit/>
             </a:bodyPr>
             <a:lstStyle/>
             <a:p>
-              <a:pPr indent="0" lvl="0" marL="0" rtl="0" algn="l">
+              <a:pPr marL="0" lvl="0" indent="0" algn="l" rtl="0">
                 <a:spcBef>
                   <a:spcPts val="0"/>
                 </a:spcBef>
@@ -6026,9 +6367,6 @@
                 </a:spcAft>
                 <a:buNone/>
               </a:pPr>
-              <a:r>
-                <a:t/>
-              </a:r>
               <a:endParaRPr/>
             </a:p>
           </p:txBody>
@@ -6055,12 +6393,12 @@
             </a:ln>
           </p:spPr>
           <p:txBody>
-            <a:bodyPr anchorCtr="0" anchor="ctr" bIns="91425" lIns="91425" spcFirstLastPara="1" rIns="91425" wrap="square" tIns="91425">
+            <a:bodyPr spcFirstLastPara="1" wrap="square" lIns="91425" tIns="91425" rIns="91425" bIns="91425" anchor="ctr" anchorCtr="0">
               <a:noAutofit/>
             </a:bodyPr>
             <a:lstStyle/>
             <a:p>
-              <a:pPr indent="0" lvl="0" marL="0" rtl="0" algn="l">
+              <a:pPr marL="0" lvl="0" indent="0" algn="l" rtl="0">
                 <a:spcBef>
                   <a:spcPts val="0"/>
                 </a:spcBef>
@@ -6069,9 +6407,6 @@
                 </a:spcAft>
                 <a:buNone/>
               </a:pPr>
-              <a:r>
-                <a:t/>
-              </a:r>
               <a:endParaRPr/>
             </a:p>
           </p:txBody>
@@ -6098,12 +6433,12 @@
             </a:ln>
           </p:spPr>
           <p:txBody>
-            <a:bodyPr anchorCtr="0" anchor="ctr" bIns="91425" lIns="91425" spcFirstLastPara="1" rIns="91425" wrap="square" tIns="91425">
+            <a:bodyPr spcFirstLastPara="1" wrap="square" lIns="91425" tIns="91425" rIns="91425" bIns="91425" anchor="ctr" anchorCtr="0">
               <a:noAutofit/>
             </a:bodyPr>
             <a:lstStyle/>
             <a:p>
-              <a:pPr indent="0" lvl="0" marL="0" rtl="0" algn="l">
+              <a:pPr marL="0" lvl="0" indent="0" algn="l" rtl="0">
                 <a:spcBef>
                   <a:spcPts val="0"/>
                 </a:spcBef>
@@ -6112,9 +6447,6 @@
                 </a:spcAft>
                 <a:buNone/>
               </a:pPr>
-              <a:r>
-                <a:t/>
-              </a:r>
               <a:endParaRPr/>
             </a:p>
           </p:txBody>
@@ -6123,7 +6455,9 @@
       <p:sp>
         <p:nvSpPr>
           <p:cNvPr id="57" name="Google Shape;57;p8"/>
-          <p:cNvSpPr txBox="1"/>
+          <p:cNvSpPr txBox="1">
+            <a:spLocks noGrp="1"/>
+          </p:cNvSpPr>
           <p:nvPr>
             <p:ph type="title"/>
           </p:nvPr>
@@ -6138,7 +6472,7 @@
           </a:prstGeom>
         </p:spPr>
         <p:txBody>
-          <a:bodyPr anchorCtr="0" anchor="ctr" bIns="91425" lIns="91425" spcFirstLastPara="1" rIns="91425" wrap="square" tIns="91425">
+          <a:bodyPr spcFirstLastPara="1" wrap="square" lIns="91425" tIns="91425" rIns="91425" bIns="91425" anchor="ctr" anchorCtr="0">
             <a:normAutofit/>
           </a:bodyPr>
           <a:lstStyle>
@@ -6305,15 +6639,19 @@
               </a:defRPr>
             </a:lvl9pPr>
           </a:lstStyle>
-          <a:p/>
+          <a:p>
+            <a:endParaRPr/>
+          </a:p>
         </p:txBody>
       </p:sp>
       <p:sp>
         <p:nvSpPr>
           <p:cNvPr id="58" name="Google Shape;58;p8"/>
-          <p:cNvSpPr txBox="1"/>
+          <p:cNvSpPr txBox="1">
+            <a:spLocks noGrp="1"/>
+          </p:cNvSpPr>
           <p:nvPr>
-            <p:ph idx="12" type="sldNum"/>
+            <p:ph type="sldNum" idx="12"/>
           </p:nvPr>
         </p:nvSpPr>
         <p:spPr>
@@ -6326,7 +6664,7 @@
           </a:prstGeom>
         </p:spPr>
         <p:txBody>
-          <a:bodyPr anchorCtr="0" anchor="ctr" bIns="91425" lIns="91425" spcFirstLastPara="1" rIns="91425" wrap="square" tIns="91425">
+          <a:bodyPr spcFirstLastPara="1" wrap="square" lIns="91425" tIns="91425" rIns="91425" bIns="91425" anchor="ctr" anchorCtr="0">
             <a:normAutofit/>
           </a:bodyPr>
           <a:lstStyle>
@@ -6368,7 +6706,7 @@
             </a:lvl9pPr>
           </a:lstStyle>
           <a:p>
-            <a:pPr indent="0" lvl="0" marL="0" rtl="0" algn="r">
+            <a:pPr marL="0" lvl="0" indent="0" algn="r" rtl="0">
               <a:spcBef>
                 <a:spcPts val="0"/>
               </a:spcBef>
@@ -6394,11 +6732,11 @@
 </file>
 
 <file path=ppt/slideLayouts/slideLayout8.xml><?xml version="1.0" encoding="utf-8"?>
-<p:sldLayout xmlns:a="http://schemas.openxmlformats.org/drawingml/2006/main" xmlns:r="http://schemas.openxmlformats.org/officeDocument/2006/relationships" xmlns:mc="http://schemas.openxmlformats.org/markup-compatibility/2006" xmlns:mv="urn:schemas-microsoft-com:mac:vml" xmlns:p="http://schemas.openxmlformats.org/presentationml/2006/main" xmlns:c="http://schemas.openxmlformats.org/drawingml/2006/chart" xmlns:dgm="http://schemas.openxmlformats.org/drawingml/2006/diagram" xmlns:o="urn:schemas-microsoft-com:office:office" xmlns:v="urn:schemas-microsoft-com:vml" xmlns:pvml="urn:schemas-microsoft-com:office:powerpoint" xmlns:com="http://schemas.openxmlformats.org/drawingml/2006/compatibility" xmlns:p14="http://schemas.microsoft.com/office/powerpoint/2010/main" xmlns:p15="http://schemas.microsoft.com/office/powerpoint/2012/main" xmlns:ahyp="http://schemas.microsoft.com/office/drawing/2018/hyperlinkcolor" matchingName="Section title and description">
+<p:sldLayout xmlns:a="http://schemas.openxmlformats.org/drawingml/2006/main" xmlns:r="http://schemas.openxmlformats.org/officeDocument/2006/relationships" xmlns:p="http://schemas.openxmlformats.org/presentationml/2006/main" matchingName="Section title and description">
   <p:cSld name="SECTION_TITLE_AND_DESCRIPTION">
     <p:spTree>
       <p:nvGrpSpPr>
-        <p:cNvPr id="59" name="Shape 59"/>
+        <p:cNvPr id="1" name="Shape 59"/>
         <p:cNvGrpSpPr/>
         <p:nvPr/>
       </p:nvGrpSpPr>
@@ -6432,12 +6770,12 @@
           </a:ln>
         </p:spPr>
         <p:txBody>
-          <a:bodyPr anchorCtr="0" anchor="ctr" bIns="91425" lIns="91425" spcFirstLastPara="1" rIns="91425" wrap="square" tIns="91425">
+          <a:bodyPr spcFirstLastPara="1" wrap="square" lIns="91425" tIns="91425" rIns="91425" bIns="91425" anchor="ctr" anchorCtr="0">
             <a:noAutofit/>
           </a:bodyPr>
           <a:lstStyle/>
           <a:p>
-            <a:pPr indent="0" lvl="0" marL="0" rtl="0" algn="l">
+            <a:pPr marL="0" lvl="0" indent="0" algn="l" rtl="0">
               <a:spcBef>
                 <a:spcPts val="0"/>
               </a:spcBef>
@@ -6446,9 +6784,6 @@
               </a:spcAft>
               <a:buNone/>
             </a:pPr>
-            <a:r>
-              <a:t/>
-            </a:r>
             <a:endParaRPr/>
           </a:p>
         </p:txBody>
@@ -6468,21 +6803,23 @@
             <a:avLst/>
           </a:prstGeom>
           <a:noFill/>
-          <a:ln cap="flat" cmpd="sng" w="19050">
+          <a:ln w="19050" cap="flat" cmpd="sng">
             <a:solidFill>
               <a:schemeClr val="lt1"/>
             </a:solidFill>
             <a:prstDash val="solid"/>
             <a:round/>
-            <a:headEnd len="sm" w="sm" type="none"/>
-            <a:tailEnd len="sm" w="sm" type="none"/>
+            <a:headEnd type="none" w="sm" len="sm"/>
+            <a:tailEnd type="none" w="sm" len="sm"/>
           </a:ln>
         </p:spPr>
       </p:cxnSp>
       <p:sp>
         <p:nvSpPr>
           <p:cNvPr id="62" name="Google Shape;62;p9"/>
-          <p:cNvSpPr txBox="1"/>
+          <p:cNvSpPr txBox="1">
+            <a:spLocks noGrp="1"/>
+          </p:cNvSpPr>
           <p:nvPr>
             <p:ph type="title"/>
           </p:nvPr>
@@ -6497,7 +6834,7 @@
           </a:prstGeom>
         </p:spPr>
         <p:txBody>
-          <a:bodyPr anchorCtr="0" anchor="b" bIns="91425" lIns="91425" spcFirstLastPara="1" rIns="91425" wrap="square" tIns="91425">
+          <a:bodyPr spcFirstLastPara="1" wrap="square" lIns="91425" tIns="91425" rIns="91425" bIns="91425" anchor="b" anchorCtr="0">
             <a:normAutofit/>
           </a:bodyPr>
           <a:lstStyle>
@@ -6601,15 +6938,19 @@
               <a:defRPr sz="4200"/>
             </a:lvl9pPr>
           </a:lstStyle>
-          <a:p/>
+          <a:p>
+            <a:endParaRPr/>
+          </a:p>
         </p:txBody>
       </p:sp>
       <p:sp>
         <p:nvSpPr>
           <p:cNvPr id="63" name="Google Shape;63;p9"/>
-          <p:cNvSpPr txBox="1"/>
+          <p:cNvSpPr txBox="1">
+            <a:spLocks noGrp="1"/>
+          </p:cNvSpPr>
           <p:nvPr>
-            <p:ph idx="1" type="subTitle"/>
+            <p:ph type="subTitle" idx="1"/>
           </p:nvPr>
         </p:nvSpPr>
         <p:spPr>
@@ -6622,7 +6963,7 @@
           </a:prstGeom>
         </p:spPr>
         <p:txBody>
-          <a:bodyPr anchorCtr="0" anchor="t" bIns="91425" lIns="91425" spcFirstLastPara="1" rIns="91425" wrap="square" tIns="91425">
+          <a:bodyPr spcFirstLastPara="1" wrap="square" lIns="91425" tIns="91425" rIns="91425" bIns="91425" anchor="t" anchorCtr="0">
             <a:normAutofit/>
           </a:bodyPr>
           <a:lstStyle>
@@ -6753,15 +7094,19 @@
               <a:defRPr sz="2100"/>
             </a:lvl9pPr>
           </a:lstStyle>
-          <a:p/>
+          <a:p>
+            <a:endParaRPr/>
+          </a:p>
         </p:txBody>
       </p:sp>
       <p:sp>
         <p:nvSpPr>
           <p:cNvPr id="64" name="Google Shape;64;p9"/>
-          <p:cNvSpPr txBox="1"/>
+          <p:cNvSpPr txBox="1">
+            <a:spLocks noGrp="1"/>
+          </p:cNvSpPr>
           <p:nvPr>
-            <p:ph idx="2" type="body"/>
+            <p:ph type="body" idx="2"/>
           </p:nvPr>
         </p:nvSpPr>
         <p:spPr>
@@ -6774,11 +7119,11 @@
           </a:prstGeom>
         </p:spPr>
         <p:txBody>
-          <a:bodyPr anchorCtr="0" anchor="ctr" bIns="91425" lIns="91425" spcFirstLastPara="1" rIns="91425" wrap="square" tIns="91425">
+          <a:bodyPr spcFirstLastPara="1" wrap="square" lIns="91425" tIns="91425" rIns="91425" bIns="91425" anchor="ctr" anchorCtr="0">
             <a:normAutofit/>
           </a:bodyPr>
           <a:lstStyle>
-            <a:lvl1pPr indent="-342900" lvl="0" marL="457200">
+            <a:lvl1pPr marL="457200" lvl="0" indent="-342900">
               <a:spcBef>
                 <a:spcPts val="0"/>
               </a:spcBef>
@@ -6796,7 +7141,7 @@
                 </a:solidFill>
               </a:defRPr>
             </a:lvl1pPr>
-            <a:lvl2pPr indent="-317500" lvl="1" marL="914400">
+            <a:lvl2pPr marL="914400" lvl="1" indent="-317500">
               <a:spcBef>
                 <a:spcPts val="0"/>
               </a:spcBef>
@@ -6814,7 +7159,7 @@
                 </a:solidFill>
               </a:defRPr>
             </a:lvl2pPr>
-            <a:lvl3pPr indent="-317500" lvl="2" marL="1371600">
+            <a:lvl3pPr marL="1371600" lvl="2" indent="-317500">
               <a:spcBef>
                 <a:spcPts val="0"/>
               </a:spcBef>
@@ -6832,7 +7177,7 @@
                 </a:solidFill>
               </a:defRPr>
             </a:lvl3pPr>
-            <a:lvl4pPr indent="-317500" lvl="3" marL="1828800">
+            <a:lvl4pPr marL="1828800" lvl="3" indent="-317500">
               <a:spcBef>
                 <a:spcPts val="0"/>
               </a:spcBef>
@@ -6850,7 +7195,7 @@
                 </a:solidFill>
               </a:defRPr>
             </a:lvl4pPr>
-            <a:lvl5pPr indent="-317500" lvl="4" marL="2286000">
+            <a:lvl5pPr marL="2286000" lvl="4" indent="-317500">
               <a:spcBef>
                 <a:spcPts val="0"/>
               </a:spcBef>
@@ -6868,7 +7213,7 @@
                 </a:solidFill>
               </a:defRPr>
             </a:lvl5pPr>
-            <a:lvl6pPr indent="-317500" lvl="5" marL="2743200">
+            <a:lvl6pPr marL="2743200" lvl="5" indent="-317500">
               <a:spcBef>
                 <a:spcPts val="0"/>
               </a:spcBef>
@@ -6886,7 +7231,7 @@
                 </a:solidFill>
               </a:defRPr>
             </a:lvl6pPr>
-            <a:lvl7pPr indent="-317500" lvl="6" marL="3200400">
+            <a:lvl7pPr marL="3200400" lvl="6" indent="-317500">
               <a:spcBef>
                 <a:spcPts val="0"/>
               </a:spcBef>
@@ -6904,7 +7249,7 @@
                 </a:solidFill>
               </a:defRPr>
             </a:lvl7pPr>
-            <a:lvl8pPr indent="-317500" lvl="7" marL="3657600">
+            <a:lvl8pPr marL="3657600" lvl="7" indent="-317500">
               <a:spcBef>
                 <a:spcPts val="0"/>
               </a:spcBef>
@@ -6922,7 +7267,7 @@
                 </a:solidFill>
               </a:defRPr>
             </a:lvl8pPr>
-            <a:lvl9pPr indent="-317500" lvl="8" marL="4114800">
+            <a:lvl9pPr marL="4114800" lvl="8" indent="-317500">
               <a:spcBef>
                 <a:spcPts val="0"/>
               </a:spcBef>
@@ -6941,15 +7286,19 @@
               </a:defRPr>
             </a:lvl9pPr>
           </a:lstStyle>
-          <a:p/>
+          <a:p>
+            <a:endParaRPr/>
+          </a:p>
         </p:txBody>
       </p:sp>
       <p:sp>
         <p:nvSpPr>
           <p:cNvPr id="65" name="Google Shape;65;p9"/>
-          <p:cNvSpPr txBox="1"/>
+          <p:cNvSpPr txBox="1">
+            <a:spLocks noGrp="1"/>
+          </p:cNvSpPr>
           <p:nvPr>
-            <p:ph idx="12" type="sldNum"/>
+            <p:ph type="sldNum" idx="12"/>
           </p:nvPr>
         </p:nvSpPr>
         <p:spPr>
@@ -6962,7 +7311,7 @@
           </a:prstGeom>
         </p:spPr>
         <p:txBody>
-          <a:bodyPr anchorCtr="0" anchor="ctr" bIns="91425" lIns="91425" spcFirstLastPara="1" rIns="91425" wrap="square" tIns="91425">
+          <a:bodyPr spcFirstLastPara="1" wrap="square" lIns="91425" tIns="91425" rIns="91425" bIns="91425" anchor="ctr" anchorCtr="0">
             <a:normAutofit/>
           </a:bodyPr>
           <a:lstStyle>
@@ -7004,7 +7353,7 @@
             </a:lvl9pPr>
           </a:lstStyle>
           <a:p>
-            <a:pPr indent="0" lvl="0" marL="0" rtl="0" algn="r">
+            <a:pPr marL="0" lvl="0" indent="0" algn="r" rtl="0">
               <a:spcBef>
                 <a:spcPts val="0"/>
               </a:spcBef>
@@ -7030,11 +7379,11 @@
 </file>
 
 <file path=ppt/slideLayouts/slideLayout9.xml><?xml version="1.0" encoding="utf-8"?>
-<p:sldLayout xmlns:a="http://schemas.openxmlformats.org/drawingml/2006/main" xmlns:r="http://schemas.openxmlformats.org/officeDocument/2006/relationships" xmlns:mc="http://schemas.openxmlformats.org/markup-compatibility/2006" xmlns:mv="urn:schemas-microsoft-com:mac:vml" xmlns:p="http://schemas.openxmlformats.org/presentationml/2006/main" xmlns:c="http://schemas.openxmlformats.org/drawingml/2006/chart" xmlns:dgm="http://schemas.openxmlformats.org/drawingml/2006/diagram" xmlns:o="urn:schemas-microsoft-com:office:office" xmlns:v="urn:schemas-microsoft-com:vml" xmlns:pvml="urn:schemas-microsoft-com:office:powerpoint" xmlns:com="http://schemas.openxmlformats.org/drawingml/2006/compatibility" xmlns:p14="http://schemas.microsoft.com/office/powerpoint/2010/main" xmlns:p15="http://schemas.microsoft.com/office/powerpoint/2012/main" xmlns:ahyp="http://schemas.microsoft.com/office/drawing/2018/hyperlinkcolor" matchingName="Caption">
+<p:sldLayout xmlns:a="http://schemas.openxmlformats.org/drawingml/2006/main" xmlns:r="http://schemas.openxmlformats.org/officeDocument/2006/relationships" xmlns:p="http://schemas.openxmlformats.org/presentationml/2006/main" matchingName="Caption">
   <p:cSld name="CAPTION_ONLY">
     <p:spTree>
       <p:nvGrpSpPr>
-        <p:cNvPr id="66" name="Shape 66"/>
+        <p:cNvPr id="1" name="Shape 66"/>
         <p:cNvGrpSpPr/>
         <p:nvPr/>
       </p:nvGrpSpPr>
@@ -7049,9 +7398,11 @@
       <p:sp>
         <p:nvSpPr>
           <p:cNvPr id="67" name="Google Shape;67;p10"/>
-          <p:cNvSpPr txBox="1"/>
+          <p:cNvSpPr txBox="1">
+            <a:spLocks noGrp="1"/>
+          </p:cNvSpPr>
           <p:nvPr>
-            <p:ph idx="1" type="body"/>
+            <p:ph type="body" idx="1"/>
           </p:nvPr>
         </p:nvSpPr>
         <p:spPr>
@@ -7064,11 +7415,11 @@
           </a:prstGeom>
         </p:spPr>
         <p:txBody>
-          <a:bodyPr anchorCtr="0" anchor="ctr" bIns="91425" lIns="91425" spcFirstLastPara="1" rIns="91425" wrap="square" tIns="91425">
+          <a:bodyPr spcFirstLastPara="1" wrap="square" lIns="91425" tIns="91425" rIns="91425" bIns="91425" anchor="ctr" anchorCtr="0">
             <a:normAutofit/>
           </a:bodyPr>
           <a:lstStyle>
-            <a:lvl1pPr indent="-228600" lvl="0" marL="457200">
+            <a:lvl1pPr marL="457200" lvl="0" indent="-228600">
               <a:lnSpc>
                 <a:spcPct val="100000"/>
               </a:lnSpc>
@@ -7083,15 +7434,19 @@
               <a:defRPr/>
             </a:lvl1pPr>
           </a:lstStyle>
-          <a:p/>
+          <a:p>
+            <a:endParaRPr/>
+          </a:p>
         </p:txBody>
       </p:sp>
       <p:sp>
         <p:nvSpPr>
           <p:cNvPr id="68" name="Google Shape;68;p10"/>
-          <p:cNvSpPr txBox="1"/>
+          <p:cNvSpPr txBox="1">
+            <a:spLocks noGrp="1"/>
+          </p:cNvSpPr>
           <p:nvPr>
-            <p:ph idx="12" type="sldNum"/>
+            <p:ph type="sldNum" idx="12"/>
           </p:nvPr>
         </p:nvSpPr>
         <p:spPr>
@@ -7104,7 +7459,7 @@
           </a:prstGeom>
         </p:spPr>
         <p:txBody>
-          <a:bodyPr anchorCtr="0" anchor="ctr" bIns="91425" lIns="91425" spcFirstLastPara="1" rIns="91425" wrap="square" tIns="91425">
+          <a:bodyPr spcFirstLastPara="1" wrap="square" lIns="91425" tIns="91425" rIns="91425" bIns="91425" anchor="ctr" anchorCtr="0">
             <a:normAutofit/>
           </a:bodyPr>
           <a:lstStyle>
@@ -7182,7 +7537,7 @@
             </a:lvl9pPr>
           </a:lstStyle>
           <a:p>
-            <a:pPr indent="0" lvl="0" marL="0" rtl="0" algn="r">
+            <a:pPr marL="0" lvl="0" indent="0" algn="r" rtl="0">
               <a:spcBef>
                 <a:spcPts val="0"/>
               </a:spcBef>
@@ -7208,18 +7563,19 @@
 </file>
 
 <file path=ppt/slideMasters/slideMaster1.xml><?xml version="1.0" encoding="utf-8"?>
-<p:sldMaster xmlns:a="http://schemas.openxmlformats.org/drawingml/2006/main" xmlns:r="http://schemas.openxmlformats.org/officeDocument/2006/relationships" xmlns:mc="http://schemas.openxmlformats.org/markup-compatibility/2006" xmlns:mv="urn:schemas-microsoft-com:mac:vml" xmlns:p="http://schemas.openxmlformats.org/presentationml/2006/main" xmlns:c="http://schemas.openxmlformats.org/drawingml/2006/chart" xmlns:dgm="http://schemas.openxmlformats.org/drawingml/2006/diagram" xmlns:o="urn:schemas-microsoft-com:office:office" xmlns:v="urn:schemas-microsoft-com:vml" xmlns:pvml="urn:schemas-microsoft-com:office:powerpoint" xmlns:com="http://schemas.openxmlformats.org/drawingml/2006/compatibility" xmlns:p14="http://schemas.microsoft.com/office/powerpoint/2010/main" xmlns:p15="http://schemas.microsoft.com/office/powerpoint/2012/main" xmlns:ahyp="http://schemas.microsoft.com/office/drawing/2018/hyperlinkcolor">
+<p:sldMaster xmlns:a="http://schemas.openxmlformats.org/drawingml/2006/main" xmlns:r="http://schemas.openxmlformats.org/officeDocument/2006/relationships" xmlns:p="http://schemas.openxmlformats.org/presentationml/2006/main">
   <p:cSld name="geometric">
     <p:bg>
       <p:bgPr>
         <a:solidFill>
           <a:schemeClr val="lt1"/>
         </a:solidFill>
+        <a:effectLst/>
       </p:bgPr>
     </p:bg>
     <p:spTree>
       <p:nvGrpSpPr>
-        <p:cNvPr id="5" name="Shape 5"/>
+        <p:cNvPr id="1" name="Shape 5"/>
         <p:cNvGrpSpPr/>
         <p:nvPr/>
       </p:nvGrpSpPr>
@@ -7234,7 +7590,9 @@
       <p:sp>
         <p:nvSpPr>
           <p:cNvPr id="6" name="Google Shape;6;p1"/>
-          <p:cNvSpPr txBox="1"/>
+          <p:cNvSpPr txBox="1">
+            <a:spLocks noGrp="1"/>
+          </p:cNvSpPr>
           <p:nvPr>
             <p:ph type="title"/>
           </p:nvPr>
@@ -7253,7 +7611,7 @@
           </a:ln>
         </p:spPr>
         <p:txBody>
-          <a:bodyPr anchorCtr="0" anchor="t" bIns="91425" lIns="91425" spcFirstLastPara="1" rIns="91425" wrap="square" tIns="91425">
+          <a:bodyPr spcFirstLastPara="1" wrap="square" lIns="91425" tIns="91425" rIns="91425" bIns="91425" anchor="t" anchorCtr="0">
             <a:normAutofit/>
           </a:bodyPr>
           <a:lstStyle>
@@ -7465,15 +7823,19 @@
               </a:defRPr>
             </a:lvl9pPr>
           </a:lstStyle>
-          <a:p/>
+          <a:p>
+            <a:endParaRPr/>
+          </a:p>
         </p:txBody>
       </p:sp>
       <p:sp>
         <p:nvSpPr>
           <p:cNvPr id="7" name="Google Shape;7;p1"/>
-          <p:cNvSpPr txBox="1"/>
+          <p:cNvSpPr txBox="1">
+            <a:spLocks noGrp="1"/>
+          </p:cNvSpPr>
           <p:nvPr>
-            <p:ph idx="1" type="body"/>
+            <p:ph type="body" idx="1"/>
           </p:nvPr>
         </p:nvSpPr>
         <p:spPr>
@@ -7490,11 +7852,11 @@
           </a:ln>
         </p:spPr>
         <p:txBody>
-          <a:bodyPr anchorCtr="0" anchor="t" bIns="91425" lIns="91425" spcFirstLastPara="1" rIns="91425" wrap="square" tIns="91425">
+          <a:bodyPr spcFirstLastPara="1" wrap="square" lIns="91425" tIns="91425" rIns="91425" bIns="91425" anchor="t" anchorCtr="0">
             <a:normAutofit/>
           </a:bodyPr>
           <a:lstStyle>
-            <a:lvl1pPr indent="-342900" lvl="0" marL="457200">
+            <a:lvl1pPr marL="457200" lvl="0" indent="-342900">
               <a:lnSpc>
                 <a:spcPct val="115000"/>
               </a:lnSpc>
@@ -7520,7 +7882,7 @@
                 <a:sym typeface="Roboto"/>
               </a:defRPr>
             </a:lvl1pPr>
-            <a:lvl2pPr indent="-317500" lvl="1" marL="914400">
+            <a:lvl2pPr marL="914400" lvl="1" indent="-317500">
               <a:lnSpc>
                 <a:spcPct val="115000"/>
               </a:lnSpc>
@@ -7546,7 +7908,7 @@
                 <a:sym typeface="Roboto"/>
               </a:defRPr>
             </a:lvl2pPr>
-            <a:lvl3pPr indent="-317500" lvl="2" marL="1371600">
+            <a:lvl3pPr marL="1371600" lvl="2" indent="-317500">
               <a:lnSpc>
                 <a:spcPct val="115000"/>
               </a:lnSpc>
@@ -7572,7 +7934,7 @@
                 <a:sym typeface="Roboto"/>
               </a:defRPr>
             </a:lvl3pPr>
-            <a:lvl4pPr indent="-317500" lvl="3" marL="1828800">
+            <a:lvl4pPr marL="1828800" lvl="3" indent="-317500">
               <a:lnSpc>
                 <a:spcPct val="115000"/>
               </a:lnSpc>
@@ -7598,7 +7960,7 @@
                 <a:sym typeface="Roboto"/>
               </a:defRPr>
             </a:lvl4pPr>
-            <a:lvl5pPr indent="-317500" lvl="4" marL="2286000">
+            <a:lvl5pPr marL="2286000" lvl="4" indent="-317500">
               <a:lnSpc>
                 <a:spcPct val="115000"/>
               </a:lnSpc>
@@ -7624,7 +7986,7 @@
                 <a:sym typeface="Roboto"/>
               </a:defRPr>
             </a:lvl5pPr>
-            <a:lvl6pPr indent="-317500" lvl="5" marL="2743200">
+            <a:lvl6pPr marL="2743200" lvl="5" indent="-317500">
               <a:lnSpc>
                 <a:spcPct val="115000"/>
               </a:lnSpc>
@@ -7650,7 +8012,7 @@
                 <a:sym typeface="Roboto"/>
               </a:defRPr>
             </a:lvl6pPr>
-            <a:lvl7pPr indent="-317500" lvl="6" marL="3200400">
+            <a:lvl7pPr marL="3200400" lvl="6" indent="-317500">
               <a:lnSpc>
                 <a:spcPct val="115000"/>
               </a:lnSpc>
@@ -7676,7 +8038,7 @@
                 <a:sym typeface="Roboto"/>
               </a:defRPr>
             </a:lvl7pPr>
-            <a:lvl8pPr indent="-317500" lvl="7" marL="3657600">
+            <a:lvl8pPr marL="3657600" lvl="7" indent="-317500">
               <a:lnSpc>
                 <a:spcPct val="115000"/>
               </a:lnSpc>
@@ -7702,7 +8064,7 @@
                 <a:sym typeface="Roboto"/>
               </a:defRPr>
             </a:lvl8pPr>
-            <a:lvl9pPr indent="-317500" lvl="8" marL="4114800">
+            <a:lvl9pPr marL="4114800" lvl="8" indent="-317500">
               <a:lnSpc>
                 <a:spcPct val="115000"/>
               </a:lnSpc>
@@ -7729,15 +8091,19 @@
               </a:defRPr>
             </a:lvl9pPr>
           </a:lstStyle>
-          <a:p/>
+          <a:p>
+            <a:endParaRPr/>
+          </a:p>
         </p:txBody>
       </p:sp>
       <p:sp>
         <p:nvSpPr>
           <p:cNvPr id="8" name="Google Shape;8;p1"/>
-          <p:cNvSpPr txBox="1"/>
+          <p:cNvSpPr txBox="1">
+            <a:spLocks noGrp="1"/>
+          </p:cNvSpPr>
           <p:nvPr>
-            <p:ph idx="12" type="sldNum"/>
+            <p:ph type="sldNum" idx="12"/>
           </p:nvPr>
         </p:nvSpPr>
         <p:spPr>
@@ -7754,7 +8120,7 @@
           </a:ln>
         </p:spPr>
         <p:txBody>
-          <a:bodyPr anchorCtr="0" anchor="ctr" bIns="91425" lIns="91425" spcFirstLastPara="1" rIns="91425" wrap="square" tIns="91425">
+          <a:bodyPr spcFirstLastPara="1" wrap="square" lIns="91425" tIns="91425" rIns="91425" bIns="91425" anchor="ctr" anchorCtr="0">
             <a:normAutofit/>
           </a:bodyPr>
           <a:lstStyle>
@@ -7868,7 +8234,7 @@
             </a:lvl9pPr>
           </a:lstStyle>
           <a:p>
-            <a:pPr indent="0" lvl="0" marL="0" rtl="0" algn="r">
+            <a:pPr marL="0" lvl="0" indent="0" algn="r" rtl="0">
               <a:spcBef>
                 <a:spcPts val="0"/>
               </a:spcBef>
@@ -7887,7 +8253,7 @@
       </p:sp>
     </p:spTree>
   </p:cSld>
-  <p:clrMap accent1="accent1" accent2="accent2" accent3="accent3" accent4="accent4" accent5="accent5" accent6="accent6" bg1="lt1" bg2="dk2" tx1="dk1" tx2="lt2" folHlink="folHlink" hlink="hlink"/>
+  <p:clrMap bg1="lt1" tx1="dk1" bg2="dk2" tx2="lt2" accent1="accent1" accent2="accent2" accent3="accent3" accent4="accent4" accent5="accent5" accent6="accent6" hlink="hlink" folHlink="folHlink"/>
   <p:sldLayoutIdLst>
     <p:sldLayoutId id="2147483648" r:id="rId1"/>
     <p:sldLayoutId id="2147483649" r:id="rId2"/>
@@ -7901,10 +8267,10 @@
     <p:sldLayoutId id="2147483657" r:id="rId10"/>
     <p:sldLayoutId id="2147483658" r:id="rId11"/>
   </p:sldLayoutIdLst>
-  <p:hf dt="0" ftr="0" hdr="0" sldNum="0"/>
+  <p:hf sldNum="0" hdr="0" ftr="0" dt="0"/>
   <p:txStyles>
     <p:titleStyle>
-      <a:defPPr lvl="0" marR="0" rtl="0" algn="l">
+      <a:defPPr marR="0" lvl="0" algn="l" rtl="0">
         <a:lnSpc>
           <a:spcPct val="100000"/>
         </a:lnSpc>
@@ -7915,7 +8281,7 @@
           <a:spcPts val="0"/>
         </a:spcAft>
       </a:defPPr>
-      <a:lvl1pPr lvl="0" marR="0" rtl="0" algn="l">
+      <a:lvl1pPr marR="0" lvl="0" algn="l" rtl="0">
         <a:lnSpc>
           <a:spcPct val="100000"/>
         </a:lnSpc>
@@ -7929,7 +8295,7 @@
           <a:srgbClr val="000000"/>
         </a:buClr>
         <a:buFont typeface="Arial"/>
-        <a:defRPr b="0" i="0" sz="1400" u="none" cap="none" strike="noStrike">
+        <a:defRPr sz="1400" b="0" i="0" u="none" strike="noStrike" cap="none">
           <a:solidFill>
             <a:srgbClr val="000000"/>
           </a:solidFill>
@@ -7939,7 +8305,7 @@
           <a:sym typeface="Arial"/>
         </a:defRPr>
       </a:lvl1pPr>
-      <a:lvl2pPr lvl="1" marR="0" rtl="0" algn="l">
+      <a:lvl2pPr marR="0" lvl="1" algn="l" rtl="0">
         <a:lnSpc>
           <a:spcPct val="100000"/>
         </a:lnSpc>
@@ -7953,7 +8319,7 @@
           <a:srgbClr val="000000"/>
         </a:buClr>
         <a:buFont typeface="Arial"/>
-        <a:defRPr b="0" i="0" sz="1400" u="none" cap="none" strike="noStrike">
+        <a:defRPr sz="1400" b="0" i="0" u="none" strike="noStrike" cap="none">
           <a:solidFill>
             <a:srgbClr val="000000"/>
           </a:solidFill>
@@ -7963,7 +8329,7 @@
           <a:sym typeface="Arial"/>
         </a:defRPr>
       </a:lvl2pPr>
-      <a:lvl3pPr lvl="2" marR="0" rtl="0" algn="l">
+      <a:lvl3pPr marR="0" lvl="2" algn="l" rtl="0">
         <a:lnSpc>
           <a:spcPct val="100000"/>
         </a:lnSpc>
@@ -7977,7 +8343,7 @@
           <a:srgbClr val="000000"/>
         </a:buClr>
         <a:buFont typeface="Arial"/>
-        <a:defRPr b="0" i="0" sz="1400" u="none" cap="none" strike="noStrike">
+        <a:defRPr sz="1400" b="0" i="0" u="none" strike="noStrike" cap="none">
           <a:solidFill>
             <a:srgbClr val="000000"/>
           </a:solidFill>
@@ -7987,7 +8353,7 @@
           <a:sym typeface="Arial"/>
         </a:defRPr>
       </a:lvl3pPr>
-      <a:lvl4pPr lvl="3" marR="0" rtl="0" algn="l">
+      <a:lvl4pPr marR="0" lvl="3" algn="l" rtl="0">
         <a:lnSpc>
           <a:spcPct val="100000"/>
         </a:lnSpc>
@@ -8001,7 +8367,7 @@
           <a:srgbClr val="000000"/>
         </a:buClr>
         <a:buFont typeface="Arial"/>
-        <a:defRPr b="0" i="0" sz="1400" u="none" cap="none" strike="noStrike">
+        <a:defRPr sz="1400" b="0" i="0" u="none" strike="noStrike" cap="none">
           <a:solidFill>
             <a:srgbClr val="000000"/>
           </a:solidFill>
@@ -8011,7 +8377,7 @@
           <a:sym typeface="Arial"/>
         </a:defRPr>
       </a:lvl4pPr>
-      <a:lvl5pPr lvl="4" marR="0" rtl="0" algn="l">
+      <a:lvl5pPr marR="0" lvl="4" algn="l" rtl="0">
         <a:lnSpc>
           <a:spcPct val="100000"/>
         </a:lnSpc>
@@ -8025,7 +8391,7 @@
           <a:srgbClr val="000000"/>
         </a:buClr>
         <a:buFont typeface="Arial"/>
-        <a:defRPr b="0" i="0" sz="1400" u="none" cap="none" strike="noStrike">
+        <a:defRPr sz="1400" b="0" i="0" u="none" strike="noStrike" cap="none">
           <a:solidFill>
             <a:srgbClr val="000000"/>
           </a:solidFill>
@@ -8035,7 +8401,7 @@
           <a:sym typeface="Arial"/>
         </a:defRPr>
       </a:lvl5pPr>
-      <a:lvl6pPr lvl="5" marR="0" rtl="0" algn="l">
+      <a:lvl6pPr marR="0" lvl="5" algn="l" rtl="0">
         <a:lnSpc>
           <a:spcPct val="100000"/>
         </a:lnSpc>
@@ -8049,7 +8415,7 @@
           <a:srgbClr val="000000"/>
         </a:buClr>
         <a:buFont typeface="Arial"/>
-        <a:defRPr b="0" i="0" sz="1400" u="none" cap="none" strike="noStrike">
+        <a:defRPr sz="1400" b="0" i="0" u="none" strike="noStrike" cap="none">
           <a:solidFill>
             <a:srgbClr val="000000"/>
           </a:solidFill>
@@ -8059,7 +8425,7 @@
           <a:sym typeface="Arial"/>
         </a:defRPr>
       </a:lvl6pPr>
-      <a:lvl7pPr lvl="6" marR="0" rtl="0" algn="l">
+      <a:lvl7pPr marR="0" lvl="6" algn="l" rtl="0">
         <a:lnSpc>
           <a:spcPct val="100000"/>
         </a:lnSpc>
@@ -8073,7 +8439,7 @@
           <a:srgbClr val="000000"/>
         </a:buClr>
         <a:buFont typeface="Arial"/>
-        <a:defRPr b="0" i="0" sz="1400" u="none" cap="none" strike="noStrike">
+        <a:defRPr sz="1400" b="0" i="0" u="none" strike="noStrike" cap="none">
           <a:solidFill>
             <a:srgbClr val="000000"/>
           </a:solidFill>
@@ -8083,7 +8449,7 @@
           <a:sym typeface="Arial"/>
         </a:defRPr>
       </a:lvl7pPr>
-      <a:lvl8pPr lvl="7" marR="0" rtl="0" algn="l">
+      <a:lvl8pPr marR="0" lvl="7" algn="l" rtl="0">
         <a:lnSpc>
           <a:spcPct val="100000"/>
         </a:lnSpc>
@@ -8097,7 +8463,7 @@
           <a:srgbClr val="000000"/>
         </a:buClr>
         <a:buFont typeface="Arial"/>
-        <a:defRPr b="0" i="0" sz="1400" u="none" cap="none" strike="noStrike">
+        <a:defRPr sz="1400" b="0" i="0" u="none" strike="noStrike" cap="none">
           <a:solidFill>
             <a:srgbClr val="000000"/>
           </a:solidFill>
@@ -8107,7 +8473,7 @@
           <a:sym typeface="Arial"/>
         </a:defRPr>
       </a:lvl8pPr>
-      <a:lvl9pPr lvl="8" marR="0" rtl="0" algn="l">
+      <a:lvl9pPr marR="0" lvl="8" algn="l" rtl="0">
         <a:lnSpc>
           <a:spcPct val="100000"/>
         </a:lnSpc>
@@ -8121,7 +8487,7 @@
           <a:srgbClr val="000000"/>
         </a:buClr>
         <a:buFont typeface="Arial"/>
-        <a:defRPr b="0" i="0" sz="1400" u="none" cap="none" strike="noStrike">
+        <a:defRPr sz="1400" b="0" i="0" u="none" strike="noStrike" cap="none">
           <a:solidFill>
             <a:srgbClr val="000000"/>
           </a:solidFill>
@@ -8133,7 +8499,7 @@
       </a:lvl9pPr>
     </p:titleStyle>
     <p:bodyStyle>
-      <a:defPPr lvl="0" marR="0" rtl="0" algn="l">
+      <a:defPPr marR="0" lvl="0" algn="l" rtl="0">
         <a:lnSpc>
           <a:spcPct val="100000"/>
         </a:lnSpc>
@@ -8144,7 +8510,7 @@
           <a:spcPts val="0"/>
         </a:spcAft>
       </a:defPPr>
-      <a:lvl1pPr lvl="0" marR="0" rtl="0" algn="l">
+      <a:lvl1pPr marR="0" lvl="0" algn="l" rtl="0">
         <a:lnSpc>
           <a:spcPct val="100000"/>
         </a:lnSpc>
@@ -8158,7 +8524,7 @@
           <a:srgbClr val="000000"/>
         </a:buClr>
         <a:buFont typeface="Arial"/>
-        <a:defRPr b="0" i="0" sz="1400" u="none" cap="none" strike="noStrike">
+        <a:defRPr sz="1400" b="0" i="0" u="none" strike="noStrike" cap="none">
           <a:solidFill>
             <a:srgbClr val="000000"/>
           </a:solidFill>
@@ -8168,7 +8534,7 @@
           <a:sym typeface="Arial"/>
         </a:defRPr>
       </a:lvl1pPr>
-      <a:lvl2pPr lvl="1" marR="0" rtl="0" algn="l">
+      <a:lvl2pPr marR="0" lvl="1" algn="l" rtl="0">
         <a:lnSpc>
           <a:spcPct val="100000"/>
         </a:lnSpc>
@@ -8182,7 +8548,7 @@
           <a:srgbClr val="000000"/>
         </a:buClr>
         <a:buFont typeface="Arial"/>
-        <a:defRPr b="0" i="0" sz="1400" u="none" cap="none" strike="noStrike">
+        <a:defRPr sz="1400" b="0" i="0" u="none" strike="noStrike" cap="none">
           <a:solidFill>
             <a:srgbClr val="000000"/>
           </a:solidFill>
@@ -8192,7 +8558,7 @@
           <a:sym typeface="Arial"/>
         </a:defRPr>
       </a:lvl2pPr>
-      <a:lvl3pPr lvl="2" marR="0" rtl="0" algn="l">
+      <a:lvl3pPr marR="0" lvl="2" algn="l" rtl="0">
         <a:lnSpc>
           <a:spcPct val="100000"/>
         </a:lnSpc>
@@ -8206,7 +8572,7 @@
           <a:srgbClr val="000000"/>
         </a:buClr>
         <a:buFont typeface="Arial"/>
-        <a:defRPr b="0" i="0" sz="1400" u="none" cap="none" strike="noStrike">
+        <a:defRPr sz="1400" b="0" i="0" u="none" strike="noStrike" cap="none">
           <a:solidFill>
             <a:srgbClr val="000000"/>
           </a:solidFill>
@@ -8216,7 +8582,7 @@
           <a:sym typeface="Arial"/>
         </a:defRPr>
       </a:lvl3pPr>
-      <a:lvl4pPr lvl="3" marR="0" rtl="0" algn="l">
+      <a:lvl4pPr marR="0" lvl="3" algn="l" rtl="0">
         <a:lnSpc>
           <a:spcPct val="100000"/>
         </a:lnSpc>
@@ -8230,7 +8596,7 @@
           <a:srgbClr val="000000"/>
         </a:buClr>
         <a:buFont typeface="Arial"/>
-        <a:defRPr b="0" i="0" sz="1400" u="none" cap="none" strike="noStrike">
+        <a:defRPr sz="1400" b="0" i="0" u="none" strike="noStrike" cap="none">
           <a:solidFill>
             <a:srgbClr val="000000"/>
           </a:solidFill>
@@ -8240,7 +8606,7 @@
           <a:sym typeface="Arial"/>
         </a:defRPr>
       </a:lvl4pPr>
-      <a:lvl5pPr lvl="4" marR="0" rtl="0" algn="l">
+      <a:lvl5pPr marR="0" lvl="4" algn="l" rtl="0">
         <a:lnSpc>
           <a:spcPct val="100000"/>
         </a:lnSpc>
@@ -8254,7 +8620,7 @@
           <a:srgbClr val="000000"/>
         </a:buClr>
         <a:buFont typeface="Arial"/>
-        <a:defRPr b="0" i="0" sz="1400" u="none" cap="none" strike="noStrike">
+        <a:defRPr sz="1400" b="0" i="0" u="none" strike="noStrike" cap="none">
           <a:solidFill>
             <a:srgbClr val="000000"/>
           </a:solidFill>
@@ -8264,7 +8630,7 @@
           <a:sym typeface="Arial"/>
         </a:defRPr>
       </a:lvl5pPr>
-      <a:lvl6pPr lvl="5" marR="0" rtl="0" algn="l">
+      <a:lvl6pPr marR="0" lvl="5" algn="l" rtl="0">
         <a:lnSpc>
           <a:spcPct val="100000"/>
         </a:lnSpc>
@@ -8278,7 +8644,7 @@
           <a:srgbClr val="000000"/>
         </a:buClr>
         <a:buFont typeface="Arial"/>
-        <a:defRPr b="0" i="0" sz="1400" u="none" cap="none" strike="noStrike">
+        <a:defRPr sz="1400" b="0" i="0" u="none" strike="noStrike" cap="none">
           <a:solidFill>
             <a:srgbClr val="000000"/>
           </a:solidFill>
@@ -8288,7 +8654,7 @@
           <a:sym typeface="Arial"/>
         </a:defRPr>
       </a:lvl6pPr>
-      <a:lvl7pPr lvl="6" marR="0" rtl="0" algn="l">
+      <a:lvl7pPr marR="0" lvl="6" algn="l" rtl="0">
         <a:lnSpc>
           <a:spcPct val="100000"/>
         </a:lnSpc>
@@ -8302,7 +8668,7 @@
           <a:srgbClr val="000000"/>
         </a:buClr>
         <a:buFont typeface="Arial"/>
-        <a:defRPr b="0" i="0" sz="1400" u="none" cap="none" strike="noStrike">
+        <a:defRPr sz="1400" b="0" i="0" u="none" strike="noStrike" cap="none">
           <a:solidFill>
             <a:srgbClr val="000000"/>
           </a:solidFill>
@@ -8312,7 +8678,7 @@
           <a:sym typeface="Arial"/>
         </a:defRPr>
       </a:lvl7pPr>
-      <a:lvl8pPr lvl="7" marR="0" rtl="0" algn="l">
+      <a:lvl8pPr marR="0" lvl="7" algn="l" rtl="0">
         <a:lnSpc>
           <a:spcPct val="100000"/>
         </a:lnSpc>
@@ -8326,7 +8692,7 @@
           <a:srgbClr val="000000"/>
         </a:buClr>
         <a:buFont typeface="Arial"/>
-        <a:defRPr b="0" i="0" sz="1400" u="none" cap="none" strike="noStrike">
+        <a:defRPr sz="1400" b="0" i="0" u="none" strike="noStrike" cap="none">
           <a:solidFill>
             <a:srgbClr val="000000"/>
           </a:solidFill>
@@ -8336,7 +8702,7 @@
           <a:sym typeface="Arial"/>
         </a:defRPr>
       </a:lvl8pPr>
-      <a:lvl9pPr lvl="8" marR="0" rtl="0" algn="l">
+      <a:lvl9pPr marR="0" lvl="8" algn="l" rtl="0">
         <a:lnSpc>
           <a:spcPct val="100000"/>
         </a:lnSpc>
@@ -8350,7 +8716,7 @@
           <a:srgbClr val="000000"/>
         </a:buClr>
         <a:buFont typeface="Arial"/>
-        <a:defRPr b="0" i="0" sz="1400" u="none" cap="none" strike="noStrike">
+        <a:defRPr sz="1400" b="0" i="0" u="none" strike="noStrike" cap="none">
           <a:solidFill>
             <a:srgbClr val="000000"/>
           </a:solidFill>
@@ -8362,7 +8728,7 @@
       </a:lvl9pPr>
     </p:bodyStyle>
     <p:otherStyle>
-      <a:defPPr lvl="0" marR="0" rtl="0" algn="l">
+      <a:defPPr marR="0" lvl="0" algn="l" rtl="0">
         <a:lnSpc>
           <a:spcPct val="100000"/>
         </a:lnSpc>
@@ -8373,7 +8739,7 @@
           <a:spcPts val="0"/>
         </a:spcAft>
       </a:defPPr>
-      <a:lvl1pPr lvl="0" marR="0" rtl="0" algn="l">
+      <a:lvl1pPr marR="0" lvl="0" algn="l" rtl="0">
         <a:lnSpc>
           <a:spcPct val="100000"/>
         </a:lnSpc>
@@ -8387,7 +8753,7 @@
           <a:srgbClr val="000000"/>
         </a:buClr>
         <a:buFont typeface="Arial"/>
-        <a:defRPr b="0" i="0" sz="1400" u="none" cap="none" strike="noStrike">
+        <a:defRPr sz="1400" b="0" i="0" u="none" strike="noStrike" cap="none">
           <a:solidFill>
             <a:srgbClr val="000000"/>
           </a:solidFill>
@@ -8397,7 +8763,7 @@
           <a:sym typeface="Arial"/>
         </a:defRPr>
       </a:lvl1pPr>
-      <a:lvl2pPr lvl="1" marR="0" rtl="0" algn="l">
+      <a:lvl2pPr marR="0" lvl="1" algn="l" rtl="0">
         <a:lnSpc>
           <a:spcPct val="100000"/>
         </a:lnSpc>
@@ -8411,7 +8777,7 @@
           <a:srgbClr val="000000"/>
         </a:buClr>
         <a:buFont typeface="Arial"/>
-        <a:defRPr b="0" i="0" sz="1400" u="none" cap="none" strike="noStrike">
+        <a:defRPr sz="1400" b="0" i="0" u="none" strike="noStrike" cap="none">
           <a:solidFill>
             <a:srgbClr val="000000"/>
           </a:solidFill>
@@ -8421,7 +8787,7 @@
           <a:sym typeface="Arial"/>
         </a:defRPr>
       </a:lvl2pPr>
-      <a:lvl3pPr lvl="2" marR="0" rtl="0" algn="l">
+      <a:lvl3pPr marR="0" lvl="2" algn="l" rtl="0">
         <a:lnSpc>
           <a:spcPct val="100000"/>
         </a:lnSpc>
@@ -8435,7 +8801,7 @@
           <a:srgbClr val="000000"/>
         </a:buClr>
         <a:buFont typeface="Arial"/>
-        <a:defRPr b="0" i="0" sz="1400" u="none" cap="none" strike="noStrike">
+        <a:defRPr sz="1400" b="0" i="0" u="none" strike="noStrike" cap="none">
           <a:solidFill>
             <a:srgbClr val="000000"/>
           </a:solidFill>
@@ -8445,7 +8811,7 @@
           <a:sym typeface="Arial"/>
         </a:defRPr>
       </a:lvl3pPr>
-      <a:lvl4pPr lvl="3" marR="0" rtl="0" algn="l">
+      <a:lvl4pPr marR="0" lvl="3" algn="l" rtl="0">
         <a:lnSpc>
           <a:spcPct val="100000"/>
         </a:lnSpc>
@@ -8459,7 +8825,7 @@
           <a:srgbClr val="000000"/>
         </a:buClr>
         <a:buFont typeface="Arial"/>
-        <a:defRPr b="0" i="0" sz="1400" u="none" cap="none" strike="noStrike">
+        <a:defRPr sz="1400" b="0" i="0" u="none" strike="noStrike" cap="none">
           <a:solidFill>
             <a:srgbClr val="000000"/>
           </a:solidFill>
@@ -8469,7 +8835,7 @@
           <a:sym typeface="Arial"/>
         </a:defRPr>
       </a:lvl4pPr>
-      <a:lvl5pPr lvl="4" marR="0" rtl="0" algn="l">
+      <a:lvl5pPr marR="0" lvl="4" algn="l" rtl="0">
         <a:lnSpc>
           <a:spcPct val="100000"/>
         </a:lnSpc>
@@ -8483,7 +8849,7 @@
           <a:srgbClr val="000000"/>
         </a:buClr>
         <a:buFont typeface="Arial"/>
-        <a:defRPr b="0" i="0" sz="1400" u="none" cap="none" strike="noStrike">
+        <a:defRPr sz="1400" b="0" i="0" u="none" strike="noStrike" cap="none">
           <a:solidFill>
             <a:srgbClr val="000000"/>
           </a:solidFill>
@@ -8493,7 +8859,7 @@
           <a:sym typeface="Arial"/>
         </a:defRPr>
       </a:lvl5pPr>
-      <a:lvl6pPr lvl="5" marR="0" rtl="0" algn="l">
+      <a:lvl6pPr marR="0" lvl="5" algn="l" rtl="0">
         <a:lnSpc>
           <a:spcPct val="100000"/>
         </a:lnSpc>
@@ -8507,7 +8873,7 @@
           <a:srgbClr val="000000"/>
         </a:buClr>
         <a:buFont typeface="Arial"/>
-        <a:defRPr b="0" i="0" sz="1400" u="none" cap="none" strike="noStrike">
+        <a:defRPr sz="1400" b="0" i="0" u="none" strike="noStrike" cap="none">
           <a:solidFill>
             <a:srgbClr val="000000"/>
           </a:solidFill>
@@ -8517,7 +8883,7 @@
           <a:sym typeface="Arial"/>
         </a:defRPr>
       </a:lvl6pPr>
-      <a:lvl7pPr lvl="6" marR="0" rtl="0" algn="l">
+      <a:lvl7pPr marR="0" lvl="6" algn="l" rtl="0">
         <a:lnSpc>
           <a:spcPct val="100000"/>
         </a:lnSpc>
@@ -8531,7 +8897,7 @@
           <a:srgbClr val="000000"/>
         </a:buClr>
         <a:buFont typeface="Arial"/>
-        <a:defRPr b="0" i="0" sz="1400" u="none" cap="none" strike="noStrike">
+        <a:defRPr sz="1400" b="0" i="0" u="none" strike="noStrike" cap="none">
           <a:solidFill>
             <a:srgbClr val="000000"/>
           </a:solidFill>
@@ -8541,7 +8907,7 @@
           <a:sym typeface="Arial"/>
         </a:defRPr>
       </a:lvl7pPr>
-      <a:lvl8pPr lvl="7" marR="0" rtl="0" algn="l">
+      <a:lvl8pPr marR="0" lvl="7" algn="l" rtl="0">
         <a:lnSpc>
           <a:spcPct val="100000"/>
         </a:lnSpc>
@@ -8555,7 +8921,7 @@
           <a:srgbClr val="000000"/>
         </a:buClr>
         <a:buFont typeface="Arial"/>
-        <a:defRPr b="0" i="0" sz="1400" u="none" cap="none" strike="noStrike">
+        <a:defRPr sz="1400" b="0" i="0" u="none" strike="noStrike" cap="none">
           <a:solidFill>
             <a:srgbClr val="000000"/>
           </a:solidFill>
@@ -8565,7 +8931,7 @@
           <a:sym typeface="Arial"/>
         </a:defRPr>
       </a:lvl8pPr>
-      <a:lvl9pPr lvl="8" marR="0" rtl="0" algn="l">
+      <a:lvl9pPr marR="0" lvl="8" algn="l" rtl="0">
         <a:lnSpc>
           <a:spcPct val="100000"/>
         </a:lnSpc>
@@ -8579,7 +8945,7 @@
           <a:srgbClr val="000000"/>
         </a:buClr>
         <a:buFont typeface="Arial"/>
-        <a:defRPr b="0" i="0" sz="1400" u="none" cap="none" strike="noStrike">
+        <a:defRPr sz="1400" b="0" i="0" u="none" strike="noStrike" cap="none">
           <a:solidFill>
             <a:srgbClr val="000000"/>
           </a:solidFill>
@@ -8595,11 +8961,11 @@
 </file>
 
 <file path=ppt/slides/slide1.xml><?xml version="1.0" encoding="utf-8"?>
-<p:sld xmlns:a="http://schemas.openxmlformats.org/drawingml/2006/main" xmlns:r="http://schemas.openxmlformats.org/officeDocument/2006/relationships" xmlns:mc="http://schemas.openxmlformats.org/markup-compatibility/2006" xmlns:mv="urn:schemas-microsoft-com:mac:vml" xmlns:p="http://schemas.openxmlformats.org/presentationml/2006/main" xmlns:c="http://schemas.openxmlformats.org/drawingml/2006/chart" xmlns:dgm="http://schemas.openxmlformats.org/drawingml/2006/diagram" xmlns:o="urn:schemas-microsoft-com:office:office" xmlns:v="urn:schemas-microsoft-com:vml" xmlns:pvml="urn:schemas-microsoft-com:office:powerpoint" xmlns:com="http://schemas.openxmlformats.org/drawingml/2006/compatibility" xmlns:p14="http://schemas.microsoft.com/office/powerpoint/2010/main" xmlns:p15="http://schemas.microsoft.com/office/powerpoint/2012/main" xmlns:ahyp="http://schemas.microsoft.com/office/drawing/2018/hyperlinkcolor">
+<p:sld xmlns:a="http://schemas.openxmlformats.org/drawingml/2006/main" xmlns:r="http://schemas.openxmlformats.org/officeDocument/2006/relationships" xmlns:p="http://schemas.openxmlformats.org/presentationml/2006/main">
   <p:cSld>
     <p:spTree>
       <p:nvGrpSpPr>
-        <p:cNvPr id="84" name="Shape 84"/>
+        <p:cNvPr id="1" name="Shape 84"/>
         <p:cNvGrpSpPr/>
         <p:nvPr/>
       </p:nvGrpSpPr>
@@ -8614,7 +8980,9 @@
       <p:sp>
         <p:nvSpPr>
           <p:cNvPr id="85" name="Google Shape;85;p13"/>
-          <p:cNvSpPr txBox="1"/>
+          <p:cNvSpPr txBox="1">
+            <a:spLocks noGrp="1"/>
+          </p:cNvSpPr>
           <p:nvPr>
             <p:ph type="ctrTitle"/>
           </p:nvPr>
@@ -8629,12 +8997,12 @@
           </a:prstGeom>
         </p:spPr>
         <p:txBody>
-          <a:bodyPr anchorCtr="0" anchor="b" bIns="91425" lIns="91425" spcFirstLastPara="1" rIns="91425" wrap="square" tIns="91425">
+          <a:bodyPr spcFirstLastPara="1" wrap="square" lIns="91425" tIns="91425" rIns="91425" bIns="91425" anchor="b" anchorCtr="0">
             <a:normAutofit/>
           </a:bodyPr>
           <a:lstStyle/>
           <a:p>
-            <a:pPr indent="0" lvl="0" marL="0" rtl="0" algn="l">
+            <a:pPr marL="0" lvl="0" indent="0" algn="l" rtl="0">
               <a:spcBef>
                 <a:spcPts val="0"/>
               </a:spcBef>
@@ -8654,9 +9022,11 @@
       <p:sp>
         <p:nvSpPr>
           <p:cNvPr id="86" name="Google Shape;86;p13"/>
-          <p:cNvSpPr txBox="1"/>
+          <p:cNvSpPr txBox="1">
+            <a:spLocks noGrp="1"/>
+          </p:cNvSpPr>
           <p:nvPr>
-            <p:ph idx="1" type="subTitle"/>
+            <p:ph type="subTitle" idx="1"/>
           </p:nvPr>
         </p:nvSpPr>
         <p:spPr>
@@ -8669,12 +9039,12 @@
           </a:prstGeom>
         </p:spPr>
         <p:txBody>
-          <a:bodyPr anchorCtr="0" anchor="t" bIns="91425" lIns="91425" spcFirstLastPara="1" rIns="91425" wrap="square" tIns="91425">
+          <a:bodyPr spcFirstLastPara="1" wrap="square" lIns="91425" tIns="91425" rIns="91425" bIns="91425" anchor="t" anchorCtr="0">
             <a:normAutofit fontScale="47500" lnSpcReduction="20000"/>
           </a:bodyPr>
           <a:lstStyle/>
           <a:p>
-            <a:pPr indent="0" lvl="0" marL="0" rtl="0" algn="l">
+            <a:pPr marL="0" lvl="0" indent="0" algn="l" rtl="0">
               <a:spcBef>
                 <a:spcPts val="0"/>
               </a:spcBef>
@@ -8707,11 +9077,150 @@
 </file>
 
 <file path=ppt/slides/slide10.xml><?xml version="1.0" encoding="utf-8"?>
-<p:sld xmlns:a="http://schemas.openxmlformats.org/drawingml/2006/main" xmlns:r="http://schemas.openxmlformats.org/officeDocument/2006/relationships" xmlns:mc="http://schemas.openxmlformats.org/markup-compatibility/2006" xmlns:mv="urn:schemas-microsoft-com:mac:vml" xmlns:p="http://schemas.openxmlformats.org/presentationml/2006/main" xmlns:c="http://schemas.openxmlformats.org/drawingml/2006/chart" xmlns:dgm="http://schemas.openxmlformats.org/drawingml/2006/diagram" xmlns:o="urn:schemas-microsoft-com:office:office" xmlns:v="urn:schemas-microsoft-com:vml" xmlns:pvml="urn:schemas-microsoft-com:office:powerpoint" xmlns:com="http://schemas.openxmlformats.org/drawingml/2006/compatibility" xmlns:p14="http://schemas.microsoft.com/office/powerpoint/2010/main" xmlns:p15="http://schemas.microsoft.com/office/powerpoint/2012/main" xmlns:ahyp="http://schemas.microsoft.com/office/drawing/2018/hyperlinkcolor">
+<p:sld xmlns:a="http://schemas.openxmlformats.org/drawingml/2006/main" xmlns:r="http://schemas.openxmlformats.org/officeDocument/2006/relationships" xmlns:p="http://schemas.openxmlformats.org/presentationml/2006/main">
   <p:cSld>
     <p:spTree>
       <p:nvGrpSpPr>
-        <p:cNvPr id="138" name="Shape 138"/>
+        <p:cNvPr id="1" name="Shape 132"/>
+        <p:cNvGrpSpPr/>
+        <p:nvPr/>
+      </p:nvGrpSpPr>
+      <p:grpSpPr>
+        <a:xfrm>
+          <a:off x="0" y="0"/>
+          <a:ext cx="0" cy="0"/>
+          <a:chOff x="0" y="0"/>
+          <a:chExt cx="0" cy="0"/>
+        </a:xfrm>
+      </p:grpSpPr>
+      <p:sp>
+        <p:nvSpPr>
+          <p:cNvPr id="133" name="Google Shape;133;p21"/>
+          <p:cNvSpPr txBox="1">
+            <a:spLocks noGrp="1"/>
+          </p:cNvSpPr>
+          <p:nvPr>
+            <p:ph type="title"/>
+          </p:nvPr>
+        </p:nvSpPr>
+        <p:spPr>
+          <a:xfrm>
+            <a:off x="311700" y="410000"/>
+            <a:ext cx="8520600" cy="607800"/>
+          </a:xfrm>
+          <a:prstGeom prst="rect">
+            <a:avLst/>
+          </a:prstGeom>
+        </p:spPr>
+        <p:txBody>
+          <a:bodyPr spcFirstLastPara="1" wrap="square" lIns="91425" tIns="91425" rIns="91425" bIns="91425" anchor="t" anchorCtr="0">
+            <a:normAutofit fontScale="90000"/>
+          </a:bodyPr>
+          <a:lstStyle/>
+          <a:p>
+            <a:pPr marL="0" lvl="0" indent="0" algn="l" rtl="0">
+              <a:spcBef>
+                <a:spcPts val="0"/>
+              </a:spcBef>
+              <a:spcAft>
+                <a:spcPts val="0"/>
+              </a:spcAft>
+              <a:buNone/>
+            </a:pPr>
+            <a:r>
+              <a:rPr lang="hu"/>
+              <a:t>Kijelentkezés</a:t>
+            </a:r>
+            <a:endParaRPr/>
+          </a:p>
+        </p:txBody>
+      </p:sp>
+      <p:sp>
+        <p:nvSpPr>
+          <p:cNvPr id="134" name="Google Shape;134;p21"/>
+          <p:cNvSpPr txBox="1">
+            <a:spLocks noGrp="1"/>
+          </p:cNvSpPr>
+          <p:nvPr>
+            <p:ph type="body" idx="1"/>
+          </p:nvPr>
+        </p:nvSpPr>
+        <p:spPr>
+          <a:xfrm>
+            <a:off x="311700" y="1229875"/>
+            <a:ext cx="8520600" cy="3339000"/>
+          </a:xfrm>
+          <a:prstGeom prst="rect">
+            <a:avLst/>
+          </a:prstGeom>
+        </p:spPr>
+        <p:txBody>
+          <a:bodyPr spcFirstLastPara="1" wrap="square" lIns="91425" tIns="91425" rIns="91425" bIns="91425" anchor="t" anchorCtr="0">
+            <a:normAutofit/>
+          </a:bodyPr>
+          <a:lstStyle/>
+          <a:p>
+            <a:pPr marL="457200" lvl="0" indent="-342900" algn="l" rtl="0">
+              <a:spcBef>
+                <a:spcPts val="0"/>
+              </a:spcBef>
+              <a:spcAft>
+                <a:spcPts val="0"/>
+              </a:spcAft>
+              <a:buSzPts val="1800"/>
+              <a:buChar char="●"/>
+            </a:pPr>
+            <a:r>
+              <a:rPr lang="hu"/>
+              <a:t>A menüsorban gombnyomás hatására kijelentkeztet azonnal</a:t>
+            </a:r>
+            <a:endParaRPr/>
+          </a:p>
+          <a:p>
+            <a:pPr marL="457200" lvl="0" indent="-342900" algn="l" rtl="0">
+              <a:spcBef>
+                <a:spcPts val="0"/>
+              </a:spcBef>
+              <a:spcAft>
+                <a:spcPts val="0"/>
+              </a:spcAft>
+              <a:buSzPts val="1800"/>
+              <a:buChar char="●"/>
+            </a:pPr>
+            <a:r>
+              <a:rPr lang="hu"/>
+              <a:t>Újboli bejelentkezés szükséges</a:t>
+            </a:r>
+            <a:endParaRPr/>
+          </a:p>
+          <a:p>
+            <a:pPr marL="457200" lvl="0" indent="0" algn="l" rtl="0">
+              <a:spcBef>
+                <a:spcPts val="1200"/>
+              </a:spcBef>
+              <a:spcAft>
+                <a:spcPts val="1200"/>
+              </a:spcAft>
+              <a:buNone/>
+            </a:pPr>
+            <a:endParaRPr/>
+          </a:p>
+        </p:txBody>
+      </p:sp>
+    </p:spTree>
+  </p:cSld>
+  <p:clrMapOvr>
+    <a:masterClrMapping/>
+  </p:clrMapOvr>
+</p:sld>
+</file>
+
+<file path=ppt/slides/slide11.xml><?xml version="1.0" encoding="utf-8"?>
+<p:sld xmlns:a="http://schemas.openxmlformats.org/drawingml/2006/main" xmlns:r="http://schemas.openxmlformats.org/officeDocument/2006/relationships" xmlns:p="http://schemas.openxmlformats.org/presentationml/2006/main">
+  <p:cSld>
+    <p:spTree>
+      <p:nvGrpSpPr>
+        <p:cNvPr id="1" name="Shape 138"/>
         <p:cNvGrpSpPr/>
         <p:nvPr/>
       </p:nvGrpSpPr>
@@ -8726,7 +9235,9 @@
       <p:sp>
         <p:nvSpPr>
           <p:cNvPr id="139" name="Google Shape;139;p22"/>
-          <p:cNvSpPr txBox="1"/>
+          <p:cNvSpPr txBox="1">
+            <a:spLocks noGrp="1"/>
+          </p:cNvSpPr>
           <p:nvPr>
             <p:ph type="title"/>
           </p:nvPr>
@@ -8741,12 +9252,12 @@
           </a:prstGeom>
         </p:spPr>
         <p:txBody>
-          <a:bodyPr anchorCtr="0" anchor="t" bIns="91425" lIns="91425" spcFirstLastPara="1" rIns="91425" wrap="square" tIns="91425">
+          <a:bodyPr spcFirstLastPara="1" wrap="square" lIns="91425" tIns="91425" rIns="91425" bIns="91425" anchor="t" anchorCtr="0">
             <a:normAutofit fontScale="90000"/>
           </a:bodyPr>
           <a:lstStyle/>
           <a:p>
-            <a:pPr indent="0" lvl="0" marL="0" rtl="0" algn="l">
+            <a:pPr marL="0" lvl="0" indent="0" algn="l" rtl="0">
               <a:spcBef>
                 <a:spcPts val="0"/>
               </a:spcBef>
@@ -8766,9 +9277,11 @@
       <p:sp>
         <p:nvSpPr>
           <p:cNvPr id="140" name="Google Shape;140;p22"/>
-          <p:cNvSpPr txBox="1"/>
+          <p:cNvSpPr txBox="1">
+            <a:spLocks noGrp="1"/>
+          </p:cNvSpPr>
           <p:nvPr>
-            <p:ph idx="1" type="body"/>
+            <p:ph type="body" idx="1"/>
           </p:nvPr>
         </p:nvSpPr>
         <p:spPr>
@@ -8781,12 +9294,12 @@
           </a:prstGeom>
         </p:spPr>
         <p:txBody>
-          <a:bodyPr anchorCtr="0" anchor="t" bIns="91425" lIns="91425" spcFirstLastPara="1" rIns="91425" wrap="square" tIns="91425">
+          <a:bodyPr spcFirstLastPara="1" wrap="square" lIns="91425" tIns="91425" rIns="91425" bIns="91425" anchor="t" anchorCtr="0">
             <a:normAutofit/>
           </a:bodyPr>
           <a:lstStyle/>
           <a:p>
-            <a:pPr indent="-342900" lvl="0" marL="457200" rtl="0" algn="l">
+            <a:pPr marL="457200" lvl="0" indent="-342900" algn="l" rtl="0">
               <a:spcBef>
                 <a:spcPts val="0"/>
               </a:spcBef>
@@ -8797,13 +9310,13 @@
               <a:buChar char="●"/>
             </a:pPr>
             <a:r>
-              <a:rPr lang="hu"/>
+              <a:rPr lang="hu" dirty="0"/>
               <a:t>3 darab használt tábla: pontok,  quiz, felhasznalok</a:t>
             </a:r>
-            <a:endParaRPr/>
+            <a:endParaRPr dirty="0"/>
           </a:p>
           <a:p>
-            <a:pPr indent="-342900" lvl="0" marL="457200" rtl="0" algn="l">
+            <a:pPr marL="457200" lvl="0" indent="-342900" algn="l" rtl="0">
               <a:spcBef>
                 <a:spcPts val="0"/>
               </a:spcBef>
@@ -8814,10 +9327,10 @@
               <a:buChar char="●"/>
             </a:pPr>
             <a:r>
-              <a:rPr lang="hu"/>
+              <a:rPr lang="hu" dirty="0"/>
               <a:t>1 darab használt kapcsolat</a:t>
             </a:r>
-            <a:endParaRPr/>
+            <a:endParaRPr dirty="0"/>
           </a:p>
         </p:txBody>
       </p:sp>
@@ -8885,12 +9398,12 @@
 </p:sld>
 </file>
 
-<file path=ppt/slides/slide11.xml><?xml version="1.0" encoding="utf-8"?>
-<p:sld xmlns:a="http://schemas.openxmlformats.org/drawingml/2006/main" xmlns:r="http://schemas.openxmlformats.org/officeDocument/2006/relationships" xmlns:mc="http://schemas.openxmlformats.org/markup-compatibility/2006" xmlns:mv="urn:schemas-microsoft-com:mac:vml" xmlns:p="http://schemas.openxmlformats.org/presentationml/2006/main" xmlns:c="http://schemas.openxmlformats.org/drawingml/2006/chart" xmlns:dgm="http://schemas.openxmlformats.org/drawingml/2006/diagram" xmlns:o="urn:schemas-microsoft-com:office:office" xmlns:v="urn:schemas-microsoft-com:vml" xmlns:pvml="urn:schemas-microsoft-com:office:powerpoint" xmlns:com="http://schemas.openxmlformats.org/drawingml/2006/compatibility" xmlns:p14="http://schemas.microsoft.com/office/powerpoint/2010/main" xmlns:p15="http://schemas.microsoft.com/office/powerpoint/2012/main" xmlns:ahyp="http://schemas.microsoft.com/office/drawing/2018/hyperlinkcolor">
+<file path=ppt/slides/slide12.xml><?xml version="1.0" encoding="utf-8"?>
+<p:sld xmlns:a="http://schemas.openxmlformats.org/drawingml/2006/main" xmlns:r="http://schemas.openxmlformats.org/officeDocument/2006/relationships" xmlns:p="http://schemas.openxmlformats.org/presentationml/2006/main">
   <p:cSld>
     <p:spTree>
       <p:nvGrpSpPr>
-        <p:cNvPr id="146" name="Shape 146"/>
+        <p:cNvPr id="1" name="Shape 146"/>
         <p:cNvGrpSpPr/>
         <p:nvPr/>
       </p:nvGrpSpPr>
@@ -8905,7 +9418,9 @@
       <p:sp>
         <p:nvSpPr>
           <p:cNvPr id="147" name="Google Shape;147;p23"/>
-          <p:cNvSpPr txBox="1"/>
+          <p:cNvSpPr txBox="1">
+            <a:spLocks noGrp="1"/>
+          </p:cNvSpPr>
           <p:nvPr>
             <p:ph type="title"/>
           </p:nvPr>
@@ -8920,12 +9435,12 @@
           </a:prstGeom>
         </p:spPr>
         <p:txBody>
-          <a:bodyPr anchorCtr="0" anchor="t" bIns="91425" lIns="91425" spcFirstLastPara="1" rIns="91425" wrap="square" tIns="91425">
+          <a:bodyPr spcFirstLastPara="1" wrap="square" lIns="91425" tIns="91425" rIns="91425" bIns="91425" anchor="t" anchorCtr="0">
             <a:normAutofit fontScale="90000"/>
           </a:bodyPr>
           <a:lstStyle/>
           <a:p>
-            <a:pPr indent="0" lvl="0" marL="0" rtl="0" algn="l">
+            <a:pPr marL="0" lvl="0" indent="0" algn="l" rtl="0">
               <a:spcBef>
                 <a:spcPts val="0"/>
               </a:spcBef>
@@ -8935,49 +9450,721 @@
               <a:buNone/>
             </a:pPr>
             <a:r>
-              <a:rPr lang="hu"/>
+              <a:rPr lang="hu" dirty="0"/>
               <a:t>Frontend</a:t>
             </a:r>
-            <a:endParaRPr/>
+            <a:endParaRPr dirty="0"/>
           </a:p>
         </p:txBody>
       </p:sp>
       <p:sp>
         <p:nvSpPr>
-          <p:cNvPr id="148" name="Google Shape;148;p23"/>
-          <p:cNvSpPr txBox="1"/>
+          <p:cNvPr id="3" name="Rectangle 2">
+            <a:extLst>
+              <a:ext uri="{FF2B5EF4-FFF2-40B4-BE49-F238E27FC236}">
+                <a16:creationId xmlns:a16="http://schemas.microsoft.com/office/drawing/2014/main" id="{EF79EA64-CF2F-C724-D35F-D4C6047E68EA}"/>
+              </a:ext>
+            </a:extLst>
+          </p:cNvPr>
+          <p:cNvSpPr>
+            <a:spLocks noGrp="1" noChangeArrowheads="1"/>
+          </p:cNvSpPr>
           <p:nvPr>
-            <p:ph idx="1" type="body"/>
+            <p:ph type="body" idx="1"/>
           </p:nvPr>
         </p:nvSpPr>
-        <p:spPr>
+        <p:spPr bwMode="auto">
           <a:xfrm>
-            <a:off x="311700" y="1229875"/>
-            <a:ext cx="8520600" cy="3339000"/>
+            <a:off x="311151" y="1606906"/>
+            <a:ext cx="8602390" cy="2585323"/>
           </a:xfrm>
           <a:prstGeom prst="rect">
             <a:avLst/>
           </a:prstGeom>
+          <a:noFill/>
+          <a:ln>
+            <a:noFill/>
+          </a:ln>
+          <a:effectLst/>
+          <a:extLst>
+            <a:ext uri="{909E8E84-426E-40DD-AFC4-6F175D3DCCD1}">
+              <a14:hiddenFill xmlns:a14="http://schemas.microsoft.com/office/drawing/2010/main">
+                <a:solidFill>
+                  <a:schemeClr val="accent1"/>
+                </a:solidFill>
+              </a14:hiddenFill>
+            </a:ext>
+            <a:ext uri="{91240B29-F687-4F45-9708-019B960494DF}">
+              <a14:hiddenLine xmlns:a14="http://schemas.microsoft.com/office/drawing/2010/main" w="9525">
+                <a:solidFill>
+                  <a:schemeClr val="tx1"/>
+                </a:solidFill>
+                <a:miter lim="800000"/>
+                <a:headEnd/>
+                <a:tailEnd/>
+              </a14:hiddenLine>
+            </a:ext>
+            <a:ext uri="{AF507438-7753-43E0-B8FC-AC1667EBCBE1}">
+              <a14:hiddenEffects xmlns:a14="http://schemas.microsoft.com/office/drawing/2010/main">
+                <a:effectLst>
+                  <a:outerShdw dist="35921" dir="2700000" algn="ctr" rotWithShape="0">
+                    <a:schemeClr val="bg2"/>
+                  </a:outerShdw>
+                </a:effectLst>
+              </a14:hiddenEffects>
+            </a:ext>
+          </a:extLst>
         </p:spPr>
         <p:txBody>
-          <a:bodyPr anchorCtr="0" anchor="t" bIns="91425" lIns="91425" spcFirstLastPara="1" rIns="91425" wrap="square" tIns="91425">
-            <a:normAutofit/>
+          <a:bodyPr vert="horz" wrap="square" lIns="91440" tIns="45720" rIns="91440" bIns="45720" numCol="1" anchor="ctr" anchorCtr="0" compatLnSpc="1">
+            <a:prstTxWarp prst="textNoShape">
+              <a:avLst/>
+            </a:prstTxWarp>
+            <a:spAutoFit/>
           </a:bodyPr>
           <a:lstStyle/>
           <a:p>
-            <a:pPr indent="0" lvl="0" marL="0" rtl="0" algn="l">
-              <a:spcBef>
-                <a:spcPts val="0"/>
-              </a:spcBef>
-              <a:spcAft>
-                <a:spcPts val="1200"/>
-              </a:spcAft>
-              <a:buNone/>
+            <a:pPr marL="0" marR="0" lvl="0" indent="0" algn="l" defTabSz="914400" rtl="0" eaLnBrk="0" fontAlgn="base" latinLnBrk="0" hangingPunct="0">
+              <a:lnSpc>
+                <a:spcPct val="100000"/>
+              </a:lnSpc>
+              <a:spcBef>
+                <a:spcPct val="0"/>
+              </a:spcBef>
+              <a:spcAft>
+                <a:spcPct val="0"/>
+              </a:spcAft>
+              <a:buClrTx/>
+              <a:buSzTx/>
+              <a:buFontTx/>
+              <a:buChar char="•"/>
+              <a:tabLst/>
             </a:pPr>
             <a:r>
-              <a:t/>
-            </a:r>
-            <a:endParaRPr/>
+              <a:rPr kumimoji="0" lang="hu-HU" altLang="hu-HU" sz="1600" i="0" u="none" strike="noStrike" cap="none" normalizeH="0" baseline="0" dirty="0" err="1">
+                <a:ln>
+                  <a:noFill/>
+                </a:ln>
+                <a:solidFill>
+                  <a:schemeClr val="bg2">
+                    <a:lumMod val="50000"/>
+                  </a:schemeClr>
+                </a:solidFill>
+                <a:effectLst/>
+                <a:latin typeface="Roboto" panose="02000000000000000000" pitchFamily="2" charset="0"/>
+                <a:ea typeface="Roboto" panose="02000000000000000000" pitchFamily="2" charset="0"/>
+                <a:cs typeface="Roboto" panose="02000000000000000000" pitchFamily="2" charset="0"/>
+              </a:rPr>
+              <a:t>src</a:t>
+            </a:r>
+            <a:r>
+              <a:rPr kumimoji="0" lang="hu-HU" altLang="hu-HU" sz="1600" i="0" u="none" strike="noStrike" cap="none" normalizeH="0" baseline="0" dirty="0">
+                <a:ln>
+                  <a:noFill/>
+                </a:ln>
+                <a:solidFill>
+                  <a:schemeClr val="bg2">
+                    <a:lumMod val="50000"/>
+                  </a:schemeClr>
+                </a:solidFill>
+                <a:effectLst/>
+                <a:latin typeface="Roboto" panose="02000000000000000000" pitchFamily="2" charset="0"/>
+                <a:ea typeface="Roboto" panose="02000000000000000000" pitchFamily="2" charset="0"/>
+                <a:cs typeface="Roboto" panose="02000000000000000000" pitchFamily="2" charset="0"/>
+              </a:rPr>
+              <a:t>/index.js: Az alkalmazás belépési pontja, amely </a:t>
+            </a:r>
+            <a:r>
+              <a:rPr kumimoji="0" lang="hu-HU" altLang="hu-HU" sz="1600" i="0" u="none" strike="noStrike" cap="none" normalizeH="0" baseline="0" dirty="0" err="1">
+                <a:ln>
+                  <a:noFill/>
+                </a:ln>
+                <a:solidFill>
+                  <a:schemeClr val="bg2">
+                    <a:lumMod val="50000"/>
+                  </a:schemeClr>
+                </a:solidFill>
+                <a:effectLst/>
+                <a:latin typeface="Roboto" panose="02000000000000000000" pitchFamily="2" charset="0"/>
+                <a:ea typeface="Roboto" panose="02000000000000000000" pitchFamily="2" charset="0"/>
+                <a:cs typeface="Roboto" panose="02000000000000000000" pitchFamily="2" charset="0"/>
+              </a:rPr>
+              <a:t>rendereli</a:t>
+            </a:r>
+            <a:r>
+              <a:rPr kumimoji="0" lang="hu-HU" altLang="hu-HU" sz="1600" i="0" u="none" strike="noStrike" cap="none" normalizeH="0" baseline="0" dirty="0">
+                <a:ln>
+                  <a:noFill/>
+                </a:ln>
+                <a:solidFill>
+                  <a:schemeClr val="bg2">
+                    <a:lumMod val="50000"/>
+                  </a:schemeClr>
+                </a:solidFill>
+                <a:effectLst/>
+                <a:latin typeface="Roboto" panose="02000000000000000000" pitchFamily="2" charset="0"/>
+                <a:ea typeface="Roboto" panose="02000000000000000000" pitchFamily="2" charset="0"/>
+                <a:cs typeface="Roboto" panose="02000000000000000000" pitchFamily="2" charset="0"/>
+              </a:rPr>
+              <a:t> a App.js komponenst a DOM-</a:t>
+            </a:r>
+            <a:r>
+              <a:rPr kumimoji="0" lang="hu-HU" altLang="hu-HU" sz="1600" i="0" u="none" strike="noStrike" cap="none" normalizeH="0" baseline="0" dirty="0" err="1">
+                <a:ln>
+                  <a:noFill/>
+                </a:ln>
+                <a:solidFill>
+                  <a:schemeClr val="bg2">
+                    <a:lumMod val="50000"/>
+                  </a:schemeClr>
+                </a:solidFill>
+                <a:effectLst/>
+                <a:latin typeface="Roboto" panose="02000000000000000000" pitchFamily="2" charset="0"/>
+                <a:ea typeface="Roboto" panose="02000000000000000000" pitchFamily="2" charset="0"/>
+                <a:cs typeface="Roboto" panose="02000000000000000000" pitchFamily="2" charset="0"/>
+              </a:rPr>
+              <a:t>ba</a:t>
+            </a:r>
+            <a:r>
+              <a:rPr kumimoji="0" lang="hu-HU" altLang="hu-HU" sz="1600" i="0" u="none" strike="noStrike" cap="none" normalizeH="0" baseline="0" dirty="0">
+                <a:ln>
+                  <a:noFill/>
+                </a:ln>
+                <a:solidFill>
+                  <a:schemeClr val="bg2">
+                    <a:lumMod val="50000"/>
+                  </a:schemeClr>
+                </a:solidFill>
+                <a:effectLst/>
+                <a:latin typeface="Roboto" panose="02000000000000000000" pitchFamily="2" charset="0"/>
+                <a:ea typeface="Roboto" panose="02000000000000000000" pitchFamily="2" charset="0"/>
+                <a:cs typeface="Roboto" panose="02000000000000000000" pitchFamily="2" charset="0"/>
+              </a:rPr>
+              <a:t>.</a:t>
+            </a:r>
+          </a:p>
+          <a:p>
+            <a:pPr marL="0" marR="0" lvl="0" indent="0" algn="l" defTabSz="914400" rtl="0" eaLnBrk="0" fontAlgn="base" latinLnBrk="0" hangingPunct="0">
+              <a:lnSpc>
+                <a:spcPct val="100000"/>
+              </a:lnSpc>
+              <a:spcBef>
+                <a:spcPct val="0"/>
+              </a:spcBef>
+              <a:spcAft>
+                <a:spcPct val="0"/>
+              </a:spcAft>
+              <a:buClrTx/>
+              <a:buSzTx/>
+              <a:buFontTx/>
+              <a:buChar char="•"/>
+              <a:tabLst/>
+            </a:pPr>
+            <a:r>
+              <a:rPr kumimoji="0" lang="hu-HU" altLang="hu-HU" sz="1600" i="0" u="none" strike="noStrike" cap="none" normalizeH="0" baseline="0" dirty="0" err="1">
+                <a:ln>
+                  <a:noFill/>
+                </a:ln>
+                <a:solidFill>
+                  <a:schemeClr val="bg2">
+                    <a:lumMod val="50000"/>
+                  </a:schemeClr>
+                </a:solidFill>
+                <a:effectLst/>
+                <a:latin typeface="Roboto" panose="02000000000000000000" pitchFamily="2" charset="0"/>
+                <a:ea typeface="Roboto" panose="02000000000000000000" pitchFamily="2" charset="0"/>
+                <a:cs typeface="Roboto" panose="02000000000000000000" pitchFamily="2" charset="0"/>
+              </a:rPr>
+              <a:t>src</a:t>
+            </a:r>
+            <a:r>
+              <a:rPr kumimoji="0" lang="hu-HU" altLang="hu-HU" sz="1600" i="0" u="none" strike="noStrike" cap="none" normalizeH="0" baseline="0" dirty="0">
+                <a:ln>
+                  <a:noFill/>
+                </a:ln>
+                <a:solidFill>
+                  <a:schemeClr val="bg2">
+                    <a:lumMod val="50000"/>
+                  </a:schemeClr>
+                </a:solidFill>
+                <a:effectLst/>
+                <a:latin typeface="Roboto" panose="02000000000000000000" pitchFamily="2" charset="0"/>
+                <a:ea typeface="Roboto" panose="02000000000000000000" pitchFamily="2" charset="0"/>
+                <a:cs typeface="Roboto" panose="02000000000000000000" pitchFamily="2" charset="0"/>
+              </a:rPr>
+              <a:t>/App.js: A fő </a:t>
+            </a:r>
+            <a:r>
+              <a:rPr kumimoji="0" lang="hu-HU" altLang="hu-HU" sz="1600" i="0" u="none" strike="noStrike" cap="none" normalizeH="0" baseline="0" dirty="0" err="1">
+                <a:ln>
+                  <a:noFill/>
+                </a:ln>
+                <a:solidFill>
+                  <a:schemeClr val="bg2">
+                    <a:lumMod val="50000"/>
+                  </a:schemeClr>
+                </a:solidFill>
+                <a:effectLst/>
+                <a:latin typeface="Roboto" panose="02000000000000000000" pitchFamily="2" charset="0"/>
+                <a:ea typeface="Roboto" panose="02000000000000000000" pitchFamily="2" charset="0"/>
+                <a:cs typeface="Roboto" panose="02000000000000000000" pitchFamily="2" charset="0"/>
+              </a:rPr>
+              <a:t>React</a:t>
+            </a:r>
+            <a:r>
+              <a:rPr kumimoji="0" lang="hu-HU" altLang="hu-HU" sz="1600" i="0" u="none" strike="noStrike" cap="none" normalizeH="0" baseline="0" dirty="0">
+                <a:ln>
+                  <a:noFill/>
+                </a:ln>
+                <a:solidFill>
+                  <a:schemeClr val="bg2">
+                    <a:lumMod val="50000"/>
+                  </a:schemeClr>
+                </a:solidFill>
+                <a:effectLst/>
+                <a:latin typeface="Roboto" panose="02000000000000000000" pitchFamily="2" charset="0"/>
+                <a:ea typeface="Roboto" panose="02000000000000000000" pitchFamily="2" charset="0"/>
+                <a:cs typeface="Roboto" panose="02000000000000000000" pitchFamily="2" charset="0"/>
+              </a:rPr>
+              <a:t> komponens, amely a különböző oldalak és funkciók összefogója.</a:t>
+            </a:r>
+          </a:p>
+          <a:p>
+            <a:pPr marL="0" marR="0" lvl="0" indent="0" algn="l" defTabSz="914400" rtl="0" eaLnBrk="0" fontAlgn="base" latinLnBrk="0" hangingPunct="0">
+              <a:lnSpc>
+                <a:spcPct val="100000"/>
+              </a:lnSpc>
+              <a:spcBef>
+                <a:spcPct val="0"/>
+              </a:spcBef>
+              <a:spcAft>
+                <a:spcPct val="0"/>
+              </a:spcAft>
+              <a:buClrTx/>
+              <a:buSzTx/>
+              <a:buFontTx/>
+              <a:buChar char="•"/>
+              <a:tabLst/>
+            </a:pPr>
+            <a:r>
+              <a:rPr kumimoji="0" lang="hu-HU" altLang="hu-HU" sz="1600" i="0" u="none" strike="noStrike" cap="none" normalizeH="0" baseline="0" dirty="0" err="1">
+                <a:ln>
+                  <a:noFill/>
+                </a:ln>
+                <a:solidFill>
+                  <a:schemeClr val="bg2">
+                    <a:lumMod val="50000"/>
+                  </a:schemeClr>
+                </a:solidFill>
+                <a:effectLst/>
+                <a:latin typeface="Roboto" panose="02000000000000000000" pitchFamily="2" charset="0"/>
+                <a:ea typeface="Roboto" panose="02000000000000000000" pitchFamily="2" charset="0"/>
+                <a:cs typeface="Roboto" panose="02000000000000000000" pitchFamily="2" charset="0"/>
+              </a:rPr>
+              <a:t>src</a:t>
+            </a:r>
+            <a:r>
+              <a:rPr kumimoji="0" lang="hu-HU" altLang="hu-HU" sz="1600" i="0" u="none" strike="noStrike" cap="none" normalizeH="0" baseline="0" dirty="0">
+                <a:ln>
+                  <a:noFill/>
+                </a:ln>
+                <a:solidFill>
+                  <a:schemeClr val="bg2">
+                    <a:lumMod val="50000"/>
+                  </a:schemeClr>
+                </a:solidFill>
+                <a:effectLst/>
+                <a:latin typeface="Roboto" panose="02000000000000000000" pitchFamily="2" charset="0"/>
+                <a:ea typeface="Roboto" panose="02000000000000000000" pitchFamily="2" charset="0"/>
+                <a:cs typeface="Roboto" panose="02000000000000000000" pitchFamily="2" charset="0"/>
+              </a:rPr>
+              <a:t>/</a:t>
+            </a:r>
+            <a:r>
+              <a:rPr kumimoji="0" lang="hu-HU" altLang="hu-HU" sz="1600" i="0" u="none" strike="noStrike" cap="none" normalizeH="0" baseline="0" dirty="0" err="1">
+                <a:ln>
+                  <a:noFill/>
+                </a:ln>
+                <a:solidFill>
+                  <a:schemeClr val="bg2">
+                    <a:lumMod val="50000"/>
+                  </a:schemeClr>
+                </a:solidFill>
+                <a:effectLst/>
+                <a:latin typeface="Roboto" panose="02000000000000000000" pitchFamily="2" charset="0"/>
+                <a:ea typeface="Roboto" panose="02000000000000000000" pitchFamily="2" charset="0"/>
+                <a:cs typeface="Roboto" panose="02000000000000000000" pitchFamily="2" charset="0"/>
+              </a:rPr>
+              <a:t>pages</a:t>
+            </a:r>
+            <a:r>
+              <a:rPr kumimoji="0" lang="hu-HU" altLang="hu-HU" sz="1600" i="0" u="none" strike="noStrike" cap="none" normalizeH="0" baseline="0" dirty="0">
+                <a:ln>
+                  <a:noFill/>
+                </a:ln>
+                <a:solidFill>
+                  <a:schemeClr val="bg2">
+                    <a:lumMod val="50000"/>
+                  </a:schemeClr>
+                </a:solidFill>
+                <a:effectLst/>
+                <a:latin typeface="Roboto" panose="02000000000000000000" pitchFamily="2" charset="0"/>
+                <a:ea typeface="Roboto" panose="02000000000000000000" pitchFamily="2" charset="0"/>
+                <a:cs typeface="Roboto" panose="02000000000000000000" pitchFamily="2" charset="0"/>
+              </a:rPr>
+              <a:t>/home.js: A főoldal komponense, amely valószínűleg az alkalmazás kezdőlapját jeleníti meg.</a:t>
+            </a:r>
+          </a:p>
+          <a:p>
+            <a:pPr marL="0" marR="0" lvl="0" indent="0" algn="l" defTabSz="914400" rtl="0" eaLnBrk="0" fontAlgn="base" latinLnBrk="0" hangingPunct="0">
+              <a:lnSpc>
+                <a:spcPct val="100000"/>
+              </a:lnSpc>
+              <a:spcBef>
+                <a:spcPct val="0"/>
+              </a:spcBef>
+              <a:spcAft>
+                <a:spcPct val="0"/>
+              </a:spcAft>
+              <a:buClrTx/>
+              <a:buSzTx/>
+              <a:buFontTx/>
+              <a:buChar char="•"/>
+              <a:tabLst/>
+            </a:pPr>
+            <a:r>
+              <a:rPr kumimoji="0" lang="hu-HU" altLang="hu-HU" sz="1600" i="0" u="none" strike="noStrike" cap="none" normalizeH="0" baseline="0" dirty="0" err="1">
+                <a:ln>
+                  <a:noFill/>
+                </a:ln>
+                <a:solidFill>
+                  <a:schemeClr val="bg2">
+                    <a:lumMod val="50000"/>
+                  </a:schemeClr>
+                </a:solidFill>
+                <a:effectLst/>
+                <a:latin typeface="Roboto" panose="02000000000000000000" pitchFamily="2" charset="0"/>
+                <a:ea typeface="Roboto" panose="02000000000000000000" pitchFamily="2" charset="0"/>
+                <a:cs typeface="Roboto" panose="02000000000000000000" pitchFamily="2" charset="0"/>
+              </a:rPr>
+              <a:t>src</a:t>
+            </a:r>
+            <a:r>
+              <a:rPr kumimoji="0" lang="hu-HU" altLang="hu-HU" sz="1600" i="0" u="none" strike="noStrike" cap="none" normalizeH="0" baseline="0" dirty="0">
+                <a:ln>
+                  <a:noFill/>
+                </a:ln>
+                <a:solidFill>
+                  <a:schemeClr val="bg2">
+                    <a:lumMod val="50000"/>
+                  </a:schemeClr>
+                </a:solidFill>
+                <a:effectLst/>
+                <a:latin typeface="Roboto" panose="02000000000000000000" pitchFamily="2" charset="0"/>
+                <a:ea typeface="Roboto" panose="02000000000000000000" pitchFamily="2" charset="0"/>
+                <a:cs typeface="Roboto" panose="02000000000000000000" pitchFamily="2" charset="0"/>
+              </a:rPr>
+              <a:t>/</a:t>
+            </a:r>
+            <a:r>
+              <a:rPr kumimoji="0" lang="hu-HU" altLang="hu-HU" sz="1600" i="0" u="none" strike="noStrike" cap="none" normalizeH="0" baseline="0" dirty="0" err="1">
+                <a:ln>
+                  <a:noFill/>
+                </a:ln>
+                <a:solidFill>
+                  <a:schemeClr val="bg2">
+                    <a:lumMod val="50000"/>
+                  </a:schemeClr>
+                </a:solidFill>
+                <a:effectLst/>
+                <a:latin typeface="Roboto" panose="02000000000000000000" pitchFamily="2" charset="0"/>
+                <a:ea typeface="Roboto" panose="02000000000000000000" pitchFamily="2" charset="0"/>
+                <a:cs typeface="Roboto" panose="02000000000000000000" pitchFamily="2" charset="0"/>
+              </a:rPr>
+              <a:t>pages</a:t>
+            </a:r>
+            <a:r>
+              <a:rPr kumimoji="0" lang="hu-HU" altLang="hu-HU" sz="1600" i="0" u="none" strike="noStrike" cap="none" normalizeH="0" baseline="0" dirty="0">
+                <a:ln>
+                  <a:noFill/>
+                </a:ln>
+                <a:solidFill>
+                  <a:schemeClr val="bg2">
+                    <a:lumMod val="50000"/>
+                  </a:schemeClr>
+                </a:solidFill>
+                <a:effectLst/>
+                <a:latin typeface="Roboto" panose="02000000000000000000" pitchFamily="2" charset="0"/>
+                <a:ea typeface="Roboto" panose="02000000000000000000" pitchFamily="2" charset="0"/>
+                <a:cs typeface="Roboto" panose="02000000000000000000" pitchFamily="2" charset="0"/>
+              </a:rPr>
+              <a:t>/leaderboard.js: Egy ranglistát kezelő oldal, amely várhatóan a felhasználók pontszámait vagy teljesítményét jeleníti meg.</a:t>
+            </a:r>
+          </a:p>
+          <a:p>
+            <a:pPr marL="0" marR="0" lvl="0" indent="0" algn="l" defTabSz="914400" rtl="0" eaLnBrk="0" fontAlgn="base" latinLnBrk="0" hangingPunct="0">
+              <a:lnSpc>
+                <a:spcPct val="100000"/>
+              </a:lnSpc>
+              <a:spcBef>
+                <a:spcPct val="0"/>
+              </a:spcBef>
+              <a:spcAft>
+                <a:spcPct val="0"/>
+              </a:spcAft>
+              <a:buClrTx/>
+              <a:buSzTx/>
+              <a:buFontTx/>
+              <a:buChar char="•"/>
+              <a:tabLst/>
+            </a:pPr>
+            <a:r>
+              <a:rPr kumimoji="0" lang="hu-HU" altLang="hu-HU" sz="1600" i="0" u="none" strike="noStrike" cap="none" normalizeH="0" baseline="0" dirty="0" err="1">
+                <a:ln>
+                  <a:noFill/>
+                </a:ln>
+                <a:solidFill>
+                  <a:schemeClr val="bg2">
+                    <a:lumMod val="50000"/>
+                  </a:schemeClr>
+                </a:solidFill>
+                <a:effectLst/>
+                <a:latin typeface="Roboto" panose="02000000000000000000" pitchFamily="2" charset="0"/>
+                <a:ea typeface="Roboto" panose="02000000000000000000" pitchFamily="2" charset="0"/>
+                <a:cs typeface="Roboto" panose="02000000000000000000" pitchFamily="2" charset="0"/>
+              </a:rPr>
+              <a:t>src</a:t>
+            </a:r>
+            <a:r>
+              <a:rPr kumimoji="0" lang="hu-HU" altLang="hu-HU" sz="1600" i="0" u="none" strike="noStrike" cap="none" normalizeH="0" baseline="0" dirty="0">
+                <a:ln>
+                  <a:noFill/>
+                </a:ln>
+                <a:solidFill>
+                  <a:schemeClr val="bg2">
+                    <a:lumMod val="50000"/>
+                  </a:schemeClr>
+                </a:solidFill>
+                <a:effectLst/>
+                <a:latin typeface="Roboto" panose="02000000000000000000" pitchFamily="2" charset="0"/>
+                <a:ea typeface="Roboto" panose="02000000000000000000" pitchFamily="2" charset="0"/>
+                <a:cs typeface="Roboto" panose="02000000000000000000" pitchFamily="2" charset="0"/>
+              </a:rPr>
+              <a:t>/</a:t>
+            </a:r>
+            <a:r>
+              <a:rPr kumimoji="0" lang="hu-HU" altLang="hu-HU" sz="1600" i="0" u="none" strike="noStrike" cap="none" normalizeH="0" baseline="0" dirty="0" err="1">
+                <a:ln>
+                  <a:noFill/>
+                </a:ln>
+                <a:solidFill>
+                  <a:schemeClr val="bg2">
+                    <a:lumMod val="50000"/>
+                  </a:schemeClr>
+                </a:solidFill>
+                <a:effectLst/>
+                <a:latin typeface="Roboto" panose="02000000000000000000" pitchFamily="2" charset="0"/>
+                <a:ea typeface="Roboto" panose="02000000000000000000" pitchFamily="2" charset="0"/>
+                <a:cs typeface="Roboto" panose="02000000000000000000" pitchFamily="2" charset="0"/>
+              </a:rPr>
+              <a:t>pages</a:t>
+            </a:r>
+            <a:r>
+              <a:rPr kumimoji="0" lang="hu-HU" altLang="hu-HU" sz="1600" i="0" u="none" strike="noStrike" cap="none" normalizeH="0" baseline="0" dirty="0">
+                <a:ln>
+                  <a:noFill/>
+                </a:ln>
+                <a:solidFill>
+                  <a:schemeClr val="bg2">
+                    <a:lumMod val="50000"/>
+                  </a:schemeClr>
+                </a:solidFill>
+                <a:effectLst/>
+                <a:latin typeface="Roboto" panose="02000000000000000000" pitchFamily="2" charset="0"/>
+                <a:ea typeface="Roboto" panose="02000000000000000000" pitchFamily="2" charset="0"/>
+                <a:cs typeface="Roboto" panose="02000000000000000000" pitchFamily="2" charset="0"/>
+              </a:rPr>
+              <a:t>/login.js: A bejelentkezési oldal logikáját kezelő komponens.</a:t>
+            </a:r>
+          </a:p>
+          <a:p>
+            <a:pPr marL="0" marR="0" lvl="0" indent="0" algn="l" defTabSz="914400" rtl="0" eaLnBrk="0" fontAlgn="base" latinLnBrk="0" hangingPunct="0">
+              <a:lnSpc>
+                <a:spcPct val="100000"/>
+              </a:lnSpc>
+              <a:spcBef>
+                <a:spcPct val="0"/>
+              </a:spcBef>
+              <a:spcAft>
+                <a:spcPct val="0"/>
+              </a:spcAft>
+              <a:buClrTx/>
+              <a:buSzTx/>
+              <a:buFontTx/>
+              <a:buChar char="•"/>
+              <a:tabLst/>
+            </a:pPr>
+            <a:r>
+              <a:rPr kumimoji="0" lang="hu-HU" altLang="hu-HU" sz="1600" i="0" u="none" strike="noStrike" cap="none" normalizeH="0" baseline="0" dirty="0" err="1">
+                <a:ln>
+                  <a:noFill/>
+                </a:ln>
+                <a:solidFill>
+                  <a:schemeClr val="bg2">
+                    <a:lumMod val="50000"/>
+                  </a:schemeClr>
+                </a:solidFill>
+                <a:effectLst/>
+                <a:latin typeface="Roboto" panose="02000000000000000000" pitchFamily="2" charset="0"/>
+                <a:ea typeface="Roboto" panose="02000000000000000000" pitchFamily="2" charset="0"/>
+                <a:cs typeface="Roboto" panose="02000000000000000000" pitchFamily="2" charset="0"/>
+              </a:rPr>
+              <a:t>public</a:t>
+            </a:r>
+            <a:r>
+              <a:rPr kumimoji="0" lang="hu-HU" altLang="hu-HU" sz="1600" i="0" u="none" strike="noStrike" cap="none" normalizeH="0" baseline="0" dirty="0">
+                <a:ln>
+                  <a:noFill/>
+                </a:ln>
+                <a:solidFill>
+                  <a:schemeClr val="bg2">
+                    <a:lumMod val="50000"/>
+                  </a:schemeClr>
+                </a:solidFill>
+                <a:effectLst/>
+                <a:latin typeface="Roboto" panose="02000000000000000000" pitchFamily="2" charset="0"/>
+                <a:ea typeface="Roboto" panose="02000000000000000000" pitchFamily="2" charset="0"/>
+                <a:cs typeface="Roboto" panose="02000000000000000000" pitchFamily="2" charset="0"/>
+              </a:rPr>
+              <a:t>/index.html: Az egyetlen HTML fájl, amelybe a </a:t>
+            </a:r>
+            <a:r>
+              <a:rPr kumimoji="0" lang="hu-HU" altLang="hu-HU" sz="1600" i="0" u="none" strike="noStrike" cap="none" normalizeH="0" baseline="0" dirty="0" err="1">
+                <a:ln>
+                  <a:noFill/>
+                </a:ln>
+                <a:solidFill>
+                  <a:schemeClr val="bg2">
+                    <a:lumMod val="50000"/>
+                  </a:schemeClr>
+                </a:solidFill>
+                <a:effectLst/>
+                <a:latin typeface="Roboto" panose="02000000000000000000" pitchFamily="2" charset="0"/>
+                <a:ea typeface="Roboto" panose="02000000000000000000" pitchFamily="2" charset="0"/>
+                <a:cs typeface="Roboto" panose="02000000000000000000" pitchFamily="2" charset="0"/>
+              </a:rPr>
+              <a:t>React</a:t>
+            </a:r>
+            <a:r>
+              <a:rPr kumimoji="0" lang="hu-HU" altLang="hu-HU" sz="1600" i="0" u="none" strike="noStrike" cap="none" normalizeH="0" baseline="0" dirty="0">
+                <a:ln>
+                  <a:noFill/>
+                </a:ln>
+                <a:solidFill>
+                  <a:schemeClr val="bg2">
+                    <a:lumMod val="50000"/>
+                  </a:schemeClr>
+                </a:solidFill>
+                <a:effectLst/>
+                <a:latin typeface="Roboto" panose="02000000000000000000" pitchFamily="2" charset="0"/>
+                <a:ea typeface="Roboto" panose="02000000000000000000" pitchFamily="2" charset="0"/>
+                <a:cs typeface="Roboto" panose="02000000000000000000" pitchFamily="2" charset="0"/>
+              </a:rPr>
+              <a:t> alkalmazás beágyazódik.</a:t>
+            </a:r>
+          </a:p>
+          <a:p>
+            <a:pPr marL="0" marR="0" lvl="0" indent="0" algn="l" defTabSz="914400" rtl="0" eaLnBrk="0" fontAlgn="base" latinLnBrk="0" hangingPunct="0">
+              <a:lnSpc>
+                <a:spcPct val="100000"/>
+              </a:lnSpc>
+              <a:spcBef>
+                <a:spcPct val="0"/>
+              </a:spcBef>
+              <a:spcAft>
+                <a:spcPct val="0"/>
+              </a:spcAft>
+              <a:buClrTx/>
+              <a:buSzTx/>
+              <a:buFontTx/>
+              <a:buChar char="•"/>
+              <a:tabLst/>
+            </a:pPr>
+            <a:r>
+              <a:rPr kumimoji="0" lang="hu-HU" altLang="hu-HU" sz="1600" i="0" u="none" strike="noStrike" cap="none" normalizeH="0" baseline="0" dirty="0" err="1">
+                <a:ln>
+                  <a:noFill/>
+                </a:ln>
+                <a:solidFill>
+                  <a:schemeClr val="bg2">
+                    <a:lumMod val="50000"/>
+                  </a:schemeClr>
+                </a:solidFill>
+                <a:effectLst/>
+                <a:latin typeface="Roboto" panose="02000000000000000000" pitchFamily="2" charset="0"/>
+                <a:ea typeface="Roboto" panose="02000000000000000000" pitchFamily="2" charset="0"/>
+                <a:cs typeface="Roboto" panose="02000000000000000000" pitchFamily="2" charset="0"/>
+              </a:rPr>
+              <a:t>package.json</a:t>
+            </a:r>
+            <a:r>
+              <a:rPr lang="hu-HU" altLang="hu-HU" sz="1600" dirty="0">
+                <a:solidFill>
+                  <a:schemeClr val="bg2">
+                    <a:lumMod val="50000"/>
+                  </a:schemeClr>
+                </a:solidFill>
+                <a:latin typeface="Roboto" panose="02000000000000000000" pitchFamily="2" charset="0"/>
+                <a:ea typeface="Roboto" panose="02000000000000000000" pitchFamily="2" charset="0"/>
+                <a:cs typeface="Roboto" panose="02000000000000000000" pitchFamily="2" charset="0"/>
+              </a:rPr>
+              <a:t>: </a:t>
+            </a:r>
+            <a:r>
+              <a:rPr kumimoji="0" lang="hu-HU" altLang="hu-HU" sz="1600" i="0" u="none" strike="noStrike" cap="none" normalizeH="0" baseline="0" dirty="0">
+                <a:ln>
+                  <a:noFill/>
+                </a:ln>
+                <a:solidFill>
+                  <a:schemeClr val="bg2">
+                    <a:lumMod val="50000"/>
+                  </a:schemeClr>
+                </a:solidFill>
+                <a:effectLst/>
+                <a:latin typeface="Roboto" panose="02000000000000000000" pitchFamily="2" charset="0"/>
+                <a:ea typeface="Roboto" panose="02000000000000000000" pitchFamily="2" charset="0"/>
+                <a:cs typeface="Roboto" panose="02000000000000000000" pitchFamily="2" charset="0"/>
+              </a:rPr>
+              <a:t>A projekt csomagfüggőségeit és parancsait tartalmazza.</a:t>
+            </a:r>
+          </a:p>
+          <a:p>
+            <a:pPr marL="0" marR="0" lvl="0" indent="0" algn="l" defTabSz="914400" rtl="0" eaLnBrk="0" fontAlgn="base" latinLnBrk="0" hangingPunct="0">
+              <a:lnSpc>
+                <a:spcPct val="100000"/>
+              </a:lnSpc>
+              <a:spcBef>
+                <a:spcPct val="0"/>
+              </a:spcBef>
+              <a:spcAft>
+                <a:spcPct val="0"/>
+              </a:spcAft>
+              <a:buClrTx/>
+              <a:buSzTx/>
+              <a:buFontTx/>
+              <a:buNone/>
+              <a:tabLst/>
+            </a:pPr>
+            <a:endParaRPr kumimoji="0" lang="hu-HU" altLang="hu-HU" sz="1800" b="0" i="0" u="none" strike="noStrike" cap="none" normalizeH="0" baseline="0" dirty="0">
+              <a:ln>
+                <a:noFill/>
+              </a:ln>
+              <a:solidFill>
+                <a:schemeClr val="tx1"/>
+              </a:solidFill>
+              <a:effectLst/>
+              <a:latin typeface="Arial" panose="020B0604020202020204" pitchFamily="34" charset="0"/>
+            </a:endParaRPr>
           </a:p>
         </p:txBody>
       </p:sp>
@@ -8989,12 +10176,12 @@
 </p:sld>
 </file>
 
-<file path=ppt/slides/slide12.xml><?xml version="1.0" encoding="utf-8"?>
-<p:sld xmlns:a="http://schemas.openxmlformats.org/drawingml/2006/main" xmlns:r="http://schemas.openxmlformats.org/officeDocument/2006/relationships" xmlns:mc="http://schemas.openxmlformats.org/markup-compatibility/2006" xmlns:mv="urn:schemas-microsoft-com:mac:vml" xmlns:p="http://schemas.openxmlformats.org/presentationml/2006/main" xmlns:c="http://schemas.openxmlformats.org/drawingml/2006/chart" xmlns:dgm="http://schemas.openxmlformats.org/drawingml/2006/diagram" xmlns:o="urn:schemas-microsoft-com:office:office" xmlns:v="urn:schemas-microsoft-com:vml" xmlns:pvml="urn:schemas-microsoft-com:office:powerpoint" xmlns:com="http://schemas.openxmlformats.org/drawingml/2006/compatibility" xmlns:p14="http://schemas.microsoft.com/office/powerpoint/2010/main" xmlns:p15="http://schemas.microsoft.com/office/powerpoint/2012/main" xmlns:ahyp="http://schemas.microsoft.com/office/drawing/2018/hyperlinkcolor">
+<file path=ppt/slides/slide13.xml><?xml version="1.0" encoding="utf-8"?>
+<p:sld xmlns:a="http://schemas.openxmlformats.org/drawingml/2006/main" xmlns:r="http://schemas.openxmlformats.org/officeDocument/2006/relationships" xmlns:p="http://schemas.openxmlformats.org/presentationml/2006/main">
   <p:cSld>
     <p:spTree>
       <p:nvGrpSpPr>
-        <p:cNvPr id="152" name="Shape 152"/>
+        <p:cNvPr id="1" name="Shape 152"/>
         <p:cNvGrpSpPr/>
         <p:nvPr/>
       </p:nvGrpSpPr>
@@ -9009,7 +10196,9 @@
       <p:sp>
         <p:nvSpPr>
           <p:cNvPr id="153" name="Google Shape;153;p24"/>
-          <p:cNvSpPr txBox="1"/>
+          <p:cNvSpPr txBox="1">
+            <a:spLocks noGrp="1"/>
+          </p:cNvSpPr>
           <p:nvPr>
             <p:ph type="title"/>
           </p:nvPr>
@@ -9024,12 +10213,12 @@
           </a:prstGeom>
         </p:spPr>
         <p:txBody>
-          <a:bodyPr anchorCtr="0" anchor="t" bIns="91425" lIns="91425" spcFirstLastPara="1" rIns="91425" wrap="square" tIns="91425">
+          <a:bodyPr spcFirstLastPara="1" wrap="square" lIns="91425" tIns="91425" rIns="91425" bIns="91425" anchor="t" anchorCtr="0">
             <a:normAutofit fontScale="90000"/>
           </a:bodyPr>
           <a:lstStyle/>
           <a:p>
-            <a:pPr indent="0" lvl="0" marL="0" rtl="0" algn="l">
+            <a:pPr marL="0" lvl="0" indent="0" algn="l" rtl="0">
               <a:spcBef>
                 <a:spcPts val="0"/>
               </a:spcBef>
@@ -9039,52 +10228,73 @@
               <a:buNone/>
             </a:pPr>
             <a:r>
-              <a:rPr lang="hu"/>
-              <a:t>Backend</a:t>
-            </a:r>
-            <a:endParaRPr/>
+              <a:rPr lang="hu" dirty="0"/>
+              <a:t>Frontend</a:t>
+            </a:r>
+            <a:endParaRPr dirty="0"/>
           </a:p>
         </p:txBody>
       </p:sp>
-      <p:sp>
-        <p:nvSpPr>
-          <p:cNvPr id="154" name="Google Shape;154;p24"/>
-          <p:cNvSpPr txBox="1"/>
-          <p:nvPr>
-            <p:ph idx="1" type="body"/>
-          </p:nvPr>
-        </p:nvSpPr>
+      <p:pic>
+        <p:nvPicPr>
+          <p:cNvPr id="3" name="Kép 2">
+            <a:extLst>
+              <a:ext uri="{FF2B5EF4-FFF2-40B4-BE49-F238E27FC236}">
+                <a16:creationId xmlns:a16="http://schemas.microsoft.com/office/drawing/2014/main" id="{B7E42AFE-06C3-7D67-8BF6-0E8A772E2F98}"/>
+              </a:ext>
+            </a:extLst>
+          </p:cNvPr>
+          <p:cNvPicPr>
+            <a:picLocks noChangeAspect="1"/>
+          </p:cNvPicPr>
+          <p:nvPr/>
+        </p:nvPicPr>
+        <p:blipFill>
+          <a:blip r:embed="rId3"/>
+          <a:stretch>
+            <a:fillRect/>
+          </a:stretch>
+        </p:blipFill>
         <p:spPr>
           <a:xfrm>
-            <a:off x="311700" y="1229875"/>
-            <a:ext cx="8520600" cy="3339000"/>
+            <a:off x="157700" y="1047093"/>
+            <a:ext cx="1125731" cy="3686407"/>
           </a:xfrm>
           <a:prstGeom prst="rect">
             <a:avLst/>
           </a:prstGeom>
         </p:spPr>
-        <p:txBody>
-          <a:bodyPr anchorCtr="0" anchor="t" bIns="91425" lIns="91425" spcFirstLastPara="1" rIns="91425" wrap="square" tIns="91425">
-            <a:normAutofit/>
-          </a:bodyPr>
-          <a:lstStyle/>
-          <a:p>
-            <a:pPr indent="0" lvl="0" marL="0" rtl="0" algn="l">
-              <a:spcBef>
-                <a:spcPts val="0"/>
-              </a:spcBef>
-              <a:spcAft>
-                <a:spcPts val="1200"/>
-              </a:spcAft>
-              <a:buNone/>
-            </a:pPr>
-            <a:r>
-              <a:t/>
-            </a:r>
-            <a:endParaRPr/>
-          </a:p>
-        </p:txBody>
-      </p:sp>
+      </p:pic>
+      <p:pic>
+        <p:nvPicPr>
+          <p:cNvPr id="5" name="Kép 4">
+            <a:extLst>
+              <a:ext uri="{FF2B5EF4-FFF2-40B4-BE49-F238E27FC236}">
+                <a16:creationId xmlns:a16="http://schemas.microsoft.com/office/drawing/2014/main" id="{E349745F-FF60-6DA1-AB69-024E6AC31542}"/>
+              </a:ext>
+            </a:extLst>
+          </p:cNvPr>
+          <p:cNvPicPr>
+            <a:picLocks noChangeAspect="1"/>
+          </p:cNvPicPr>
+          <p:nvPr/>
+        </p:nvPicPr>
+        <p:blipFill>
+          <a:blip r:embed="rId4"/>
+          <a:stretch>
+            <a:fillRect/>
+          </a:stretch>
+        </p:blipFill>
+        <p:spPr>
+          <a:xfrm>
+            <a:off x="3337932" y="275135"/>
+            <a:ext cx="4157720" cy="4561488"/>
+          </a:xfrm>
+          <a:prstGeom prst="rect">
+            <a:avLst/>
+          </a:prstGeom>
+        </p:spPr>
+      </p:pic>
     </p:spTree>
   </p:cSld>
   <p:clrMapOvr>
@@ -9093,12 +10303,2149 @@
 </p:sld>
 </file>
 
-<file path=ppt/slides/slide13.xml><?xml version="1.0" encoding="utf-8"?>
-<p:sld xmlns:a="http://schemas.openxmlformats.org/drawingml/2006/main" xmlns:r="http://schemas.openxmlformats.org/officeDocument/2006/relationships" xmlns:mc="http://schemas.openxmlformats.org/markup-compatibility/2006" xmlns:mv="urn:schemas-microsoft-com:mac:vml" xmlns:p="http://schemas.openxmlformats.org/presentationml/2006/main" xmlns:c="http://schemas.openxmlformats.org/drawingml/2006/chart" xmlns:dgm="http://schemas.openxmlformats.org/drawingml/2006/diagram" xmlns:o="urn:schemas-microsoft-com:office:office" xmlns:v="urn:schemas-microsoft-com:vml" xmlns:pvml="urn:schemas-microsoft-com:office:powerpoint" xmlns:com="http://schemas.openxmlformats.org/drawingml/2006/compatibility" xmlns:p14="http://schemas.microsoft.com/office/powerpoint/2010/main" xmlns:p15="http://schemas.microsoft.com/office/powerpoint/2012/main" xmlns:ahyp="http://schemas.microsoft.com/office/drawing/2018/hyperlinkcolor">
+<file path=ppt/slides/slide14.xml><?xml version="1.0" encoding="utf-8"?>
+<p:sld xmlns:a="http://schemas.openxmlformats.org/drawingml/2006/main" xmlns:r="http://schemas.openxmlformats.org/officeDocument/2006/relationships" xmlns:p="http://schemas.openxmlformats.org/presentationml/2006/main">
   <p:cSld>
     <p:spTree>
       <p:nvGrpSpPr>
-        <p:cNvPr id="158" name="Shape 158"/>
+        <p:cNvPr id="1" name="Shape 152">
+          <a:extLst>
+            <a:ext uri="{FF2B5EF4-FFF2-40B4-BE49-F238E27FC236}">
+              <a16:creationId xmlns:a16="http://schemas.microsoft.com/office/drawing/2014/main" id="{5A2CA53D-76AE-83F8-829D-0A40E78FA2FD}"/>
+            </a:ext>
+          </a:extLst>
+        </p:cNvPr>
+        <p:cNvGrpSpPr/>
+        <p:nvPr/>
+      </p:nvGrpSpPr>
+      <p:grpSpPr>
+        <a:xfrm>
+          <a:off x="0" y="0"/>
+          <a:ext cx="0" cy="0"/>
+          <a:chOff x="0" y="0"/>
+          <a:chExt cx="0" cy="0"/>
+        </a:xfrm>
+      </p:grpSpPr>
+      <p:sp>
+        <p:nvSpPr>
+          <p:cNvPr id="153" name="Google Shape;153;p24">
+            <a:extLst>
+              <a:ext uri="{FF2B5EF4-FFF2-40B4-BE49-F238E27FC236}">
+                <a16:creationId xmlns:a16="http://schemas.microsoft.com/office/drawing/2014/main" id="{E5CD8805-6F07-524D-6D4B-6D5BCC40FA44}"/>
+              </a:ext>
+            </a:extLst>
+          </p:cNvPr>
+          <p:cNvSpPr txBox="1">
+            <a:spLocks noGrp="1"/>
+          </p:cNvSpPr>
+          <p:nvPr>
+            <p:ph type="title"/>
+          </p:nvPr>
+        </p:nvSpPr>
+        <p:spPr>
+          <a:xfrm>
+            <a:off x="311700" y="410000"/>
+            <a:ext cx="8520600" cy="607800"/>
+          </a:xfrm>
+          <a:prstGeom prst="rect">
+            <a:avLst/>
+          </a:prstGeom>
+        </p:spPr>
+        <p:txBody>
+          <a:bodyPr spcFirstLastPara="1" wrap="square" lIns="91425" tIns="91425" rIns="91425" bIns="91425" anchor="t" anchorCtr="0">
+            <a:normAutofit fontScale="90000"/>
+          </a:bodyPr>
+          <a:lstStyle/>
+          <a:p>
+            <a:pPr marL="0" lvl="0" indent="0" algn="l" rtl="0">
+              <a:spcBef>
+                <a:spcPts val="0"/>
+              </a:spcBef>
+              <a:spcAft>
+                <a:spcPts val="0"/>
+              </a:spcAft>
+              <a:buNone/>
+            </a:pPr>
+            <a:r>
+              <a:rPr lang="hu"/>
+              <a:t>Backend</a:t>
+            </a:r>
+            <a:endParaRPr/>
+          </a:p>
+        </p:txBody>
+      </p:sp>
+      <p:sp>
+        <p:nvSpPr>
+          <p:cNvPr id="2" name="Rectangle 1">
+            <a:extLst>
+              <a:ext uri="{FF2B5EF4-FFF2-40B4-BE49-F238E27FC236}">
+                <a16:creationId xmlns:a16="http://schemas.microsoft.com/office/drawing/2014/main" id="{F88CE87B-DF89-0408-A286-0849139CC5D9}"/>
+              </a:ext>
+            </a:extLst>
+          </p:cNvPr>
+          <p:cNvSpPr>
+            <a:spLocks noGrp="1" noChangeArrowheads="1"/>
+          </p:cNvSpPr>
+          <p:nvPr>
+            <p:ph type="body" idx="1"/>
+          </p:nvPr>
+        </p:nvSpPr>
+        <p:spPr bwMode="auto">
+          <a:xfrm>
+            <a:off x="0" y="1081083"/>
+            <a:ext cx="6780476" cy="3785652"/>
+          </a:xfrm>
+          <a:prstGeom prst="rect">
+            <a:avLst/>
+          </a:prstGeom>
+          <a:noFill/>
+          <a:ln>
+            <a:noFill/>
+          </a:ln>
+          <a:effectLst/>
+          <a:extLst>
+            <a:ext uri="{909E8E84-426E-40DD-AFC4-6F175D3DCCD1}">
+              <a14:hiddenFill xmlns:a14="http://schemas.microsoft.com/office/drawing/2010/main">
+                <a:solidFill>
+                  <a:schemeClr val="accent1"/>
+                </a:solidFill>
+              </a14:hiddenFill>
+            </a:ext>
+            <a:ext uri="{91240B29-F687-4F45-9708-019B960494DF}">
+              <a14:hiddenLine xmlns:a14="http://schemas.microsoft.com/office/drawing/2010/main" w="9525">
+                <a:solidFill>
+                  <a:schemeClr val="tx1"/>
+                </a:solidFill>
+                <a:miter lim="800000"/>
+                <a:headEnd/>
+                <a:tailEnd/>
+              </a14:hiddenLine>
+            </a:ext>
+            <a:ext uri="{AF507438-7753-43E0-B8FC-AC1667EBCBE1}">
+              <a14:hiddenEffects xmlns:a14="http://schemas.microsoft.com/office/drawing/2010/main">
+                <a:effectLst>
+                  <a:outerShdw dist="35921" dir="2700000" algn="ctr" rotWithShape="0">
+                    <a:schemeClr val="bg2"/>
+                  </a:outerShdw>
+                </a:effectLst>
+              </a14:hiddenEffects>
+            </a:ext>
+          </a:extLst>
+        </p:spPr>
+        <p:txBody>
+          <a:bodyPr vert="horz" wrap="square" lIns="91440" tIns="45720" rIns="91440" bIns="45720" numCol="1" anchor="ctr" anchorCtr="0" compatLnSpc="1">
+            <a:prstTxWarp prst="textNoShape">
+              <a:avLst/>
+            </a:prstTxWarp>
+            <a:spAutoFit/>
+          </a:bodyPr>
+          <a:lstStyle/>
+          <a:p>
+            <a:pPr marL="0" marR="0" lvl="0" indent="0" algn="l" defTabSz="914400" rtl="0" eaLnBrk="0" fontAlgn="base" latinLnBrk="0" hangingPunct="0">
+              <a:lnSpc>
+                <a:spcPct val="100000"/>
+              </a:lnSpc>
+              <a:spcBef>
+                <a:spcPct val="0"/>
+              </a:spcBef>
+              <a:spcAft>
+                <a:spcPct val="0"/>
+              </a:spcAft>
+              <a:buClrTx/>
+              <a:buSzTx/>
+              <a:buFontTx/>
+              <a:buChar char="•"/>
+              <a:tabLst/>
+            </a:pPr>
+            <a:r>
+              <a:rPr kumimoji="0" lang="hu-HU" altLang="hu-HU" sz="1200" b="1" i="0" u="none" strike="noStrike" cap="none" normalizeH="0" baseline="0" dirty="0" err="1">
+                <a:ln>
+                  <a:noFill/>
+                </a:ln>
+                <a:solidFill>
+                  <a:schemeClr val="bg2">
+                    <a:lumMod val="50000"/>
+                  </a:schemeClr>
+                </a:solidFill>
+                <a:effectLst/>
+                <a:latin typeface="Arial" panose="020B0604020202020204" pitchFamily="34" charset="0"/>
+              </a:rPr>
+              <a:t>cohoot</a:t>
+            </a:r>
+            <a:r>
+              <a:rPr kumimoji="0" lang="hu-HU" altLang="hu-HU" sz="1200" b="1" i="0" u="none" strike="noStrike" cap="none" normalizeH="0" baseline="0" dirty="0">
+                <a:ln>
+                  <a:noFill/>
+                </a:ln>
+                <a:solidFill>
+                  <a:schemeClr val="bg2">
+                    <a:lumMod val="50000"/>
+                  </a:schemeClr>
+                </a:solidFill>
+                <a:effectLst/>
+                <a:latin typeface="Arial" panose="020B0604020202020204" pitchFamily="34" charset="0"/>
+              </a:rPr>
+              <a:t>-backend/</a:t>
+            </a:r>
+            <a:r>
+              <a:rPr kumimoji="0" lang="hu-HU" altLang="hu-HU" sz="1200" b="1" i="0" u="none" strike="noStrike" cap="none" normalizeH="0" baseline="0" dirty="0" err="1">
+                <a:ln>
+                  <a:noFill/>
+                </a:ln>
+                <a:solidFill>
+                  <a:schemeClr val="bg2">
+                    <a:lumMod val="50000"/>
+                  </a:schemeClr>
+                </a:solidFill>
+                <a:effectLst/>
+                <a:latin typeface="Arial" panose="020B0604020202020204" pitchFamily="34" charset="0"/>
+              </a:rPr>
+              <a:t>cohoot</a:t>
+            </a:r>
+            <a:r>
+              <a:rPr kumimoji="0" lang="hu-HU" altLang="hu-HU" sz="1200" b="1" i="0" u="none" strike="noStrike" cap="none" normalizeH="0" baseline="0" dirty="0">
+                <a:ln>
+                  <a:noFill/>
+                </a:ln>
+                <a:solidFill>
+                  <a:schemeClr val="bg2">
+                    <a:lumMod val="50000"/>
+                  </a:schemeClr>
+                </a:solidFill>
+                <a:effectLst/>
+                <a:latin typeface="Arial" panose="020B0604020202020204" pitchFamily="34" charset="0"/>
+              </a:rPr>
+              <a:t>/</a:t>
+            </a:r>
+            <a:r>
+              <a:rPr kumimoji="0" lang="hu-HU" altLang="hu-HU" sz="1200" b="0" i="0" u="none" strike="noStrike" cap="none" normalizeH="0" baseline="0" dirty="0">
+                <a:ln>
+                  <a:noFill/>
+                </a:ln>
+                <a:solidFill>
+                  <a:schemeClr val="bg2">
+                    <a:lumMod val="50000"/>
+                  </a:schemeClr>
+                </a:solidFill>
+                <a:effectLst/>
+                <a:latin typeface="Arial" panose="020B0604020202020204" pitchFamily="34" charset="0"/>
+              </a:rPr>
+              <a:t> </a:t>
+            </a:r>
+            <a:r>
+              <a:rPr kumimoji="0" lang="hu-HU" altLang="hu-HU" sz="1200" b="0" i="1" u="none" strike="noStrike" cap="none" normalizeH="0" baseline="0" dirty="0">
+                <a:ln>
+                  <a:noFill/>
+                </a:ln>
+                <a:solidFill>
+                  <a:schemeClr val="bg2">
+                    <a:lumMod val="50000"/>
+                  </a:schemeClr>
+                </a:solidFill>
+                <a:effectLst/>
+                <a:latin typeface="Arial" panose="020B0604020202020204" pitchFamily="34" charset="0"/>
+              </a:rPr>
+              <a:t>(backend főkönyvtár)</a:t>
+            </a:r>
+            <a:r>
+              <a:rPr lang="hu-HU" altLang="hu-HU" sz="1200" dirty="0">
+                <a:solidFill>
+                  <a:schemeClr val="bg2">
+                    <a:lumMod val="50000"/>
+                  </a:schemeClr>
+                </a:solidFill>
+                <a:latin typeface="Arial" panose="020B0604020202020204" pitchFamily="34" charset="0"/>
+              </a:rPr>
+              <a:t> </a:t>
+            </a:r>
+            <a:r>
+              <a:rPr kumimoji="0" lang="hu-HU" altLang="hu-HU" sz="1200" b="0" i="0" u="none" strike="noStrike" cap="none" normalizeH="0" baseline="0" dirty="0" err="1">
+                <a:ln>
+                  <a:noFill/>
+                </a:ln>
+                <a:solidFill>
+                  <a:schemeClr val="bg2">
+                    <a:lumMod val="50000"/>
+                  </a:schemeClr>
+                </a:solidFill>
+                <a:effectLst/>
+                <a:latin typeface="Arial Unicode MS"/>
+              </a:rPr>
+              <a:t>Program.cs</a:t>
+            </a:r>
+            <a:r>
+              <a:rPr kumimoji="0" lang="hu-HU" altLang="hu-HU" sz="1200" b="0" i="0" u="none" strike="noStrike" cap="none" normalizeH="0" baseline="0" dirty="0">
+                <a:ln>
+                  <a:noFill/>
+                </a:ln>
+                <a:solidFill>
+                  <a:schemeClr val="bg2">
+                    <a:lumMod val="50000"/>
+                  </a:schemeClr>
+                </a:solidFill>
+                <a:effectLst/>
+              </a:rPr>
+              <a:t> – Az alkalmazás belépési pontja</a:t>
+            </a:r>
+            <a:endParaRPr kumimoji="0" lang="hu-HU" altLang="hu-HU" sz="1200" b="0" i="0" u="none" strike="noStrike" cap="none" normalizeH="0" baseline="0" dirty="0">
+              <a:ln>
+                <a:noFill/>
+              </a:ln>
+              <a:solidFill>
+                <a:schemeClr val="bg2">
+                  <a:lumMod val="50000"/>
+                </a:schemeClr>
+              </a:solidFill>
+              <a:effectLst/>
+              <a:latin typeface="Arial" panose="020B0604020202020204" pitchFamily="34" charset="0"/>
+            </a:endParaRPr>
+          </a:p>
+          <a:p>
+            <a:pPr marL="0" marR="0" lvl="0" indent="0" algn="l" defTabSz="914400" rtl="0" eaLnBrk="0" fontAlgn="base" latinLnBrk="0" hangingPunct="0">
+              <a:lnSpc>
+                <a:spcPct val="100000"/>
+              </a:lnSpc>
+              <a:spcBef>
+                <a:spcPct val="0"/>
+              </a:spcBef>
+              <a:spcAft>
+                <a:spcPct val="0"/>
+              </a:spcAft>
+              <a:buClrTx/>
+              <a:buSzTx/>
+              <a:buNone/>
+              <a:tabLst/>
+            </a:pPr>
+            <a:r>
+              <a:rPr kumimoji="0" lang="hu-HU" altLang="hu-HU" sz="1200" b="0" i="0" u="none" strike="noStrike" cap="none" normalizeH="0" baseline="0" dirty="0">
+                <a:ln>
+                  <a:noFill/>
+                </a:ln>
+                <a:solidFill>
+                  <a:schemeClr val="bg2">
+                    <a:lumMod val="50000"/>
+                  </a:schemeClr>
+                </a:solidFill>
+                <a:effectLst/>
+                <a:latin typeface="Arial Unicode MS"/>
+              </a:rPr>
+              <a:t>	</a:t>
+            </a:r>
+            <a:r>
+              <a:rPr kumimoji="0" lang="hu-HU" altLang="hu-HU" sz="1200" b="0" i="0" u="none" strike="noStrike" cap="none" normalizeH="0" baseline="0" dirty="0" err="1">
+                <a:ln>
+                  <a:noFill/>
+                </a:ln>
+                <a:solidFill>
+                  <a:schemeClr val="bg2">
+                    <a:lumMod val="50000"/>
+                  </a:schemeClr>
+                </a:solidFill>
+                <a:effectLst/>
+                <a:latin typeface="Arial Unicode MS"/>
+              </a:rPr>
+              <a:t>appsettings.json</a:t>
+            </a:r>
+            <a:r>
+              <a:rPr kumimoji="0" lang="hu-HU" altLang="hu-HU" sz="1200" b="0" i="0" u="none" strike="noStrike" cap="none" normalizeH="0" baseline="0" dirty="0">
+                <a:ln>
+                  <a:noFill/>
+                </a:ln>
+                <a:solidFill>
+                  <a:schemeClr val="bg2">
+                    <a:lumMod val="50000"/>
+                  </a:schemeClr>
+                </a:solidFill>
+                <a:effectLst/>
+              </a:rPr>
+              <a:t> és </a:t>
+            </a:r>
+            <a:r>
+              <a:rPr kumimoji="0" lang="hu-HU" altLang="hu-HU" sz="1200" b="0" i="0" u="none" strike="noStrike" cap="none" normalizeH="0" baseline="0" dirty="0" err="1">
+                <a:ln>
+                  <a:noFill/>
+                </a:ln>
+                <a:solidFill>
+                  <a:schemeClr val="bg2">
+                    <a:lumMod val="50000"/>
+                  </a:schemeClr>
+                </a:solidFill>
+                <a:effectLst/>
+                <a:latin typeface="Arial Unicode MS"/>
+              </a:rPr>
+              <a:t>appsettings.Development.json</a:t>
+            </a:r>
+            <a:r>
+              <a:rPr kumimoji="0" lang="hu-HU" altLang="hu-HU" sz="1200" b="0" i="0" u="none" strike="noStrike" cap="none" normalizeH="0" baseline="0" dirty="0">
+                <a:ln>
+                  <a:noFill/>
+                </a:ln>
+                <a:solidFill>
+                  <a:schemeClr val="bg2">
+                    <a:lumMod val="50000"/>
+                  </a:schemeClr>
+                </a:solidFill>
+                <a:effectLst/>
+              </a:rPr>
+              <a:t> – Konfigurációs fájlok</a:t>
+            </a:r>
+            <a:endParaRPr kumimoji="0" lang="hu-HU" altLang="hu-HU" sz="1200" b="0" i="0" u="none" strike="noStrike" cap="none" normalizeH="0" baseline="0" dirty="0">
+              <a:ln>
+                <a:noFill/>
+              </a:ln>
+              <a:solidFill>
+                <a:schemeClr val="bg2">
+                  <a:lumMod val="50000"/>
+                </a:schemeClr>
+              </a:solidFill>
+              <a:effectLst/>
+              <a:latin typeface="Arial" panose="020B0604020202020204" pitchFamily="34" charset="0"/>
+            </a:endParaRPr>
+          </a:p>
+          <a:p>
+            <a:pPr marL="0" marR="0" lvl="0" indent="0" algn="l" defTabSz="914400" rtl="0" eaLnBrk="0" fontAlgn="base" latinLnBrk="0" hangingPunct="0">
+              <a:lnSpc>
+                <a:spcPct val="100000"/>
+              </a:lnSpc>
+              <a:spcBef>
+                <a:spcPct val="0"/>
+              </a:spcBef>
+              <a:spcAft>
+                <a:spcPct val="0"/>
+              </a:spcAft>
+              <a:buClrTx/>
+              <a:buSzTx/>
+              <a:buNone/>
+              <a:tabLst/>
+            </a:pPr>
+            <a:r>
+              <a:rPr kumimoji="0" lang="hu-HU" altLang="hu-HU" sz="1200" b="0" i="0" u="none" strike="noStrike" cap="none" normalizeH="0" baseline="0" dirty="0">
+                <a:ln>
+                  <a:noFill/>
+                </a:ln>
+                <a:solidFill>
+                  <a:schemeClr val="bg2">
+                    <a:lumMod val="50000"/>
+                  </a:schemeClr>
+                </a:solidFill>
+                <a:effectLst/>
+                <a:latin typeface="Arial Unicode MS"/>
+              </a:rPr>
+              <a:t>	</a:t>
+            </a:r>
+            <a:r>
+              <a:rPr kumimoji="0" lang="hu-HU" altLang="hu-HU" sz="1200" b="0" i="0" u="none" strike="noStrike" cap="none" normalizeH="0" baseline="0" dirty="0" err="1">
+                <a:ln>
+                  <a:noFill/>
+                </a:ln>
+                <a:solidFill>
+                  <a:schemeClr val="bg2">
+                    <a:lumMod val="50000"/>
+                  </a:schemeClr>
+                </a:solidFill>
+                <a:effectLst/>
+                <a:latin typeface="Arial Unicode MS"/>
+              </a:rPr>
+              <a:t>cohoot.csproj</a:t>
+            </a:r>
+            <a:r>
+              <a:rPr kumimoji="0" lang="hu-HU" altLang="hu-HU" sz="1200" b="0" i="0" u="none" strike="noStrike" cap="none" normalizeH="0" baseline="0" dirty="0">
+                <a:ln>
+                  <a:noFill/>
+                </a:ln>
+                <a:solidFill>
+                  <a:schemeClr val="bg2">
+                    <a:lumMod val="50000"/>
+                  </a:schemeClr>
+                </a:solidFill>
+                <a:effectLst/>
+              </a:rPr>
+              <a:t> és </a:t>
+            </a:r>
+            <a:r>
+              <a:rPr kumimoji="0" lang="hu-HU" altLang="hu-HU" sz="1200" b="0" i="0" u="none" strike="noStrike" cap="none" normalizeH="0" baseline="0" dirty="0" err="1">
+                <a:ln>
+                  <a:noFill/>
+                </a:ln>
+                <a:solidFill>
+                  <a:schemeClr val="bg2">
+                    <a:lumMod val="50000"/>
+                  </a:schemeClr>
+                </a:solidFill>
+                <a:effectLst/>
+                <a:latin typeface="Arial Unicode MS"/>
+              </a:rPr>
+              <a:t>cohoot.csproj.user</a:t>
+            </a:r>
+            <a:r>
+              <a:rPr kumimoji="0" lang="hu-HU" altLang="hu-HU" sz="1200" b="0" i="0" u="none" strike="noStrike" cap="none" normalizeH="0" baseline="0" dirty="0">
+                <a:ln>
+                  <a:noFill/>
+                </a:ln>
+                <a:solidFill>
+                  <a:schemeClr val="bg2">
+                    <a:lumMod val="50000"/>
+                  </a:schemeClr>
+                </a:solidFill>
+                <a:effectLst/>
+              </a:rPr>
+              <a:t> – Projektfájlok</a:t>
+            </a:r>
+            <a:endParaRPr kumimoji="0" lang="hu-HU" altLang="hu-HU" sz="1200" b="0" i="0" u="none" strike="noStrike" cap="none" normalizeH="0" baseline="0" dirty="0">
+              <a:ln>
+                <a:noFill/>
+              </a:ln>
+              <a:solidFill>
+                <a:schemeClr val="bg2">
+                  <a:lumMod val="50000"/>
+                </a:schemeClr>
+              </a:solidFill>
+              <a:effectLst/>
+              <a:latin typeface="Arial" panose="020B0604020202020204" pitchFamily="34" charset="0"/>
+            </a:endParaRPr>
+          </a:p>
+          <a:p>
+            <a:pPr marL="0" marR="0" lvl="0" indent="0" algn="l" defTabSz="914400" rtl="0" eaLnBrk="0" fontAlgn="base" latinLnBrk="0" hangingPunct="0">
+              <a:lnSpc>
+                <a:spcPct val="100000"/>
+              </a:lnSpc>
+              <a:spcBef>
+                <a:spcPct val="0"/>
+              </a:spcBef>
+              <a:spcAft>
+                <a:spcPct val="0"/>
+              </a:spcAft>
+              <a:buClrTx/>
+              <a:buSzTx/>
+              <a:buNone/>
+              <a:tabLst/>
+            </a:pPr>
+            <a:r>
+              <a:rPr kumimoji="0" lang="hu-HU" altLang="hu-HU" sz="1200" b="0" i="0" u="none" strike="noStrike" cap="none" normalizeH="0" baseline="0" dirty="0">
+                <a:ln>
+                  <a:noFill/>
+                </a:ln>
+                <a:solidFill>
+                  <a:schemeClr val="bg2">
+                    <a:lumMod val="50000"/>
+                  </a:schemeClr>
+                </a:solidFill>
+                <a:effectLst/>
+                <a:latin typeface="Arial Unicode MS"/>
+              </a:rPr>
+              <a:t>	</a:t>
+            </a:r>
+            <a:r>
+              <a:rPr kumimoji="0" lang="hu-HU" altLang="hu-HU" sz="1200" b="0" i="0" u="none" strike="noStrike" cap="none" normalizeH="0" baseline="0" dirty="0" err="1">
+                <a:ln>
+                  <a:noFill/>
+                </a:ln>
+                <a:solidFill>
+                  <a:schemeClr val="bg2">
+                    <a:lumMod val="50000"/>
+                  </a:schemeClr>
+                </a:solidFill>
+                <a:effectLst/>
+                <a:latin typeface="Arial Unicode MS"/>
+              </a:rPr>
+              <a:t>cohoot.http</a:t>
+            </a:r>
+            <a:r>
+              <a:rPr kumimoji="0" lang="hu-HU" altLang="hu-HU" sz="1200" b="0" i="0" u="none" strike="noStrike" cap="none" normalizeH="0" baseline="0" dirty="0">
+                <a:ln>
+                  <a:noFill/>
+                </a:ln>
+                <a:solidFill>
+                  <a:schemeClr val="bg2">
+                    <a:lumMod val="50000"/>
+                  </a:schemeClr>
+                </a:solidFill>
+                <a:effectLst/>
+              </a:rPr>
+              <a:t> – HTTP-kérések teszteléséhez</a:t>
+            </a:r>
+            <a:endParaRPr kumimoji="0" lang="hu-HU" altLang="hu-HU" sz="1200" b="0" i="0" u="none" strike="noStrike" cap="none" normalizeH="0" baseline="0" dirty="0">
+              <a:ln>
+                <a:noFill/>
+              </a:ln>
+              <a:solidFill>
+                <a:schemeClr val="bg2">
+                  <a:lumMod val="50000"/>
+                </a:schemeClr>
+              </a:solidFill>
+              <a:effectLst/>
+              <a:latin typeface="Arial" panose="020B0604020202020204" pitchFamily="34" charset="0"/>
+            </a:endParaRPr>
+          </a:p>
+          <a:p>
+            <a:pPr marL="0" marR="0" lvl="0" indent="0" algn="l" defTabSz="914400" rtl="0" eaLnBrk="0" fontAlgn="base" latinLnBrk="0" hangingPunct="0">
+              <a:lnSpc>
+                <a:spcPct val="100000"/>
+              </a:lnSpc>
+              <a:spcBef>
+                <a:spcPct val="0"/>
+              </a:spcBef>
+              <a:spcAft>
+                <a:spcPct val="0"/>
+              </a:spcAft>
+              <a:buClrTx/>
+              <a:buSzTx/>
+              <a:buFontTx/>
+              <a:buChar char="•"/>
+              <a:tabLst/>
+            </a:pPr>
+            <a:r>
+              <a:rPr kumimoji="0" lang="hu-HU" altLang="hu-HU" sz="1200" b="1" i="0" u="none" strike="noStrike" cap="none" normalizeH="0" baseline="0" dirty="0" err="1">
+                <a:ln>
+                  <a:noFill/>
+                </a:ln>
+                <a:solidFill>
+                  <a:schemeClr val="bg2">
+                    <a:lumMod val="50000"/>
+                  </a:schemeClr>
+                </a:solidFill>
+                <a:effectLst/>
+                <a:latin typeface="Arial" panose="020B0604020202020204" pitchFamily="34" charset="0"/>
+              </a:rPr>
+              <a:t>cohoot</a:t>
+            </a:r>
+            <a:r>
+              <a:rPr kumimoji="0" lang="hu-HU" altLang="hu-HU" sz="1200" b="1" i="0" u="none" strike="noStrike" cap="none" normalizeH="0" baseline="0" dirty="0">
+                <a:ln>
+                  <a:noFill/>
+                </a:ln>
+                <a:solidFill>
+                  <a:schemeClr val="bg2">
+                    <a:lumMod val="50000"/>
+                  </a:schemeClr>
+                </a:solidFill>
+                <a:effectLst/>
+                <a:latin typeface="Arial" panose="020B0604020202020204" pitchFamily="34" charset="0"/>
+              </a:rPr>
+              <a:t>-backend/</a:t>
+            </a:r>
+            <a:r>
+              <a:rPr kumimoji="0" lang="hu-HU" altLang="hu-HU" sz="1200" b="1" i="0" u="none" strike="noStrike" cap="none" normalizeH="0" baseline="0" dirty="0" err="1">
+                <a:ln>
+                  <a:noFill/>
+                </a:ln>
+                <a:solidFill>
+                  <a:schemeClr val="bg2">
+                    <a:lumMod val="50000"/>
+                  </a:schemeClr>
+                </a:solidFill>
+                <a:effectLst/>
+                <a:latin typeface="Arial" panose="020B0604020202020204" pitchFamily="34" charset="0"/>
+              </a:rPr>
+              <a:t>cohoot</a:t>
+            </a:r>
+            <a:r>
+              <a:rPr kumimoji="0" lang="hu-HU" altLang="hu-HU" sz="1200" b="1" i="0" u="none" strike="noStrike" cap="none" normalizeH="0" baseline="0" dirty="0">
+                <a:ln>
+                  <a:noFill/>
+                </a:ln>
+                <a:solidFill>
+                  <a:schemeClr val="bg2">
+                    <a:lumMod val="50000"/>
+                  </a:schemeClr>
+                </a:solidFill>
+                <a:effectLst/>
+                <a:latin typeface="Arial" panose="020B0604020202020204" pitchFamily="34" charset="0"/>
+              </a:rPr>
+              <a:t>/</a:t>
+            </a:r>
+            <a:r>
+              <a:rPr kumimoji="0" lang="hu-HU" altLang="hu-HU" sz="1200" b="1" i="0" u="none" strike="noStrike" cap="none" normalizeH="0" baseline="0" dirty="0" err="1">
+                <a:ln>
+                  <a:noFill/>
+                </a:ln>
+                <a:solidFill>
+                  <a:schemeClr val="bg2">
+                    <a:lumMod val="50000"/>
+                  </a:schemeClr>
+                </a:solidFill>
+                <a:effectLst/>
+                <a:latin typeface="Arial" panose="020B0604020202020204" pitchFamily="34" charset="0"/>
+              </a:rPr>
+              <a:t>Controllers</a:t>
+            </a:r>
+            <a:r>
+              <a:rPr kumimoji="0" lang="hu-HU" altLang="hu-HU" sz="1200" b="1" i="0" u="none" strike="noStrike" cap="none" normalizeH="0" baseline="0" dirty="0">
+                <a:ln>
+                  <a:noFill/>
+                </a:ln>
+                <a:solidFill>
+                  <a:schemeClr val="bg2">
+                    <a:lumMod val="50000"/>
+                  </a:schemeClr>
+                </a:solidFill>
+                <a:effectLst/>
+                <a:latin typeface="Arial" panose="020B0604020202020204" pitchFamily="34" charset="0"/>
+              </a:rPr>
+              <a:t>/</a:t>
+            </a:r>
+            <a:r>
+              <a:rPr kumimoji="0" lang="hu-HU" altLang="hu-HU" sz="1200" b="0" i="0" u="none" strike="noStrike" cap="none" normalizeH="0" baseline="0" dirty="0">
+                <a:ln>
+                  <a:noFill/>
+                </a:ln>
+                <a:solidFill>
+                  <a:schemeClr val="bg2">
+                    <a:lumMod val="50000"/>
+                  </a:schemeClr>
+                </a:solidFill>
+                <a:effectLst/>
+                <a:latin typeface="Arial" panose="020B0604020202020204" pitchFamily="34" charset="0"/>
+              </a:rPr>
+              <a:t> </a:t>
+            </a:r>
+            <a:r>
+              <a:rPr kumimoji="0" lang="hu-HU" altLang="hu-HU" sz="1200" b="0" i="1" u="none" strike="noStrike" cap="none" normalizeH="0" baseline="0" dirty="0">
+                <a:ln>
+                  <a:noFill/>
+                </a:ln>
+                <a:solidFill>
+                  <a:schemeClr val="bg2">
+                    <a:lumMod val="50000"/>
+                  </a:schemeClr>
+                </a:solidFill>
+                <a:effectLst/>
+                <a:latin typeface="Arial" panose="020B0604020202020204" pitchFamily="34" charset="0"/>
+              </a:rPr>
+              <a:t>(vezérlők az API végpontokhoz)</a:t>
+            </a:r>
+            <a:r>
+              <a:rPr lang="hu-HU" altLang="hu-HU" sz="1200" dirty="0">
+                <a:solidFill>
+                  <a:schemeClr val="bg2">
+                    <a:lumMod val="50000"/>
+                  </a:schemeClr>
+                </a:solidFill>
+                <a:latin typeface="Arial" panose="020B0604020202020204" pitchFamily="34" charset="0"/>
+              </a:rPr>
+              <a:t>:</a:t>
+            </a:r>
+            <a:r>
+              <a:rPr kumimoji="0" lang="hu-HU" altLang="hu-HU" sz="1200" b="0" i="0" u="none" strike="noStrike" cap="none" normalizeH="0" baseline="0" dirty="0" err="1">
+                <a:ln>
+                  <a:noFill/>
+                </a:ln>
+                <a:solidFill>
+                  <a:schemeClr val="bg2">
+                    <a:lumMod val="50000"/>
+                  </a:schemeClr>
+                </a:solidFill>
+                <a:effectLst/>
+                <a:latin typeface="Arial Unicode MS"/>
+              </a:rPr>
+              <a:t>LoginController.cs</a:t>
+            </a:r>
+            <a:r>
+              <a:rPr kumimoji="0" lang="hu-HU" altLang="hu-HU" sz="1200" b="0" i="0" u="none" strike="noStrike" cap="none" normalizeH="0" baseline="0" dirty="0">
+                <a:ln>
+                  <a:noFill/>
+                </a:ln>
+                <a:solidFill>
+                  <a:schemeClr val="bg2">
+                    <a:lumMod val="50000"/>
+                  </a:schemeClr>
+                </a:solidFill>
+                <a:effectLst/>
+              </a:rPr>
+              <a:t> – Felhasználói bejelentkezés kezelése</a:t>
+            </a:r>
+            <a:endParaRPr kumimoji="0" lang="hu-HU" altLang="hu-HU" sz="1200" b="0" i="0" u="none" strike="noStrike" cap="none" normalizeH="0" baseline="0" dirty="0">
+              <a:ln>
+                <a:noFill/>
+              </a:ln>
+              <a:solidFill>
+                <a:schemeClr val="bg2">
+                  <a:lumMod val="50000"/>
+                </a:schemeClr>
+              </a:solidFill>
+              <a:effectLst/>
+              <a:latin typeface="Arial" panose="020B0604020202020204" pitchFamily="34" charset="0"/>
+            </a:endParaRPr>
+          </a:p>
+          <a:p>
+            <a:pPr marL="0" marR="0" lvl="0" indent="0" algn="l" defTabSz="914400" rtl="0" eaLnBrk="0" fontAlgn="base" latinLnBrk="0" hangingPunct="0">
+              <a:lnSpc>
+                <a:spcPct val="100000"/>
+              </a:lnSpc>
+              <a:spcBef>
+                <a:spcPct val="0"/>
+              </a:spcBef>
+              <a:spcAft>
+                <a:spcPct val="0"/>
+              </a:spcAft>
+              <a:buClrTx/>
+              <a:buSzTx/>
+              <a:buNone/>
+              <a:tabLst/>
+            </a:pPr>
+            <a:r>
+              <a:rPr kumimoji="0" lang="hu-HU" altLang="hu-HU" sz="1200" b="0" i="0" u="none" strike="noStrike" cap="none" normalizeH="0" baseline="0" dirty="0">
+                <a:ln>
+                  <a:noFill/>
+                </a:ln>
+                <a:solidFill>
+                  <a:schemeClr val="bg2">
+                    <a:lumMod val="50000"/>
+                  </a:schemeClr>
+                </a:solidFill>
+                <a:effectLst/>
+                <a:latin typeface="Arial Unicode MS"/>
+              </a:rPr>
+              <a:t>	</a:t>
+            </a:r>
+            <a:r>
+              <a:rPr kumimoji="0" lang="hu-HU" altLang="hu-HU" sz="1200" b="0" i="0" u="none" strike="noStrike" cap="none" normalizeH="0" baseline="0" dirty="0" err="1">
+                <a:ln>
+                  <a:noFill/>
+                </a:ln>
+                <a:solidFill>
+                  <a:schemeClr val="bg2">
+                    <a:lumMod val="50000"/>
+                  </a:schemeClr>
+                </a:solidFill>
+                <a:effectLst/>
+                <a:latin typeface="Arial Unicode MS"/>
+              </a:rPr>
+              <a:t>PointController.cs</a:t>
+            </a:r>
+            <a:r>
+              <a:rPr kumimoji="0" lang="hu-HU" altLang="hu-HU" sz="1200" b="0" i="0" u="none" strike="noStrike" cap="none" normalizeH="0" baseline="0" dirty="0">
+                <a:ln>
+                  <a:noFill/>
+                </a:ln>
+                <a:solidFill>
+                  <a:schemeClr val="bg2">
+                    <a:lumMod val="50000"/>
+                  </a:schemeClr>
+                </a:solidFill>
+                <a:effectLst/>
+              </a:rPr>
+              <a:t> – Pontszámok kezelése</a:t>
+            </a:r>
+            <a:endParaRPr kumimoji="0" lang="hu-HU" altLang="hu-HU" sz="1200" b="0" i="0" u="none" strike="noStrike" cap="none" normalizeH="0" baseline="0" dirty="0">
+              <a:ln>
+                <a:noFill/>
+              </a:ln>
+              <a:solidFill>
+                <a:schemeClr val="bg2">
+                  <a:lumMod val="50000"/>
+                </a:schemeClr>
+              </a:solidFill>
+              <a:effectLst/>
+              <a:latin typeface="Arial" panose="020B0604020202020204" pitchFamily="34" charset="0"/>
+            </a:endParaRPr>
+          </a:p>
+          <a:p>
+            <a:pPr marL="0" marR="0" lvl="0" indent="0" algn="l" defTabSz="914400" rtl="0" eaLnBrk="0" fontAlgn="base" latinLnBrk="0" hangingPunct="0">
+              <a:lnSpc>
+                <a:spcPct val="100000"/>
+              </a:lnSpc>
+              <a:spcBef>
+                <a:spcPct val="0"/>
+              </a:spcBef>
+              <a:spcAft>
+                <a:spcPct val="0"/>
+              </a:spcAft>
+              <a:buClrTx/>
+              <a:buSzTx/>
+              <a:buNone/>
+              <a:tabLst/>
+            </a:pPr>
+            <a:r>
+              <a:rPr kumimoji="0" lang="hu-HU" altLang="hu-HU" sz="1200" b="0" i="0" u="none" strike="noStrike" cap="none" normalizeH="0" baseline="0" dirty="0">
+                <a:ln>
+                  <a:noFill/>
+                </a:ln>
+                <a:solidFill>
+                  <a:schemeClr val="bg2">
+                    <a:lumMod val="50000"/>
+                  </a:schemeClr>
+                </a:solidFill>
+                <a:effectLst/>
+                <a:latin typeface="Arial Unicode MS"/>
+              </a:rPr>
+              <a:t>	</a:t>
+            </a:r>
+            <a:r>
+              <a:rPr kumimoji="0" lang="hu-HU" altLang="hu-HU" sz="1200" b="0" i="0" u="none" strike="noStrike" cap="none" normalizeH="0" baseline="0" dirty="0" err="1">
+                <a:ln>
+                  <a:noFill/>
+                </a:ln>
+                <a:solidFill>
+                  <a:schemeClr val="bg2">
+                    <a:lumMod val="50000"/>
+                  </a:schemeClr>
+                </a:solidFill>
+                <a:effectLst/>
+                <a:latin typeface="Arial Unicode MS"/>
+              </a:rPr>
+              <a:t>QuizController.cs</a:t>
+            </a:r>
+            <a:r>
+              <a:rPr kumimoji="0" lang="hu-HU" altLang="hu-HU" sz="1200" b="0" i="0" u="none" strike="noStrike" cap="none" normalizeH="0" baseline="0" dirty="0">
+                <a:ln>
+                  <a:noFill/>
+                </a:ln>
+                <a:solidFill>
+                  <a:schemeClr val="bg2">
+                    <a:lumMod val="50000"/>
+                  </a:schemeClr>
+                </a:solidFill>
+                <a:effectLst/>
+              </a:rPr>
+              <a:t> – Kvíz API végpontok</a:t>
+            </a:r>
+            <a:endParaRPr kumimoji="0" lang="hu-HU" altLang="hu-HU" sz="1200" b="0" i="0" u="none" strike="noStrike" cap="none" normalizeH="0" baseline="0" dirty="0">
+              <a:ln>
+                <a:noFill/>
+              </a:ln>
+              <a:solidFill>
+                <a:schemeClr val="bg2">
+                  <a:lumMod val="50000"/>
+                </a:schemeClr>
+              </a:solidFill>
+              <a:effectLst/>
+              <a:latin typeface="Arial" panose="020B0604020202020204" pitchFamily="34" charset="0"/>
+            </a:endParaRPr>
+          </a:p>
+          <a:p>
+            <a:pPr marL="0" marR="0" lvl="0" indent="0" algn="l" defTabSz="914400" rtl="0" eaLnBrk="0" fontAlgn="base" latinLnBrk="0" hangingPunct="0">
+              <a:lnSpc>
+                <a:spcPct val="100000"/>
+              </a:lnSpc>
+              <a:spcBef>
+                <a:spcPct val="0"/>
+              </a:spcBef>
+              <a:spcAft>
+                <a:spcPct val="0"/>
+              </a:spcAft>
+              <a:buClrTx/>
+              <a:buSzTx/>
+              <a:buNone/>
+              <a:tabLst/>
+            </a:pPr>
+            <a:r>
+              <a:rPr kumimoji="0" lang="hu-HU" altLang="hu-HU" sz="1200" b="0" i="0" u="none" strike="noStrike" cap="none" normalizeH="0" baseline="0" dirty="0">
+                <a:ln>
+                  <a:noFill/>
+                </a:ln>
+                <a:solidFill>
+                  <a:schemeClr val="bg2">
+                    <a:lumMod val="50000"/>
+                  </a:schemeClr>
+                </a:solidFill>
+                <a:effectLst/>
+                <a:latin typeface="Arial Unicode MS"/>
+              </a:rPr>
+              <a:t>	</a:t>
+            </a:r>
+            <a:r>
+              <a:rPr kumimoji="0" lang="hu-HU" altLang="hu-HU" sz="1200" b="0" i="0" u="none" strike="noStrike" cap="none" normalizeH="0" baseline="0" dirty="0" err="1">
+                <a:ln>
+                  <a:noFill/>
+                </a:ln>
+                <a:solidFill>
+                  <a:schemeClr val="bg2">
+                    <a:lumMod val="50000"/>
+                  </a:schemeClr>
+                </a:solidFill>
+                <a:effectLst/>
+                <a:latin typeface="Arial Unicode MS"/>
+              </a:rPr>
+              <a:t>RankingController.cs</a:t>
+            </a:r>
+            <a:r>
+              <a:rPr kumimoji="0" lang="hu-HU" altLang="hu-HU" sz="1200" b="0" i="0" u="none" strike="noStrike" cap="none" normalizeH="0" baseline="0" dirty="0">
+                <a:ln>
+                  <a:noFill/>
+                </a:ln>
+                <a:solidFill>
+                  <a:schemeClr val="bg2">
+                    <a:lumMod val="50000"/>
+                  </a:schemeClr>
+                </a:solidFill>
+                <a:effectLst/>
+              </a:rPr>
+              <a:t> – Ranglista kezelés</a:t>
+            </a:r>
+            <a:endParaRPr kumimoji="0" lang="hu-HU" altLang="hu-HU" sz="1200" b="0" i="0" u="none" strike="noStrike" cap="none" normalizeH="0" baseline="0" dirty="0">
+              <a:ln>
+                <a:noFill/>
+              </a:ln>
+              <a:solidFill>
+                <a:schemeClr val="bg2">
+                  <a:lumMod val="50000"/>
+                </a:schemeClr>
+              </a:solidFill>
+              <a:effectLst/>
+              <a:latin typeface="Arial" panose="020B0604020202020204" pitchFamily="34" charset="0"/>
+            </a:endParaRPr>
+          </a:p>
+          <a:p>
+            <a:pPr marL="0" marR="0" lvl="0" indent="0" algn="l" defTabSz="914400" rtl="0" eaLnBrk="0" fontAlgn="base" latinLnBrk="0" hangingPunct="0">
+              <a:lnSpc>
+                <a:spcPct val="100000"/>
+              </a:lnSpc>
+              <a:spcBef>
+                <a:spcPct val="0"/>
+              </a:spcBef>
+              <a:spcAft>
+                <a:spcPct val="0"/>
+              </a:spcAft>
+              <a:buClrTx/>
+              <a:buSzTx/>
+              <a:buNone/>
+              <a:tabLst/>
+            </a:pPr>
+            <a:r>
+              <a:rPr kumimoji="0" lang="hu-HU" altLang="hu-HU" sz="1200" b="0" i="0" u="none" strike="noStrike" cap="none" normalizeH="0" baseline="0" dirty="0">
+                <a:ln>
+                  <a:noFill/>
+                </a:ln>
+                <a:solidFill>
+                  <a:schemeClr val="bg2">
+                    <a:lumMod val="50000"/>
+                  </a:schemeClr>
+                </a:solidFill>
+                <a:effectLst/>
+                <a:latin typeface="Arial Unicode MS"/>
+              </a:rPr>
+              <a:t>	</a:t>
+            </a:r>
+            <a:r>
+              <a:rPr kumimoji="0" lang="hu-HU" altLang="hu-HU" sz="1200" b="0" i="0" u="none" strike="noStrike" cap="none" normalizeH="0" baseline="0" dirty="0" err="1">
+                <a:ln>
+                  <a:noFill/>
+                </a:ln>
+                <a:solidFill>
+                  <a:schemeClr val="bg2">
+                    <a:lumMod val="50000"/>
+                  </a:schemeClr>
+                </a:solidFill>
+                <a:effectLst/>
+                <a:latin typeface="Arial Unicode MS"/>
+              </a:rPr>
+              <a:t>RegistryController.cs</a:t>
+            </a:r>
+            <a:r>
+              <a:rPr kumimoji="0" lang="hu-HU" altLang="hu-HU" sz="1200" b="0" i="0" u="none" strike="noStrike" cap="none" normalizeH="0" baseline="0" dirty="0">
+                <a:ln>
+                  <a:noFill/>
+                </a:ln>
+                <a:solidFill>
+                  <a:schemeClr val="bg2">
+                    <a:lumMod val="50000"/>
+                  </a:schemeClr>
+                </a:solidFill>
+                <a:effectLst/>
+              </a:rPr>
+              <a:t> – Felhasználói regisztráció</a:t>
+            </a:r>
+            <a:endParaRPr kumimoji="0" lang="hu-HU" altLang="hu-HU" sz="1200" b="0" i="0" u="none" strike="noStrike" cap="none" normalizeH="0" baseline="0" dirty="0">
+              <a:ln>
+                <a:noFill/>
+              </a:ln>
+              <a:solidFill>
+                <a:schemeClr val="bg2">
+                  <a:lumMod val="50000"/>
+                </a:schemeClr>
+              </a:solidFill>
+              <a:effectLst/>
+              <a:latin typeface="Arial" panose="020B0604020202020204" pitchFamily="34" charset="0"/>
+            </a:endParaRPr>
+          </a:p>
+          <a:p>
+            <a:pPr marL="0" marR="0" lvl="0" indent="0" algn="l" defTabSz="914400" rtl="0" eaLnBrk="0" fontAlgn="base" latinLnBrk="0" hangingPunct="0">
+              <a:lnSpc>
+                <a:spcPct val="100000"/>
+              </a:lnSpc>
+              <a:spcBef>
+                <a:spcPct val="0"/>
+              </a:spcBef>
+              <a:spcAft>
+                <a:spcPct val="0"/>
+              </a:spcAft>
+              <a:buClrTx/>
+              <a:buSzTx/>
+              <a:buFontTx/>
+              <a:buChar char="•"/>
+              <a:tabLst/>
+            </a:pPr>
+            <a:r>
+              <a:rPr kumimoji="0" lang="hu-HU" altLang="hu-HU" sz="1200" b="1" i="0" u="none" strike="noStrike" cap="none" normalizeH="0" baseline="0" dirty="0" err="1">
+                <a:ln>
+                  <a:noFill/>
+                </a:ln>
+                <a:solidFill>
+                  <a:schemeClr val="bg2">
+                    <a:lumMod val="50000"/>
+                  </a:schemeClr>
+                </a:solidFill>
+                <a:effectLst/>
+                <a:latin typeface="Arial" panose="020B0604020202020204" pitchFamily="34" charset="0"/>
+              </a:rPr>
+              <a:t>cohoot</a:t>
+            </a:r>
+            <a:r>
+              <a:rPr kumimoji="0" lang="hu-HU" altLang="hu-HU" sz="1200" b="1" i="0" u="none" strike="noStrike" cap="none" normalizeH="0" baseline="0" dirty="0">
+                <a:ln>
+                  <a:noFill/>
+                </a:ln>
+                <a:solidFill>
+                  <a:schemeClr val="bg2">
+                    <a:lumMod val="50000"/>
+                  </a:schemeClr>
+                </a:solidFill>
+                <a:effectLst/>
+                <a:latin typeface="Arial" panose="020B0604020202020204" pitchFamily="34" charset="0"/>
+              </a:rPr>
+              <a:t>-backend/</a:t>
+            </a:r>
+            <a:r>
+              <a:rPr kumimoji="0" lang="hu-HU" altLang="hu-HU" sz="1200" b="1" i="0" u="none" strike="noStrike" cap="none" normalizeH="0" baseline="0" dirty="0" err="1">
+                <a:ln>
+                  <a:noFill/>
+                </a:ln>
+                <a:solidFill>
+                  <a:schemeClr val="bg2">
+                    <a:lumMod val="50000"/>
+                  </a:schemeClr>
+                </a:solidFill>
+                <a:effectLst/>
+                <a:latin typeface="Arial" panose="020B0604020202020204" pitchFamily="34" charset="0"/>
+              </a:rPr>
+              <a:t>cohoot</a:t>
+            </a:r>
+            <a:r>
+              <a:rPr kumimoji="0" lang="hu-HU" altLang="hu-HU" sz="1200" b="1" i="0" u="none" strike="noStrike" cap="none" normalizeH="0" baseline="0" dirty="0">
+                <a:ln>
+                  <a:noFill/>
+                </a:ln>
+                <a:solidFill>
+                  <a:schemeClr val="bg2">
+                    <a:lumMod val="50000"/>
+                  </a:schemeClr>
+                </a:solidFill>
+                <a:effectLst/>
+                <a:latin typeface="Arial" panose="020B0604020202020204" pitchFamily="34" charset="0"/>
+              </a:rPr>
+              <a:t>/</a:t>
+            </a:r>
+            <a:r>
+              <a:rPr kumimoji="0" lang="hu-HU" altLang="hu-HU" sz="1200" b="1" i="0" u="none" strike="noStrike" cap="none" normalizeH="0" baseline="0" dirty="0" err="1">
+                <a:ln>
+                  <a:noFill/>
+                </a:ln>
+                <a:solidFill>
+                  <a:schemeClr val="bg2">
+                    <a:lumMod val="50000"/>
+                  </a:schemeClr>
+                </a:solidFill>
+                <a:effectLst/>
+                <a:latin typeface="Arial" panose="020B0604020202020204" pitchFamily="34" charset="0"/>
+              </a:rPr>
+              <a:t>DTOs</a:t>
+            </a:r>
+            <a:r>
+              <a:rPr kumimoji="0" lang="hu-HU" altLang="hu-HU" sz="1200" b="1" i="0" u="none" strike="noStrike" cap="none" normalizeH="0" baseline="0" dirty="0">
+                <a:ln>
+                  <a:noFill/>
+                </a:ln>
+                <a:solidFill>
+                  <a:schemeClr val="bg2">
+                    <a:lumMod val="50000"/>
+                  </a:schemeClr>
+                </a:solidFill>
+                <a:effectLst/>
+                <a:latin typeface="Arial" panose="020B0604020202020204" pitchFamily="34" charset="0"/>
+              </a:rPr>
+              <a:t>/</a:t>
+            </a:r>
+            <a:r>
+              <a:rPr kumimoji="0" lang="hu-HU" altLang="hu-HU" sz="1200" b="0" i="0" u="none" strike="noStrike" cap="none" normalizeH="0" baseline="0" dirty="0">
+                <a:ln>
+                  <a:noFill/>
+                </a:ln>
+                <a:solidFill>
+                  <a:schemeClr val="bg2">
+                    <a:lumMod val="50000"/>
+                  </a:schemeClr>
+                </a:solidFill>
+                <a:effectLst/>
+                <a:latin typeface="Arial" panose="020B0604020202020204" pitchFamily="34" charset="0"/>
+              </a:rPr>
+              <a:t> </a:t>
+            </a:r>
+            <a:r>
+              <a:rPr kumimoji="0" lang="hu-HU" altLang="hu-HU" sz="1200" b="0" i="1" u="none" strike="noStrike" cap="none" normalizeH="0" baseline="0" dirty="0">
+                <a:ln>
+                  <a:noFill/>
+                </a:ln>
+                <a:solidFill>
+                  <a:schemeClr val="bg2">
+                    <a:lumMod val="50000"/>
+                  </a:schemeClr>
+                </a:solidFill>
+                <a:effectLst/>
+                <a:latin typeface="Arial" panose="020B0604020202020204" pitchFamily="34" charset="0"/>
+              </a:rPr>
+              <a:t>(adatátviteli objektumok)</a:t>
+            </a:r>
+            <a:r>
+              <a:rPr lang="hu-HU" altLang="hu-HU" sz="1200" dirty="0">
+                <a:solidFill>
+                  <a:schemeClr val="bg2">
+                    <a:lumMod val="50000"/>
+                  </a:schemeClr>
+                </a:solidFill>
+                <a:latin typeface="Arial" panose="020B0604020202020204" pitchFamily="34" charset="0"/>
+              </a:rPr>
+              <a:t>:</a:t>
+            </a:r>
+            <a:r>
+              <a:rPr kumimoji="0" lang="hu-HU" altLang="hu-HU" sz="1200" b="0" i="0" u="none" strike="noStrike" cap="none" normalizeH="0" baseline="0" dirty="0" err="1">
+                <a:ln>
+                  <a:noFill/>
+                </a:ln>
+                <a:solidFill>
+                  <a:schemeClr val="bg2">
+                    <a:lumMod val="50000"/>
+                  </a:schemeClr>
+                </a:solidFill>
+                <a:effectLst/>
+                <a:latin typeface="Arial Unicode MS"/>
+              </a:rPr>
+              <a:t>LoggedUser.cs</a:t>
+            </a:r>
+            <a:r>
+              <a:rPr kumimoji="0" lang="hu-HU" altLang="hu-HU" sz="1200" b="0" i="0" u="none" strike="noStrike" cap="none" normalizeH="0" baseline="0" dirty="0">
+                <a:ln>
+                  <a:noFill/>
+                </a:ln>
+                <a:solidFill>
+                  <a:schemeClr val="bg2">
+                    <a:lumMod val="50000"/>
+                  </a:schemeClr>
+                </a:solidFill>
+                <a:effectLst/>
+              </a:rPr>
+              <a:t>, </a:t>
+            </a:r>
+            <a:r>
+              <a:rPr kumimoji="0" lang="hu-HU" altLang="hu-HU" sz="1200" b="0" i="0" u="none" strike="noStrike" cap="none" normalizeH="0" baseline="0" dirty="0" err="1">
+                <a:ln>
+                  <a:noFill/>
+                </a:ln>
+                <a:solidFill>
+                  <a:schemeClr val="bg2">
+                    <a:lumMod val="50000"/>
+                  </a:schemeClr>
+                </a:solidFill>
+                <a:effectLst/>
+                <a:latin typeface="Arial Unicode MS"/>
+              </a:rPr>
+              <a:t>LoginDTO.cs</a:t>
+            </a:r>
+            <a:r>
+              <a:rPr kumimoji="0" lang="hu-HU" altLang="hu-HU" sz="1200" b="0" i="0" u="none" strike="noStrike" cap="none" normalizeH="0" baseline="0" dirty="0">
+                <a:ln>
+                  <a:noFill/>
+                </a:ln>
+                <a:solidFill>
+                  <a:schemeClr val="bg2">
+                    <a:lumMod val="50000"/>
+                  </a:schemeClr>
+                </a:solidFill>
+                <a:effectLst/>
+              </a:rPr>
+              <a:t>, </a:t>
+            </a:r>
+            <a:r>
+              <a:rPr kumimoji="0" lang="hu-HU" altLang="hu-HU" sz="1200" b="0" i="0" u="none" strike="noStrike" cap="none" normalizeH="0" baseline="0" dirty="0" err="1">
+                <a:ln>
+                  <a:noFill/>
+                </a:ln>
+                <a:solidFill>
+                  <a:schemeClr val="bg2">
+                    <a:lumMod val="50000"/>
+                  </a:schemeClr>
+                </a:solidFill>
+                <a:effectLst/>
+                <a:latin typeface="Arial Unicode MS"/>
+              </a:rPr>
+              <a:t>PointDTO.cs</a:t>
+            </a:r>
+            <a:r>
+              <a:rPr kumimoji="0" lang="hu-HU" altLang="hu-HU" sz="1200" b="0" i="0" u="none" strike="noStrike" cap="none" normalizeH="0" baseline="0" dirty="0">
+                <a:ln>
+                  <a:noFill/>
+                </a:ln>
+                <a:solidFill>
+                  <a:schemeClr val="bg2">
+                    <a:lumMod val="50000"/>
+                  </a:schemeClr>
+                </a:solidFill>
+                <a:effectLst/>
+              </a:rPr>
+              <a:t>, </a:t>
+            </a:r>
+            <a:r>
+              <a:rPr kumimoji="0" lang="hu-HU" altLang="hu-HU" sz="1200" b="0" i="0" u="none" strike="noStrike" cap="none" normalizeH="0" baseline="0" dirty="0" err="1">
+                <a:ln>
+                  <a:noFill/>
+                </a:ln>
+                <a:solidFill>
+                  <a:schemeClr val="bg2">
+                    <a:lumMod val="50000"/>
+                  </a:schemeClr>
+                </a:solidFill>
+                <a:effectLst/>
+                <a:latin typeface="Arial Unicode MS"/>
+              </a:rPr>
+              <a:t>RegisterDTO.cs</a:t>
+            </a:r>
+            <a:r>
+              <a:rPr kumimoji="0" lang="hu-HU" altLang="hu-HU" sz="1200" b="0" i="0" u="none" strike="noStrike" cap="none" normalizeH="0" baseline="0" dirty="0">
+                <a:ln>
+                  <a:noFill/>
+                </a:ln>
+                <a:solidFill>
+                  <a:schemeClr val="bg2">
+                    <a:lumMod val="50000"/>
+                  </a:schemeClr>
+                </a:solidFill>
+                <a:effectLst/>
+              </a:rPr>
+              <a:t> – Adatformátumok az API-n keresztüli adatcseréhez</a:t>
+            </a:r>
+            <a:endParaRPr kumimoji="0" lang="hu-HU" altLang="hu-HU" sz="1200" b="0" i="0" u="none" strike="noStrike" cap="none" normalizeH="0" baseline="0" dirty="0">
+              <a:ln>
+                <a:noFill/>
+              </a:ln>
+              <a:solidFill>
+                <a:schemeClr val="bg2">
+                  <a:lumMod val="50000"/>
+                </a:schemeClr>
+              </a:solidFill>
+              <a:effectLst/>
+              <a:latin typeface="Arial" panose="020B0604020202020204" pitchFamily="34" charset="0"/>
+            </a:endParaRPr>
+          </a:p>
+          <a:p>
+            <a:pPr marL="0" marR="0" lvl="0" indent="0" algn="l" defTabSz="914400" rtl="0" eaLnBrk="0" fontAlgn="base" latinLnBrk="0" hangingPunct="0">
+              <a:lnSpc>
+                <a:spcPct val="100000"/>
+              </a:lnSpc>
+              <a:spcBef>
+                <a:spcPct val="0"/>
+              </a:spcBef>
+              <a:spcAft>
+                <a:spcPct val="0"/>
+              </a:spcAft>
+              <a:buClrTx/>
+              <a:buSzTx/>
+              <a:buFontTx/>
+              <a:buChar char="•"/>
+              <a:tabLst/>
+            </a:pPr>
+            <a:r>
+              <a:rPr kumimoji="0" lang="hu-HU" altLang="hu-HU" sz="1200" b="1" i="0" u="none" strike="noStrike" cap="none" normalizeH="0" baseline="0" dirty="0" err="1">
+                <a:ln>
+                  <a:noFill/>
+                </a:ln>
+                <a:solidFill>
+                  <a:schemeClr val="bg2">
+                    <a:lumMod val="50000"/>
+                  </a:schemeClr>
+                </a:solidFill>
+                <a:effectLst/>
+                <a:latin typeface="Arial" panose="020B0604020202020204" pitchFamily="34" charset="0"/>
+              </a:rPr>
+              <a:t>cohoot</a:t>
+            </a:r>
+            <a:r>
+              <a:rPr kumimoji="0" lang="hu-HU" altLang="hu-HU" sz="1200" b="1" i="0" u="none" strike="noStrike" cap="none" normalizeH="0" baseline="0" dirty="0">
+                <a:ln>
+                  <a:noFill/>
+                </a:ln>
+                <a:solidFill>
+                  <a:schemeClr val="bg2">
+                    <a:lumMod val="50000"/>
+                  </a:schemeClr>
+                </a:solidFill>
+                <a:effectLst/>
+                <a:latin typeface="Arial" panose="020B0604020202020204" pitchFamily="34" charset="0"/>
+              </a:rPr>
+              <a:t>-backend/</a:t>
+            </a:r>
+            <a:r>
+              <a:rPr kumimoji="0" lang="hu-HU" altLang="hu-HU" sz="1200" b="1" i="0" u="none" strike="noStrike" cap="none" normalizeH="0" baseline="0" dirty="0" err="1">
+                <a:ln>
+                  <a:noFill/>
+                </a:ln>
+                <a:solidFill>
+                  <a:schemeClr val="bg2">
+                    <a:lumMod val="50000"/>
+                  </a:schemeClr>
+                </a:solidFill>
+                <a:effectLst/>
+                <a:latin typeface="Arial" panose="020B0604020202020204" pitchFamily="34" charset="0"/>
+              </a:rPr>
+              <a:t>cohoot</a:t>
+            </a:r>
+            <a:r>
+              <a:rPr kumimoji="0" lang="hu-HU" altLang="hu-HU" sz="1200" b="1" i="0" u="none" strike="noStrike" cap="none" normalizeH="0" baseline="0" dirty="0">
+                <a:ln>
+                  <a:noFill/>
+                </a:ln>
+                <a:solidFill>
+                  <a:schemeClr val="bg2">
+                    <a:lumMod val="50000"/>
+                  </a:schemeClr>
+                </a:solidFill>
+                <a:effectLst/>
+                <a:latin typeface="Arial" panose="020B0604020202020204" pitchFamily="34" charset="0"/>
+              </a:rPr>
+              <a:t>/</a:t>
+            </a:r>
+            <a:r>
+              <a:rPr kumimoji="0" lang="hu-HU" altLang="hu-HU" sz="1200" b="1" i="0" u="none" strike="noStrike" cap="none" normalizeH="0" baseline="0" dirty="0" err="1">
+                <a:ln>
+                  <a:noFill/>
+                </a:ln>
+                <a:solidFill>
+                  <a:schemeClr val="bg2">
+                    <a:lumMod val="50000"/>
+                  </a:schemeClr>
+                </a:solidFill>
+                <a:effectLst/>
+                <a:latin typeface="Arial" panose="020B0604020202020204" pitchFamily="34" charset="0"/>
+              </a:rPr>
+              <a:t>Models</a:t>
+            </a:r>
+            <a:r>
+              <a:rPr kumimoji="0" lang="hu-HU" altLang="hu-HU" sz="1200" b="1" i="0" u="none" strike="noStrike" cap="none" normalizeH="0" baseline="0" dirty="0">
+                <a:ln>
+                  <a:noFill/>
+                </a:ln>
+                <a:solidFill>
+                  <a:schemeClr val="bg2">
+                    <a:lumMod val="50000"/>
+                  </a:schemeClr>
+                </a:solidFill>
+                <a:effectLst/>
+                <a:latin typeface="Arial" panose="020B0604020202020204" pitchFamily="34" charset="0"/>
+              </a:rPr>
+              <a:t>/</a:t>
+            </a:r>
+            <a:r>
+              <a:rPr kumimoji="0" lang="hu-HU" altLang="hu-HU" sz="1200" b="0" i="0" u="none" strike="noStrike" cap="none" normalizeH="0" baseline="0" dirty="0">
+                <a:ln>
+                  <a:noFill/>
+                </a:ln>
+                <a:solidFill>
+                  <a:schemeClr val="bg2">
+                    <a:lumMod val="50000"/>
+                  </a:schemeClr>
+                </a:solidFill>
+                <a:effectLst/>
+                <a:latin typeface="Arial" panose="020B0604020202020204" pitchFamily="34" charset="0"/>
+              </a:rPr>
+              <a:t> </a:t>
+            </a:r>
+            <a:r>
+              <a:rPr kumimoji="0" lang="hu-HU" altLang="hu-HU" sz="1200" b="0" i="1" u="none" strike="noStrike" cap="none" normalizeH="0" baseline="0" dirty="0">
+                <a:ln>
+                  <a:noFill/>
+                </a:ln>
+                <a:solidFill>
+                  <a:schemeClr val="bg2">
+                    <a:lumMod val="50000"/>
+                  </a:schemeClr>
+                </a:solidFill>
+                <a:effectLst/>
+                <a:latin typeface="Arial" panose="020B0604020202020204" pitchFamily="34" charset="0"/>
+              </a:rPr>
+              <a:t>(adatbázis modellek)</a:t>
+            </a:r>
+            <a:r>
+              <a:rPr lang="hu-HU" altLang="hu-HU" sz="1200" dirty="0">
+                <a:solidFill>
+                  <a:schemeClr val="bg2">
+                    <a:lumMod val="50000"/>
+                  </a:schemeClr>
+                </a:solidFill>
+                <a:latin typeface="Arial" panose="020B0604020202020204" pitchFamily="34" charset="0"/>
+              </a:rPr>
+              <a:t>: </a:t>
+            </a:r>
+            <a:r>
+              <a:rPr kumimoji="0" lang="hu-HU" altLang="hu-HU" sz="1200" b="0" i="0" u="none" strike="noStrike" cap="none" normalizeH="0" baseline="0" dirty="0" err="1">
+                <a:ln>
+                  <a:noFill/>
+                </a:ln>
+                <a:solidFill>
+                  <a:schemeClr val="bg2">
+                    <a:lumMod val="50000"/>
+                  </a:schemeClr>
+                </a:solidFill>
+                <a:effectLst/>
+                <a:latin typeface="Arial Unicode MS"/>
+              </a:rPr>
+              <a:t>CohootContext.cs</a:t>
+            </a:r>
+            <a:r>
+              <a:rPr kumimoji="0" lang="hu-HU" altLang="hu-HU" sz="1200" b="0" i="0" u="none" strike="noStrike" cap="none" normalizeH="0" baseline="0" dirty="0">
+                <a:ln>
+                  <a:noFill/>
+                </a:ln>
+                <a:solidFill>
+                  <a:schemeClr val="bg2">
+                    <a:lumMod val="50000"/>
+                  </a:schemeClr>
+                </a:solidFill>
+                <a:effectLst/>
+              </a:rPr>
+              <a:t> – </a:t>
+            </a:r>
+            <a:r>
+              <a:rPr kumimoji="0" lang="hu-HU" altLang="hu-HU" sz="1200" b="0" i="0" u="none" strike="noStrike" cap="none" normalizeH="0" baseline="0" dirty="0" err="1">
+                <a:ln>
+                  <a:noFill/>
+                </a:ln>
+                <a:solidFill>
+                  <a:schemeClr val="bg2">
+                    <a:lumMod val="50000"/>
+                  </a:schemeClr>
+                </a:solidFill>
+                <a:effectLst/>
+              </a:rPr>
+              <a:t>Entity</a:t>
+            </a:r>
+            <a:r>
+              <a:rPr kumimoji="0" lang="hu-HU" altLang="hu-HU" sz="1200" b="0" i="0" u="none" strike="noStrike" cap="none" normalizeH="0" baseline="0" dirty="0">
+                <a:ln>
+                  <a:noFill/>
+                </a:ln>
+                <a:solidFill>
+                  <a:schemeClr val="bg2">
+                    <a:lumMod val="50000"/>
+                  </a:schemeClr>
+                </a:solidFill>
+                <a:effectLst/>
+              </a:rPr>
+              <a:t> Framework adatbáziskapcsolat</a:t>
+            </a:r>
+            <a:endParaRPr kumimoji="0" lang="hu-HU" altLang="hu-HU" sz="1200" b="0" i="0" u="none" strike="noStrike" cap="none" normalizeH="0" baseline="0" dirty="0">
+              <a:ln>
+                <a:noFill/>
+              </a:ln>
+              <a:solidFill>
+                <a:schemeClr val="bg2">
+                  <a:lumMod val="50000"/>
+                </a:schemeClr>
+              </a:solidFill>
+              <a:effectLst/>
+              <a:latin typeface="Arial" panose="020B0604020202020204" pitchFamily="34" charset="0"/>
+            </a:endParaRPr>
+          </a:p>
+          <a:p>
+            <a:pPr marL="0" marR="0" lvl="0" indent="0" algn="l" defTabSz="914400" rtl="0" eaLnBrk="0" fontAlgn="base" latinLnBrk="0" hangingPunct="0">
+              <a:lnSpc>
+                <a:spcPct val="100000"/>
+              </a:lnSpc>
+              <a:spcBef>
+                <a:spcPct val="0"/>
+              </a:spcBef>
+              <a:spcAft>
+                <a:spcPct val="0"/>
+              </a:spcAft>
+              <a:buClrTx/>
+              <a:buSzTx/>
+              <a:buNone/>
+              <a:tabLst/>
+            </a:pPr>
+            <a:r>
+              <a:rPr kumimoji="0" lang="hu-HU" altLang="hu-HU" sz="1200" b="0" i="0" u="none" strike="noStrike" cap="none" normalizeH="0" baseline="0" dirty="0">
+                <a:ln>
+                  <a:noFill/>
+                </a:ln>
+                <a:solidFill>
+                  <a:schemeClr val="bg2">
+                    <a:lumMod val="50000"/>
+                  </a:schemeClr>
+                </a:solidFill>
+                <a:effectLst/>
+                <a:latin typeface="Arial Unicode MS"/>
+              </a:rPr>
+              <a:t>	</a:t>
+            </a:r>
+            <a:r>
+              <a:rPr kumimoji="0" lang="hu-HU" altLang="hu-HU" sz="1200" b="0" i="0" u="none" strike="noStrike" cap="none" normalizeH="0" baseline="0" dirty="0" err="1">
+                <a:ln>
+                  <a:noFill/>
+                </a:ln>
+                <a:solidFill>
+                  <a:schemeClr val="bg2">
+                    <a:lumMod val="50000"/>
+                  </a:schemeClr>
+                </a:solidFill>
+                <a:effectLst/>
+                <a:latin typeface="Arial Unicode MS"/>
+              </a:rPr>
+              <a:t>Felhasznalok.cs</a:t>
+            </a:r>
+            <a:r>
+              <a:rPr kumimoji="0" lang="hu-HU" altLang="hu-HU" sz="1200" b="0" i="0" u="none" strike="noStrike" cap="none" normalizeH="0" baseline="0" dirty="0">
+                <a:ln>
+                  <a:noFill/>
+                </a:ln>
+                <a:solidFill>
+                  <a:schemeClr val="bg2">
+                    <a:lumMod val="50000"/>
+                  </a:schemeClr>
+                </a:solidFill>
+                <a:effectLst/>
+              </a:rPr>
+              <a:t>, </a:t>
+            </a:r>
+            <a:r>
+              <a:rPr kumimoji="0" lang="hu-HU" altLang="hu-HU" sz="1200" b="0" i="0" u="none" strike="noStrike" cap="none" normalizeH="0" baseline="0" dirty="0" err="1">
+                <a:ln>
+                  <a:noFill/>
+                </a:ln>
+                <a:solidFill>
+                  <a:schemeClr val="bg2">
+                    <a:lumMod val="50000"/>
+                  </a:schemeClr>
+                </a:solidFill>
+                <a:effectLst/>
+                <a:latin typeface="Arial Unicode MS"/>
+              </a:rPr>
+              <a:t>Pontok.cs</a:t>
+            </a:r>
+            <a:r>
+              <a:rPr kumimoji="0" lang="hu-HU" altLang="hu-HU" sz="1200" b="0" i="0" u="none" strike="noStrike" cap="none" normalizeH="0" baseline="0" dirty="0">
+                <a:ln>
+                  <a:noFill/>
+                </a:ln>
+                <a:solidFill>
+                  <a:schemeClr val="bg2">
+                    <a:lumMod val="50000"/>
+                  </a:schemeClr>
+                </a:solidFill>
+                <a:effectLst/>
+              </a:rPr>
+              <a:t>, </a:t>
+            </a:r>
+            <a:r>
+              <a:rPr kumimoji="0" lang="hu-HU" altLang="hu-HU" sz="1200" b="0" i="0" u="none" strike="noStrike" cap="none" normalizeH="0" baseline="0" dirty="0" err="1">
+                <a:ln>
+                  <a:noFill/>
+                </a:ln>
+                <a:solidFill>
+                  <a:schemeClr val="bg2">
+                    <a:lumMod val="50000"/>
+                  </a:schemeClr>
+                </a:solidFill>
+                <a:effectLst/>
+                <a:latin typeface="Arial Unicode MS"/>
+              </a:rPr>
+              <a:t>Quiz.cs</a:t>
+            </a:r>
+            <a:r>
+              <a:rPr kumimoji="0" lang="hu-HU" altLang="hu-HU" sz="1200" b="0" i="0" u="none" strike="noStrike" cap="none" normalizeH="0" baseline="0" dirty="0">
+                <a:ln>
+                  <a:noFill/>
+                </a:ln>
+                <a:solidFill>
+                  <a:schemeClr val="bg2">
+                    <a:lumMod val="50000"/>
+                  </a:schemeClr>
+                </a:solidFill>
+                <a:effectLst/>
+              </a:rPr>
+              <a:t> – Táblamodellek</a:t>
+            </a:r>
+            <a:endParaRPr kumimoji="0" lang="hu-HU" altLang="hu-HU" sz="1200" b="0" i="0" u="none" strike="noStrike" cap="none" normalizeH="0" baseline="0" dirty="0">
+              <a:ln>
+                <a:noFill/>
+              </a:ln>
+              <a:solidFill>
+                <a:schemeClr val="bg2">
+                  <a:lumMod val="50000"/>
+                </a:schemeClr>
+              </a:solidFill>
+              <a:effectLst/>
+              <a:latin typeface="Arial" panose="020B0604020202020204" pitchFamily="34" charset="0"/>
+            </a:endParaRPr>
+          </a:p>
+          <a:p>
+            <a:pPr marL="0" marR="0" lvl="0" indent="0" algn="l" defTabSz="914400" rtl="0" eaLnBrk="0" fontAlgn="base" latinLnBrk="0" hangingPunct="0">
+              <a:lnSpc>
+                <a:spcPct val="100000"/>
+              </a:lnSpc>
+              <a:spcBef>
+                <a:spcPct val="0"/>
+              </a:spcBef>
+              <a:spcAft>
+                <a:spcPct val="0"/>
+              </a:spcAft>
+              <a:buClrTx/>
+              <a:buSzTx/>
+              <a:buFontTx/>
+              <a:buChar char="•"/>
+              <a:tabLst/>
+            </a:pPr>
+            <a:r>
+              <a:rPr kumimoji="0" lang="hu-HU" altLang="hu-HU" sz="1200" b="1" i="0" u="none" strike="noStrike" cap="none" normalizeH="0" baseline="0" dirty="0" err="1">
+                <a:ln>
+                  <a:noFill/>
+                </a:ln>
+                <a:solidFill>
+                  <a:schemeClr val="bg2">
+                    <a:lumMod val="50000"/>
+                  </a:schemeClr>
+                </a:solidFill>
+                <a:effectLst/>
+                <a:latin typeface="Arial" panose="020B0604020202020204" pitchFamily="34" charset="0"/>
+              </a:rPr>
+              <a:t>cohoot</a:t>
+            </a:r>
+            <a:r>
+              <a:rPr kumimoji="0" lang="hu-HU" altLang="hu-HU" sz="1200" b="1" i="0" u="none" strike="noStrike" cap="none" normalizeH="0" baseline="0" dirty="0">
+                <a:ln>
+                  <a:noFill/>
+                </a:ln>
+                <a:solidFill>
+                  <a:schemeClr val="bg2">
+                    <a:lumMod val="50000"/>
+                  </a:schemeClr>
+                </a:solidFill>
+                <a:effectLst/>
+                <a:latin typeface="Arial" panose="020B0604020202020204" pitchFamily="34" charset="0"/>
+              </a:rPr>
+              <a:t>-backend/</a:t>
+            </a:r>
+            <a:r>
+              <a:rPr kumimoji="0" lang="hu-HU" altLang="hu-HU" sz="1200" b="1" i="0" u="none" strike="noStrike" cap="none" normalizeH="0" baseline="0" dirty="0" err="1">
+                <a:ln>
+                  <a:noFill/>
+                </a:ln>
+                <a:solidFill>
+                  <a:schemeClr val="bg2">
+                    <a:lumMod val="50000"/>
+                  </a:schemeClr>
+                </a:solidFill>
+                <a:effectLst/>
+                <a:latin typeface="Arial" panose="020B0604020202020204" pitchFamily="34" charset="0"/>
+              </a:rPr>
+              <a:t>cohoot</a:t>
+            </a:r>
+            <a:r>
+              <a:rPr kumimoji="0" lang="hu-HU" altLang="hu-HU" sz="1200" b="1" i="0" u="none" strike="noStrike" cap="none" normalizeH="0" baseline="0" dirty="0">
+                <a:ln>
+                  <a:noFill/>
+                </a:ln>
+                <a:solidFill>
+                  <a:schemeClr val="bg2">
+                    <a:lumMod val="50000"/>
+                  </a:schemeClr>
+                </a:solidFill>
+                <a:effectLst/>
+                <a:latin typeface="Arial" panose="020B0604020202020204" pitchFamily="34" charset="0"/>
+              </a:rPr>
+              <a:t>/</a:t>
+            </a:r>
+            <a:r>
+              <a:rPr kumimoji="0" lang="hu-HU" altLang="hu-HU" sz="1200" b="1" i="0" u="none" strike="noStrike" cap="none" normalizeH="0" baseline="0" dirty="0" err="1">
+                <a:ln>
+                  <a:noFill/>
+                </a:ln>
+                <a:solidFill>
+                  <a:schemeClr val="bg2">
+                    <a:lumMod val="50000"/>
+                  </a:schemeClr>
+                </a:solidFill>
+                <a:effectLst/>
+                <a:latin typeface="Arial" panose="020B0604020202020204" pitchFamily="34" charset="0"/>
+              </a:rPr>
+              <a:t>Properties</a:t>
+            </a:r>
+            <a:r>
+              <a:rPr kumimoji="0" lang="hu-HU" altLang="hu-HU" sz="1200" b="1" i="0" u="none" strike="noStrike" cap="none" normalizeH="0" baseline="0" dirty="0">
+                <a:ln>
+                  <a:noFill/>
+                </a:ln>
+                <a:solidFill>
+                  <a:schemeClr val="bg2">
+                    <a:lumMod val="50000"/>
+                  </a:schemeClr>
+                </a:solidFill>
+                <a:effectLst/>
+                <a:latin typeface="Arial" panose="020B0604020202020204" pitchFamily="34" charset="0"/>
+              </a:rPr>
+              <a:t>/</a:t>
+            </a:r>
+            <a:r>
+              <a:rPr kumimoji="0" lang="hu-HU" altLang="hu-HU" sz="1200" b="0" i="0" u="none" strike="noStrike" cap="none" normalizeH="0" baseline="0" dirty="0">
+                <a:ln>
+                  <a:noFill/>
+                </a:ln>
+                <a:solidFill>
+                  <a:schemeClr val="bg2">
+                    <a:lumMod val="50000"/>
+                  </a:schemeClr>
+                </a:solidFill>
+                <a:effectLst/>
+                <a:latin typeface="Arial" panose="020B0604020202020204" pitchFamily="34" charset="0"/>
+              </a:rPr>
+              <a:t> </a:t>
+            </a:r>
+            <a:r>
+              <a:rPr kumimoji="0" lang="hu-HU" altLang="hu-HU" sz="1200" b="0" i="1" u="none" strike="noStrike" cap="none" normalizeH="0" baseline="0" dirty="0">
+                <a:ln>
+                  <a:noFill/>
+                </a:ln>
+                <a:solidFill>
+                  <a:schemeClr val="bg2">
+                    <a:lumMod val="50000"/>
+                  </a:schemeClr>
+                </a:solidFill>
+                <a:effectLst/>
+                <a:latin typeface="Arial" panose="020B0604020202020204" pitchFamily="34" charset="0"/>
+              </a:rPr>
+              <a:t>(konfigurációs fájlok)</a:t>
+            </a:r>
+            <a:r>
+              <a:rPr lang="hu-HU" altLang="hu-HU" sz="1200" dirty="0">
+                <a:solidFill>
+                  <a:schemeClr val="bg2">
+                    <a:lumMod val="50000"/>
+                  </a:schemeClr>
+                </a:solidFill>
+                <a:latin typeface="Arial" panose="020B0604020202020204" pitchFamily="34" charset="0"/>
+              </a:rPr>
+              <a:t>: </a:t>
+            </a:r>
+            <a:r>
+              <a:rPr kumimoji="0" lang="hu-HU" altLang="hu-HU" sz="1200" b="0" i="0" u="none" strike="noStrike" cap="none" normalizeH="0" baseline="0" dirty="0" err="1">
+                <a:ln>
+                  <a:noFill/>
+                </a:ln>
+                <a:solidFill>
+                  <a:schemeClr val="bg2">
+                    <a:lumMod val="50000"/>
+                  </a:schemeClr>
+                </a:solidFill>
+                <a:effectLst/>
+                <a:latin typeface="Arial Unicode MS"/>
+              </a:rPr>
+              <a:t>launchSettings.json</a:t>
+            </a:r>
+            <a:r>
+              <a:rPr kumimoji="0" lang="hu-HU" altLang="hu-HU" sz="1200" b="0" i="0" u="none" strike="noStrike" cap="none" normalizeH="0" baseline="0" dirty="0">
+                <a:ln>
+                  <a:noFill/>
+                </a:ln>
+                <a:solidFill>
+                  <a:schemeClr val="bg2">
+                    <a:lumMod val="50000"/>
+                  </a:schemeClr>
+                </a:solidFill>
+                <a:effectLst/>
+              </a:rPr>
+              <a:t> – Fejlesztési környezet beállításai</a:t>
+            </a:r>
+            <a:endParaRPr kumimoji="0" lang="hu-HU" altLang="hu-HU" sz="1200" b="0" i="0" u="none" strike="noStrike" cap="none" normalizeH="0" baseline="0" dirty="0">
+              <a:ln>
+                <a:noFill/>
+              </a:ln>
+              <a:solidFill>
+                <a:schemeClr val="bg2">
+                  <a:lumMod val="50000"/>
+                </a:schemeClr>
+              </a:solidFill>
+              <a:effectLst/>
+              <a:latin typeface="Arial" panose="020B0604020202020204" pitchFamily="34" charset="0"/>
+            </a:endParaRPr>
+          </a:p>
+          <a:p>
+            <a:pPr marL="0" marR="0" lvl="0" indent="0" algn="l" defTabSz="914400" rtl="0" eaLnBrk="0" fontAlgn="base" latinLnBrk="0" hangingPunct="0">
+              <a:lnSpc>
+                <a:spcPct val="100000"/>
+              </a:lnSpc>
+              <a:spcBef>
+                <a:spcPct val="0"/>
+              </a:spcBef>
+              <a:spcAft>
+                <a:spcPct val="0"/>
+              </a:spcAft>
+              <a:buClrTx/>
+              <a:buSzTx/>
+              <a:buFontTx/>
+              <a:buChar char="•"/>
+              <a:tabLst/>
+            </a:pPr>
+            <a:r>
+              <a:rPr kumimoji="0" lang="hu-HU" altLang="hu-HU" sz="1200" b="1" i="0" u="none" strike="noStrike" cap="none" normalizeH="0" baseline="0" dirty="0" err="1">
+                <a:ln>
+                  <a:noFill/>
+                </a:ln>
+                <a:solidFill>
+                  <a:schemeClr val="bg2">
+                    <a:lumMod val="50000"/>
+                  </a:schemeClr>
+                </a:solidFill>
+                <a:effectLst/>
+                <a:latin typeface="Arial" panose="020B0604020202020204" pitchFamily="34" charset="0"/>
+              </a:rPr>
+              <a:t>cohoot</a:t>
+            </a:r>
+            <a:r>
+              <a:rPr kumimoji="0" lang="hu-HU" altLang="hu-HU" sz="1200" b="1" i="0" u="none" strike="noStrike" cap="none" normalizeH="0" baseline="0" dirty="0">
+                <a:ln>
+                  <a:noFill/>
+                </a:ln>
+                <a:solidFill>
+                  <a:schemeClr val="bg2">
+                    <a:lumMod val="50000"/>
+                  </a:schemeClr>
+                </a:solidFill>
+                <a:effectLst/>
+                <a:latin typeface="Arial" panose="020B0604020202020204" pitchFamily="34" charset="0"/>
+              </a:rPr>
+              <a:t>-backend/</a:t>
+            </a:r>
+            <a:r>
+              <a:rPr kumimoji="0" lang="hu-HU" altLang="hu-HU" sz="1200" b="1" i="0" u="none" strike="noStrike" cap="none" normalizeH="0" baseline="0" dirty="0" err="1">
+                <a:ln>
+                  <a:noFill/>
+                </a:ln>
+                <a:solidFill>
+                  <a:schemeClr val="bg2">
+                    <a:lumMod val="50000"/>
+                  </a:schemeClr>
+                </a:solidFill>
+                <a:effectLst/>
+                <a:latin typeface="Arial" panose="020B0604020202020204" pitchFamily="34" charset="0"/>
+              </a:rPr>
+              <a:t>cohoot</a:t>
+            </a:r>
+            <a:r>
+              <a:rPr kumimoji="0" lang="hu-HU" altLang="hu-HU" sz="1200" b="1" i="0" u="none" strike="noStrike" cap="none" normalizeH="0" baseline="0" dirty="0">
+                <a:ln>
+                  <a:noFill/>
+                </a:ln>
+                <a:solidFill>
+                  <a:schemeClr val="bg2">
+                    <a:lumMod val="50000"/>
+                  </a:schemeClr>
+                </a:solidFill>
+                <a:effectLst/>
+                <a:latin typeface="Arial" panose="020B0604020202020204" pitchFamily="34" charset="0"/>
+              </a:rPr>
+              <a:t>/</a:t>
+            </a:r>
+            <a:r>
+              <a:rPr kumimoji="0" lang="hu-HU" altLang="hu-HU" sz="1200" b="1" i="0" u="none" strike="noStrike" cap="none" normalizeH="0" baseline="0" dirty="0" err="1">
+                <a:ln>
+                  <a:noFill/>
+                </a:ln>
+                <a:solidFill>
+                  <a:schemeClr val="bg2">
+                    <a:lumMod val="50000"/>
+                  </a:schemeClr>
+                </a:solidFill>
+                <a:effectLst/>
+                <a:latin typeface="Arial" panose="020B0604020202020204" pitchFamily="34" charset="0"/>
+              </a:rPr>
+              <a:t>Services</a:t>
+            </a:r>
+            <a:r>
+              <a:rPr kumimoji="0" lang="hu-HU" altLang="hu-HU" sz="1200" b="1" i="0" u="none" strike="noStrike" cap="none" normalizeH="0" baseline="0" dirty="0">
+                <a:ln>
+                  <a:noFill/>
+                </a:ln>
+                <a:solidFill>
+                  <a:schemeClr val="bg2">
+                    <a:lumMod val="50000"/>
+                  </a:schemeClr>
+                </a:solidFill>
+                <a:effectLst/>
+                <a:latin typeface="Arial" panose="020B0604020202020204" pitchFamily="34" charset="0"/>
+              </a:rPr>
+              <a:t>/</a:t>
+            </a:r>
+            <a:r>
+              <a:rPr kumimoji="0" lang="hu-HU" altLang="hu-HU" sz="1200" b="0" i="0" u="none" strike="noStrike" cap="none" normalizeH="0" baseline="0" dirty="0">
+                <a:ln>
+                  <a:noFill/>
+                </a:ln>
+                <a:solidFill>
+                  <a:schemeClr val="bg2">
+                    <a:lumMod val="50000"/>
+                  </a:schemeClr>
+                </a:solidFill>
+                <a:effectLst/>
+                <a:latin typeface="Arial" panose="020B0604020202020204" pitchFamily="34" charset="0"/>
+              </a:rPr>
+              <a:t> </a:t>
+            </a:r>
+            <a:r>
+              <a:rPr kumimoji="0" lang="hu-HU" altLang="hu-HU" sz="1200" b="0" i="1" u="none" strike="noStrike" cap="none" normalizeH="0" baseline="0" dirty="0">
+                <a:ln>
+                  <a:noFill/>
+                </a:ln>
+                <a:solidFill>
+                  <a:schemeClr val="bg2">
+                    <a:lumMod val="50000"/>
+                  </a:schemeClr>
+                </a:solidFill>
+                <a:effectLst/>
+                <a:latin typeface="Arial" panose="020B0604020202020204" pitchFamily="34" charset="0"/>
+              </a:rPr>
+              <a:t>(üzleti logika és biztonsági szolgáltatások)</a:t>
+            </a:r>
+            <a:r>
+              <a:rPr lang="hu-HU" altLang="hu-HU" sz="1200" dirty="0">
+                <a:solidFill>
+                  <a:schemeClr val="bg2">
+                    <a:lumMod val="50000"/>
+                  </a:schemeClr>
+                </a:solidFill>
+                <a:latin typeface="Arial" panose="020B0604020202020204" pitchFamily="34" charset="0"/>
+              </a:rPr>
+              <a:t>: </a:t>
+            </a:r>
+            <a:r>
+              <a:rPr kumimoji="0" lang="hu-HU" altLang="hu-HU" sz="1200" b="0" i="0" u="none" strike="noStrike" cap="none" normalizeH="0" baseline="0" dirty="0" err="1">
+                <a:ln>
+                  <a:noFill/>
+                </a:ln>
+                <a:solidFill>
+                  <a:schemeClr val="bg2">
+                    <a:lumMod val="50000"/>
+                  </a:schemeClr>
+                </a:solidFill>
+                <a:effectLst/>
+                <a:latin typeface="Arial Unicode MS"/>
+              </a:rPr>
+              <a:t>SecurityService.cs</a:t>
+            </a:r>
+            <a:r>
+              <a:rPr kumimoji="0" lang="hu-HU" altLang="hu-HU" sz="1200" b="0" i="0" u="none" strike="noStrike" cap="none" normalizeH="0" baseline="0" dirty="0">
+                <a:ln>
+                  <a:noFill/>
+                </a:ln>
+                <a:solidFill>
+                  <a:schemeClr val="bg2">
+                    <a:lumMod val="50000"/>
+                  </a:schemeClr>
+                </a:solidFill>
+                <a:effectLst/>
+              </a:rPr>
+              <a:t> – Felhasználói hitelesítés és biztonsági funkciók</a:t>
+            </a:r>
+            <a:endParaRPr kumimoji="0" lang="hu-HU" altLang="hu-HU" sz="1200" b="0" i="0" u="none" strike="noStrike" cap="none" normalizeH="0" baseline="0" dirty="0">
+              <a:ln>
+                <a:noFill/>
+              </a:ln>
+              <a:solidFill>
+                <a:schemeClr val="bg2">
+                  <a:lumMod val="50000"/>
+                </a:schemeClr>
+              </a:solidFill>
+              <a:effectLst/>
+              <a:latin typeface="Arial" panose="020B0604020202020204" pitchFamily="34" charset="0"/>
+            </a:endParaRPr>
+          </a:p>
+          <a:p>
+            <a:pPr marL="0" marR="0" lvl="0" indent="0" algn="l" defTabSz="914400" rtl="0" eaLnBrk="0" fontAlgn="base" latinLnBrk="0" hangingPunct="0">
+              <a:lnSpc>
+                <a:spcPct val="100000"/>
+              </a:lnSpc>
+              <a:spcBef>
+                <a:spcPct val="0"/>
+              </a:spcBef>
+              <a:spcAft>
+                <a:spcPct val="0"/>
+              </a:spcAft>
+              <a:buClrTx/>
+              <a:buSzTx/>
+              <a:buFontTx/>
+              <a:buNone/>
+              <a:tabLst/>
+            </a:pPr>
+            <a:endParaRPr kumimoji="0" lang="hu-HU" altLang="hu-HU" sz="1200" b="0" i="0" u="none" strike="noStrike" cap="none" normalizeH="0" baseline="0" dirty="0">
+              <a:ln>
+                <a:noFill/>
+              </a:ln>
+              <a:solidFill>
+                <a:schemeClr val="bg2">
+                  <a:lumMod val="50000"/>
+                </a:schemeClr>
+              </a:solidFill>
+              <a:effectLst/>
+              <a:latin typeface="Arial" panose="020B0604020202020204" pitchFamily="34" charset="0"/>
+            </a:endParaRPr>
+          </a:p>
+        </p:txBody>
+      </p:sp>
+      <p:pic>
+        <p:nvPicPr>
+          <p:cNvPr id="3" name="Kép 2">
+            <a:extLst>
+              <a:ext uri="{FF2B5EF4-FFF2-40B4-BE49-F238E27FC236}">
+                <a16:creationId xmlns:a16="http://schemas.microsoft.com/office/drawing/2014/main" id="{DD8965A6-ABA0-8997-D7FB-C93C63167E71}"/>
+              </a:ext>
+            </a:extLst>
+          </p:cNvPr>
+          <p:cNvPicPr>
+            <a:picLocks noChangeAspect="1"/>
+          </p:cNvPicPr>
+          <p:nvPr/>
+        </p:nvPicPr>
+        <p:blipFill>
+          <a:blip r:embed="rId3"/>
+          <a:stretch>
+            <a:fillRect/>
+          </a:stretch>
+        </p:blipFill>
+        <p:spPr>
+          <a:xfrm>
+            <a:off x="7530456" y="160153"/>
+            <a:ext cx="1301844" cy="3651513"/>
+          </a:xfrm>
+          <a:prstGeom prst="rect">
+            <a:avLst/>
+          </a:prstGeom>
+        </p:spPr>
+      </p:pic>
+    </p:spTree>
+    <p:extLst>
+      <p:ext uri="{BB962C8B-B14F-4D97-AF65-F5344CB8AC3E}">
+        <p14:creationId xmlns:p14="http://schemas.microsoft.com/office/powerpoint/2010/main" val="2287398294"/>
+      </p:ext>
+    </p:extLst>
+  </p:cSld>
+  <p:clrMapOvr>
+    <a:masterClrMapping/>
+  </p:clrMapOvr>
+</p:sld>
+</file>
+
+<file path=ppt/slides/slide15.xml><?xml version="1.0" encoding="utf-8"?>
+<p:sld xmlns:a="http://schemas.openxmlformats.org/drawingml/2006/main" xmlns:r="http://schemas.openxmlformats.org/officeDocument/2006/relationships" xmlns:p="http://schemas.openxmlformats.org/presentationml/2006/main">
+  <p:cSld>
+    <p:spTree>
+      <p:nvGrpSpPr>
+        <p:cNvPr id="1" name="Shape 158"/>
         <p:cNvGrpSpPr/>
         <p:nvPr/>
       </p:nvGrpSpPr>
@@ -9113,7 +12460,9 @@
       <p:sp>
         <p:nvSpPr>
           <p:cNvPr id="159" name="Google Shape;159;p25"/>
-          <p:cNvSpPr txBox="1"/>
+          <p:cNvSpPr txBox="1">
+            <a:spLocks noGrp="1"/>
+          </p:cNvSpPr>
           <p:nvPr>
             <p:ph type="title"/>
           </p:nvPr>
@@ -9128,12 +12477,12 @@
           </a:prstGeom>
         </p:spPr>
         <p:txBody>
-          <a:bodyPr anchorCtr="0" anchor="t" bIns="91425" lIns="91425" spcFirstLastPara="1" rIns="91425" wrap="square" tIns="91425">
+          <a:bodyPr spcFirstLastPara="1" wrap="square" lIns="91425" tIns="91425" rIns="91425" bIns="91425" anchor="t" anchorCtr="0">
             <a:normAutofit fontScale="90000"/>
           </a:bodyPr>
           <a:lstStyle/>
           <a:p>
-            <a:pPr indent="0" lvl="0" marL="0" rtl="0" algn="l">
+            <a:pPr marL="0" lvl="0" indent="0" algn="l" rtl="0">
               <a:spcBef>
                 <a:spcPts val="0"/>
               </a:spcBef>
@@ -9143,18 +12492,21 @@
               <a:buNone/>
             </a:pPr>
             <a:r>
-              <a:t/>
-            </a:r>
-            <a:endParaRPr/>
+              <a:rPr lang="hu-HU" dirty="0"/>
+              <a:t>MAUI</a:t>
+            </a:r>
+            <a:endParaRPr dirty="0"/>
           </a:p>
         </p:txBody>
       </p:sp>
       <p:sp>
         <p:nvSpPr>
           <p:cNvPr id="160" name="Google Shape;160;p25"/>
-          <p:cNvSpPr txBox="1"/>
+          <p:cNvSpPr txBox="1">
+            <a:spLocks noGrp="1"/>
+          </p:cNvSpPr>
           <p:nvPr>
-            <p:ph idx="1" type="body"/>
+            <p:ph type="body" idx="1"/>
           </p:nvPr>
         </p:nvSpPr>
         <p:spPr>
@@ -9167,27 +12519,76 @@
           </a:prstGeom>
         </p:spPr>
         <p:txBody>
-          <a:bodyPr anchorCtr="0" anchor="t" bIns="91425" lIns="91425" spcFirstLastPara="1" rIns="91425" wrap="square" tIns="91425">
+          <a:bodyPr spcFirstLastPara="1" wrap="square" lIns="91425" tIns="91425" rIns="91425" bIns="91425" anchor="t" anchorCtr="0">
             <a:normAutofit/>
           </a:bodyPr>
           <a:lstStyle/>
           <a:p>
-            <a:pPr indent="0" lvl="0" marL="0" rtl="0" algn="l">
-              <a:spcBef>
-                <a:spcPts val="0"/>
-              </a:spcBef>
+            <a:pPr marL="742950" lvl="1" indent="-285750">
               <a:spcAft>
                 <a:spcPts val="1200"/>
               </a:spcAft>
-              <a:buNone/>
             </a:pPr>
             <a:r>
-              <a:t/>
-            </a:r>
-            <a:endParaRPr/>
+              <a:rPr lang="hu-HU" dirty="0"/>
+              <a:t>Kapcsolatot létesít az adatbázissal</a:t>
+            </a:r>
+          </a:p>
+          <a:p>
+            <a:pPr marL="742950" lvl="1" indent="-285750">
+              <a:spcAft>
+                <a:spcPts val="1200"/>
+              </a:spcAft>
+            </a:pPr>
+            <a:r>
+              <a:rPr lang="hu-HU" dirty="0"/>
+              <a:t>Ranglista megjelenítés</a:t>
+            </a:r>
+          </a:p>
+          <a:p>
+            <a:pPr marL="742950" lvl="1" indent="-285750">
+              <a:spcAft>
+                <a:spcPts val="1200"/>
+              </a:spcAft>
+            </a:pPr>
+            <a:r>
+              <a:rPr lang="hu-HU" dirty="0"/>
+              <a:t>Betöltődés a frontendből(folyamatban)</a:t>
+            </a:r>
+            <a:endParaRPr dirty="0"/>
           </a:p>
         </p:txBody>
       </p:sp>
+      <p:pic>
+        <p:nvPicPr>
+          <p:cNvPr id="3" name="Kép 2">
+            <a:extLst>
+              <a:ext uri="{FF2B5EF4-FFF2-40B4-BE49-F238E27FC236}">
+                <a16:creationId xmlns:a16="http://schemas.microsoft.com/office/drawing/2014/main" id="{A6712DF5-E31B-C65F-6E73-50D587DE1993}"/>
+              </a:ext>
+            </a:extLst>
+          </p:cNvPr>
+          <p:cNvPicPr>
+            <a:picLocks noChangeAspect="1"/>
+          </p:cNvPicPr>
+          <p:nvPr/>
+        </p:nvPicPr>
+        <p:blipFill>
+          <a:blip r:embed="rId3"/>
+          <a:stretch>
+            <a:fillRect/>
+          </a:stretch>
+        </p:blipFill>
+        <p:spPr>
+          <a:xfrm>
+            <a:off x="5752255" y="357144"/>
+            <a:ext cx="2114845" cy="3953427"/>
+          </a:xfrm>
+          <a:prstGeom prst="rect">
+            <a:avLst/>
+          </a:prstGeom>
+        </p:spPr>
+      </p:pic>
     </p:spTree>
   </p:cSld>
   <p:clrMapOvr>
@@ -9196,12 +12597,132 @@
 </p:sld>
 </file>
 
-<file path=ppt/slides/slide2.xml><?xml version="1.0" encoding="utf-8"?>
-<p:sld xmlns:a="http://schemas.openxmlformats.org/drawingml/2006/main" xmlns:r="http://schemas.openxmlformats.org/officeDocument/2006/relationships" xmlns:mc="http://schemas.openxmlformats.org/markup-compatibility/2006" xmlns:mv="urn:schemas-microsoft-com:mac:vml" xmlns:p="http://schemas.openxmlformats.org/presentationml/2006/main" xmlns:c="http://schemas.openxmlformats.org/drawingml/2006/chart" xmlns:dgm="http://schemas.openxmlformats.org/drawingml/2006/diagram" xmlns:o="urn:schemas-microsoft-com:office:office" xmlns:v="urn:schemas-microsoft-com:vml" xmlns:pvml="urn:schemas-microsoft-com:office:powerpoint" xmlns:com="http://schemas.openxmlformats.org/drawingml/2006/compatibility" xmlns:p14="http://schemas.microsoft.com/office/powerpoint/2010/main" xmlns:p15="http://schemas.microsoft.com/office/powerpoint/2012/main" xmlns:ahyp="http://schemas.microsoft.com/office/drawing/2018/hyperlinkcolor">
+<file path=ppt/slides/slide16.xml><?xml version="1.0" encoding="utf-8"?>
+<p:sld xmlns:a="http://schemas.openxmlformats.org/drawingml/2006/main" xmlns:r="http://schemas.openxmlformats.org/officeDocument/2006/relationships" xmlns:p="http://schemas.openxmlformats.org/presentationml/2006/main">
   <p:cSld>
     <p:spTree>
       <p:nvGrpSpPr>
-        <p:cNvPr id="90" name="Shape 90"/>
+        <p:cNvPr id="1" name=""/>
+        <p:cNvGrpSpPr/>
+        <p:nvPr/>
+      </p:nvGrpSpPr>
+      <p:grpSpPr>
+        <a:xfrm>
+          <a:off x="0" y="0"/>
+          <a:ext cx="0" cy="0"/>
+          <a:chOff x="0" y="0"/>
+          <a:chExt cx="0" cy="0"/>
+        </a:xfrm>
+      </p:grpSpPr>
+      <p:sp>
+        <p:nvSpPr>
+          <p:cNvPr id="2" name="Cím 1">
+            <a:extLst>
+              <a:ext uri="{FF2B5EF4-FFF2-40B4-BE49-F238E27FC236}">
+                <a16:creationId xmlns:a16="http://schemas.microsoft.com/office/drawing/2014/main" id="{03F3C135-EB6A-DCB3-70C9-868AD60876A7}"/>
+              </a:ext>
+            </a:extLst>
+          </p:cNvPr>
+          <p:cNvSpPr>
+            <a:spLocks noGrp="1"/>
+          </p:cNvSpPr>
+          <p:nvPr>
+            <p:ph type="title"/>
+          </p:nvPr>
+        </p:nvSpPr>
+        <p:spPr/>
+        <p:txBody>
+          <a:bodyPr>
+            <a:normAutofit fontScale="90000"/>
+          </a:bodyPr>
+          <a:lstStyle/>
+          <a:p>
+            <a:r>
+              <a:rPr lang="hu-HU" dirty="0"/>
+              <a:t>MAUI kinézet</a:t>
+            </a:r>
+          </a:p>
+        </p:txBody>
+      </p:sp>
+      <p:pic>
+        <p:nvPicPr>
+          <p:cNvPr id="5" name="Kép 4">
+            <a:extLst>
+              <a:ext uri="{FF2B5EF4-FFF2-40B4-BE49-F238E27FC236}">
+                <a16:creationId xmlns:a16="http://schemas.microsoft.com/office/drawing/2014/main" id="{227AA613-022D-97E4-47F4-D87D45A34771}"/>
+              </a:ext>
+            </a:extLst>
+          </p:cNvPr>
+          <p:cNvPicPr>
+            <a:picLocks noChangeAspect="1"/>
+          </p:cNvPicPr>
+          <p:nvPr/>
+        </p:nvPicPr>
+        <p:blipFill>
+          <a:blip r:embed="rId2"/>
+          <a:stretch>
+            <a:fillRect/>
+          </a:stretch>
+        </p:blipFill>
+        <p:spPr>
+          <a:xfrm>
+            <a:off x="133281" y="1017800"/>
+            <a:ext cx="5775944" cy="2424210"/>
+          </a:xfrm>
+          <a:prstGeom prst="rect">
+            <a:avLst/>
+          </a:prstGeom>
+        </p:spPr>
+      </p:pic>
+      <p:pic>
+        <p:nvPicPr>
+          <p:cNvPr id="7" name="Kép 6">
+            <a:extLst>
+              <a:ext uri="{FF2B5EF4-FFF2-40B4-BE49-F238E27FC236}">
+                <a16:creationId xmlns:a16="http://schemas.microsoft.com/office/drawing/2014/main" id="{B38060D7-2EFD-0A14-FA95-631A20BF1E8E}"/>
+              </a:ext>
+            </a:extLst>
+          </p:cNvPr>
+          <p:cNvPicPr>
+            <a:picLocks noChangeAspect="1"/>
+          </p:cNvPicPr>
+          <p:nvPr/>
+        </p:nvPicPr>
+        <p:blipFill>
+          <a:blip r:embed="rId3"/>
+          <a:stretch>
+            <a:fillRect/>
+          </a:stretch>
+        </p:blipFill>
+        <p:spPr>
+          <a:xfrm>
+            <a:off x="2304585" y="3051957"/>
+            <a:ext cx="6839415" cy="1847881"/>
+          </a:xfrm>
+          <a:prstGeom prst="rect">
+            <a:avLst/>
+          </a:prstGeom>
+        </p:spPr>
+      </p:pic>
+    </p:spTree>
+    <p:extLst>
+      <p:ext uri="{BB962C8B-B14F-4D97-AF65-F5344CB8AC3E}">
+        <p14:creationId xmlns:p14="http://schemas.microsoft.com/office/powerpoint/2010/main" val="141254302"/>
+      </p:ext>
+    </p:extLst>
+  </p:cSld>
+  <p:clrMapOvr>
+    <a:masterClrMapping/>
+  </p:clrMapOvr>
+</p:sld>
+</file>
+
+<file path=ppt/slides/slide2.xml><?xml version="1.0" encoding="utf-8"?>
+<p:sld xmlns:a="http://schemas.openxmlformats.org/drawingml/2006/main" xmlns:r="http://schemas.openxmlformats.org/officeDocument/2006/relationships" xmlns:p="http://schemas.openxmlformats.org/presentationml/2006/main">
+  <p:cSld>
+    <p:spTree>
+      <p:nvGrpSpPr>
+        <p:cNvPr id="1" name="Shape 90"/>
         <p:cNvGrpSpPr/>
         <p:nvPr/>
       </p:nvGrpSpPr>
@@ -9216,7 +12737,9 @@
       <p:sp>
         <p:nvSpPr>
           <p:cNvPr id="91" name="Google Shape;91;p14"/>
-          <p:cNvSpPr txBox="1"/>
+          <p:cNvSpPr txBox="1">
+            <a:spLocks noGrp="1"/>
+          </p:cNvSpPr>
           <p:nvPr>
             <p:ph type="title"/>
           </p:nvPr>
@@ -9231,12 +12754,12 @@
           </a:prstGeom>
         </p:spPr>
         <p:txBody>
-          <a:bodyPr anchorCtr="0" anchor="t" bIns="91425" lIns="91425" spcFirstLastPara="1" rIns="91425" wrap="square" tIns="91425">
+          <a:bodyPr spcFirstLastPara="1" wrap="square" lIns="91425" tIns="91425" rIns="91425" bIns="91425" anchor="t" anchorCtr="0">
             <a:normAutofit fontScale="90000"/>
           </a:bodyPr>
           <a:lstStyle/>
           <a:p>
-            <a:pPr indent="0" lvl="0" marL="0" rtl="0" algn="l">
+            <a:pPr marL="0" lvl="0" indent="0" algn="l" rtl="0">
               <a:spcBef>
                 <a:spcPts val="0"/>
               </a:spcBef>
@@ -9256,9 +12779,11 @@
       <p:sp>
         <p:nvSpPr>
           <p:cNvPr id="92" name="Google Shape;92;p14"/>
-          <p:cNvSpPr txBox="1"/>
+          <p:cNvSpPr txBox="1">
+            <a:spLocks noGrp="1"/>
+          </p:cNvSpPr>
           <p:nvPr>
-            <p:ph idx="1" type="body"/>
+            <p:ph type="body" idx="1"/>
           </p:nvPr>
         </p:nvSpPr>
         <p:spPr>
@@ -9271,12 +12796,12 @@
           </a:prstGeom>
         </p:spPr>
         <p:txBody>
-          <a:bodyPr anchorCtr="0" anchor="t" bIns="91425" lIns="91425" spcFirstLastPara="1" rIns="91425" wrap="square" tIns="91425">
+          <a:bodyPr spcFirstLastPara="1" wrap="square" lIns="91425" tIns="91425" rIns="91425" bIns="91425" anchor="t" anchorCtr="0">
             <a:normAutofit/>
           </a:bodyPr>
           <a:lstStyle/>
           <a:p>
-            <a:pPr indent="-342900" lvl="0" marL="457200" rtl="0" algn="l">
+            <a:pPr marL="457200" lvl="0" indent="-342900" algn="l" rtl="0">
               <a:spcBef>
                 <a:spcPts val="0"/>
               </a:spcBef>
@@ -9287,13 +12812,13 @@
               <a:buChar char="●"/>
             </a:pPr>
             <a:r>
-              <a:rPr lang="hu"/>
+              <a:rPr lang="hu" dirty="0"/>
               <a:t>Szórakoztatás, tudás</a:t>
             </a:r>
-            <a:endParaRPr/>
+            <a:endParaRPr dirty="0"/>
           </a:p>
           <a:p>
-            <a:pPr indent="-342900" lvl="0" marL="457200" rtl="0" algn="l">
+            <a:pPr marL="457200" lvl="0" indent="-342900" algn="l" rtl="0">
               <a:spcBef>
                 <a:spcPts val="0"/>
               </a:spcBef>
@@ -9304,13 +12829,13 @@
               <a:buChar char="●"/>
             </a:pPr>
             <a:r>
-              <a:rPr lang="hu"/>
+              <a:rPr lang="hu" dirty="0"/>
               <a:t>Kvíz játék</a:t>
             </a:r>
-            <a:endParaRPr/>
+            <a:endParaRPr dirty="0"/>
           </a:p>
           <a:p>
-            <a:pPr indent="-342900" lvl="0" marL="457200" rtl="0" algn="l">
+            <a:pPr marL="457200" lvl="0" indent="-342900" algn="l" rtl="0">
               <a:spcBef>
                 <a:spcPts val="0"/>
               </a:spcBef>
@@ -9321,13 +12846,13 @@
               <a:buChar char="●"/>
             </a:pPr>
             <a:r>
-              <a:rPr lang="hu"/>
+              <a:rPr lang="hu" dirty="0"/>
               <a:t>Kérdések különböző témákból</a:t>
             </a:r>
-            <a:endParaRPr/>
+            <a:endParaRPr dirty="0"/>
           </a:p>
           <a:p>
-            <a:pPr indent="-342900" lvl="0" marL="457200" rtl="0" algn="l">
+            <a:pPr marL="457200" lvl="0" indent="-342900" algn="l" rtl="0">
               <a:spcBef>
                 <a:spcPts val="0"/>
               </a:spcBef>
@@ -9338,13 +12863,13 @@
               <a:buChar char="●"/>
             </a:pPr>
             <a:r>
-              <a:rPr lang="hu"/>
-              <a:t>Időarányos pontozás</a:t>
-            </a:r>
-            <a:endParaRPr/>
+              <a:rPr lang="hu" dirty="0"/>
+              <a:t>Időarányos pontozás(folyamatban)</a:t>
+            </a:r>
+            <a:endParaRPr dirty="0"/>
           </a:p>
           <a:p>
-            <a:pPr indent="0" lvl="0" marL="457200" rtl="0" algn="l">
+            <a:pPr marL="457200" lvl="0" indent="0" algn="l" rtl="0">
               <a:spcBef>
                 <a:spcPts val="1200"/>
               </a:spcBef>
@@ -9353,10 +12878,7 @@
               </a:spcAft>
               <a:buNone/>
             </a:pPr>
-            <a:r>
-              <a:t/>
-            </a:r>
-            <a:endParaRPr/>
+            <a:endParaRPr dirty="0"/>
           </a:p>
         </p:txBody>
       </p:sp>
@@ -9369,11 +12891,11 @@
 </file>
 
 <file path=ppt/slides/slide3.xml><?xml version="1.0" encoding="utf-8"?>
-<p:sld xmlns:a="http://schemas.openxmlformats.org/drawingml/2006/main" xmlns:r="http://schemas.openxmlformats.org/officeDocument/2006/relationships" xmlns:mc="http://schemas.openxmlformats.org/markup-compatibility/2006" xmlns:mv="urn:schemas-microsoft-com:mac:vml" xmlns:p="http://schemas.openxmlformats.org/presentationml/2006/main" xmlns:c="http://schemas.openxmlformats.org/drawingml/2006/chart" xmlns:dgm="http://schemas.openxmlformats.org/drawingml/2006/diagram" xmlns:o="urn:schemas-microsoft-com:office:office" xmlns:v="urn:schemas-microsoft-com:vml" xmlns:pvml="urn:schemas-microsoft-com:office:powerpoint" xmlns:com="http://schemas.openxmlformats.org/drawingml/2006/compatibility" xmlns:p14="http://schemas.microsoft.com/office/powerpoint/2010/main" xmlns:p15="http://schemas.microsoft.com/office/powerpoint/2012/main" xmlns:ahyp="http://schemas.microsoft.com/office/drawing/2018/hyperlinkcolor">
+<p:sld xmlns:a="http://schemas.openxmlformats.org/drawingml/2006/main" xmlns:r="http://schemas.openxmlformats.org/officeDocument/2006/relationships" xmlns:p="http://schemas.openxmlformats.org/presentationml/2006/main">
   <p:cSld>
     <p:spTree>
       <p:nvGrpSpPr>
-        <p:cNvPr id="96" name="Shape 96"/>
+        <p:cNvPr id="1" name="Shape 96"/>
         <p:cNvGrpSpPr/>
         <p:nvPr/>
       </p:nvGrpSpPr>
@@ -9388,7 +12910,9 @@
       <p:sp>
         <p:nvSpPr>
           <p:cNvPr id="97" name="Google Shape;97;p15"/>
-          <p:cNvSpPr txBox="1"/>
+          <p:cNvSpPr txBox="1">
+            <a:spLocks noGrp="1"/>
+          </p:cNvSpPr>
           <p:nvPr>
             <p:ph type="title"/>
           </p:nvPr>
@@ -9403,12 +12927,12 @@
           </a:prstGeom>
         </p:spPr>
         <p:txBody>
-          <a:bodyPr anchorCtr="0" anchor="t" bIns="91425" lIns="91425" spcFirstLastPara="1" rIns="91425" wrap="square" tIns="91425">
+          <a:bodyPr spcFirstLastPara="1" wrap="square" lIns="91425" tIns="91425" rIns="91425" bIns="91425" anchor="t" anchorCtr="0">
             <a:normAutofit fontScale="90000"/>
           </a:bodyPr>
           <a:lstStyle/>
           <a:p>
-            <a:pPr indent="0" lvl="0" marL="0" rtl="0" algn="l">
+            <a:pPr marL="0" lvl="0" indent="0" algn="l" rtl="0">
               <a:spcBef>
                 <a:spcPts val="0"/>
               </a:spcBef>
@@ -9428,9 +12952,11 @@
       <p:sp>
         <p:nvSpPr>
           <p:cNvPr id="98" name="Google Shape;98;p15"/>
-          <p:cNvSpPr txBox="1"/>
+          <p:cNvSpPr txBox="1">
+            <a:spLocks noGrp="1"/>
+          </p:cNvSpPr>
           <p:nvPr>
-            <p:ph idx="1" type="body"/>
+            <p:ph type="body" idx="1"/>
           </p:nvPr>
         </p:nvSpPr>
         <p:spPr>
@@ -9443,12 +12969,12 @@
           </a:prstGeom>
         </p:spPr>
         <p:txBody>
-          <a:bodyPr anchorCtr="0" anchor="t" bIns="91425" lIns="91425" spcFirstLastPara="1" rIns="91425" wrap="square" tIns="91425">
+          <a:bodyPr spcFirstLastPara="1" wrap="square" lIns="91425" tIns="91425" rIns="91425" bIns="91425" anchor="t" anchorCtr="0">
             <a:normAutofit/>
           </a:bodyPr>
           <a:lstStyle/>
           <a:p>
-            <a:pPr indent="-342900" lvl="0" marL="457200" rtl="0" algn="l">
+            <a:pPr marL="457200" lvl="0" indent="-342900" algn="l" rtl="0">
               <a:spcBef>
                 <a:spcPts val="0"/>
               </a:spcBef>
@@ -9459,13 +12985,13 @@
               <a:buChar char="●"/>
             </a:pPr>
             <a:r>
-              <a:rPr lang="hu"/>
+              <a:rPr lang="hu" dirty="0"/>
               <a:t>Reactot használó Login ablak</a:t>
             </a:r>
-            <a:endParaRPr/>
+            <a:endParaRPr dirty="0"/>
           </a:p>
           <a:p>
-            <a:pPr indent="-342900" lvl="0" marL="457200" rtl="0" algn="l">
+            <a:pPr marL="457200" lvl="0" indent="-342900" algn="l" rtl="0">
               <a:spcBef>
                 <a:spcPts val="0"/>
               </a:spcBef>
@@ -9476,13 +13002,13 @@
               <a:buChar char="●"/>
             </a:pPr>
             <a:r>
-              <a:rPr lang="hu"/>
+              <a:rPr lang="hu" dirty="0"/>
               <a:t>Bejelentkezés után válnak elérhetővé a kvízek</a:t>
             </a:r>
-            <a:endParaRPr/>
+            <a:endParaRPr dirty="0"/>
           </a:p>
           <a:p>
-            <a:pPr indent="-342900" lvl="0" marL="457200" rtl="0" algn="l">
+            <a:pPr marL="457200" lvl="0" indent="-342900" algn="l" rtl="0">
               <a:spcBef>
                 <a:spcPts val="0"/>
               </a:spcBef>
@@ -9493,13 +13019,13 @@
               <a:buChar char="●"/>
             </a:pPr>
             <a:r>
-              <a:rPr lang="hu"/>
-              <a:t>Szükséges a regisztrációhoz: 1. Email, 2.Felhasználónév, 3.Jelszó</a:t>
-            </a:r>
-            <a:endParaRPr/>
+              <a:rPr lang="hu" dirty="0"/>
+              <a:t>Alapvető regisztrációs követelmények</a:t>
+            </a:r>
+            <a:endParaRPr dirty="0"/>
           </a:p>
           <a:p>
-            <a:pPr indent="-342900" lvl="0" marL="457200" rtl="0" algn="l">
+            <a:pPr marL="457200" lvl="0" indent="-342900" algn="l" rtl="0">
               <a:spcBef>
                 <a:spcPts val="0"/>
               </a:spcBef>
@@ -9510,13 +13036,13 @@
               <a:buChar char="●"/>
             </a:pPr>
             <a:r>
-              <a:rPr lang="hu"/>
+              <a:rPr lang="hu" dirty="0"/>
               <a:t>Menüsor a weblap tetején</a:t>
             </a:r>
-            <a:endParaRPr/>
+            <a:endParaRPr dirty="0"/>
           </a:p>
           <a:p>
-            <a:pPr indent="-342900" lvl="0" marL="457200" rtl="0" algn="l">
+            <a:pPr marL="457200" lvl="0" indent="-342900" algn="l" rtl="0">
               <a:spcBef>
                 <a:spcPts val="0"/>
               </a:spcBef>
@@ -9527,10 +13053,10 @@
               <a:buChar char="●"/>
             </a:pPr>
             <a:r>
-              <a:rPr lang="hu"/>
+              <a:rPr lang="hu" dirty="0"/>
               <a:t>Tartalmazza a Főoldalt, a kvízek oldalát, ranglistát és a kijelentkezést</a:t>
             </a:r>
-            <a:endParaRPr/>
+            <a:endParaRPr dirty="0"/>
           </a:p>
         </p:txBody>
       </p:sp>
@@ -9543,11 +13069,11 @@
 </file>
 
 <file path=ppt/slides/slide4.xml><?xml version="1.0" encoding="utf-8"?>
-<p:sld xmlns:a="http://schemas.openxmlformats.org/drawingml/2006/main" xmlns:r="http://schemas.openxmlformats.org/officeDocument/2006/relationships" xmlns:mc="http://schemas.openxmlformats.org/markup-compatibility/2006" xmlns:mv="urn:schemas-microsoft-com:mac:vml" xmlns:p="http://schemas.openxmlformats.org/presentationml/2006/main" xmlns:c="http://schemas.openxmlformats.org/drawingml/2006/chart" xmlns:dgm="http://schemas.openxmlformats.org/drawingml/2006/diagram" xmlns:o="urn:schemas-microsoft-com:office:office" xmlns:v="urn:schemas-microsoft-com:vml" xmlns:pvml="urn:schemas-microsoft-com:office:powerpoint" xmlns:com="http://schemas.openxmlformats.org/drawingml/2006/compatibility" xmlns:p14="http://schemas.microsoft.com/office/powerpoint/2010/main" xmlns:p15="http://schemas.microsoft.com/office/powerpoint/2012/main" xmlns:ahyp="http://schemas.microsoft.com/office/drawing/2018/hyperlinkcolor">
+<p:sld xmlns:a="http://schemas.openxmlformats.org/drawingml/2006/main" xmlns:r="http://schemas.openxmlformats.org/officeDocument/2006/relationships" xmlns:p="http://schemas.openxmlformats.org/presentationml/2006/main">
   <p:cSld>
     <p:spTree>
       <p:nvGrpSpPr>
-        <p:cNvPr id="102" name="Shape 102"/>
+        <p:cNvPr id="1" name="Shape 102"/>
         <p:cNvGrpSpPr/>
         <p:nvPr/>
       </p:nvGrpSpPr>
@@ -9562,7 +13088,9 @@
       <p:sp>
         <p:nvSpPr>
           <p:cNvPr id="103" name="Google Shape;103;p16"/>
-          <p:cNvSpPr txBox="1"/>
+          <p:cNvSpPr txBox="1">
+            <a:spLocks noGrp="1"/>
+          </p:cNvSpPr>
           <p:nvPr>
             <p:ph type="title"/>
           </p:nvPr>
@@ -9577,12 +13105,12 @@
           </a:prstGeom>
         </p:spPr>
         <p:txBody>
-          <a:bodyPr anchorCtr="0" anchor="t" bIns="91425" lIns="91425" spcFirstLastPara="1" rIns="91425" wrap="square" tIns="91425">
+          <a:bodyPr spcFirstLastPara="1" wrap="square" lIns="91425" tIns="91425" rIns="91425" bIns="91425" anchor="t" anchorCtr="0">
             <a:normAutofit fontScale="90000"/>
           </a:bodyPr>
           <a:lstStyle/>
           <a:p>
-            <a:pPr indent="0" lvl="0" marL="0" rtl="0" algn="l">
+            <a:pPr marL="0" lvl="0" indent="0" algn="l" rtl="0">
               <a:spcBef>
                 <a:spcPts val="0"/>
               </a:spcBef>
@@ -9592,52 +13120,43 @@
               <a:buNone/>
             </a:pPr>
             <a:r>
-              <a:rPr lang="hu"/>
-              <a:t>Illusztráció</a:t>
-            </a:r>
-            <a:endParaRPr/>
+              <a:rPr lang="hu" dirty="0"/>
+              <a:t>UI kezdőlap</a:t>
+            </a:r>
+            <a:endParaRPr dirty="0"/>
           </a:p>
         </p:txBody>
       </p:sp>
-      <p:sp>
-        <p:nvSpPr>
-          <p:cNvPr id="104" name="Google Shape;104;p16"/>
-          <p:cNvSpPr txBox="1"/>
-          <p:nvPr>
-            <p:ph idx="1" type="body"/>
-          </p:nvPr>
-        </p:nvSpPr>
+      <p:pic>
+        <p:nvPicPr>
+          <p:cNvPr id="3" name="Kép 2" descr="A képen Égitest, képernyőkép, égi esemény, csillagászat látható&#10;&#10;Előfordulhat, hogy a mesterséges intelligencia által létrehozott tartalom helytelen.">
+            <a:extLst>
+              <a:ext uri="{FF2B5EF4-FFF2-40B4-BE49-F238E27FC236}">
+                <a16:creationId xmlns:a16="http://schemas.microsoft.com/office/drawing/2014/main" id="{C27B2BAB-A851-1036-F068-049E4D977F7C}"/>
+              </a:ext>
+            </a:extLst>
+          </p:cNvPr>
+          <p:cNvPicPr>
+            <a:picLocks noChangeAspect="1"/>
+          </p:cNvPicPr>
+          <p:nvPr/>
+        </p:nvPicPr>
+        <p:blipFill>
+          <a:blip r:embed="rId3"/>
+          <a:stretch>
+            <a:fillRect/>
+          </a:stretch>
+        </p:blipFill>
         <p:spPr>
           <a:xfrm>
-            <a:off x="311700" y="1229875"/>
-            <a:ext cx="8520600" cy="3339000"/>
+            <a:off x="913865" y="1232674"/>
+            <a:ext cx="5302199" cy="2982487"/>
           </a:xfrm>
           <a:prstGeom prst="rect">
             <a:avLst/>
           </a:prstGeom>
         </p:spPr>
-        <p:txBody>
-          <a:bodyPr anchorCtr="0" anchor="t" bIns="91425" lIns="91425" spcFirstLastPara="1" rIns="91425" wrap="square" tIns="91425">
-            <a:normAutofit/>
-          </a:bodyPr>
-          <a:lstStyle/>
-          <a:p>
-            <a:pPr indent="0" lvl="0" marL="0" rtl="0" algn="l">
-              <a:spcBef>
-                <a:spcPts val="0"/>
-              </a:spcBef>
-              <a:spcAft>
-                <a:spcPts val="1200"/>
-              </a:spcAft>
-              <a:buNone/>
-            </a:pPr>
-            <a:r>
-              <a:t/>
-            </a:r>
-            <a:endParaRPr/>
-          </a:p>
-        </p:txBody>
-      </p:sp>
+      </p:pic>
     </p:spTree>
   </p:cSld>
   <p:clrMapOvr>
@@ -9647,11 +13166,155 @@
 </file>
 
 <file path=ppt/slides/slide5.xml><?xml version="1.0" encoding="utf-8"?>
-<p:sld xmlns:a="http://schemas.openxmlformats.org/drawingml/2006/main" xmlns:r="http://schemas.openxmlformats.org/officeDocument/2006/relationships" xmlns:mc="http://schemas.openxmlformats.org/markup-compatibility/2006" xmlns:mv="urn:schemas-microsoft-com:mac:vml" xmlns:p="http://schemas.openxmlformats.org/presentationml/2006/main" xmlns:c="http://schemas.openxmlformats.org/drawingml/2006/chart" xmlns:dgm="http://schemas.openxmlformats.org/drawingml/2006/diagram" xmlns:o="urn:schemas-microsoft-com:office:office" xmlns:v="urn:schemas-microsoft-com:vml" xmlns:pvml="urn:schemas-microsoft-com:office:powerpoint" xmlns:com="http://schemas.openxmlformats.org/drawingml/2006/compatibility" xmlns:p14="http://schemas.microsoft.com/office/powerpoint/2010/main" xmlns:p15="http://schemas.microsoft.com/office/powerpoint/2012/main" xmlns:ahyp="http://schemas.microsoft.com/office/drawing/2018/hyperlinkcolor">
+<p:sld xmlns:a="http://schemas.openxmlformats.org/drawingml/2006/main" xmlns:r="http://schemas.openxmlformats.org/officeDocument/2006/relationships" xmlns:p="http://schemas.openxmlformats.org/presentationml/2006/main">
   <p:cSld>
     <p:spTree>
       <p:nvGrpSpPr>
-        <p:cNvPr id="108" name="Shape 108"/>
+        <p:cNvPr id="1" name="Shape 102">
+          <a:extLst>
+            <a:ext uri="{FF2B5EF4-FFF2-40B4-BE49-F238E27FC236}">
+              <a16:creationId xmlns:a16="http://schemas.microsoft.com/office/drawing/2014/main" id="{F7097DDB-C536-F0B4-A31B-10F77EE41CFD}"/>
+            </a:ext>
+          </a:extLst>
+        </p:cNvPr>
+        <p:cNvGrpSpPr/>
+        <p:nvPr/>
+      </p:nvGrpSpPr>
+      <p:grpSpPr>
+        <a:xfrm>
+          <a:off x="0" y="0"/>
+          <a:ext cx="0" cy="0"/>
+          <a:chOff x="0" y="0"/>
+          <a:chExt cx="0" cy="0"/>
+        </a:xfrm>
+      </p:grpSpPr>
+      <p:sp>
+        <p:nvSpPr>
+          <p:cNvPr id="103" name="Google Shape;103;p16">
+            <a:extLst>
+              <a:ext uri="{FF2B5EF4-FFF2-40B4-BE49-F238E27FC236}">
+                <a16:creationId xmlns:a16="http://schemas.microsoft.com/office/drawing/2014/main" id="{ACD5457E-53CE-EBDE-C088-A52CB765AF92}"/>
+              </a:ext>
+            </a:extLst>
+          </p:cNvPr>
+          <p:cNvSpPr txBox="1">
+            <a:spLocks noGrp="1"/>
+          </p:cNvSpPr>
+          <p:nvPr>
+            <p:ph type="title"/>
+          </p:nvPr>
+        </p:nvSpPr>
+        <p:spPr>
+          <a:xfrm>
+            <a:off x="311700" y="410000"/>
+            <a:ext cx="8520600" cy="607800"/>
+          </a:xfrm>
+          <a:prstGeom prst="rect">
+            <a:avLst/>
+          </a:prstGeom>
+        </p:spPr>
+        <p:txBody>
+          <a:bodyPr spcFirstLastPara="1" wrap="square" lIns="91425" tIns="91425" rIns="91425" bIns="91425" anchor="t" anchorCtr="0">
+            <a:normAutofit fontScale="90000"/>
+          </a:bodyPr>
+          <a:lstStyle/>
+          <a:p>
+            <a:pPr marL="0" lvl="0" indent="0" algn="l" rtl="0">
+              <a:spcBef>
+                <a:spcPts val="0"/>
+              </a:spcBef>
+              <a:spcAft>
+                <a:spcPts val="0"/>
+              </a:spcAft>
+              <a:buNone/>
+            </a:pPr>
+            <a:r>
+              <a:rPr lang="hu" dirty="0"/>
+              <a:t>UI Bejelentkező ablak</a:t>
+            </a:r>
+            <a:endParaRPr dirty="0"/>
+          </a:p>
+        </p:txBody>
+      </p:sp>
+      <p:pic>
+        <p:nvPicPr>
+          <p:cNvPr id="4" name="Kép 3" descr="A képen szöveg, képernyőkép, szoftver, Multimédiás szoftver látható&#10;&#10;Előfordulhat, hogy a mesterséges intelligencia által létrehozott tartalom helytelen.">
+            <a:extLst>
+              <a:ext uri="{FF2B5EF4-FFF2-40B4-BE49-F238E27FC236}">
+                <a16:creationId xmlns:a16="http://schemas.microsoft.com/office/drawing/2014/main" id="{C62D4E3D-704E-8D27-6462-13413118CC47}"/>
+              </a:ext>
+            </a:extLst>
+          </p:cNvPr>
+          <p:cNvPicPr>
+            <a:picLocks noChangeAspect="1"/>
+          </p:cNvPicPr>
+          <p:nvPr/>
+        </p:nvPicPr>
+        <p:blipFill>
+          <a:blip r:embed="rId3"/>
+          <a:stretch>
+            <a:fillRect/>
+          </a:stretch>
+        </p:blipFill>
+        <p:spPr>
+          <a:xfrm>
+            <a:off x="4073913" y="234069"/>
+            <a:ext cx="5003180" cy="2814289"/>
+          </a:xfrm>
+          <a:prstGeom prst="rect">
+            <a:avLst/>
+          </a:prstGeom>
+        </p:spPr>
+      </p:pic>
+      <p:pic>
+        <p:nvPicPr>
+          <p:cNvPr id="6" name="Kép 5" descr="A képen szöveg, képernyőkép, szoftver, tervezés látható&#10;&#10;Előfordulhat, hogy a mesterséges intelligencia által létrehozott tartalom helytelen.">
+            <a:extLst>
+              <a:ext uri="{FF2B5EF4-FFF2-40B4-BE49-F238E27FC236}">
+                <a16:creationId xmlns:a16="http://schemas.microsoft.com/office/drawing/2014/main" id="{C6A92152-52B0-637D-90F6-0C869885402E}"/>
+              </a:ext>
+            </a:extLst>
+          </p:cNvPr>
+          <p:cNvPicPr>
+            <a:picLocks noChangeAspect="1"/>
+          </p:cNvPicPr>
+          <p:nvPr/>
+        </p:nvPicPr>
+        <p:blipFill>
+          <a:blip r:embed="rId4"/>
+          <a:stretch>
+            <a:fillRect/>
+          </a:stretch>
+        </p:blipFill>
+        <p:spPr>
+          <a:xfrm>
+            <a:off x="193288" y="2264627"/>
+            <a:ext cx="4572000" cy="2571750"/>
+          </a:xfrm>
+          <a:prstGeom prst="rect">
+            <a:avLst/>
+          </a:prstGeom>
+        </p:spPr>
+      </p:pic>
+    </p:spTree>
+    <p:extLst>
+      <p:ext uri="{BB962C8B-B14F-4D97-AF65-F5344CB8AC3E}">
+        <p14:creationId xmlns:p14="http://schemas.microsoft.com/office/powerpoint/2010/main" val="1915165965"/>
+      </p:ext>
+    </p:extLst>
+  </p:cSld>
+  <p:clrMapOvr>
+    <a:masterClrMapping/>
+  </p:clrMapOvr>
+</p:sld>
+</file>
+
+<file path=ppt/slides/slide6.xml><?xml version="1.0" encoding="utf-8"?>
+<p:sld xmlns:a="http://schemas.openxmlformats.org/drawingml/2006/main" xmlns:r="http://schemas.openxmlformats.org/officeDocument/2006/relationships" xmlns:p="http://schemas.openxmlformats.org/presentationml/2006/main">
+  <p:cSld>
+    <p:spTree>
+      <p:nvGrpSpPr>
+        <p:cNvPr id="1" name="Shape 108"/>
         <p:cNvGrpSpPr/>
         <p:nvPr/>
       </p:nvGrpSpPr>
@@ -9666,7 +13329,9 @@
       <p:sp>
         <p:nvSpPr>
           <p:cNvPr id="109" name="Google Shape;109;p17"/>
-          <p:cNvSpPr txBox="1"/>
+          <p:cNvSpPr txBox="1">
+            <a:spLocks noGrp="1"/>
+          </p:cNvSpPr>
           <p:nvPr>
             <p:ph type="title"/>
           </p:nvPr>
@@ -9681,12 +13346,12 @@
           </a:prstGeom>
         </p:spPr>
         <p:txBody>
-          <a:bodyPr anchorCtr="0" anchor="t" bIns="91425" lIns="91425" spcFirstLastPara="1" rIns="91425" wrap="square" tIns="91425">
+          <a:bodyPr spcFirstLastPara="1" wrap="square" lIns="91425" tIns="91425" rIns="91425" bIns="91425" anchor="t" anchorCtr="0">
             <a:normAutofit fontScale="90000"/>
           </a:bodyPr>
           <a:lstStyle/>
           <a:p>
-            <a:pPr indent="0" lvl="0" marL="0" rtl="0" algn="l">
+            <a:pPr marL="0" lvl="0" indent="0" algn="l" rtl="0">
               <a:spcBef>
                 <a:spcPts val="0"/>
               </a:spcBef>
@@ -9706,9 +13371,11 @@
       <p:sp>
         <p:nvSpPr>
           <p:cNvPr id="110" name="Google Shape;110;p17"/>
-          <p:cNvSpPr txBox="1"/>
+          <p:cNvSpPr txBox="1">
+            <a:spLocks noGrp="1"/>
+          </p:cNvSpPr>
           <p:nvPr>
-            <p:ph idx="1" type="body"/>
+            <p:ph type="body" idx="1"/>
           </p:nvPr>
         </p:nvSpPr>
         <p:spPr>
@@ -9721,12 +13388,12 @@
           </a:prstGeom>
         </p:spPr>
         <p:txBody>
-          <a:bodyPr anchorCtr="0" anchor="t" bIns="91425" lIns="91425" spcFirstLastPara="1" rIns="91425" wrap="square" tIns="91425">
+          <a:bodyPr spcFirstLastPara="1" wrap="square" lIns="91425" tIns="91425" rIns="91425" bIns="91425" anchor="t" anchorCtr="0">
             <a:normAutofit/>
           </a:bodyPr>
           <a:lstStyle/>
           <a:p>
-            <a:pPr indent="-342900" lvl="0" marL="457200" rtl="0" algn="l">
+            <a:pPr marL="457200" lvl="0" indent="-342900" algn="l" rtl="0">
               <a:spcBef>
                 <a:spcPts val="0"/>
               </a:spcBef>
@@ -9737,13 +13404,13 @@
               <a:buChar char="●"/>
             </a:pPr>
             <a:r>
-              <a:rPr lang="hu"/>
+              <a:rPr lang="hu" dirty="0"/>
               <a:t>4 választható témakör(jelenleg)</a:t>
             </a:r>
-            <a:endParaRPr/>
+            <a:endParaRPr dirty="0"/>
           </a:p>
           <a:p>
-            <a:pPr indent="-342900" lvl="0" marL="457200" rtl="0" algn="l">
+            <a:pPr marL="457200" lvl="0" indent="-342900" algn="l" rtl="0">
               <a:spcBef>
                 <a:spcPts val="0"/>
               </a:spcBef>
@@ -9754,13 +13421,13 @@
               <a:buChar char="●"/>
             </a:pPr>
             <a:r>
-              <a:rPr lang="hu"/>
+              <a:rPr lang="hu" dirty="0"/>
               <a:t>Kattintás után azonnal elérhetővé váló válaszok</a:t>
             </a:r>
-            <a:endParaRPr/>
+            <a:endParaRPr dirty="0"/>
           </a:p>
           <a:p>
-            <a:pPr indent="-342900" lvl="0" marL="457200" rtl="0" algn="l">
+            <a:pPr marL="457200" lvl="0" indent="-342900" algn="l" rtl="0">
               <a:spcBef>
                 <a:spcPts val="0"/>
               </a:spcBef>
@@ -9771,13 +13438,13 @@
               <a:buChar char="●"/>
             </a:pPr>
             <a:r>
-              <a:rPr lang="hu"/>
+              <a:rPr lang="hu" dirty="0"/>
               <a:t>Randomizált sorrendben érkező kérdések</a:t>
             </a:r>
-            <a:endParaRPr/>
+            <a:endParaRPr dirty="0"/>
           </a:p>
           <a:p>
-            <a:pPr indent="-342900" lvl="0" marL="457200" rtl="0" algn="l">
+            <a:pPr marL="457200" lvl="0" indent="-342900" algn="l" rtl="0">
               <a:spcBef>
                 <a:spcPts val="0"/>
               </a:spcBef>
@@ -9788,13 +13455,13 @@
               <a:buChar char="●"/>
             </a:pPr>
             <a:r>
-              <a:rPr lang="hu"/>
+              <a:rPr lang="hu" dirty="0"/>
               <a:t>4 válaszlehetőség/kérdés</a:t>
             </a:r>
-            <a:endParaRPr/>
+            <a:endParaRPr dirty="0"/>
           </a:p>
           <a:p>
-            <a:pPr indent="-342900" lvl="0" marL="457200" rtl="0" algn="l">
+            <a:pPr marL="457200" lvl="0" indent="-342900" algn="l" rtl="0">
               <a:spcBef>
                 <a:spcPts val="0"/>
               </a:spcBef>
@@ -9805,13 +13472,13 @@
               <a:buChar char="●"/>
             </a:pPr>
             <a:r>
-              <a:rPr lang="hu"/>
+              <a:rPr lang="hu" dirty="0"/>
               <a:t>Timer ami számolja a válaszadáshoz szükséges időt(folyamatban)</a:t>
             </a:r>
-            <a:endParaRPr/>
+            <a:endParaRPr dirty="0"/>
           </a:p>
           <a:p>
-            <a:pPr indent="-342900" lvl="0" marL="457200" rtl="0" algn="l">
+            <a:pPr marL="457200" lvl="0" indent="-342900" algn="l" rtl="0">
               <a:spcBef>
                 <a:spcPts val="0"/>
               </a:spcBef>
@@ -9822,10 +13489,10 @@
               <a:buChar char="●"/>
             </a:pPr>
             <a:r>
-              <a:rPr lang="hu"/>
-              <a:t>Minden helyes válasz után pont</a:t>
-            </a:r>
-            <a:endParaRPr/>
+              <a:rPr lang="hu" dirty="0"/>
+              <a:t>Minden helyes válasz után pont(folyamatban)</a:t>
+            </a:r>
+            <a:endParaRPr dirty="0"/>
           </a:p>
         </p:txBody>
       </p:sp>
@@ -9837,12 +13504,12 @@
 </p:sld>
 </file>
 
-<file path=ppt/slides/slide6.xml><?xml version="1.0" encoding="utf-8"?>
-<p:sld xmlns:a="http://schemas.openxmlformats.org/drawingml/2006/main" xmlns:r="http://schemas.openxmlformats.org/officeDocument/2006/relationships" xmlns:mc="http://schemas.openxmlformats.org/markup-compatibility/2006" xmlns:mv="urn:schemas-microsoft-com:mac:vml" xmlns:p="http://schemas.openxmlformats.org/presentationml/2006/main" xmlns:c="http://schemas.openxmlformats.org/drawingml/2006/chart" xmlns:dgm="http://schemas.openxmlformats.org/drawingml/2006/diagram" xmlns:o="urn:schemas-microsoft-com:office:office" xmlns:v="urn:schemas-microsoft-com:vml" xmlns:pvml="urn:schemas-microsoft-com:office:powerpoint" xmlns:com="http://schemas.openxmlformats.org/drawingml/2006/compatibility" xmlns:p14="http://schemas.microsoft.com/office/powerpoint/2010/main" xmlns:p15="http://schemas.microsoft.com/office/powerpoint/2012/main" xmlns:ahyp="http://schemas.microsoft.com/office/drawing/2018/hyperlinkcolor">
+<file path=ppt/slides/slide7.xml><?xml version="1.0" encoding="utf-8"?>
+<p:sld xmlns:a="http://schemas.openxmlformats.org/drawingml/2006/main" xmlns:r="http://schemas.openxmlformats.org/officeDocument/2006/relationships" xmlns:p="http://schemas.openxmlformats.org/presentationml/2006/main">
   <p:cSld>
     <p:spTree>
       <p:nvGrpSpPr>
-        <p:cNvPr id="114" name="Shape 114"/>
+        <p:cNvPr id="1" name="Shape 114"/>
         <p:cNvGrpSpPr/>
         <p:nvPr/>
       </p:nvGrpSpPr>
@@ -9857,7 +13524,9 @@
       <p:sp>
         <p:nvSpPr>
           <p:cNvPr id="115" name="Google Shape;115;p18"/>
-          <p:cNvSpPr txBox="1"/>
+          <p:cNvSpPr txBox="1">
+            <a:spLocks noGrp="1"/>
+          </p:cNvSpPr>
           <p:nvPr>
             <p:ph type="title"/>
           </p:nvPr>
@@ -9872,12 +13541,12 @@
           </a:prstGeom>
         </p:spPr>
         <p:txBody>
-          <a:bodyPr anchorCtr="0" anchor="t" bIns="91425" lIns="91425" spcFirstLastPara="1" rIns="91425" wrap="square" tIns="91425">
+          <a:bodyPr spcFirstLastPara="1" wrap="square" lIns="91425" tIns="91425" rIns="91425" bIns="91425" anchor="t" anchorCtr="0">
             <a:normAutofit fontScale="90000"/>
           </a:bodyPr>
           <a:lstStyle/>
           <a:p>
-            <a:pPr indent="0" lvl="0" marL="0" rtl="0" algn="l">
+            <a:pPr marL="0" lvl="0" indent="0" algn="l" rtl="0">
               <a:spcBef>
                 <a:spcPts val="0"/>
               </a:spcBef>
@@ -9887,51 +13556,73 @@
               <a:buNone/>
             </a:pPr>
             <a:r>
-              <a:t/>
-            </a:r>
-            <a:endParaRPr/>
+              <a:rPr lang="hu-HU" dirty="0"/>
+              <a:t>Kvíz témakörök és válaszok</a:t>
+            </a:r>
+            <a:endParaRPr dirty="0"/>
           </a:p>
         </p:txBody>
       </p:sp>
-      <p:sp>
-        <p:nvSpPr>
-          <p:cNvPr id="116" name="Google Shape;116;p18"/>
-          <p:cNvSpPr txBox="1"/>
-          <p:nvPr>
-            <p:ph idx="1" type="body"/>
-          </p:nvPr>
-        </p:nvSpPr>
+      <p:pic>
+        <p:nvPicPr>
+          <p:cNvPr id="7" name="Kép 6" descr="A képen képernyőkép, kör látható&#10;&#10;Előfordulhat, hogy a mesterséges intelligencia által létrehozott tartalom helytelen.">
+            <a:extLst>
+              <a:ext uri="{FF2B5EF4-FFF2-40B4-BE49-F238E27FC236}">
+                <a16:creationId xmlns:a16="http://schemas.microsoft.com/office/drawing/2014/main" id="{6FBEE3EC-60E4-6B5B-9884-205E5694AB5F}"/>
+              </a:ext>
+            </a:extLst>
+          </p:cNvPr>
+          <p:cNvPicPr>
+            <a:picLocks noChangeAspect="1"/>
+          </p:cNvPicPr>
+          <p:nvPr/>
+        </p:nvPicPr>
+        <p:blipFill>
+          <a:blip r:embed="rId3"/>
+          <a:stretch>
+            <a:fillRect/>
+          </a:stretch>
+        </p:blipFill>
         <p:spPr>
           <a:xfrm>
-            <a:off x="311700" y="1229875"/>
-            <a:ext cx="8520600" cy="3339000"/>
+            <a:off x="96644" y="2038622"/>
+            <a:ext cx="4790894" cy="2694878"/>
           </a:xfrm>
           <a:prstGeom prst="rect">
             <a:avLst/>
           </a:prstGeom>
         </p:spPr>
-        <p:txBody>
-          <a:bodyPr anchorCtr="0" anchor="t" bIns="91425" lIns="91425" spcFirstLastPara="1" rIns="91425" wrap="square" tIns="91425">
-            <a:normAutofit/>
-          </a:bodyPr>
-          <a:lstStyle/>
-          <a:p>
-            <a:pPr indent="0" lvl="0" marL="0" rtl="0" algn="l">
-              <a:spcBef>
-                <a:spcPts val="0"/>
-              </a:spcBef>
-              <a:spcAft>
-                <a:spcPts val="1200"/>
-              </a:spcAft>
-              <a:buNone/>
-            </a:pPr>
-            <a:r>
-              <a:t/>
-            </a:r>
-            <a:endParaRPr/>
-          </a:p>
-        </p:txBody>
-      </p:sp>
+      </p:pic>
+      <p:pic>
+        <p:nvPicPr>
+          <p:cNvPr id="11" name="Kép 10" descr="A képen képernyőkép, kör látható&#10;&#10;Előfordulhat, hogy a mesterséges intelligencia által létrehozott tartalom helytelen.">
+            <a:extLst>
+              <a:ext uri="{FF2B5EF4-FFF2-40B4-BE49-F238E27FC236}">
+                <a16:creationId xmlns:a16="http://schemas.microsoft.com/office/drawing/2014/main" id="{56DE92B8-CF8A-BB8B-47C5-03E0B0300A20}"/>
+              </a:ext>
+            </a:extLst>
+          </p:cNvPr>
+          <p:cNvPicPr>
+            <a:picLocks noChangeAspect="1"/>
+          </p:cNvPicPr>
+          <p:nvPr/>
+        </p:nvPicPr>
+        <p:blipFill>
+          <a:blip r:embed="rId4"/>
+          <a:stretch>
+            <a:fillRect/>
+          </a:stretch>
+        </p:blipFill>
+        <p:spPr>
+          <a:xfrm>
+            <a:off x="4090052" y="965761"/>
+            <a:ext cx="4957303" cy="2788483"/>
+          </a:xfrm>
+          <a:prstGeom prst="rect">
+            <a:avLst/>
+          </a:prstGeom>
+        </p:spPr>
+      </p:pic>
     </p:spTree>
   </p:cSld>
   <p:clrMapOvr>
@@ -9940,12 +13631,12 @@
 </p:sld>
 </file>
 
-<file path=ppt/slides/slide7.xml><?xml version="1.0" encoding="utf-8"?>
-<p:sld xmlns:a="http://schemas.openxmlformats.org/drawingml/2006/main" xmlns:r="http://schemas.openxmlformats.org/officeDocument/2006/relationships" xmlns:mc="http://schemas.openxmlformats.org/markup-compatibility/2006" xmlns:mv="urn:schemas-microsoft-com:mac:vml" xmlns:p="http://schemas.openxmlformats.org/presentationml/2006/main" xmlns:c="http://schemas.openxmlformats.org/drawingml/2006/chart" xmlns:dgm="http://schemas.openxmlformats.org/drawingml/2006/diagram" xmlns:o="urn:schemas-microsoft-com:office:office" xmlns:v="urn:schemas-microsoft-com:vml" xmlns:pvml="urn:schemas-microsoft-com:office:powerpoint" xmlns:com="http://schemas.openxmlformats.org/drawingml/2006/compatibility" xmlns:p14="http://schemas.microsoft.com/office/powerpoint/2010/main" xmlns:p15="http://schemas.microsoft.com/office/powerpoint/2012/main" xmlns:ahyp="http://schemas.microsoft.com/office/drawing/2018/hyperlinkcolor">
+<file path=ppt/slides/slide8.xml><?xml version="1.0" encoding="utf-8"?>
+<p:sld xmlns:a="http://schemas.openxmlformats.org/drawingml/2006/main" xmlns:r="http://schemas.openxmlformats.org/officeDocument/2006/relationships" xmlns:p="http://schemas.openxmlformats.org/presentationml/2006/main">
   <p:cSld>
     <p:spTree>
       <p:nvGrpSpPr>
-        <p:cNvPr id="120" name="Shape 120"/>
+        <p:cNvPr id="1" name="Shape 120"/>
         <p:cNvGrpSpPr/>
         <p:nvPr/>
       </p:nvGrpSpPr>
@@ -9960,7 +13651,9 @@
       <p:sp>
         <p:nvSpPr>
           <p:cNvPr id="121" name="Google Shape;121;p19"/>
-          <p:cNvSpPr txBox="1"/>
+          <p:cNvSpPr txBox="1">
+            <a:spLocks noGrp="1"/>
+          </p:cNvSpPr>
           <p:nvPr>
             <p:ph type="title"/>
           </p:nvPr>
@@ -9975,12 +13668,12 @@
           </a:prstGeom>
         </p:spPr>
         <p:txBody>
-          <a:bodyPr anchorCtr="0" anchor="t" bIns="91425" lIns="91425" spcFirstLastPara="1" rIns="91425" wrap="square" tIns="91425">
+          <a:bodyPr spcFirstLastPara="1" wrap="square" lIns="91425" tIns="91425" rIns="91425" bIns="91425" anchor="t" anchorCtr="0">
             <a:normAutofit fontScale="90000"/>
           </a:bodyPr>
           <a:lstStyle/>
           <a:p>
-            <a:pPr indent="0" lvl="0" marL="0" rtl="0" algn="l">
+            <a:pPr marL="0" lvl="0" indent="0" algn="l" rtl="0">
               <a:spcBef>
                 <a:spcPts val="0"/>
               </a:spcBef>
@@ -10000,9 +13693,11 @@
       <p:sp>
         <p:nvSpPr>
           <p:cNvPr id="122" name="Google Shape;122;p19"/>
-          <p:cNvSpPr txBox="1"/>
+          <p:cNvSpPr txBox="1">
+            <a:spLocks noGrp="1"/>
+          </p:cNvSpPr>
           <p:nvPr>
-            <p:ph idx="1" type="body"/>
+            <p:ph type="body" idx="1"/>
           </p:nvPr>
         </p:nvSpPr>
         <p:spPr>
@@ -10015,12 +13710,12 @@
           </a:prstGeom>
         </p:spPr>
         <p:txBody>
-          <a:bodyPr anchorCtr="0" anchor="t" bIns="91425" lIns="91425" spcFirstLastPara="1" rIns="91425" wrap="square" tIns="91425">
+          <a:bodyPr spcFirstLastPara="1" wrap="square" lIns="91425" tIns="91425" rIns="91425" bIns="91425" anchor="t" anchorCtr="0">
             <a:normAutofit/>
           </a:bodyPr>
           <a:lstStyle/>
           <a:p>
-            <a:pPr indent="-342900" lvl="0" marL="457200" rtl="0" algn="l">
+            <a:pPr marL="457200" lvl="0" indent="-342900" algn="l" rtl="0">
               <a:spcBef>
                 <a:spcPts val="0"/>
               </a:spcBef>
@@ -10037,7 +13732,7 @@
             <a:endParaRPr/>
           </a:p>
           <a:p>
-            <a:pPr indent="-342900" lvl="0" marL="457200" rtl="0" algn="l">
+            <a:pPr marL="457200" lvl="0" indent="-342900" algn="l" rtl="0">
               <a:spcBef>
                 <a:spcPts val="0"/>
               </a:spcBef>
@@ -10054,7 +13749,7 @@
             <a:endParaRPr/>
           </a:p>
           <a:p>
-            <a:pPr indent="-342900" lvl="0" marL="457200" rtl="0" algn="l">
+            <a:pPr marL="457200" lvl="0" indent="-342900" algn="l" rtl="0">
               <a:spcBef>
                 <a:spcPts val="0"/>
               </a:spcBef>
@@ -10080,12 +13775,12 @@
 </p:sld>
 </file>
 
-<file path=ppt/slides/slide8.xml><?xml version="1.0" encoding="utf-8"?>
-<p:sld xmlns:a="http://schemas.openxmlformats.org/drawingml/2006/main" xmlns:r="http://schemas.openxmlformats.org/officeDocument/2006/relationships" xmlns:mc="http://schemas.openxmlformats.org/markup-compatibility/2006" xmlns:mv="urn:schemas-microsoft-com:mac:vml" xmlns:p="http://schemas.openxmlformats.org/presentationml/2006/main" xmlns:c="http://schemas.openxmlformats.org/drawingml/2006/chart" xmlns:dgm="http://schemas.openxmlformats.org/drawingml/2006/diagram" xmlns:o="urn:schemas-microsoft-com:office:office" xmlns:v="urn:schemas-microsoft-com:vml" xmlns:pvml="urn:schemas-microsoft-com:office:powerpoint" xmlns:com="http://schemas.openxmlformats.org/drawingml/2006/compatibility" xmlns:p14="http://schemas.microsoft.com/office/powerpoint/2010/main" xmlns:p15="http://schemas.microsoft.com/office/powerpoint/2012/main" xmlns:ahyp="http://schemas.microsoft.com/office/drawing/2018/hyperlinkcolor">
+<file path=ppt/slides/slide9.xml><?xml version="1.0" encoding="utf-8"?>
+<p:sld xmlns:a="http://schemas.openxmlformats.org/drawingml/2006/main" xmlns:r="http://schemas.openxmlformats.org/officeDocument/2006/relationships" xmlns:p="http://schemas.openxmlformats.org/presentationml/2006/main">
   <p:cSld>
     <p:spTree>
       <p:nvGrpSpPr>
-        <p:cNvPr id="126" name="Shape 126"/>
+        <p:cNvPr id="1" name="Shape 126"/>
         <p:cNvGrpSpPr/>
         <p:nvPr/>
       </p:nvGrpSpPr>
@@ -10100,7 +13795,9 @@
       <p:sp>
         <p:nvSpPr>
           <p:cNvPr id="127" name="Google Shape;127;p20"/>
-          <p:cNvSpPr txBox="1"/>
+          <p:cNvSpPr txBox="1">
+            <a:spLocks noGrp="1"/>
+          </p:cNvSpPr>
           <p:nvPr>
             <p:ph type="title"/>
           </p:nvPr>
@@ -10115,12 +13812,12 @@
           </a:prstGeom>
         </p:spPr>
         <p:txBody>
-          <a:bodyPr anchorCtr="0" anchor="t" bIns="91425" lIns="91425" spcFirstLastPara="1" rIns="91425" wrap="square" tIns="91425">
+          <a:bodyPr spcFirstLastPara="1" wrap="square" lIns="91425" tIns="91425" rIns="91425" bIns="91425" anchor="t" anchorCtr="0">
             <a:normAutofit fontScale="90000"/>
           </a:bodyPr>
           <a:lstStyle/>
           <a:p>
-            <a:pPr indent="0" lvl="0" marL="0" rtl="0" algn="l">
+            <a:pPr marL="0" lvl="0" indent="0" algn="l" rtl="0">
               <a:spcBef>
                 <a:spcPts val="0"/>
               </a:spcBef>
@@ -10130,189 +13827,73 @@
               <a:buNone/>
             </a:pPr>
             <a:r>
-              <a:t/>
-            </a:r>
-            <a:endParaRPr/>
+              <a:rPr lang="hu-HU" dirty="0"/>
+              <a:t>Ranglista </a:t>
+            </a:r>
+            <a:endParaRPr dirty="0"/>
           </a:p>
         </p:txBody>
       </p:sp>
-      <p:sp>
-        <p:nvSpPr>
-          <p:cNvPr id="128" name="Google Shape;128;p20"/>
-          <p:cNvSpPr txBox="1"/>
-          <p:nvPr>
-            <p:ph idx="1" type="body"/>
-          </p:nvPr>
-        </p:nvSpPr>
+      <p:pic>
+        <p:nvPicPr>
+          <p:cNvPr id="3" name="Kép 2" descr="A képen képernyőkép, kör látható&#10;&#10;Előfordulhat, hogy a mesterséges intelligencia által létrehozott tartalom helytelen.">
+            <a:extLst>
+              <a:ext uri="{FF2B5EF4-FFF2-40B4-BE49-F238E27FC236}">
+                <a16:creationId xmlns:a16="http://schemas.microsoft.com/office/drawing/2014/main" id="{0AFAB2BC-056C-B83E-B824-7B217E52DB79}"/>
+              </a:ext>
+            </a:extLst>
+          </p:cNvPr>
+          <p:cNvPicPr>
+            <a:picLocks noChangeAspect="1"/>
+          </p:cNvPicPr>
+          <p:nvPr/>
+        </p:nvPicPr>
+        <p:blipFill>
+          <a:blip r:embed="rId3"/>
+          <a:stretch>
+            <a:fillRect/>
+          </a:stretch>
+        </p:blipFill>
         <p:spPr>
           <a:xfrm>
-            <a:off x="311700" y="1229875"/>
-            <a:ext cx="8520600" cy="3339000"/>
+            <a:off x="148683" y="2099024"/>
+            <a:ext cx="4683512" cy="2634476"/>
           </a:xfrm>
           <a:prstGeom prst="rect">
             <a:avLst/>
           </a:prstGeom>
         </p:spPr>
-        <p:txBody>
-          <a:bodyPr anchorCtr="0" anchor="t" bIns="91425" lIns="91425" spcFirstLastPara="1" rIns="91425" wrap="square" tIns="91425">
-            <a:normAutofit/>
-          </a:bodyPr>
-          <a:lstStyle/>
-          <a:p>
-            <a:pPr indent="0" lvl="0" marL="0" rtl="0" algn="l">
-              <a:spcBef>
-                <a:spcPts val="0"/>
-              </a:spcBef>
-              <a:spcAft>
-                <a:spcPts val="1200"/>
-              </a:spcAft>
-              <a:buNone/>
-            </a:pPr>
-            <a:r>
-              <a:t/>
-            </a:r>
-            <a:endParaRPr/>
-          </a:p>
-        </p:txBody>
-      </p:sp>
-    </p:spTree>
-  </p:cSld>
-  <p:clrMapOvr>
-    <a:masterClrMapping/>
-  </p:clrMapOvr>
-</p:sld>
-</file>
-
-<file path=ppt/slides/slide9.xml><?xml version="1.0" encoding="utf-8"?>
-<p:sld xmlns:a="http://schemas.openxmlformats.org/drawingml/2006/main" xmlns:r="http://schemas.openxmlformats.org/officeDocument/2006/relationships" xmlns:mc="http://schemas.openxmlformats.org/markup-compatibility/2006" xmlns:mv="urn:schemas-microsoft-com:mac:vml" xmlns:p="http://schemas.openxmlformats.org/presentationml/2006/main" xmlns:c="http://schemas.openxmlformats.org/drawingml/2006/chart" xmlns:dgm="http://schemas.openxmlformats.org/drawingml/2006/diagram" xmlns:o="urn:schemas-microsoft-com:office:office" xmlns:v="urn:schemas-microsoft-com:vml" xmlns:pvml="urn:schemas-microsoft-com:office:powerpoint" xmlns:com="http://schemas.openxmlformats.org/drawingml/2006/compatibility" xmlns:p14="http://schemas.microsoft.com/office/powerpoint/2010/main" xmlns:p15="http://schemas.microsoft.com/office/powerpoint/2012/main" xmlns:ahyp="http://schemas.microsoft.com/office/drawing/2018/hyperlinkcolor">
-  <p:cSld>
-    <p:spTree>
-      <p:nvGrpSpPr>
-        <p:cNvPr id="132" name="Shape 132"/>
-        <p:cNvGrpSpPr/>
-        <p:nvPr/>
-      </p:nvGrpSpPr>
-      <p:grpSpPr>
-        <a:xfrm>
-          <a:off x="0" y="0"/>
-          <a:ext cx="0" cy="0"/>
-          <a:chOff x="0" y="0"/>
-          <a:chExt cx="0" cy="0"/>
-        </a:xfrm>
-      </p:grpSpPr>
-      <p:sp>
-        <p:nvSpPr>
-          <p:cNvPr id="133" name="Google Shape;133;p21"/>
-          <p:cNvSpPr txBox="1"/>
-          <p:nvPr>
-            <p:ph type="title"/>
-          </p:nvPr>
-        </p:nvSpPr>
+      </p:pic>
+      <p:pic>
+        <p:nvPicPr>
+          <p:cNvPr id="5" name="Kép 4" descr="A képen szöveg, képernyőkép, tervezés látható&#10;&#10;Előfordulhat, hogy a mesterséges intelligencia által létrehozott tartalom helytelen.">
+            <a:extLst>
+              <a:ext uri="{FF2B5EF4-FFF2-40B4-BE49-F238E27FC236}">
+                <a16:creationId xmlns:a16="http://schemas.microsoft.com/office/drawing/2014/main" id="{AC1345D8-DF92-5E09-60B5-CC58BA24B818}"/>
+              </a:ext>
+            </a:extLst>
+          </p:cNvPr>
+          <p:cNvPicPr>
+            <a:picLocks noChangeAspect="1"/>
+          </p:cNvPicPr>
+          <p:nvPr/>
+        </p:nvPicPr>
+        <p:blipFill>
+          <a:blip r:embed="rId4"/>
+          <a:stretch>
+            <a:fillRect/>
+          </a:stretch>
+        </p:blipFill>
         <p:spPr>
           <a:xfrm>
-            <a:off x="311700" y="410000"/>
-            <a:ext cx="8520600" cy="607800"/>
+            <a:off x="3711344" y="120370"/>
+            <a:ext cx="5283973" cy="2972235"/>
           </a:xfrm>
           <a:prstGeom prst="rect">
             <a:avLst/>
           </a:prstGeom>
         </p:spPr>
-        <p:txBody>
-          <a:bodyPr anchorCtr="0" anchor="t" bIns="91425" lIns="91425" spcFirstLastPara="1" rIns="91425" wrap="square" tIns="91425">
-            <a:normAutofit fontScale="90000"/>
-          </a:bodyPr>
-          <a:lstStyle/>
-          <a:p>
-            <a:pPr indent="0" lvl="0" marL="0" rtl="0" algn="l">
-              <a:spcBef>
-                <a:spcPts val="0"/>
-              </a:spcBef>
-              <a:spcAft>
-                <a:spcPts val="0"/>
-              </a:spcAft>
-              <a:buNone/>
-            </a:pPr>
-            <a:r>
-              <a:rPr lang="hu"/>
-              <a:t>Kijelentkezés</a:t>
-            </a:r>
-            <a:endParaRPr/>
-          </a:p>
-        </p:txBody>
-      </p:sp>
-      <p:sp>
-        <p:nvSpPr>
-          <p:cNvPr id="134" name="Google Shape;134;p21"/>
-          <p:cNvSpPr txBox="1"/>
-          <p:nvPr>
-            <p:ph idx="1" type="body"/>
-          </p:nvPr>
-        </p:nvSpPr>
-        <p:spPr>
-          <a:xfrm>
-            <a:off x="311700" y="1229875"/>
-            <a:ext cx="8520600" cy="3339000"/>
-          </a:xfrm>
-          <a:prstGeom prst="rect">
-            <a:avLst/>
-          </a:prstGeom>
-        </p:spPr>
-        <p:txBody>
-          <a:bodyPr anchorCtr="0" anchor="t" bIns="91425" lIns="91425" spcFirstLastPara="1" rIns="91425" wrap="square" tIns="91425">
-            <a:normAutofit/>
-          </a:bodyPr>
-          <a:lstStyle/>
-          <a:p>
-            <a:pPr indent="-342900" lvl="0" marL="457200" rtl="0" algn="l">
-              <a:spcBef>
-                <a:spcPts val="0"/>
-              </a:spcBef>
-              <a:spcAft>
-                <a:spcPts val="0"/>
-              </a:spcAft>
-              <a:buSzPts val="1800"/>
-              <a:buChar char="●"/>
-            </a:pPr>
-            <a:r>
-              <a:rPr lang="hu"/>
-              <a:t>A menüsorban gombnyomás hatására kijelentkeztet azonnal</a:t>
-            </a:r>
-            <a:endParaRPr/>
-          </a:p>
-          <a:p>
-            <a:pPr indent="-342900" lvl="0" marL="457200" rtl="0" algn="l">
-              <a:spcBef>
-                <a:spcPts val="0"/>
-              </a:spcBef>
-              <a:spcAft>
-                <a:spcPts val="0"/>
-              </a:spcAft>
-              <a:buSzPts val="1800"/>
-              <a:buChar char="●"/>
-            </a:pPr>
-            <a:r>
-              <a:rPr lang="hu"/>
-              <a:t>Újboli bejelentkezés szükséges</a:t>
-            </a:r>
-            <a:endParaRPr/>
-          </a:p>
-          <a:p>
-            <a:pPr indent="0" lvl="0" marL="457200" rtl="0" algn="l">
-              <a:spcBef>
-                <a:spcPts val="1200"/>
-              </a:spcBef>
-              <a:spcAft>
-                <a:spcPts val="1200"/>
-              </a:spcAft>
-              <a:buNone/>
-            </a:pPr>
-            <a:r>
-              <a:t/>
-            </a:r>
-            <a:endParaRPr/>
-          </a:p>
-        </p:txBody>
-      </p:sp>
+      </p:pic>
     </p:spTree>
   </p:cSld>
   <p:clrMapOvr>
@@ -10322,7 +13903,7 @@
 </file>
 
 <file path=ppt/theme/theme1.xml><?xml version="1.0" encoding="utf-8"?>
-<a:theme xmlns:a="http://schemas.openxmlformats.org/drawingml/2006/main" xmlns:r="http://schemas.openxmlformats.org/officeDocument/2006/relationships" name="Geometric">
+<a:theme xmlns:a="http://schemas.openxmlformats.org/drawingml/2006/main" name="Geometric">
   <a:themeElements>
     <a:clrScheme name="Geometric">
       <a:dk1>
@@ -10597,11 +14178,13 @@
       </a:bgFillStyleLst>
     </a:fmtScheme>
   </a:themeElements>
+  <a:objectDefaults/>
+  <a:extraClrSchemeLst/>
 </a:theme>
 </file>
 
 <file path=ppt/theme/theme2.xml><?xml version="1.0" encoding="utf-8"?>
-<a:theme xmlns:a="http://schemas.openxmlformats.org/drawingml/2006/main" xmlns:r="http://schemas.openxmlformats.org/officeDocument/2006/relationships">
+<a:theme xmlns:a="http://schemas.openxmlformats.org/drawingml/2006/main">
   <a:themeElements>
     <a:clrScheme name="Default">
       <a:dk1>
@@ -10876,5 +14459,7 @@
       </a:bgFillStyleLst>
     </a:fmtScheme>
   </a:themeElements>
+  <a:objectDefaults/>
+  <a:extraClrSchemeLst/>
 </a:theme>
 </file>